--- a/docs/第54节：When 项目总结与后续规划.pptx
+++ b/docs/第54节：When 项目总结与后续规划.pptx
@@ -1,28 +1,28 @@
 
 <file path=ppt/presentation.xml><?xml version="1.0" encoding="utf-8"?>
-<p:presentation xmlns:a="http://schemas.openxmlformats.org/drawingml/2006/main" xmlns:r="http://schemas.openxmlformats.org/officeDocument/2006/relationships" xmlns:p="http://schemas.openxmlformats.org/presentationml/2006/main" autoCompressPictures="0">
+<p:presentation xmlns:a="http://schemas.openxmlformats.org/drawingml/2006/main" xmlns:r="http://schemas.openxmlformats.org/officeDocument/2006/relationships" xmlns:p="http://schemas.openxmlformats.org/presentationml/2006/main" saveSubsetFonts="1" autoCompressPictures="0">
   <p:sldMasterIdLst>
     <p:sldMasterId id="2147483648" r:id="rId1"/>
   </p:sldMasterIdLst>
+  <p:sldIdLst>
+    <p:sldId id="256" r:id="rId2"/>
+    <p:sldId id="257" r:id="rId3"/>
+    <p:sldId id="258" r:id="rId4"/>
+    <p:sldId id="259" r:id="rId5"/>
+    <p:sldId id="260" r:id="rId6"/>
+    <p:sldId id="261" r:id="rId7"/>
+    <p:sldId id="262" r:id="rId8"/>
+    <p:sldId id="263" r:id="rId9"/>
+    <p:sldId id="264" r:id="rId10"/>
+    <p:sldId id="265" r:id="rId11"/>
+    <p:sldId id="266" r:id="rId12"/>
+    <p:sldId id="267" r:id="rId13"/>
+    <p:sldId id="268" r:id="rId14"/>
+    <p:sldId id="269" r:id="rId15"/>
+  </p:sldIdLst>
   <p:notesMasterIdLst>
-    <p:notesMasterId r:id="rId4"/>
+    <p:notesMasterId r:id="rId16"/>
   </p:notesMasterIdLst>
-  <p:sldIdLst>
-    <p:sldId id="256" r:id="rId3"/>
-    <p:sldId id="257" r:id="rId5"/>
-    <p:sldId id="258" r:id="rId6"/>
-    <p:sldId id="259" r:id="rId7"/>
-    <p:sldId id="260" r:id="rId8"/>
-    <p:sldId id="261" r:id="rId9"/>
-    <p:sldId id="262" r:id="rId10"/>
-    <p:sldId id="263" r:id="rId11"/>
-    <p:sldId id="264" r:id="rId12"/>
-    <p:sldId id="265" r:id="rId13"/>
-    <p:sldId id="266" r:id="rId14"/>
-    <p:sldId id="267" r:id="rId15"/>
-    <p:sldId id="268" r:id="rId16"/>
-    <p:sldId id="269" r:id="rId17"/>
-  </p:sldIdLst>
   <p:sldSz cx="9144000" cy="5143500"/>
   <p:notesSz cx="5143500" cy="9144000"/>
   <p:defaultTextStyle>
@@ -202,6 +202,7 @@
           <a:p>
             <a:fld id="{5282F153-3F37-0F45-9E97-73ACFA13230C}" type="datetimeFigureOut">
               <a:rPr lang="en-US"/>
+              <a:t>7/23/19</a:t>
             </a:fld>
             <a:endParaRPr lang="en-US"/>
           </a:p>
@@ -268,7 +269,6 @@
               <a:rPr lang="en-US"/>
               <a:t>Click to edit Master text styles</a:t>
             </a:r>
-            <a:endParaRPr lang="en-US"/>
           </a:p>
           <a:p>
             <a:pPr lvl="1"/>
@@ -276,7 +276,6 @@
               <a:rPr lang="en-US"/>
               <a:t>Second level</a:t>
             </a:r>
-            <a:endParaRPr lang="en-US"/>
           </a:p>
           <a:p>
             <a:pPr lvl="2"/>
@@ -284,7 +283,6 @@
               <a:rPr lang="en-US"/>
               <a:t>Third level</a:t>
             </a:r>
-            <a:endParaRPr lang="en-US"/>
           </a:p>
           <a:p>
             <a:pPr lvl="3"/>
@@ -292,7 +290,6 @@
               <a:rPr lang="en-US"/>
               <a:t>Fourth level</a:t>
             </a:r>
-            <a:endParaRPr lang="en-US"/>
           </a:p>
           <a:p>
             <a:pPr lvl="4"/>
@@ -300,7 +297,6 @@
               <a:rPr lang="en-US"/>
               <a:t>Fifth level</a:t>
             </a:r>
-            <a:endParaRPr lang="en-US"/>
           </a:p>
         </p:txBody>
       </p:sp>
@@ -364,12 +360,18 @@
           <a:p>
             <a:fld id="{CE5E9CC1-C706-0F49-92D6-E571CC5EEA8F}" type="slidenum">
               <a:rPr lang="en-US"/>
+              <a:t>‹#›</a:t>
             </a:fld>
             <a:endParaRPr lang="en-US"/>
           </a:p>
         </p:txBody>
       </p:sp>
     </p:spTree>
+    <p:extLst>
+      <p:ext uri="{BB962C8B-B14F-4D97-AF65-F5344CB8AC3E}">
+        <p14:creationId xmlns:p14="http://schemas.microsoft.com/office/powerpoint/2010/main" val="1024086991"/>
+      </p:ext>
+    </p:extLst>
   </p:cSld>
   <p:clrMap bg1="lt1" tx1="dk1" bg2="lt2" tx2="dk2" accent1="accent1" accent2="accent2" accent3="accent3" accent4="accent4" accent5="accent5" accent6="accent6" hlink="hlink" folHlink="folHlink"/>
   <p:notesStyle>
@@ -511,6 +513,10 @@
           <a:bodyPr/>
           <a:lstStyle/>
           <a:p>
+            <a:r>
+              <a:rPr lang="en-US" dirty="0"/>
+              <a:t/>
+            </a:r>
             <a:endParaRPr lang="en-US" dirty="0"/>
           </a:p>
         </p:txBody>
@@ -532,12 +538,18 @@
           <a:p>
             <a:fld id="{F7021451-1387-4CA6-816F-3879F97B5CBC}" type="slidenum">
               <a:rPr lang="en-US"/>
+              <a:t>1</a:t>
             </a:fld>
             <a:endParaRPr lang="en-US"/>
           </a:p>
         </p:txBody>
       </p:sp>
     </p:spTree>
+    <p:extLst>
+      <p:ext uri="{BB962C8B-B14F-4D97-AF65-F5344CB8AC3E}">
+        <p14:creationId xmlns:p14="http://schemas.microsoft.com/office/powerpoint/2010/main" val="1024086991"/>
+      </p:ext>
+    </p:extLst>
   </p:cSld>
   <p:clrMapOvr>
     <a:masterClrMapping/>
@@ -589,6 +601,10 @@
           <a:bodyPr/>
           <a:lstStyle/>
           <a:p>
+            <a:r>
+              <a:rPr lang="en-US" dirty="0"/>
+              <a:t/>
+            </a:r>
             <a:endParaRPr lang="en-US" dirty="0"/>
           </a:p>
         </p:txBody>
@@ -610,12 +626,18 @@
           <a:p>
             <a:fld id="{F7021451-1387-4CA6-816F-3879F97B5CBC}" type="slidenum">
               <a:rPr lang="en-US"/>
+              <a:t>10</a:t>
             </a:fld>
             <a:endParaRPr lang="en-US"/>
           </a:p>
         </p:txBody>
       </p:sp>
     </p:spTree>
+    <p:extLst>
+      <p:ext uri="{BB962C8B-B14F-4D97-AF65-F5344CB8AC3E}">
+        <p14:creationId xmlns:p14="http://schemas.microsoft.com/office/powerpoint/2010/main" val="1024086991"/>
+      </p:ext>
+    </p:extLst>
   </p:cSld>
   <p:clrMapOvr>
     <a:masterClrMapping/>
@@ -667,6 +689,10 @@
           <a:bodyPr/>
           <a:lstStyle/>
           <a:p>
+            <a:r>
+              <a:rPr lang="en-US" dirty="0"/>
+              <a:t/>
+            </a:r>
             <a:endParaRPr lang="en-US" dirty="0"/>
           </a:p>
         </p:txBody>
@@ -688,12 +714,18 @@
           <a:p>
             <a:fld id="{F7021451-1387-4CA6-816F-3879F97B5CBC}" type="slidenum">
               <a:rPr lang="en-US"/>
+              <a:t>11</a:t>
             </a:fld>
             <a:endParaRPr lang="en-US"/>
           </a:p>
         </p:txBody>
       </p:sp>
     </p:spTree>
+    <p:extLst>
+      <p:ext uri="{BB962C8B-B14F-4D97-AF65-F5344CB8AC3E}">
+        <p14:creationId xmlns:p14="http://schemas.microsoft.com/office/powerpoint/2010/main" val="1024086991"/>
+      </p:ext>
+    </p:extLst>
   </p:cSld>
   <p:clrMapOvr>
     <a:masterClrMapping/>
@@ -745,6 +777,10 @@
           <a:bodyPr/>
           <a:lstStyle/>
           <a:p>
+            <a:r>
+              <a:rPr lang="en-US" dirty="0"/>
+              <a:t/>
+            </a:r>
             <a:endParaRPr lang="en-US" dirty="0"/>
           </a:p>
         </p:txBody>
@@ -766,12 +802,18 @@
           <a:p>
             <a:fld id="{F7021451-1387-4CA6-816F-3879F97B5CBC}" type="slidenum">
               <a:rPr lang="en-US"/>
+              <a:t>12</a:t>
             </a:fld>
             <a:endParaRPr lang="en-US"/>
           </a:p>
         </p:txBody>
       </p:sp>
     </p:spTree>
+    <p:extLst>
+      <p:ext uri="{BB962C8B-B14F-4D97-AF65-F5344CB8AC3E}">
+        <p14:creationId xmlns:p14="http://schemas.microsoft.com/office/powerpoint/2010/main" val="1024086991"/>
+      </p:ext>
+    </p:extLst>
   </p:cSld>
   <p:clrMapOvr>
     <a:masterClrMapping/>
@@ -823,6 +865,10 @@
           <a:bodyPr/>
           <a:lstStyle/>
           <a:p>
+            <a:r>
+              <a:rPr lang="en-US" dirty="0"/>
+              <a:t/>
+            </a:r>
             <a:endParaRPr lang="en-US" dirty="0"/>
           </a:p>
         </p:txBody>
@@ -844,12 +890,18 @@
           <a:p>
             <a:fld id="{F7021451-1387-4CA6-816F-3879F97B5CBC}" type="slidenum">
               <a:rPr lang="en-US"/>
+              <a:t>13</a:t>
             </a:fld>
             <a:endParaRPr lang="en-US"/>
           </a:p>
         </p:txBody>
       </p:sp>
     </p:spTree>
+    <p:extLst>
+      <p:ext uri="{BB962C8B-B14F-4D97-AF65-F5344CB8AC3E}">
+        <p14:creationId xmlns:p14="http://schemas.microsoft.com/office/powerpoint/2010/main" val="1024086991"/>
+      </p:ext>
+    </p:extLst>
   </p:cSld>
   <p:clrMapOvr>
     <a:masterClrMapping/>
@@ -901,6 +953,10 @@
           <a:bodyPr/>
           <a:lstStyle/>
           <a:p>
+            <a:r>
+              <a:rPr lang="en-US" dirty="0"/>
+              <a:t/>
+            </a:r>
             <a:endParaRPr lang="en-US" dirty="0"/>
           </a:p>
         </p:txBody>
@@ -922,12 +978,18 @@
           <a:p>
             <a:fld id="{F7021451-1387-4CA6-816F-3879F97B5CBC}" type="slidenum">
               <a:rPr lang="en-US"/>
+              <a:t>14</a:t>
             </a:fld>
             <a:endParaRPr lang="en-US"/>
           </a:p>
         </p:txBody>
       </p:sp>
     </p:spTree>
+    <p:extLst>
+      <p:ext uri="{BB962C8B-B14F-4D97-AF65-F5344CB8AC3E}">
+        <p14:creationId xmlns:p14="http://schemas.microsoft.com/office/powerpoint/2010/main" val="1024086991"/>
+      </p:ext>
+    </p:extLst>
   </p:cSld>
   <p:clrMapOvr>
     <a:masterClrMapping/>
@@ -979,6 +1041,10 @@
           <a:bodyPr/>
           <a:lstStyle/>
           <a:p>
+            <a:r>
+              <a:rPr lang="en-US" dirty="0"/>
+              <a:t/>
+            </a:r>
             <a:endParaRPr lang="en-US" dirty="0"/>
           </a:p>
         </p:txBody>
@@ -1000,12 +1066,18 @@
           <a:p>
             <a:fld id="{F7021451-1387-4CA6-816F-3879F97B5CBC}" type="slidenum">
               <a:rPr lang="en-US"/>
+              <a:t>2</a:t>
             </a:fld>
             <a:endParaRPr lang="en-US"/>
           </a:p>
         </p:txBody>
       </p:sp>
     </p:spTree>
+    <p:extLst>
+      <p:ext uri="{BB962C8B-B14F-4D97-AF65-F5344CB8AC3E}">
+        <p14:creationId xmlns:p14="http://schemas.microsoft.com/office/powerpoint/2010/main" val="1024086991"/>
+      </p:ext>
+    </p:extLst>
   </p:cSld>
   <p:clrMapOvr>
     <a:masterClrMapping/>
@@ -1057,6 +1129,10 @@
           <a:bodyPr/>
           <a:lstStyle/>
           <a:p>
+            <a:r>
+              <a:rPr lang="en-US" dirty="0"/>
+              <a:t/>
+            </a:r>
             <a:endParaRPr lang="en-US" dirty="0"/>
           </a:p>
         </p:txBody>
@@ -1078,12 +1154,18 @@
           <a:p>
             <a:fld id="{F7021451-1387-4CA6-816F-3879F97B5CBC}" type="slidenum">
               <a:rPr lang="en-US"/>
+              <a:t>3</a:t>
             </a:fld>
             <a:endParaRPr lang="en-US"/>
           </a:p>
         </p:txBody>
       </p:sp>
     </p:spTree>
+    <p:extLst>
+      <p:ext uri="{BB962C8B-B14F-4D97-AF65-F5344CB8AC3E}">
+        <p14:creationId xmlns:p14="http://schemas.microsoft.com/office/powerpoint/2010/main" val="1024086991"/>
+      </p:ext>
+    </p:extLst>
   </p:cSld>
   <p:clrMapOvr>
     <a:masterClrMapping/>
@@ -1135,6 +1217,10 @@
           <a:bodyPr/>
           <a:lstStyle/>
           <a:p>
+            <a:r>
+              <a:rPr lang="en-US" dirty="0"/>
+              <a:t/>
+            </a:r>
             <a:endParaRPr lang="en-US" dirty="0"/>
           </a:p>
         </p:txBody>
@@ -1156,12 +1242,18 @@
           <a:p>
             <a:fld id="{F7021451-1387-4CA6-816F-3879F97B5CBC}" type="slidenum">
               <a:rPr lang="en-US"/>
+              <a:t>4</a:t>
             </a:fld>
             <a:endParaRPr lang="en-US"/>
           </a:p>
         </p:txBody>
       </p:sp>
     </p:spTree>
+    <p:extLst>
+      <p:ext uri="{BB962C8B-B14F-4D97-AF65-F5344CB8AC3E}">
+        <p14:creationId xmlns:p14="http://schemas.microsoft.com/office/powerpoint/2010/main" val="1024086991"/>
+      </p:ext>
+    </p:extLst>
   </p:cSld>
   <p:clrMapOvr>
     <a:masterClrMapping/>
@@ -1213,6 +1305,10 @@
           <a:bodyPr/>
           <a:lstStyle/>
           <a:p>
+            <a:r>
+              <a:rPr lang="en-US" dirty="0"/>
+              <a:t/>
+            </a:r>
             <a:endParaRPr lang="en-US" dirty="0"/>
           </a:p>
         </p:txBody>
@@ -1234,12 +1330,18 @@
           <a:p>
             <a:fld id="{F7021451-1387-4CA6-816F-3879F97B5CBC}" type="slidenum">
               <a:rPr lang="en-US"/>
+              <a:t>5</a:t>
             </a:fld>
             <a:endParaRPr lang="en-US"/>
           </a:p>
         </p:txBody>
       </p:sp>
     </p:spTree>
+    <p:extLst>
+      <p:ext uri="{BB962C8B-B14F-4D97-AF65-F5344CB8AC3E}">
+        <p14:creationId xmlns:p14="http://schemas.microsoft.com/office/powerpoint/2010/main" val="1024086991"/>
+      </p:ext>
+    </p:extLst>
   </p:cSld>
   <p:clrMapOvr>
     <a:masterClrMapping/>
@@ -1291,6 +1393,10 @@
           <a:bodyPr/>
           <a:lstStyle/>
           <a:p>
+            <a:r>
+              <a:rPr lang="en-US" dirty="0"/>
+              <a:t/>
+            </a:r>
             <a:endParaRPr lang="en-US" dirty="0"/>
           </a:p>
         </p:txBody>
@@ -1312,12 +1418,18 @@
           <a:p>
             <a:fld id="{F7021451-1387-4CA6-816F-3879F97B5CBC}" type="slidenum">
               <a:rPr lang="en-US"/>
+              <a:t>6</a:t>
             </a:fld>
             <a:endParaRPr lang="en-US"/>
           </a:p>
         </p:txBody>
       </p:sp>
     </p:spTree>
+    <p:extLst>
+      <p:ext uri="{BB962C8B-B14F-4D97-AF65-F5344CB8AC3E}">
+        <p14:creationId xmlns:p14="http://schemas.microsoft.com/office/powerpoint/2010/main" val="1024086991"/>
+      </p:ext>
+    </p:extLst>
   </p:cSld>
   <p:clrMapOvr>
     <a:masterClrMapping/>
@@ -1369,6 +1481,10 @@
           <a:bodyPr/>
           <a:lstStyle/>
           <a:p>
+            <a:r>
+              <a:rPr lang="en-US" dirty="0"/>
+              <a:t/>
+            </a:r>
             <a:endParaRPr lang="en-US" dirty="0"/>
           </a:p>
         </p:txBody>
@@ -1390,12 +1506,18 @@
           <a:p>
             <a:fld id="{F7021451-1387-4CA6-816F-3879F97B5CBC}" type="slidenum">
               <a:rPr lang="en-US"/>
+              <a:t>7</a:t>
             </a:fld>
             <a:endParaRPr lang="en-US"/>
           </a:p>
         </p:txBody>
       </p:sp>
     </p:spTree>
+    <p:extLst>
+      <p:ext uri="{BB962C8B-B14F-4D97-AF65-F5344CB8AC3E}">
+        <p14:creationId xmlns:p14="http://schemas.microsoft.com/office/powerpoint/2010/main" val="1024086991"/>
+      </p:ext>
+    </p:extLst>
   </p:cSld>
   <p:clrMapOvr>
     <a:masterClrMapping/>
@@ -1447,6 +1569,10 @@
           <a:bodyPr/>
           <a:lstStyle/>
           <a:p>
+            <a:r>
+              <a:rPr lang="en-US" dirty="0"/>
+              <a:t/>
+            </a:r>
             <a:endParaRPr lang="en-US" dirty="0"/>
           </a:p>
         </p:txBody>
@@ -1468,12 +1594,18 @@
           <a:p>
             <a:fld id="{F7021451-1387-4CA6-816F-3879F97B5CBC}" type="slidenum">
               <a:rPr lang="en-US"/>
+              <a:t>8</a:t>
             </a:fld>
             <a:endParaRPr lang="en-US"/>
           </a:p>
         </p:txBody>
       </p:sp>
     </p:spTree>
+    <p:extLst>
+      <p:ext uri="{BB962C8B-B14F-4D97-AF65-F5344CB8AC3E}">
+        <p14:creationId xmlns:p14="http://schemas.microsoft.com/office/powerpoint/2010/main" val="1024086991"/>
+      </p:ext>
+    </p:extLst>
   </p:cSld>
   <p:clrMapOvr>
     <a:masterClrMapping/>
@@ -1525,6 +1657,10 @@
           <a:bodyPr/>
           <a:lstStyle/>
           <a:p>
+            <a:r>
+              <a:rPr lang="en-US" dirty="0"/>
+              <a:t/>
+            </a:r>
             <a:endParaRPr lang="en-US" dirty="0"/>
           </a:p>
         </p:txBody>
@@ -1546,12 +1682,18 @@
           <a:p>
             <a:fld id="{F7021451-1387-4CA6-816F-3879F97B5CBC}" type="slidenum">
               <a:rPr lang="en-US"/>
+              <a:t>9</a:t>
             </a:fld>
             <a:endParaRPr lang="en-US"/>
           </a:p>
         </p:txBody>
       </p:sp>
     </p:spTree>
+    <p:extLst>
+      <p:ext uri="{BB962C8B-B14F-4D97-AF65-F5344CB8AC3E}">
+        <p14:creationId xmlns:p14="http://schemas.microsoft.com/office/powerpoint/2010/main" val="1024086991"/>
+      </p:ext>
+    </p:extLst>
   </p:cSld>
   <p:clrMapOvr>
     <a:masterClrMapping/>
@@ -1592,11 +1734,6 @@
 <file path=ppt/slideMasters/slideMaster1.xml><?xml version="1.0" encoding="utf-8"?>
 <p:sldMaster xmlns:a="http://schemas.openxmlformats.org/drawingml/2006/main" xmlns:r="http://schemas.openxmlformats.org/officeDocument/2006/relationships" xmlns:p="http://schemas.openxmlformats.org/presentationml/2006/main">
   <p:cSld>
-    <p:bg>
-      <p:bgRef idx="1001">
-        <a:schemeClr val="bg1"/>
-      </p:bgRef>
-    </p:bg>
     <p:spTree>
       <p:nvGrpSpPr>
         <p:cNvPr id="1" name=""/>
@@ -1640,7 +1777,7 @@
         <a:spcBef>
           <a:spcPct val="20000"/>
         </a:spcBef>
-        <a:buFont typeface="Arial" panose="020B0604020202090204" pitchFamily="34" charset="0"/>
+        <a:buFont typeface="Arial" pitchFamily="34" charset="0"/>
         <a:buChar char="•"/>
         <a:defRPr sz="3200" kern="1200">
           <a:solidFill>
@@ -1655,7 +1792,7 @@
         <a:spcBef>
           <a:spcPct val="20000"/>
         </a:spcBef>
-        <a:buFont typeface="Arial" panose="020B0604020202090204" pitchFamily="34" charset="0"/>
+        <a:buFont typeface="Arial" pitchFamily="34" charset="0"/>
         <a:buChar char="–"/>
         <a:defRPr sz="2800" kern="1200">
           <a:solidFill>
@@ -1670,7 +1807,7 @@
         <a:spcBef>
           <a:spcPct val="20000"/>
         </a:spcBef>
-        <a:buFont typeface="Arial" panose="020B0604020202090204" pitchFamily="34" charset="0"/>
+        <a:buFont typeface="Arial" pitchFamily="34" charset="0"/>
         <a:buChar char="•"/>
         <a:defRPr sz="2400" kern="1200">
           <a:solidFill>
@@ -1685,7 +1822,7 @@
         <a:spcBef>
           <a:spcPct val="20000"/>
         </a:spcBef>
-        <a:buFont typeface="Arial" panose="020B0604020202090204" pitchFamily="34" charset="0"/>
+        <a:buFont typeface="Arial" pitchFamily="34" charset="0"/>
         <a:buChar char="–"/>
         <a:defRPr sz="2000" kern="1200">
           <a:solidFill>
@@ -1700,7 +1837,7 @@
         <a:spcBef>
           <a:spcPct val="20000"/>
         </a:spcBef>
-        <a:buFont typeface="Arial" panose="020B0604020202090204" pitchFamily="34" charset="0"/>
+        <a:buFont typeface="Arial" pitchFamily="34" charset="0"/>
         <a:buChar char="»"/>
         <a:defRPr sz="2000" kern="1200">
           <a:solidFill>
@@ -1715,7 +1852,7 @@
         <a:spcBef>
           <a:spcPct val="20000"/>
         </a:spcBef>
-        <a:buFont typeface="Arial" panose="020B0604020202090204" pitchFamily="34" charset="0"/>
+        <a:buFont typeface="Arial" pitchFamily="34" charset="0"/>
         <a:buChar char="•"/>
         <a:defRPr sz="2000" kern="1200">
           <a:solidFill>
@@ -1730,7 +1867,7 @@
         <a:spcBef>
           <a:spcPct val="20000"/>
         </a:spcBef>
-        <a:buFont typeface="Arial" panose="020B0604020202090204" pitchFamily="34" charset="0"/>
+        <a:buFont typeface="Arial" pitchFamily="34" charset="0"/>
         <a:buChar char="•"/>
         <a:defRPr sz="2000" kern="1200">
           <a:solidFill>
@@ -1745,7 +1882,7 @@
         <a:spcBef>
           <a:spcPct val="20000"/>
         </a:spcBef>
-        <a:buFont typeface="Arial" panose="020B0604020202090204" pitchFamily="34" charset="0"/>
+        <a:buFont typeface="Arial" pitchFamily="34" charset="0"/>
         <a:buChar char="•"/>
         <a:defRPr sz="2000" kern="1200">
           <a:solidFill>
@@ -1760,7 +1897,7 @@
         <a:spcBef>
           <a:spcPct val="20000"/>
         </a:spcBef>
-        <a:buFont typeface="Arial" panose="020B0604020202090204" pitchFamily="34" charset="0"/>
+        <a:buFont typeface="Arial" pitchFamily="34" charset="0"/>
         <a:buChar char="•"/>
         <a:defRPr sz="2000" kern="1200">
           <a:solidFill>
@@ -1873,13 +2010,12 @@
 
 <file path=ppt/slides/slide1.xml><?xml version="1.0" encoding="utf-8"?>
 <p:sld xmlns:a="http://schemas.openxmlformats.org/drawingml/2006/main" xmlns:r="http://schemas.openxmlformats.org/officeDocument/2006/relationships" xmlns:p="http://schemas.openxmlformats.org/presentationml/2006/main">
-  <p:cSld>
+  <p:cSld name="Slide 1">
     <p:bg>
       <p:bgPr>
         <a:solidFill>
           <a:srgbClr val="1E1E1E"/>
         </a:solidFill>
-        <a:effectLst/>
       </p:bgPr>
     </p:bg>
     <p:spTree>
@@ -1935,12 +2071,13 @@
             <a:avLst/>
           </a:prstGeom>
           <a:noFill/>
-        </p:spPr>
-        <p:txBody>
-          <a:bodyPr wrap="square" lIns="0" tIns="0" rIns="0" bIns="0" rtlCol="0" anchor="ctr"/>
-          <a:lstStyle/>
-          <a:p>
-            <a:pPr marL="0" indent="0" algn="ctr">
+          <a:ln/>
+        </p:spPr>
+        <p:txBody>
+          <a:bodyPr wrap="square" lIns="0" tIns="0" rIns="0" bIns="0" rtlCol="0" anchor="ctr"/>
+          <a:lstStyle/>
+          <a:p>
+            <a:pPr algn="ctr" indent="0" marL="0">
               <a:buNone/>
             </a:pPr>
             <a:r>
@@ -1948,9 +2085,9 @@
                 <a:solidFill>
                   <a:srgbClr val="C9A96E"/>
                 </a:solidFill>
-                <a:latin typeface="Arial" panose="020B0604020202090204" pitchFamily="34" charset="0"/>
-                <a:ea typeface="Arial" panose="020B0604020202090204" pitchFamily="34" charset="-122"/>
-                <a:cs typeface="Arial" panose="020B0604020202090204" pitchFamily="34" charset="-120"/>
+                <a:latin typeface="Arial" pitchFamily="34" charset="0"/>
+                <a:ea typeface="Arial" pitchFamily="34" charset="-122"/>
+                <a:cs typeface="Arial" pitchFamily="34" charset="-120"/>
               </a:rPr>
               <a:t>第 54 节</a:t>
             </a:r>
@@ -1966,19 +2103,20 @@
         </p:nvSpPr>
         <p:spPr>
           <a:xfrm>
-            <a:off x="509905" y="1554480"/>
+            <a:off x="502920" y="1554480"/>
             <a:ext cx="8412480" cy="822960"/>
           </a:xfrm>
           <a:prstGeom prst="rect">
             <a:avLst/>
           </a:prstGeom>
           <a:noFill/>
-        </p:spPr>
-        <p:txBody>
-          <a:bodyPr wrap="square" lIns="0" tIns="0" rIns="0" bIns="0" rtlCol="0" anchor="ctr"/>
-          <a:lstStyle/>
-          <a:p>
-            <a:pPr marL="0" indent="0">
+          <a:ln/>
+        </p:spPr>
+        <p:txBody>
+          <a:bodyPr wrap="square" lIns="0" tIns="0" rIns="0" bIns="0" rtlCol="0" anchor="ctr"/>
+          <a:lstStyle/>
+          <a:p>
+            <a:pPr indent="0" marL="0">
               <a:buNone/>
             </a:pPr>
             <a:r>
@@ -1986,9 +2124,9 @@
                 <a:solidFill>
                   <a:srgbClr val="F0F0F0"/>
                 </a:solidFill>
-                <a:latin typeface="Arial" panose="020B0604020202090204" pitchFamily="34" charset="0"/>
-                <a:ea typeface="Arial" panose="020B0604020202090204" pitchFamily="34" charset="-122"/>
-                <a:cs typeface="Arial" panose="020B0604020202090204" pitchFamily="34" charset="-120"/>
+                <a:latin typeface="Arial" pitchFamily="34" charset="0"/>
+                <a:ea typeface="Arial" pitchFamily="34" charset="-122"/>
+                <a:cs typeface="Arial" pitchFamily="34" charset="-120"/>
               </a:rPr>
               <a:t>When 项目总结与后续规划</a:t>
             </a:r>
@@ -2011,12 +2149,13 @@
             <a:avLst/>
           </a:prstGeom>
           <a:noFill/>
-        </p:spPr>
-        <p:txBody>
-          <a:bodyPr wrap="square" lIns="0" tIns="0" rIns="0" bIns="0" rtlCol="0" anchor="ctr"/>
-          <a:lstStyle/>
-          <a:p>
-            <a:pPr marL="0" indent="0">
+          <a:ln/>
+        </p:spPr>
+        <p:txBody>
+          <a:bodyPr wrap="square" lIns="0" tIns="0" rIns="0" bIns="0" rtlCol="0" anchor="ctr"/>
+          <a:lstStyle/>
+          <a:p>
+            <a:pPr indent="0" marL="0">
               <a:buNone/>
             </a:pPr>
             <a:r>
@@ -2024,9 +2163,9 @@
                 <a:solidFill>
                   <a:srgbClr val="C9A96E"/>
                 </a:solidFill>
-                <a:latin typeface="Arial" panose="020B0604020202090204" pitchFamily="34" charset="0"/>
-                <a:ea typeface="Arial" panose="020B0604020202090204" pitchFamily="34" charset="-122"/>
-                <a:cs typeface="Arial" panose="020B0604020202090204" pitchFamily="34" charset="-120"/>
+                <a:latin typeface="Arial" pitchFamily="34" charset="0"/>
+                <a:ea typeface="Arial" pitchFamily="34" charset="-122"/>
+                <a:cs typeface="Arial" pitchFamily="34" charset="-120"/>
               </a:rPr>
               <a:t>用 AI 编程，做出一个生产可用的分布式延时投递组件</a:t>
             </a:r>
@@ -2049,12 +2188,13 @@
             <a:avLst/>
           </a:prstGeom>
           <a:noFill/>
-        </p:spPr>
-        <p:txBody>
-          <a:bodyPr wrap="square" lIns="0" tIns="0" rIns="0" bIns="0" rtlCol="0" anchor="ctr"/>
-          <a:lstStyle/>
-          <a:p>
-            <a:pPr marL="0" indent="0">
+          <a:ln/>
+        </p:spPr>
+        <p:txBody>
+          <a:bodyPr wrap="square" lIns="0" tIns="0" rIns="0" bIns="0" rtlCol="0" anchor="ctr"/>
+          <a:lstStyle/>
+          <a:p>
+            <a:pPr indent="0" marL="0">
               <a:buNone/>
             </a:pPr>
             <a:r>
@@ -2062,9 +2202,9 @@
                 <a:solidFill>
                   <a:srgbClr val="9A9A9A"/>
                 </a:solidFill>
-                <a:latin typeface="Arial" panose="020B0604020202090204" pitchFamily="34" charset="0"/>
-                <a:ea typeface="Arial" panose="020B0604020202090204" pitchFamily="34" charset="-122"/>
-                <a:cs typeface="Arial" panose="020B0604020202090204" pitchFamily="34" charset="-120"/>
+                <a:latin typeface="Arial" pitchFamily="34" charset="0"/>
+                <a:ea typeface="Arial" pitchFamily="34" charset="-122"/>
+                <a:cs typeface="Arial" pitchFamily="34" charset="-120"/>
               </a:rPr>
               <a:t>成果 · Loop Engineering 方法论 · AI 编程总结 · 后续规划 · 社区推进</a:t>
             </a:r>
@@ -2082,13 +2222,12 @@
 
 <file path=ppt/slides/slide10.xml><?xml version="1.0" encoding="utf-8"?>
 <p:sld xmlns:a="http://schemas.openxmlformats.org/drawingml/2006/main" xmlns:r="http://schemas.openxmlformats.org/officeDocument/2006/relationships" xmlns:p="http://schemas.openxmlformats.org/presentationml/2006/main">
-  <p:cSld>
+  <p:cSld name="Slide 10">
     <p:bg>
       <p:bgPr>
         <a:solidFill>
           <a:srgbClr val="1E1E1E"/>
         </a:solidFill>
-        <a:effectLst/>
       </p:bgPr>
     </p:bg>
     <p:spTree>
@@ -2120,12 +2259,13 @@
             <a:avLst/>
           </a:prstGeom>
           <a:noFill/>
-        </p:spPr>
-        <p:txBody>
-          <a:bodyPr wrap="square" lIns="0" tIns="0" rIns="0" bIns="0" rtlCol="0" anchor="ctr"/>
-          <a:lstStyle/>
-          <a:p>
-            <a:pPr marL="0" indent="0">
+          <a:ln/>
+        </p:spPr>
+        <p:txBody>
+          <a:bodyPr wrap="square" lIns="0" tIns="0" rIns="0" bIns="0" rtlCol="0" anchor="ctr"/>
+          <a:lstStyle/>
+          <a:p>
+            <a:pPr indent="0" marL="0">
               <a:buNone/>
             </a:pPr>
             <a:r>
@@ -2133,9 +2273,9 @@
                 <a:solidFill>
                   <a:srgbClr val="6E6E6E"/>
                 </a:solidFill>
-                <a:latin typeface="Arial" panose="020B0604020202090204" pitchFamily="34" charset="0"/>
-                <a:ea typeface="Arial" panose="020B0604020202090204" pitchFamily="34" charset="-122"/>
-                <a:cs typeface="Arial" panose="020B0604020202090204" pitchFamily="34" charset="-120"/>
+                <a:latin typeface="Arial" pitchFamily="34" charset="0"/>
+                <a:ea typeface="Arial" pitchFamily="34" charset="-122"/>
+                <a:cs typeface="Arial" pitchFamily="34" charset="-120"/>
               </a:rPr>
               <a:t>第 54 节 · When 项目总结与后续规划</a:t>
             </a:r>
@@ -2158,12 +2298,13 @@
             <a:avLst/>
           </a:prstGeom>
           <a:noFill/>
-        </p:spPr>
-        <p:txBody>
-          <a:bodyPr wrap="square" lIns="0" tIns="0" rIns="0" bIns="0" rtlCol="0" anchor="ctr"/>
-          <a:lstStyle/>
-          <a:p>
-            <a:pPr marL="0" indent="0" algn="r">
+          <a:ln/>
+        </p:spPr>
+        <p:txBody>
+          <a:bodyPr wrap="square" lIns="0" tIns="0" rIns="0" bIns="0" rtlCol="0" anchor="ctr"/>
+          <a:lstStyle/>
+          <a:p>
+            <a:pPr algn="r" indent="0" marL="0">
               <a:buNone/>
             </a:pPr>
             <a:r>
@@ -2171,9 +2312,9 @@
                 <a:solidFill>
                   <a:srgbClr val="6E6E6E"/>
                 </a:solidFill>
-                <a:latin typeface="Arial" panose="020B0604020202090204" pitchFamily="34" charset="0"/>
-                <a:ea typeface="Arial" panose="020B0604020202090204" pitchFamily="34" charset="-122"/>
-                <a:cs typeface="Arial" panose="020B0604020202090204" pitchFamily="34" charset="-120"/>
+                <a:latin typeface="Arial" pitchFamily="34" charset="0"/>
+                <a:ea typeface="Arial" pitchFamily="34" charset="-122"/>
+                <a:cs typeface="Arial" pitchFamily="34" charset="-120"/>
               </a:rPr>
               <a:t>10 / 14</a:t>
             </a:r>
@@ -2220,22 +2361,23 @@
             <a:avLst/>
           </a:prstGeom>
           <a:noFill/>
-        </p:spPr>
-        <p:txBody>
-          <a:bodyPr wrap="square" lIns="0" tIns="0" rIns="0" bIns="0" rtlCol="0" anchor="ctr"/>
-          <a:lstStyle/>
-          <a:p>
-            <a:pPr marL="0" indent="0" algn="ctr">
-              <a:buNone/>
-            </a:pPr>
-            <a:r>
-              <a:rPr lang="en-US" sz="1050" b="1" kern="0" spc="100" dirty="0">
+          <a:ln/>
+        </p:spPr>
+        <p:txBody>
+          <a:bodyPr wrap="square" lIns="0" tIns="0" rIns="0" bIns="0" rtlCol="0" anchor="ctr"/>
+          <a:lstStyle/>
+          <a:p>
+            <a:pPr algn="ctr" indent="0" marL="0">
+              <a:buNone/>
+            </a:pPr>
+            <a:r>
+              <a:rPr lang="en-US" sz="1050" b="1" spc="100" kern="0" dirty="0">
                 <a:solidFill>
                   <a:srgbClr val="C9A96E"/>
                 </a:solidFill>
-                <a:latin typeface="Arial" panose="020B0604020202090204" pitchFamily="34" charset="0"/>
-                <a:ea typeface="Arial" panose="020B0604020202090204" pitchFamily="34" charset="-122"/>
-                <a:cs typeface="Arial" panose="020B0604020202090204" pitchFamily="34" charset="-120"/>
+                <a:latin typeface="Arial" pitchFamily="34" charset="0"/>
+                <a:ea typeface="Arial" pitchFamily="34" charset="-122"/>
+                <a:cs typeface="Arial" pitchFamily="34" charset="-120"/>
               </a:rPr>
               <a:t>AI 编程总结</a:t>
             </a:r>
@@ -2258,12 +2400,13 @@
             <a:avLst/>
           </a:prstGeom>
           <a:noFill/>
-        </p:spPr>
-        <p:txBody>
-          <a:bodyPr wrap="square" lIns="0" tIns="0" rIns="0" bIns="0" rtlCol="0" anchor="ctr"/>
-          <a:lstStyle/>
-          <a:p>
-            <a:pPr marL="0" indent="0">
+          <a:ln/>
+        </p:spPr>
+        <p:txBody>
+          <a:bodyPr wrap="square" lIns="0" tIns="0" rIns="0" bIns="0" rtlCol="0" anchor="ctr"/>
+          <a:lstStyle/>
+          <a:p>
+            <a:pPr indent="0" marL="0">
               <a:buNone/>
             </a:pPr>
             <a:r>
@@ -2271,9 +2414,9 @@
                 <a:solidFill>
                   <a:srgbClr val="F0F0F0"/>
                 </a:solidFill>
-                <a:latin typeface="Arial" panose="020B0604020202090204" pitchFamily="34" charset="0"/>
-                <a:ea typeface="Arial" panose="020B0604020202090204" pitchFamily="34" charset="-122"/>
-                <a:cs typeface="Arial" panose="020B0604020202090204" pitchFamily="34" charset="-120"/>
+                <a:latin typeface="Arial" pitchFamily="34" charset="0"/>
+                <a:ea typeface="Arial" pitchFamily="34" charset="-122"/>
+                <a:cs typeface="Arial" pitchFamily="34" charset="-120"/>
               </a:rPr>
               <a:t>三句能带走的话</a:t>
             </a:r>
@@ -2307,7 +2450,7 @@
             <a:prstDash val="solid"/>
           </a:ln>
           <a:effectLst>
-            <a:outerShdw blurRad="88900" dist="25400" dir="5400000" algn="bl" rotWithShape="0">
+            <a:outerShdw sx="100000" sy="100000" kx="0" ky="0" algn="bl" rotWithShape="0" blurRad="88900" dist="25400" dir="5400000">
               <a:srgbClr val="000000">
                 <a:alpha val="30000"/>
               </a:srgbClr>
@@ -2330,12 +2473,13 @@
             <a:avLst/>
           </a:prstGeom>
           <a:noFill/>
-        </p:spPr>
-        <p:txBody>
-          <a:bodyPr wrap="square" lIns="0" tIns="0" rIns="0" bIns="0" rtlCol="0" anchor="ctr"/>
-          <a:lstStyle/>
-          <a:p>
-            <a:pPr marL="0" indent="0">
+          <a:ln/>
+        </p:spPr>
+        <p:txBody>
+          <a:bodyPr wrap="square" lIns="0" tIns="0" rIns="0" bIns="0" rtlCol="0" anchor="ctr"/>
+          <a:lstStyle/>
+          <a:p>
+            <a:pPr indent="0" marL="0">
               <a:buNone/>
             </a:pPr>
             <a:r>
@@ -2343,9 +2487,9 @@
                 <a:solidFill>
                   <a:srgbClr val="C9A96E"/>
                 </a:solidFill>
-                <a:latin typeface="Arial" panose="020B0604020202090204" pitchFamily="34" charset="0"/>
-                <a:ea typeface="Arial" panose="020B0604020202090204" pitchFamily="34" charset="-122"/>
-                <a:cs typeface="Arial" panose="020B0604020202090204" pitchFamily="34" charset="-120"/>
+                <a:latin typeface="Arial" pitchFamily="34" charset="0"/>
+                <a:ea typeface="Arial" pitchFamily="34" charset="-122"/>
+                <a:cs typeface="Arial" pitchFamily="34" charset="-120"/>
               </a:rPr>
               <a:t>杠杆变了</a:t>
             </a:r>
@@ -2368,12 +2512,13 @@
             <a:avLst/>
           </a:prstGeom>
           <a:noFill/>
-        </p:spPr>
-        <p:txBody>
-          <a:bodyPr wrap="square" lIns="0" tIns="0" rIns="0" bIns="0" rtlCol="0" anchor="ctr"/>
-          <a:lstStyle/>
-          <a:p>
-            <a:pPr marL="0" indent="0">
+          <a:ln/>
+        </p:spPr>
+        <p:txBody>
+          <a:bodyPr wrap="square" lIns="0" tIns="0" rIns="0" bIns="0" rtlCol="0" anchor="ctr"/>
+          <a:lstStyle/>
+          <a:p>
+            <a:pPr indent="0" marL="0">
               <a:lnSpc>
                 <a:spcPct val="110000"/>
               </a:lnSpc>
@@ -2384,9 +2529,9 @@
                 <a:solidFill>
                   <a:srgbClr val="D6D6D6"/>
                 </a:solidFill>
-                <a:latin typeface="Arial" panose="020B0604020202090204" pitchFamily="34" charset="0"/>
-                <a:ea typeface="Arial" panose="020B0604020202090204" pitchFamily="34" charset="-122"/>
-                <a:cs typeface="Arial" panose="020B0604020202090204" pitchFamily="34" charset="-120"/>
+                <a:latin typeface="Arial" pitchFamily="34" charset="0"/>
+                <a:ea typeface="Arial" pitchFamily="34" charset="-122"/>
+                <a:cs typeface="Arial" pitchFamily="34" charset="-120"/>
               </a:rPr>
               <a:t>从“写好一句提示词”，到“设计一个能自主循环的环境和规则”。</a:t>
             </a:r>
@@ -2420,7 +2565,7 @@
             <a:prstDash val="solid"/>
           </a:ln>
           <a:effectLst>
-            <a:outerShdw blurRad="88900" dist="25400" dir="5400000" algn="bl" rotWithShape="0">
+            <a:outerShdw sx="100000" sy="100000" kx="0" ky="0" algn="bl" rotWithShape="0" blurRad="88900" dist="25400" dir="5400000">
               <a:srgbClr val="000000">
                 <a:alpha val="30000"/>
               </a:srgbClr>
@@ -2443,12 +2588,13 @@
             <a:avLst/>
           </a:prstGeom>
           <a:noFill/>
-        </p:spPr>
-        <p:txBody>
-          <a:bodyPr wrap="square" lIns="0" tIns="0" rIns="0" bIns="0" rtlCol="0" anchor="ctr"/>
-          <a:lstStyle/>
-          <a:p>
-            <a:pPr marL="0" indent="0">
+          <a:ln/>
+        </p:spPr>
+        <p:txBody>
+          <a:bodyPr wrap="square" lIns="0" tIns="0" rIns="0" bIns="0" rtlCol="0" anchor="ctr"/>
+          <a:lstStyle/>
+          <a:p>
+            <a:pPr indent="0" marL="0">
               <a:buNone/>
             </a:pPr>
             <a:r>
@@ -2456,9 +2602,9 @@
                 <a:solidFill>
                   <a:srgbClr val="C9A96E"/>
                 </a:solidFill>
-                <a:latin typeface="Arial" panose="020B0604020202090204" pitchFamily="34" charset="0"/>
-                <a:ea typeface="Arial" panose="020B0604020202090204" pitchFamily="34" charset="-122"/>
-                <a:cs typeface="Arial" panose="020B0604020202090204" pitchFamily="34" charset="-120"/>
+                <a:latin typeface="Arial" pitchFamily="34" charset="0"/>
+                <a:ea typeface="Arial" pitchFamily="34" charset="-122"/>
+                <a:cs typeface="Arial" pitchFamily="34" charset="-120"/>
               </a:rPr>
               <a:t>人退到检查点</a:t>
             </a:r>
@@ -2481,12 +2627,13 @@
             <a:avLst/>
           </a:prstGeom>
           <a:noFill/>
-        </p:spPr>
-        <p:txBody>
-          <a:bodyPr wrap="square" lIns="0" tIns="0" rIns="0" bIns="0" rtlCol="0" anchor="ctr"/>
-          <a:lstStyle/>
-          <a:p>
-            <a:pPr marL="0" indent="0">
+          <a:ln/>
+        </p:spPr>
+        <p:txBody>
+          <a:bodyPr wrap="square" lIns="0" tIns="0" rIns="0" bIns="0" rtlCol="0" anchor="ctr"/>
+          <a:lstStyle/>
+          <a:p>
+            <a:pPr indent="0" marL="0">
               <a:lnSpc>
                 <a:spcPct val="110000"/>
               </a:lnSpc>
@@ -2497,9 +2644,9 @@
                 <a:solidFill>
                   <a:srgbClr val="D6D6D6"/>
                 </a:solidFill>
-                <a:latin typeface="Arial" panose="020B0604020202090204" pitchFamily="34" charset="0"/>
-                <a:ea typeface="Arial" panose="020B0604020202090204" pitchFamily="34" charset="-122"/>
-                <a:cs typeface="Arial" panose="020B0604020202090204" pitchFamily="34" charset="-120"/>
+                <a:latin typeface="Arial" pitchFamily="34" charset="0"/>
+                <a:ea typeface="Arial" pitchFamily="34" charset="-122"/>
+                <a:cs typeface="Arial" pitchFamily="34" charset="-120"/>
               </a:rPr>
               <a:t>AI 干执行，人做判断——定目标、设规则、看关键处、拍板高风险。</a:t>
             </a:r>
@@ -2533,7 +2680,7 @@
             <a:prstDash val="solid"/>
           </a:ln>
           <a:effectLst>
-            <a:outerShdw blurRad="88900" dist="25400" dir="5400000" algn="bl" rotWithShape="0">
+            <a:outerShdw sx="100000" sy="100000" kx="0" ky="0" algn="bl" rotWithShape="0" blurRad="88900" dist="25400" dir="5400000">
               <a:srgbClr val="000000">
                 <a:alpha val="30000"/>
               </a:srgbClr>
@@ -2556,12 +2703,13 @@
             <a:avLst/>
           </a:prstGeom>
           <a:noFill/>
-        </p:spPr>
-        <p:txBody>
-          <a:bodyPr wrap="square" lIns="0" tIns="0" rIns="0" bIns="0" rtlCol="0" anchor="ctr"/>
-          <a:lstStyle/>
-          <a:p>
-            <a:pPr marL="0" indent="0">
+          <a:ln/>
+        </p:spPr>
+        <p:txBody>
+          <a:bodyPr wrap="square" lIns="0" tIns="0" rIns="0" bIns="0" rtlCol="0" anchor="ctr"/>
+          <a:lstStyle/>
+          <a:p>
+            <a:pPr indent="0" marL="0">
               <a:buNone/>
             </a:pPr>
             <a:r>
@@ -2569,9 +2717,9 @@
                 <a:solidFill>
                   <a:srgbClr val="C9A96E"/>
                 </a:solidFill>
-                <a:latin typeface="Arial" panose="020B0604020202090204" pitchFamily="34" charset="0"/>
-                <a:ea typeface="Arial" panose="020B0604020202090204" pitchFamily="34" charset="-122"/>
-                <a:cs typeface="Arial" panose="020B0604020202090204" pitchFamily="34" charset="-120"/>
+                <a:latin typeface="Arial" pitchFamily="34" charset="0"/>
+                <a:ea typeface="Arial" pitchFamily="34" charset="-122"/>
+                <a:cs typeface="Arial" pitchFamily="34" charset="-120"/>
               </a:rPr>
               <a:t>按可验证性分工</a:t>
             </a:r>
@@ -2594,12 +2742,13 @@
             <a:avLst/>
           </a:prstGeom>
           <a:noFill/>
-        </p:spPr>
-        <p:txBody>
-          <a:bodyPr wrap="square" lIns="0" tIns="0" rIns="0" bIns="0" rtlCol="0" anchor="ctr"/>
-          <a:lstStyle/>
-          <a:p>
-            <a:pPr marL="0" indent="0">
+          <a:ln/>
+        </p:spPr>
+        <p:txBody>
+          <a:bodyPr wrap="square" lIns="0" tIns="0" rIns="0" bIns="0" rtlCol="0" anchor="ctr"/>
+          <a:lstStyle/>
+          <a:p>
+            <a:pPr indent="0" marL="0">
               <a:lnSpc>
                 <a:spcPct val="110000"/>
               </a:lnSpc>
@@ -2610,9 +2759,9 @@
                 <a:solidFill>
                   <a:srgbClr val="D6D6D6"/>
                 </a:solidFill>
-                <a:latin typeface="Arial" panose="020B0604020202090204" pitchFamily="34" charset="0"/>
-                <a:ea typeface="Arial" panose="020B0604020202090204" pitchFamily="34" charset="-122"/>
-                <a:cs typeface="Arial" panose="020B0604020202090204" pitchFamily="34" charset="-120"/>
+                <a:latin typeface="Arial" pitchFamily="34" charset="0"/>
+                <a:ea typeface="Arial" pitchFamily="34" charset="-122"/>
+                <a:cs typeface="Arial" pitchFamily="34" charset="-120"/>
               </a:rPr>
               <a:t>能廉价确定验证 → 交循环；错不起又难验证（分布式一致性/资金安全）→ 人主导。</a:t>
             </a:r>
@@ -2630,13 +2779,12 @@
 
 <file path=ppt/slides/slide11.xml><?xml version="1.0" encoding="utf-8"?>
 <p:sld xmlns:a="http://schemas.openxmlformats.org/drawingml/2006/main" xmlns:r="http://schemas.openxmlformats.org/officeDocument/2006/relationships" xmlns:p="http://schemas.openxmlformats.org/presentationml/2006/main">
-  <p:cSld>
+  <p:cSld name="Slide 11">
     <p:bg>
       <p:bgPr>
         <a:solidFill>
           <a:srgbClr val="1E1E1E"/>
         </a:solidFill>
-        <a:effectLst/>
       </p:bgPr>
     </p:bg>
     <p:spTree>
@@ -2668,12 +2816,13 @@
             <a:avLst/>
           </a:prstGeom>
           <a:noFill/>
-        </p:spPr>
-        <p:txBody>
-          <a:bodyPr wrap="square" lIns="0" tIns="0" rIns="0" bIns="0" rtlCol="0" anchor="ctr"/>
-          <a:lstStyle/>
-          <a:p>
-            <a:pPr marL="0" indent="0">
+          <a:ln/>
+        </p:spPr>
+        <p:txBody>
+          <a:bodyPr wrap="square" lIns="0" tIns="0" rIns="0" bIns="0" rtlCol="0" anchor="ctr"/>
+          <a:lstStyle/>
+          <a:p>
+            <a:pPr indent="0" marL="0">
               <a:buNone/>
             </a:pPr>
             <a:r>
@@ -2681,9 +2830,9 @@
                 <a:solidFill>
                   <a:srgbClr val="6E6E6E"/>
                 </a:solidFill>
-                <a:latin typeface="Arial" panose="020B0604020202090204" pitchFamily="34" charset="0"/>
-                <a:ea typeface="Arial" panose="020B0604020202090204" pitchFamily="34" charset="-122"/>
-                <a:cs typeface="Arial" panose="020B0604020202090204" pitchFamily="34" charset="-120"/>
+                <a:latin typeface="Arial" pitchFamily="34" charset="0"/>
+                <a:ea typeface="Arial" pitchFamily="34" charset="-122"/>
+                <a:cs typeface="Arial" pitchFamily="34" charset="-120"/>
               </a:rPr>
               <a:t>第 54 节 · When 项目总结与后续规划</a:t>
             </a:r>
@@ -2706,12 +2855,13 @@
             <a:avLst/>
           </a:prstGeom>
           <a:noFill/>
-        </p:spPr>
-        <p:txBody>
-          <a:bodyPr wrap="square" lIns="0" tIns="0" rIns="0" bIns="0" rtlCol="0" anchor="ctr"/>
-          <a:lstStyle/>
-          <a:p>
-            <a:pPr marL="0" indent="0" algn="r">
+          <a:ln/>
+        </p:spPr>
+        <p:txBody>
+          <a:bodyPr wrap="square" lIns="0" tIns="0" rIns="0" bIns="0" rtlCol="0" anchor="ctr"/>
+          <a:lstStyle/>
+          <a:p>
+            <a:pPr algn="r" indent="0" marL="0">
               <a:buNone/>
             </a:pPr>
             <a:r>
@@ -2719,9 +2869,9 @@
                 <a:solidFill>
                   <a:srgbClr val="6E6E6E"/>
                 </a:solidFill>
-                <a:latin typeface="Arial" panose="020B0604020202090204" pitchFamily="34" charset="0"/>
-                <a:ea typeface="Arial" panose="020B0604020202090204" pitchFamily="34" charset="-122"/>
-                <a:cs typeface="Arial" panose="020B0604020202090204" pitchFamily="34" charset="-120"/>
+                <a:latin typeface="Arial" pitchFamily="34" charset="0"/>
+                <a:ea typeface="Arial" pitchFamily="34" charset="-122"/>
+                <a:cs typeface="Arial" pitchFamily="34" charset="-120"/>
               </a:rPr>
               <a:t>11 / 14</a:t>
             </a:r>
@@ -2768,22 +2918,23 @@
             <a:avLst/>
           </a:prstGeom>
           <a:noFill/>
-        </p:spPr>
-        <p:txBody>
-          <a:bodyPr wrap="square" lIns="0" tIns="0" rIns="0" bIns="0" rtlCol="0" anchor="ctr"/>
-          <a:lstStyle/>
-          <a:p>
-            <a:pPr marL="0" indent="0" algn="ctr">
-              <a:buNone/>
-            </a:pPr>
-            <a:r>
-              <a:rPr lang="en-US" sz="1050" b="1" kern="0" spc="100" dirty="0">
+          <a:ln/>
+        </p:spPr>
+        <p:txBody>
+          <a:bodyPr wrap="square" lIns="0" tIns="0" rIns="0" bIns="0" rtlCol="0" anchor="ctr"/>
+          <a:lstStyle/>
+          <a:p>
+            <a:pPr algn="ctr" indent="0" marL="0">
+              <a:buNone/>
+            </a:pPr>
+            <a:r>
+              <a:rPr lang="en-US" sz="1050" b="1" spc="100" kern="0" dirty="0">
                 <a:solidFill>
                   <a:srgbClr val="C9A96E"/>
                 </a:solidFill>
-                <a:latin typeface="Arial" panose="020B0604020202090204" pitchFamily="34" charset="0"/>
-                <a:ea typeface="Arial" panose="020B0604020202090204" pitchFamily="34" charset="-122"/>
-                <a:cs typeface="Arial" panose="020B0604020202090204" pitchFamily="34" charset="-120"/>
+                <a:latin typeface="Arial" pitchFamily="34" charset="0"/>
+                <a:ea typeface="Arial" pitchFamily="34" charset="-122"/>
+                <a:cs typeface="Arial" pitchFamily="34" charset="-120"/>
               </a:rPr>
               <a:t>后续规划</a:t>
             </a:r>
@@ -2806,12 +2957,13 @@
             <a:avLst/>
           </a:prstGeom>
           <a:noFill/>
-        </p:spPr>
-        <p:txBody>
-          <a:bodyPr wrap="square" lIns="0" tIns="0" rIns="0" bIns="0" rtlCol="0" anchor="ctr"/>
-          <a:lstStyle/>
-          <a:p>
-            <a:pPr marL="0" indent="0">
+          <a:ln/>
+        </p:spPr>
+        <p:txBody>
+          <a:bodyPr wrap="square" lIns="0" tIns="0" rIns="0" bIns="0" rtlCol="0" anchor="ctr"/>
+          <a:lstStyle/>
+          <a:p>
+            <a:pPr indent="0" marL="0">
               <a:buNone/>
             </a:pPr>
             <a:r>
@@ -2819,9 +2971,9 @@
                 <a:solidFill>
                   <a:srgbClr val="F0F0F0"/>
                 </a:solidFill>
-                <a:latin typeface="Arial" panose="020B0604020202090204" pitchFamily="34" charset="0"/>
-                <a:ea typeface="Arial" panose="020B0604020202090204" pitchFamily="34" charset="-122"/>
-                <a:cs typeface="Arial" panose="020B0604020202090204" pitchFamily="34" charset="-120"/>
+                <a:latin typeface="Arial" pitchFamily="34" charset="0"/>
+                <a:ea typeface="Arial" pitchFamily="34" charset="-122"/>
+                <a:cs typeface="Arial" pitchFamily="34" charset="-120"/>
               </a:rPr>
               <a:t>3 周 MVP 之外，社区接力</a:t>
             </a:r>
@@ -2855,7 +3007,7 @@
             <a:prstDash val="solid"/>
           </a:ln>
           <a:effectLst>
-            <a:outerShdw blurRad="88900" dist="25400" dir="5400000" algn="bl" rotWithShape="0">
+            <a:outerShdw sx="100000" sy="100000" kx="0" ky="0" algn="bl" rotWithShape="0" blurRad="88900" dist="25400" dir="5400000">
               <a:srgbClr val="000000">
                 <a:alpha val="30000"/>
               </a:srgbClr>
@@ -2878,12 +3030,13 @@
             <a:avLst/>
           </a:prstGeom>
           <a:noFill/>
-        </p:spPr>
-        <p:txBody>
-          <a:bodyPr wrap="square" lIns="0" tIns="0" rIns="0" bIns="0" rtlCol="0" anchor="ctr"/>
-          <a:lstStyle/>
-          <a:p>
-            <a:pPr marL="0" indent="0" algn="ctr">
+          <a:ln/>
+        </p:spPr>
+        <p:txBody>
+          <a:bodyPr wrap="square" lIns="0" tIns="0" rIns="0" bIns="0" rtlCol="0" anchor="ctr"/>
+          <a:lstStyle/>
+          <a:p>
+            <a:pPr algn="ctr" indent="0" marL="0">
               <a:buNone/>
             </a:pPr>
             <a:r>
@@ -2891,9 +3044,9 @@
                 <a:solidFill>
                   <a:srgbClr val="C9A96E"/>
                 </a:solidFill>
-                <a:latin typeface="Arial" panose="020B0604020202090204" pitchFamily="34" charset="0"/>
-                <a:ea typeface="Arial" panose="020B0604020202090204" pitchFamily="34" charset="-122"/>
-                <a:cs typeface="Arial" panose="020B0604020202090204" pitchFamily="34" charset="-120"/>
+                <a:latin typeface="Arial" pitchFamily="34" charset="0"/>
+                <a:ea typeface="Arial" pitchFamily="34" charset="-122"/>
+                <a:cs typeface="Arial" pitchFamily="34" charset="-120"/>
               </a:rPr>
               <a:t>更多 Sink</a:t>
             </a:r>
@@ -2916,12 +3069,13 @@
             <a:avLst/>
           </a:prstGeom>
           <a:noFill/>
+          <a:ln/>
         </p:spPr>
         <p:txBody>
           <a:bodyPr wrap="square" lIns="0" tIns="0" rIns="0" bIns="0" rtlCol="0" anchor="t"/>
           <a:lstStyle/>
           <a:p>
-            <a:pPr marL="0" indent="0" algn="ctr">
+            <a:pPr algn="ctr" indent="0" marL="0">
               <a:lnSpc>
                 <a:spcPct val="112000"/>
               </a:lnSpc>
@@ -2932,9 +3086,9 @@
                 <a:solidFill>
                   <a:srgbClr val="D6D6D6"/>
                 </a:solidFill>
-                <a:latin typeface="Arial" panose="020B0604020202090204" pitchFamily="34" charset="0"/>
-                <a:ea typeface="Arial" panose="020B0604020202090204" pitchFamily="34" charset="-122"/>
-                <a:cs typeface="Arial" panose="020B0604020202090204" pitchFamily="34" charset="-120"/>
+                <a:latin typeface="Arial" pitchFamily="34" charset="0"/>
+                <a:ea typeface="Arial" pitchFamily="34" charset="-122"/>
+                <a:cs typeface="Arial" pitchFamily="34" charset="-120"/>
               </a:rPr>
               <a:t>gRPC / RocketMQ / NATS / Pulsar，SPI 加载</a:t>
             </a:r>
@@ -2968,7 +3122,7 @@
             <a:prstDash val="solid"/>
           </a:ln>
           <a:effectLst>
-            <a:outerShdw blurRad="88900" dist="25400" dir="5400000" algn="bl" rotWithShape="0">
+            <a:outerShdw sx="100000" sy="100000" kx="0" ky="0" algn="bl" rotWithShape="0" blurRad="88900" dist="25400" dir="5400000">
               <a:srgbClr val="000000">
                 <a:alpha val="30000"/>
               </a:srgbClr>
@@ -2991,12 +3145,13 @@
             <a:avLst/>
           </a:prstGeom>
           <a:noFill/>
-        </p:spPr>
-        <p:txBody>
-          <a:bodyPr wrap="square" lIns="0" tIns="0" rIns="0" bIns="0" rtlCol="0" anchor="ctr"/>
-          <a:lstStyle/>
-          <a:p>
-            <a:pPr marL="0" indent="0" algn="ctr">
+          <a:ln/>
+        </p:spPr>
+        <p:txBody>
+          <a:bodyPr wrap="square" lIns="0" tIns="0" rIns="0" bIns="0" rtlCol="0" anchor="ctr"/>
+          <a:lstStyle/>
+          <a:p>
+            <a:pPr algn="ctr" indent="0" marL="0">
               <a:buNone/>
             </a:pPr>
             <a:r>
@@ -3004,9 +3159,9 @@
                 <a:solidFill>
                   <a:srgbClr val="C9A96E"/>
                 </a:solidFill>
-                <a:latin typeface="Arial" panose="020B0604020202090204" pitchFamily="34" charset="0"/>
-                <a:ea typeface="Arial" panose="020B0604020202090204" pitchFamily="34" charset="-122"/>
-                <a:cs typeface="Arial" panose="020B0604020202090204" pitchFamily="34" charset="-120"/>
+                <a:latin typeface="Arial" pitchFamily="34" charset="0"/>
+                <a:ea typeface="Arial" pitchFamily="34" charset="-122"/>
+                <a:cs typeface="Arial" pitchFamily="34" charset="-120"/>
               </a:rPr>
               <a:t>鉴权与限流</a:t>
             </a:r>
@@ -3029,12 +3184,13 @@
             <a:avLst/>
           </a:prstGeom>
           <a:noFill/>
+          <a:ln/>
         </p:spPr>
         <p:txBody>
           <a:bodyPr wrap="square" lIns="0" tIns="0" rIns="0" bIns="0" rtlCol="0" anchor="t"/>
           <a:lstStyle/>
           <a:p>
-            <a:pPr marL="0" indent="0" algn="ctr">
+            <a:pPr algn="ctr" indent="0" marL="0">
               <a:lnSpc>
                 <a:spcPct val="112000"/>
               </a:lnSpc>
@@ -3045,9 +3201,9 @@
                 <a:solidFill>
                   <a:srgbClr val="D6D6D6"/>
                 </a:solidFill>
-                <a:latin typeface="Arial" panose="020B0604020202090204" pitchFamily="34" charset="0"/>
-                <a:ea typeface="Arial" panose="020B0604020202090204" pitchFamily="34" charset="-122"/>
-                <a:cs typeface="Arial" panose="020B0604020202090204" pitchFamily="34" charset="-120"/>
+                <a:latin typeface="Arial" pitchFamily="34" charset="0"/>
+                <a:ea typeface="Arial" pitchFamily="34" charset="-122"/>
+                <a:cs typeface="Arial" pitchFamily="34" charset="-120"/>
               </a:rPr>
               <a:t>token 鉴权、按调用方 QPS/配额</a:t>
             </a:r>
@@ -3081,7 +3237,7 @@
             <a:prstDash val="solid"/>
           </a:ln>
           <a:effectLst>
-            <a:outerShdw blurRad="88900" dist="25400" dir="5400000" algn="bl" rotWithShape="0">
+            <a:outerShdw sx="100000" sy="100000" kx="0" ky="0" algn="bl" rotWithShape="0" blurRad="88900" dist="25400" dir="5400000">
               <a:srgbClr val="000000">
                 <a:alpha val="30000"/>
               </a:srgbClr>
@@ -3104,12 +3260,13 @@
             <a:avLst/>
           </a:prstGeom>
           <a:noFill/>
-        </p:spPr>
-        <p:txBody>
-          <a:bodyPr wrap="square" lIns="0" tIns="0" rIns="0" bIns="0" rtlCol="0" anchor="ctr"/>
-          <a:lstStyle/>
-          <a:p>
-            <a:pPr marL="0" indent="0" algn="ctr">
+          <a:ln/>
+        </p:spPr>
+        <p:txBody>
+          <a:bodyPr wrap="square" lIns="0" tIns="0" rIns="0" bIns="0" rtlCol="0" anchor="ctr"/>
+          <a:lstStyle/>
+          <a:p>
+            <a:pPr algn="ctr" indent="0" marL="0">
               <a:buNone/>
             </a:pPr>
             <a:r>
@@ -3117,9 +3274,9 @@
                 <a:solidFill>
                   <a:srgbClr val="C9A96E"/>
                 </a:solidFill>
-                <a:latin typeface="Arial" panose="020B0604020202090204" pitchFamily="34" charset="0"/>
-                <a:ea typeface="Arial" panose="020B0604020202090204" pitchFamily="34" charset="-122"/>
-                <a:cs typeface="Arial" panose="020B0604020202090204" pitchFamily="34" charset="-120"/>
+                <a:latin typeface="Arial" pitchFamily="34" charset="0"/>
+                <a:ea typeface="Arial" pitchFamily="34" charset="-122"/>
+                <a:cs typeface="Arial" pitchFamily="34" charset="-120"/>
               </a:rPr>
               <a:t>死信队列</a:t>
             </a:r>
@@ -3142,12 +3299,13 @@
             <a:avLst/>
           </a:prstGeom>
           <a:noFill/>
+          <a:ln/>
         </p:spPr>
         <p:txBody>
           <a:bodyPr wrap="square" lIns="0" tIns="0" rIns="0" bIns="0" rtlCol="0" anchor="t"/>
           <a:lstStyle/>
           <a:p>
-            <a:pPr marL="0" indent="0" algn="ctr">
+            <a:pPr algn="ctr" indent="0" marL="0">
               <a:lnSpc>
                 <a:spcPct val="112000"/>
               </a:lnSpc>
@@ -3158,9 +3316,9 @@
                 <a:solidFill>
                   <a:srgbClr val="D6D6D6"/>
                 </a:solidFill>
-                <a:latin typeface="Arial" panose="020B0604020202090204" pitchFamily="34" charset="0"/>
-                <a:ea typeface="Arial" panose="020B0604020202090204" pitchFamily="34" charset="-122"/>
-                <a:cs typeface="Arial" panose="020B0604020202090204" pitchFamily="34" charset="-120"/>
+                <a:latin typeface="Arial" pitchFamily="34" charset="0"/>
+                <a:ea typeface="Arial" pitchFamily="34" charset="-122"/>
+                <a:cs typeface="Arial" pitchFamily="34" charset="-120"/>
               </a:rPr>
               <a:t>多次失败进死信，可查可重投</a:t>
             </a:r>
@@ -3194,7 +3352,7 @@
             <a:prstDash val="solid"/>
           </a:ln>
           <a:effectLst>
-            <a:outerShdw blurRad="88900" dist="25400" dir="5400000" algn="bl" rotWithShape="0">
+            <a:outerShdw sx="100000" sy="100000" kx="0" ky="0" algn="bl" rotWithShape="0" blurRad="88900" dist="25400" dir="5400000">
               <a:srgbClr val="000000">
                 <a:alpha val="30000"/>
               </a:srgbClr>
@@ -3217,12 +3375,13 @@
             <a:avLst/>
           </a:prstGeom>
           <a:noFill/>
-        </p:spPr>
-        <p:txBody>
-          <a:bodyPr wrap="square" lIns="0" tIns="0" rIns="0" bIns="0" rtlCol="0" anchor="ctr"/>
-          <a:lstStyle/>
-          <a:p>
-            <a:pPr marL="0" indent="0" algn="ctr">
+          <a:ln/>
+        </p:spPr>
+        <p:txBody>
+          <a:bodyPr wrap="square" lIns="0" tIns="0" rIns="0" bIns="0" rtlCol="0" anchor="ctr"/>
+          <a:lstStyle/>
+          <a:p>
+            <a:pPr algn="ctr" indent="0" marL="0">
               <a:buNone/>
             </a:pPr>
             <a:r>
@@ -3230,9 +3389,9 @@
                 <a:solidFill>
                   <a:srgbClr val="C9A96E"/>
                 </a:solidFill>
-                <a:latin typeface="Arial" panose="020B0604020202090204" pitchFamily="34" charset="0"/>
-                <a:ea typeface="Arial" panose="020B0604020202090204" pitchFamily="34" charset="-122"/>
-                <a:cs typeface="Arial" panose="020B0604020202090204" pitchFamily="34" charset="-120"/>
+                <a:latin typeface="Arial" pitchFamily="34" charset="0"/>
+                <a:ea typeface="Arial" pitchFamily="34" charset="-122"/>
+                <a:cs typeface="Arial" pitchFamily="34" charset="-120"/>
               </a:rPr>
               <a:t>优先级队列</a:t>
             </a:r>
@@ -3255,12 +3414,13 @@
             <a:avLst/>
           </a:prstGeom>
           <a:noFill/>
+          <a:ln/>
         </p:spPr>
         <p:txBody>
           <a:bodyPr wrap="square" lIns="0" tIns="0" rIns="0" bIns="0" rtlCol="0" anchor="t"/>
           <a:lstStyle/>
           <a:p>
-            <a:pPr marL="0" indent="0" algn="ctr">
+            <a:pPr algn="ctr" indent="0" marL="0">
               <a:lnSpc>
                 <a:spcPct val="112000"/>
               </a:lnSpc>
@@ -3271,9 +3431,9 @@
                 <a:solidFill>
                   <a:srgbClr val="D6D6D6"/>
                 </a:solidFill>
-                <a:latin typeface="Arial" panose="020B0604020202090204" pitchFamily="34" charset="0"/>
-                <a:ea typeface="Arial" panose="020B0604020202090204" pitchFamily="34" charset="-122"/>
-                <a:cs typeface="Arial" panose="020B0604020202090204" pitchFamily="34" charset="-120"/>
+                <a:latin typeface="Arial" pitchFamily="34" charset="0"/>
+                <a:ea typeface="Arial" pitchFamily="34" charset="-122"/>
+                <a:cs typeface="Arial" pitchFamily="34" charset="-120"/>
               </a:rPr>
               <a:t>P0–P3，到期高优先先投</a:t>
             </a:r>
@@ -3307,7 +3467,7 @@
             <a:prstDash val="solid"/>
           </a:ln>
           <a:effectLst>
-            <a:outerShdw blurRad="88900" dist="25400" dir="5400000" algn="bl" rotWithShape="0">
+            <a:outerShdw sx="100000" sy="100000" kx="0" ky="0" algn="bl" rotWithShape="0" blurRad="88900" dist="25400" dir="5400000">
               <a:srgbClr val="000000">
                 <a:alpha val="30000"/>
               </a:srgbClr>
@@ -3330,12 +3490,13 @@
             <a:avLst/>
           </a:prstGeom>
           <a:noFill/>
-        </p:spPr>
-        <p:txBody>
-          <a:bodyPr wrap="square" lIns="0" tIns="0" rIns="0" bIns="0" rtlCol="0" anchor="ctr"/>
-          <a:lstStyle/>
-          <a:p>
-            <a:pPr marL="0" indent="0" algn="ctr">
+          <a:ln/>
+        </p:spPr>
+        <p:txBody>
+          <a:bodyPr wrap="square" lIns="0" tIns="0" rIns="0" bIns="0" rtlCol="0" anchor="ctr"/>
+          <a:lstStyle/>
+          <a:p>
+            <a:pPr algn="ctr" indent="0" marL="0">
               <a:buNone/>
             </a:pPr>
             <a:r>
@@ -3343,9 +3504,9 @@
                 <a:solidFill>
                   <a:srgbClr val="C9A96E"/>
                 </a:solidFill>
-                <a:latin typeface="Arial" panose="020B0604020202090204" pitchFamily="34" charset="0"/>
-                <a:ea typeface="Arial" panose="020B0604020202090204" pitchFamily="34" charset="-122"/>
-                <a:cs typeface="Arial" panose="020B0604020202090204" pitchFamily="34" charset="-120"/>
+                <a:latin typeface="Arial" pitchFamily="34" charset="0"/>
+                <a:ea typeface="Arial" pitchFamily="34" charset="-122"/>
+                <a:cs typeface="Arial" pitchFamily="34" charset="-120"/>
               </a:rPr>
               <a:t>跨地域部署</a:t>
             </a:r>
@@ -3368,12 +3529,13 @@
             <a:avLst/>
           </a:prstGeom>
           <a:noFill/>
+          <a:ln/>
         </p:spPr>
         <p:txBody>
           <a:bodyPr wrap="square" lIns="0" tIns="0" rIns="0" bIns="0" rtlCol="0" anchor="t"/>
           <a:lstStyle/>
           <a:p>
-            <a:pPr marL="0" indent="0" algn="ctr">
+            <a:pPr algn="ctr" indent="0" marL="0">
               <a:lnSpc>
                 <a:spcPct val="112000"/>
               </a:lnSpc>
@@ -3384,9 +3546,9 @@
                 <a:solidFill>
                   <a:srgbClr val="D6D6D6"/>
                 </a:solidFill>
-                <a:latin typeface="Arial" panose="020B0604020202090204" pitchFamily="34" charset="0"/>
-                <a:ea typeface="Arial" panose="020B0604020202090204" pitchFamily="34" charset="-122"/>
-                <a:cs typeface="Arial" panose="020B0604020202090204" pitchFamily="34" charset="-120"/>
+                <a:latin typeface="Arial" pitchFamily="34" charset="0"/>
+                <a:ea typeface="Arial" pitchFamily="34" charset="-122"/>
+                <a:cs typeface="Arial" pitchFamily="34" charset="-120"/>
               </a:rPr>
               <a:t>时间轮按地域、跨地域 ETCD/Redis</a:t>
             </a:r>
@@ -3420,7 +3582,7 @@
             <a:prstDash val="solid"/>
           </a:ln>
           <a:effectLst>
-            <a:outerShdw blurRad="88900" dist="25400" dir="5400000" algn="bl" rotWithShape="0">
+            <a:outerShdw sx="100000" sy="100000" kx="0" ky="0" algn="bl" rotWithShape="0" blurRad="88900" dist="25400" dir="5400000">
               <a:srgbClr val="000000">
                 <a:alpha val="30000"/>
               </a:srgbClr>
@@ -3443,12 +3605,13 @@
             <a:avLst/>
           </a:prstGeom>
           <a:noFill/>
-        </p:spPr>
-        <p:txBody>
-          <a:bodyPr wrap="square" lIns="0" tIns="0" rIns="0" bIns="0" rtlCol="0" anchor="ctr"/>
-          <a:lstStyle/>
-          <a:p>
-            <a:pPr marL="0" indent="0" algn="ctr">
+          <a:ln/>
+        </p:spPr>
+        <p:txBody>
+          <a:bodyPr wrap="square" lIns="0" tIns="0" rIns="0" bIns="0" rtlCol="0" anchor="ctr"/>
+          <a:lstStyle/>
+          <a:p>
+            <a:pPr algn="ctr" indent="0" marL="0">
               <a:buNone/>
             </a:pPr>
             <a:r>
@@ -3456,9 +3619,9 @@
                 <a:solidFill>
                   <a:srgbClr val="C9A96E"/>
                 </a:solidFill>
-                <a:latin typeface="Arial" panose="020B0604020202090204" pitchFamily="34" charset="0"/>
-                <a:ea typeface="Arial" panose="020B0604020202090204" pitchFamily="34" charset="-122"/>
-                <a:cs typeface="Arial" panose="020B0604020202090204" pitchFamily="34" charset="-120"/>
+                <a:latin typeface="Arial" pitchFamily="34" charset="0"/>
+                <a:ea typeface="Arial" pitchFamily="34" charset="-122"/>
+                <a:cs typeface="Arial" pitchFamily="34" charset="-120"/>
               </a:rPr>
               <a:t>Operator / MCP</a:t>
             </a:r>
@@ -3481,12 +3644,13 @@
             <a:avLst/>
           </a:prstGeom>
           <a:noFill/>
+          <a:ln/>
         </p:spPr>
         <p:txBody>
           <a:bodyPr wrap="square" lIns="0" tIns="0" rIns="0" bIns="0" rtlCol="0" anchor="t"/>
           <a:lstStyle/>
           <a:p>
-            <a:pPr marL="0" indent="0" algn="ctr">
+            <a:pPr algn="ctr" indent="0" marL="0">
               <a:lnSpc>
                 <a:spcPct val="112000"/>
               </a:lnSpc>
@@ -3497,9 +3661,9 @@
                 <a:solidFill>
                   <a:srgbClr val="D6D6D6"/>
                 </a:solidFill>
-                <a:latin typeface="Arial" panose="020B0604020202090204" pitchFamily="34" charset="0"/>
-                <a:ea typeface="Arial" panose="020B0604020202090204" pitchFamily="34" charset="-122"/>
-                <a:cs typeface="Arial" panose="020B0604020202090204" pitchFamily="34" charset="-120"/>
+                <a:latin typeface="Arial" pitchFamily="34" charset="0"/>
+                <a:ea typeface="Arial" pitchFamily="34" charset="-122"/>
+                <a:cs typeface="Arial" pitchFamily="34" charset="-120"/>
               </a:rPr>
               <a:t>K8s Operator 工程化；暴露为 MCP 让 Agent 直接调</a:t>
             </a:r>
@@ -3549,12 +3713,13 @@
             <a:avLst/>
           </a:prstGeom>
           <a:noFill/>
-        </p:spPr>
-        <p:txBody>
-          <a:bodyPr wrap="square" lIns="0" tIns="0" rIns="0" bIns="0" rtlCol="0" anchor="ctr"/>
-          <a:lstStyle/>
-          <a:p>
-            <a:pPr marL="0" indent="0">
+          <a:ln/>
+        </p:spPr>
+        <p:txBody>
+          <a:bodyPr wrap="square" lIns="0" tIns="0" rIns="0" bIns="0" rtlCol="0" anchor="ctr"/>
+          <a:lstStyle/>
+          <a:p>
+            <a:pPr indent="0" marL="0">
               <a:lnSpc>
                 <a:spcPct val="106000"/>
               </a:lnSpc>
@@ -3565,20 +3730,26 @@
                 <a:solidFill>
                   <a:srgbClr val="C9A96E"/>
                 </a:solidFill>
-                <a:latin typeface="Arial" panose="020B0604020202090204" pitchFamily="34" charset="0"/>
-                <a:ea typeface="Arial" panose="020B0604020202090204" pitchFamily="34" charset="-122"/>
-                <a:cs typeface="Arial" panose="020B0604020202090204" pitchFamily="34" charset="-120"/>
+                <a:latin typeface="Arial" pitchFamily="34" charset="0"/>
+                <a:ea typeface="Arial" pitchFamily="34" charset="-122"/>
+                <a:cs typeface="Arial" pitchFamily="34" charset="-120"/>
               </a:rPr>
               <a:t>边界清晰：</a:t>
             </a:r>
+            <a:pPr indent="0" marL="0">
+              <a:lnSpc>
+                <a:spcPct val="106000"/>
+              </a:lnSpc>
+              <a:buNone/>
+            </a:pPr>
             <a:r>
               <a:rPr lang="en-US" sz="1250" dirty="0">
                 <a:solidFill>
                   <a:srgbClr val="F0F0F0"/>
                 </a:solidFill>
-                <a:latin typeface="Arial" panose="020B0604020202090204" pitchFamily="34" charset="0"/>
-                <a:ea typeface="Arial" panose="020B0604020202090204" pitchFamily="34" charset="-122"/>
-                <a:cs typeface="Arial" panose="020B0604020202090204" pitchFamily="34" charset="-120"/>
+                <a:latin typeface="Arial" pitchFamily="34" charset="0"/>
+                <a:ea typeface="Arial" pitchFamily="34" charset="-122"/>
+                <a:cs typeface="Arial" pitchFamily="34" charset="-120"/>
               </a:rPr>
               <a:t>这些都不在 3 周 MVP 内，通过 GitHub 社区接力持续推进，由从学员中产生的 maintainer 主导。</a:t>
             </a:r>
@@ -3596,13 +3767,12 @@
 
 <file path=ppt/slides/slide12.xml><?xml version="1.0" encoding="utf-8"?>
 <p:sld xmlns:a="http://schemas.openxmlformats.org/drawingml/2006/main" xmlns:r="http://schemas.openxmlformats.org/officeDocument/2006/relationships" xmlns:p="http://schemas.openxmlformats.org/presentationml/2006/main">
-  <p:cSld>
+  <p:cSld name="Slide 12">
     <p:bg>
       <p:bgPr>
         <a:solidFill>
           <a:srgbClr val="1E1E1E"/>
         </a:solidFill>
-        <a:effectLst/>
       </p:bgPr>
     </p:bg>
     <p:spTree>
@@ -3634,12 +3804,13 @@
             <a:avLst/>
           </a:prstGeom>
           <a:noFill/>
-        </p:spPr>
-        <p:txBody>
-          <a:bodyPr wrap="square" lIns="0" tIns="0" rIns="0" bIns="0" rtlCol="0" anchor="ctr"/>
-          <a:lstStyle/>
-          <a:p>
-            <a:pPr marL="0" indent="0">
+          <a:ln/>
+        </p:spPr>
+        <p:txBody>
+          <a:bodyPr wrap="square" lIns="0" tIns="0" rIns="0" bIns="0" rtlCol="0" anchor="ctr"/>
+          <a:lstStyle/>
+          <a:p>
+            <a:pPr indent="0" marL="0">
               <a:buNone/>
             </a:pPr>
             <a:r>
@@ -3647,9 +3818,9 @@
                 <a:solidFill>
                   <a:srgbClr val="6E6E6E"/>
                 </a:solidFill>
-                <a:latin typeface="Arial" panose="020B0604020202090204" pitchFamily="34" charset="0"/>
-                <a:ea typeface="Arial" panose="020B0604020202090204" pitchFamily="34" charset="-122"/>
-                <a:cs typeface="Arial" panose="020B0604020202090204" pitchFamily="34" charset="-120"/>
+                <a:latin typeface="Arial" pitchFamily="34" charset="0"/>
+                <a:ea typeface="Arial" pitchFamily="34" charset="-122"/>
+                <a:cs typeface="Arial" pitchFamily="34" charset="-120"/>
               </a:rPr>
               <a:t>第 54 节 · When 项目总结与后续规划</a:t>
             </a:r>
@@ -3672,12 +3843,13 @@
             <a:avLst/>
           </a:prstGeom>
           <a:noFill/>
-        </p:spPr>
-        <p:txBody>
-          <a:bodyPr wrap="square" lIns="0" tIns="0" rIns="0" bIns="0" rtlCol="0" anchor="ctr"/>
-          <a:lstStyle/>
-          <a:p>
-            <a:pPr marL="0" indent="0" algn="r">
+          <a:ln/>
+        </p:spPr>
+        <p:txBody>
+          <a:bodyPr wrap="square" lIns="0" tIns="0" rIns="0" bIns="0" rtlCol="0" anchor="ctr"/>
+          <a:lstStyle/>
+          <a:p>
+            <a:pPr algn="r" indent="0" marL="0">
               <a:buNone/>
             </a:pPr>
             <a:r>
@@ -3685,9 +3857,9 @@
                 <a:solidFill>
                   <a:srgbClr val="6E6E6E"/>
                 </a:solidFill>
-                <a:latin typeface="Arial" panose="020B0604020202090204" pitchFamily="34" charset="0"/>
-                <a:ea typeface="Arial" panose="020B0604020202090204" pitchFamily="34" charset="-122"/>
-                <a:cs typeface="Arial" panose="020B0604020202090204" pitchFamily="34" charset="-120"/>
+                <a:latin typeface="Arial" pitchFamily="34" charset="0"/>
+                <a:ea typeface="Arial" pitchFamily="34" charset="-122"/>
+                <a:cs typeface="Arial" pitchFamily="34" charset="-120"/>
               </a:rPr>
               <a:t>12 / 14</a:t>
             </a:r>
@@ -3734,22 +3906,23 @@
             <a:avLst/>
           </a:prstGeom>
           <a:noFill/>
-        </p:spPr>
-        <p:txBody>
-          <a:bodyPr wrap="square" lIns="0" tIns="0" rIns="0" bIns="0" rtlCol="0" anchor="ctr"/>
-          <a:lstStyle/>
-          <a:p>
-            <a:pPr marL="0" indent="0" algn="ctr">
-              <a:buNone/>
-            </a:pPr>
-            <a:r>
-              <a:rPr lang="en-US" sz="1050" b="1" kern="0" spc="100" dirty="0">
+          <a:ln/>
+        </p:spPr>
+        <p:txBody>
+          <a:bodyPr wrap="square" lIns="0" tIns="0" rIns="0" bIns="0" rtlCol="0" anchor="ctr"/>
+          <a:lstStyle/>
+          <a:p>
+            <a:pPr algn="ctr" indent="0" marL="0">
+              <a:buNone/>
+            </a:pPr>
+            <a:r>
+              <a:rPr lang="en-US" sz="1050" b="1" spc="100" kern="0" dirty="0">
                 <a:solidFill>
                   <a:srgbClr val="C9A96E"/>
                 </a:solidFill>
-                <a:latin typeface="Arial" panose="020B0604020202090204" pitchFamily="34" charset="0"/>
-                <a:ea typeface="Arial" panose="020B0604020202090204" pitchFamily="34" charset="-122"/>
-                <a:cs typeface="Arial" panose="020B0604020202090204" pitchFamily="34" charset="-120"/>
+                <a:latin typeface="Arial" pitchFamily="34" charset="0"/>
+                <a:ea typeface="Arial" pitchFamily="34" charset="-122"/>
+                <a:cs typeface="Arial" pitchFamily="34" charset="-120"/>
               </a:rPr>
               <a:t>社区推进</a:t>
             </a:r>
@@ -3772,12 +3945,13 @@
             <a:avLst/>
           </a:prstGeom>
           <a:noFill/>
-        </p:spPr>
-        <p:txBody>
-          <a:bodyPr wrap="square" lIns="0" tIns="0" rIns="0" bIns="0" rtlCol="0" anchor="ctr"/>
-          <a:lstStyle/>
-          <a:p>
-            <a:pPr marL="0" indent="0">
+          <a:ln/>
+        </p:spPr>
+        <p:txBody>
+          <a:bodyPr wrap="square" lIns="0" tIns="0" rIns="0" bIns="0" rtlCol="0" anchor="ctr"/>
+          <a:lstStyle/>
+          <a:p>
+            <a:pPr indent="0" marL="0">
               <a:buNone/>
             </a:pPr>
             <a:r>
@@ -3785,9 +3959,9 @@
                 <a:solidFill>
                   <a:srgbClr val="F0F0F0"/>
                 </a:solidFill>
-                <a:latin typeface="Arial" panose="020B0604020202090204" pitchFamily="34" charset="0"/>
-                <a:ea typeface="Arial" panose="020B0604020202090204" pitchFamily="34" charset="-122"/>
-                <a:cs typeface="Arial" panose="020B0604020202090204" pitchFamily="34" charset="-120"/>
+                <a:latin typeface="Arial" pitchFamily="34" charset="0"/>
+                <a:ea typeface="Arial" pitchFamily="34" charset="-122"/>
+                <a:cs typeface="Arial" pitchFamily="34" charset="-120"/>
               </a:rPr>
               <a:t>把项目交给对它感兴趣的人</a:t>
             </a:r>
@@ -3821,7 +3995,7 @@
             <a:prstDash val="solid"/>
           </a:ln>
           <a:effectLst>
-            <a:outerShdw blurRad="88900" dist="25400" dir="5400000" algn="bl" rotWithShape="0">
+            <a:outerShdw sx="100000" sy="100000" kx="0" ky="0" algn="bl" rotWithShape="0" blurRad="88900" dist="25400" dir="5400000">
               <a:srgbClr val="000000">
                 <a:alpha val="30000"/>
               </a:srgbClr>
@@ -3844,12 +4018,13 @@
             <a:avLst/>
           </a:prstGeom>
           <a:noFill/>
-        </p:spPr>
-        <p:txBody>
-          <a:bodyPr wrap="square" lIns="0" tIns="0" rIns="0" bIns="0" rtlCol="0" anchor="ctr"/>
-          <a:lstStyle/>
-          <a:p>
-            <a:pPr marL="0" indent="0" algn="ctr">
+          <a:ln/>
+        </p:spPr>
+        <p:txBody>
+          <a:bodyPr wrap="square" lIns="0" tIns="0" rIns="0" bIns="0" rtlCol="0" anchor="ctr"/>
+          <a:lstStyle/>
+          <a:p>
+            <a:pPr algn="ctr" indent="0" marL="0">
               <a:lnSpc>
                 <a:spcPct val="100000"/>
               </a:lnSpc>
@@ -3860,16 +4035,16 @@
                 <a:solidFill>
                   <a:srgbClr val="D6D6D6"/>
                 </a:solidFill>
-                <a:latin typeface="Arial" panose="020B0604020202090204" pitchFamily="34" charset="0"/>
-                <a:ea typeface="Arial" panose="020B0604020202090204" pitchFamily="34" charset="-122"/>
-                <a:cs typeface="Arial" panose="020B0604020202090204" pitchFamily="34" charset="-120"/>
+                <a:latin typeface="Arial" pitchFamily="34" charset="0"/>
+                <a:ea typeface="Arial" pitchFamily="34" charset="-122"/>
+                <a:cs typeface="Arial" pitchFamily="34" charset="-120"/>
               </a:rPr>
               <a:t>点 Star</a:t>
             </a:r>
             <a:endParaRPr lang="en-US" sz="1200" dirty="0"/>
           </a:p>
           <a:p>
-            <a:pPr marL="0" indent="0" algn="ctr">
+            <a:pPr algn="ctr" indent="0" marL="0">
               <a:lnSpc>
                 <a:spcPct val="100000"/>
               </a:lnSpc>
@@ -3880,9 +4055,9 @@
                 <a:solidFill>
                   <a:srgbClr val="D6D6D6"/>
                 </a:solidFill>
-                <a:latin typeface="Arial" panose="020B0604020202090204" pitchFamily="34" charset="0"/>
-                <a:ea typeface="Arial" panose="020B0604020202090204" pitchFamily="34" charset="-122"/>
-                <a:cs typeface="Arial" panose="020B0604020202090204" pitchFamily="34" charset="-120"/>
+                <a:latin typeface="Arial" pitchFamily="34" charset="0"/>
+                <a:ea typeface="Arial" pitchFamily="34" charset="-122"/>
+                <a:cs typeface="Arial" pitchFamily="34" charset="-120"/>
               </a:rPr>
               <a:t>了解项目</a:t>
             </a:r>
@@ -3905,12 +4080,13 @@
             <a:avLst/>
           </a:prstGeom>
           <a:noFill/>
-        </p:spPr>
-        <p:txBody>
-          <a:bodyPr wrap="square" lIns="0" tIns="0" rIns="0" bIns="0" rtlCol="0" anchor="ctr"/>
-          <a:lstStyle/>
-          <a:p>
-            <a:pPr marL="0" indent="0" algn="ctr">
+          <a:ln/>
+        </p:spPr>
+        <p:txBody>
+          <a:bodyPr wrap="square" lIns="0" tIns="0" rIns="0" bIns="0" rtlCol="0" anchor="ctr"/>
+          <a:lstStyle/>
+          <a:p>
+            <a:pPr algn="ctr" indent="0" marL="0">
               <a:buNone/>
             </a:pPr>
             <a:r>
@@ -3918,9 +4094,9 @@
                 <a:solidFill>
                   <a:srgbClr val="C9A96E"/>
                 </a:solidFill>
-                <a:latin typeface="Arial" panose="020B0604020202090204" pitchFamily="34" charset="0"/>
-                <a:ea typeface="Arial" panose="020B0604020202090204" pitchFamily="34" charset="-122"/>
-                <a:cs typeface="Arial" panose="020B0604020202090204" pitchFamily="34" charset="-120"/>
+                <a:latin typeface="Arial" pitchFamily="34" charset="0"/>
+                <a:ea typeface="Arial" pitchFamily="34" charset="-122"/>
+                <a:cs typeface="Arial" pitchFamily="34" charset="-120"/>
               </a:rPr>
               <a:t>→</a:t>
             </a:r>
@@ -3954,7 +4130,7 @@
             <a:prstDash val="solid"/>
           </a:ln>
           <a:effectLst>
-            <a:outerShdw blurRad="88900" dist="25400" dir="5400000" algn="bl" rotWithShape="0">
+            <a:outerShdw sx="100000" sy="100000" kx="0" ky="0" algn="bl" rotWithShape="0" blurRad="88900" dist="25400" dir="5400000">
               <a:srgbClr val="000000">
                 <a:alpha val="30000"/>
               </a:srgbClr>
@@ -3977,12 +4153,13 @@
             <a:avLst/>
           </a:prstGeom>
           <a:noFill/>
-        </p:spPr>
-        <p:txBody>
-          <a:bodyPr wrap="square" lIns="0" tIns="0" rIns="0" bIns="0" rtlCol="0" anchor="ctr"/>
-          <a:lstStyle/>
-          <a:p>
-            <a:pPr marL="0" indent="0" algn="ctr">
+          <a:ln/>
+        </p:spPr>
+        <p:txBody>
+          <a:bodyPr wrap="square" lIns="0" tIns="0" rIns="0" bIns="0" rtlCol="0" anchor="ctr"/>
+          <a:lstStyle/>
+          <a:p>
+            <a:pPr algn="ctr" indent="0" marL="0">
               <a:lnSpc>
                 <a:spcPct val="100000"/>
               </a:lnSpc>
@@ -3993,16 +4170,16 @@
                 <a:solidFill>
                   <a:srgbClr val="D6D6D6"/>
                 </a:solidFill>
-                <a:latin typeface="Arial" panose="020B0604020202090204" pitchFamily="34" charset="0"/>
-                <a:ea typeface="Arial" panose="020B0604020202090204" pitchFamily="34" charset="-122"/>
-                <a:cs typeface="Arial" panose="020B0604020202090204" pitchFamily="34" charset="-120"/>
+                <a:latin typeface="Arial" pitchFamily="34" charset="0"/>
+                <a:ea typeface="Arial" pitchFamily="34" charset="-122"/>
+                <a:cs typeface="Arial" pitchFamily="34" charset="-120"/>
               </a:rPr>
               <a:t>认领 issue</a:t>
             </a:r>
             <a:endParaRPr lang="en-US" sz="1200" dirty="0"/>
           </a:p>
           <a:p>
-            <a:pPr marL="0" indent="0" algn="ctr">
+            <a:pPr algn="ctr" indent="0" marL="0">
               <a:lnSpc>
                 <a:spcPct val="100000"/>
               </a:lnSpc>
@@ -4013,9 +4190,9 @@
                 <a:solidFill>
                   <a:srgbClr val="D6D6D6"/>
                 </a:solidFill>
-                <a:latin typeface="Arial" panose="020B0604020202090204" pitchFamily="34" charset="0"/>
-                <a:ea typeface="Arial" panose="020B0604020202090204" pitchFamily="34" charset="-122"/>
-                <a:cs typeface="Arial" panose="020B0604020202090204" pitchFamily="34" charset="-120"/>
+                <a:latin typeface="Arial" pitchFamily="34" charset="0"/>
+                <a:ea typeface="Arial" pitchFamily="34" charset="-122"/>
+                <a:cs typeface="Arial" pitchFamily="34" charset="-120"/>
               </a:rPr>
               <a:t>从小处上手</a:t>
             </a:r>
@@ -4038,12 +4215,13 @@
             <a:avLst/>
           </a:prstGeom>
           <a:noFill/>
-        </p:spPr>
-        <p:txBody>
-          <a:bodyPr wrap="square" lIns="0" tIns="0" rIns="0" bIns="0" rtlCol="0" anchor="ctr"/>
-          <a:lstStyle/>
-          <a:p>
-            <a:pPr marL="0" indent="0" algn="ctr">
+          <a:ln/>
+        </p:spPr>
+        <p:txBody>
+          <a:bodyPr wrap="square" lIns="0" tIns="0" rIns="0" bIns="0" rtlCol="0" anchor="ctr"/>
+          <a:lstStyle/>
+          <a:p>
+            <a:pPr algn="ctr" indent="0" marL="0">
               <a:buNone/>
             </a:pPr>
             <a:r>
@@ -4051,9 +4229,9 @@
                 <a:solidFill>
                   <a:srgbClr val="C9A96E"/>
                 </a:solidFill>
-                <a:latin typeface="Arial" panose="020B0604020202090204" pitchFamily="34" charset="0"/>
-                <a:ea typeface="Arial" panose="020B0604020202090204" pitchFamily="34" charset="-122"/>
-                <a:cs typeface="Arial" panose="020B0604020202090204" pitchFamily="34" charset="-120"/>
+                <a:latin typeface="Arial" pitchFamily="34" charset="0"/>
+                <a:ea typeface="Arial" pitchFamily="34" charset="-122"/>
+                <a:cs typeface="Arial" pitchFamily="34" charset="-120"/>
               </a:rPr>
               <a:t>→</a:t>
             </a:r>
@@ -4087,7 +4265,7 @@
             <a:prstDash val="solid"/>
           </a:ln>
           <a:effectLst>
-            <a:outerShdw blurRad="88900" dist="25400" dir="5400000" algn="bl" rotWithShape="0">
+            <a:outerShdw sx="100000" sy="100000" kx="0" ky="0" algn="bl" rotWithShape="0" blurRad="88900" dist="25400" dir="5400000">
               <a:srgbClr val="000000">
                 <a:alpha val="30000"/>
               </a:srgbClr>
@@ -4110,12 +4288,13 @@
             <a:avLst/>
           </a:prstGeom>
           <a:noFill/>
-        </p:spPr>
-        <p:txBody>
-          <a:bodyPr wrap="square" lIns="0" tIns="0" rIns="0" bIns="0" rtlCol="0" anchor="ctr"/>
-          <a:lstStyle/>
-          <a:p>
-            <a:pPr marL="0" indent="0" algn="ctr">
+          <a:ln/>
+        </p:spPr>
+        <p:txBody>
+          <a:bodyPr wrap="square" lIns="0" tIns="0" rIns="0" bIns="0" rtlCol="0" anchor="ctr"/>
+          <a:lstStyle/>
+          <a:p>
+            <a:pPr algn="ctr" indent="0" marL="0">
               <a:lnSpc>
                 <a:spcPct val="100000"/>
               </a:lnSpc>
@@ -4126,16 +4305,16 @@
                 <a:solidFill>
                   <a:srgbClr val="D6D6D6"/>
                 </a:solidFill>
-                <a:latin typeface="Arial" panose="020B0604020202090204" pitchFamily="34" charset="0"/>
-                <a:ea typeface="Arial" panose="020B0604020202090204" pitchFamily="34" charset="-122"/>
-                <a:cs typeface="Arial" panose="020B0604020202090204" pitchFamily="34" charset="-120"/>
+                <a:latin typeface="Arial" pitchFamily="34" charset="0"/>
+                <a:ea typeface="Arial" pitchFamily="34" charset="-122"/>
+                <a:cs typeface="Arial" pitchFamily="34" charset="-120"/>
               </a:rPr>
               <a:t>提第一个 PR</a:t>
             </a:r>
             <a:endParaRPr lang="en-US" sz="1200" dirty="0"/>
           </a:p>
           <a:p>
-            <a:pPr marL="0" indent="0" algn="ctr">
+            <a:pPr algn="ctr" indent="0" marL="0">
               <a:lnSpc>
                 <a:spcPct val="100000"/>
               </a:lnSpc>
@@ -4146,9 +4325,9 @@
                 <a:solidFill>
                   <a:srgbClr val="D6D6D6"/>
                 </a:solidFill>
-                <a:latin typeface="Arial" panose="020B0604020202090204" pitchFamily="34" charset="0"/>
-                <a:ea typeface="Arial" panose="020B0604020202090204" pitchFamily="34" charset="-122"/>
-                <a:cs typeface="Arial" panose="020B0604020202090204" pitchFamily="34" charset="-120"/>
+                <a:latin typeface="Arial" pitchFamily="34" charset="0"/>
+                <a:ea typeface="Arial" pitchFamily="34" charset="-122"/>
+                <a:cs typeface="Arial" pitchFamily="34" charset="-120"/>
               </a:rPr>
               <a:t>经 review 合并</a:t>
             </a:r>
@@ -4171,12 +4350,13 @@
             <a:avLst/>
           </a:prstGeom>
           <a:noFill/>
-        </p:spPr>
-        <p:txBody>
-          <a:bodyPr wrap="square" lIns="0" tIns="0" rIns="0" bIns="0" rtlCol="0" anchor="ctr"/>
-          <a:lstStyle/>
-          <a:p>
-            <a:pPr marL="0" indent="0" algn="ctr">
+          <a:ln/>
+        </p:spPr>
+        <p:txBody>
+          <a:bodyPr wrap="square" lIns="0" tIns="0" rIns="0" bIns="0" rtlCol="0" anchor="ctr"/>
+          <a:lstStyle/>
+          <a:p>
+            <a:pPr algn="ctr" indent="0" marL="0">
               <a:buNone/>
             </a:pPr>
             <a:r>
@@ -4184,9 +4364,9 @@
                 <a:solidFill>
                   <a:srgbClr val="C9A96E"/>
                 </a:solidFill>
-                <a:latin typeface="Arial" panose="020B0604020202090204" pitchFamily="34" charset="0"/>
-                <a:ea typeface="Arial" panose="020B0604020202090204" pitchFamily="34" charset="-122"/>
-                <a:cs typeface="Arial" panose="020B0604020202090204" pitchFamily="34" charset="-120"/>
+                <a:latin typeface="Arial" pitchFamily="34" charset="0"/>
+                <a:ea typeface="Arial" pitchFamily="34" charset="-122"/>
+                <a:cs typeface="Arial" pitchFamily="34" charset="-120"/>
               </a:rPr>
               <a:t>→</a:t>
             </a:r>
@@ -4220,7 +4400,7 @@
             <a:prstDash val="solid"/>
           </a:ln>
           <a:effectLst>
-            <a:outerShdw blurRad="88900" dist="25400" dir="5400000" algn="bl" rotWithShape="0">
+            <a:outerShdw sx="100000" sy="100000" kx="0" ky="0" algn="bl" rotWithShape="0" blurRad="88900" dist="25400" dir="5400000">
               <a:srgbClr val="000000">
                 <a:alpha val="30000"/>
               </a:srgbClr>
@@ -4243,12 +4423,13 @@
             <a:avLst/>
           </a:prstGeom>
           <a:noFill/>
-        </p:spPr>
-        <p:txBody>
-          <a:bodyPr wrap="square" lIns="0" tIns="0" rIns="0" bIns="0" rtlCol="0" anchor="ctr"/>
-          <a:lstStyle/>
-          <a:p>
-            <a:pPr marL="0" indent="0" algn="ctr">
+          <a:ln/>
+        </p:spPr>
+        <p:txBody>
+          <a:bodyPr wrap="square" lIns="0" tIns="0" rIns="0" bIns="0" rtlCol="0" anchor="ctr"/>
+          <a:lstStyle/>
+          <a:p>
+            <a:pPr algn="ctr" indent="0" marL="0">
               <a:lnSpc>
                 <a:spcPct val="100000"/>
               </a:lnSpc>
@@ -4259,16 +4440,16 @@
                 <a:solidFill>
                   <a:srgbClr val="C9A96E"/>
                 </a:solidFill>
-                <a:latin typeface="Arial" panose="020B0604020202090204" pitchFamily="34" charset="0"/>
-                <a:ea typeface="Arial" panose="020B0604020202090204" pitchFamily="34" charset="-122"/>
-                <a:cs typeface="Arial" panose="020B0604020202090204" pitchFamily="34" charset="-120"/>
+                <a:latin typeface="Arial" pitchFamily="34" charset="0"/>
+                <a:ea typeface="Arial" pitchFamily="34" charset="-122"/>
+                <a:cs typeface="Arial" pitchFamily="34" charset="-120"/>
               </a:rPr>
               <a:t>成为 maintainer</a:t>
             </a:r>
             <a:endParaRPr lang="en-US" sz="1200" dirty="0"/>
           </a:p>
           <a:p>
-            <a:pPr marL="0" indent="0" algn="ctr">
+            <a:pPr algn="ctr" indent="0" marL="0">
               <a:lnSpc>
                 <a:spcPct val="100000"/>
               </a:lnSpc>
@@ -4279,9 +4460,9 @@
                 <a:solidFill>
                   <a:srgbClr val="C9A96E"/>
                 </a:solidFill>
-                <a:latin typeface="Arial" panose="020B0604020202090204" pitchFamily="34" charset="0"/>
-                <a:ea typeface="Arial" panose="020B0604020202090204" pitchFamily="34" charset="-122"/>
-                <a:cs typeface="Arial" panose="020B0604020202090204" pitchFamily="34" charset="-120"/>
+                <a:latin typeface="Arial" pitchFamily="34" charset="0"/>
+                <a:ea typeface="Arial" pitchFamily="34" charset="-122"/>
+                <a:cs typeface="Arial" pitchFamily="34" charset="-120"/>
               </a:rPr>
               <a:t>主导一块</a:t>
             </a:r>
@@ -4306,6 +4487,7 @@
           <a:solidFill>
             <a:srgbClr val="C9A96E"/>
           </a:solidFill>
+          <a:ln/>
         </p:spPr>
       </p:sp>
       <p:sp>
@@ -4323,12 +4505,13 @@
             <a:avLst/>
           </a:prstGeom>
           <a:noFill/>
+          <a:ln/>
         </p:spPr>
         <p:txBody>
           <a:bodyPr wrap="square" lIns="0" tIns="0" rIns="0" bIns="0" rtlCol="0" anchor="t"/>
           <a:lstStyle/>
           <a:p>
-            <a:pPr marL="0" indent="0">
+            <a:pPr indent="0" marL="0">
               <a:lnSpc>
                 <a:spcPct val="108000"/>
               </a:lnSpc>
@@ -4339,9 +4522,9 @@
                 <a:solidFill>
                   <a:srgbClr val="D6D6D6"/>
                 </a:solidFill>
-                <a:latin typeface="Arial" panose="020B0604020202090204" pitchFamily="34" charset="0"/>
-                <a:ea typeface="Arial" panose="020B0604020202090204" pitchFamily="34" charset="-122"/>
-                <a:cs typeface="Arial" panose="020B0604020202090204" pitchFamily="34" charset="-120"/>
+                <a:latin typeface="Arial" pitchFamily="34" charset="0"/>
+                <a:ea typeface="Arial" pitchFamily="34" charset="-122"/>
+                <a:cs typeface="Arial" pitchFamily="34" charset="-120"/>
               </a:rPr>
               <a:t>核心是社区建设：找到真正对项目感兴趣的人，把它持续推动下去。</a:t>
             </a:r>
@@ -4366,6 +4549,7 @@
           <a:solidFill>
             <a:srgbClr val="C9A96E"/>
           </a:solidFill>
+          <a:ln/>
         </p:spPr>
       </p:sp>
       <p:sp>
@@ -4383,12 +4567,13 @@
             <a:avLst/>
           </a:prstGeom>
           <a:noFill/>
+          <a:ln/>
         </p:spPr>
         <p:txBody>
           <a:bodyPr wrap="square" lIns="0" tIns="0" rIns="0" bIns="0" rtlCol="0" anchor="t"/>
           <a:lstStyle/>
           <a:p>
-            <a:pPr marL="0" indent="0">
+            <a:pPr indent="0" marL="0">
               <a:lnSpc>
                 <a:spcPct val="108000"/>
               </a:lnSpc>
@@ -4399,9 +4584,9 @@
                 <a:solidFill>
                   <a:srgbClr val="D6D6D6"/>
                 </a:solidFill>
-                <a:latin typeface="Arial" panose="020B0604020202090204" pitchFamily="34" charset="0"/>
-                <a:ea typeface="Arial" panose="020B0604020202090204" pitchFamily="34" charset="-122"/>
-                <a:cs typeface="Arial" panose="020B0604020202090204" pitchFamily="34" charset="-120"/>
+                <a:latin typeface="Arial" pitchFamily="34" charset="0"/>
+                <a:ea typeface="Arial" pitchFamily="34" charset="-122"/>
+                <a:cs typeface="Arial" pitchFamily="34" charset="-120"/>
               </a:rPr>
               <a:t>我也会持续参与推动——不是做完就散，而是让 When 长期活着、被引用。</a:t>
             </a:r>
@@ -4451,12 +4636,13 @@
             <a:avLst/>
           </a:prstGeom>
           <a:noFill/>
-        </p:spPr>
-        <p:txBody>
-          <a:bodyPr wrap="square" lIns="0" tIns="0" rIns="0" bIns="0" rtlCol="0" anchor="ctr"/>
-          <a:lstStyle/>
-          <a:p>
-            <a:pPr marL="0" indent="0">
+          <a:ln/>
+        </p:spPr>
+        <p:txBody>
+          <a:bodyPr wrap="square" lIns="0" tIns="0" rIns="0" bIns="0" rtlCol="0" anchor="ctr"/>
+          <a:lstStyle/>
+          <a:p>
+            <a:pPr indent="0" marL="0">
               <a:lnSpc>
                 <a:spcPct val="106000"/>
               </a:lnSpc>
@@ -4467,20 +4653,26 @@
                 <a:solidFill>
                   <a:srgbClr val="C9A96E"/>
                 </a:solidFill>
-                <a:latin typeface="Arial" panose="020B0604020202090204" pitchFamily="34" charset="0"/>
-                <a:ea typeface="Arial" panose="020B0604020202090204" pitchFamily="34" charset="-122"/>
-                <a:cs typeface="Arial" panose="020B0604020202090204" pitchFamily="34" charset="-120"/>
+                <a:latin typeface="Arial" pitchFamily="34" charset="0"/>
+                <a:ea typeface="Arial" pitchFamily="34" charset="-122"/>
+                <a:cs typeface="Arial" pitchFamily="34" charset="-120"/>
               </a:rPr>
               <a:t>欢迎：</a:t>
             </a:r>
+            <a:pPr indent="0" marL="0">
+              <a:lnSpc>
+                <a:spcPct val="106000"/>
+              </a:lnSpc>
+              <a:buNone/>
+            </a:pPr>
             <a:r>
               <a:rPr lang="en-US" sz="1250" dirty="0">
                 <a:solidFill>
                   <a:srgbClr val="F0F0F0"/>
                 </a:solidFill>
-                <a:latin typeface="Arial" panose="020B0604020202090204" pitchFamily="34" charset="0"/>
-                <a:ea typeface="Arial" panose="020B0604020202090204" pitchFamily="34" charset="-122"/>
-                <a:cs typeface="Arial" panose="020B0604020202090204" pitchFamily="34" charset="-120"/>
+                <a:latin typeface="Arial" pitchFamily="34" charset="0"/>
+                <a:ea typeface="Arial" pitchFamily="34" charset="-122"/>
+                <a:cs typeface="Arial" pitchFamily="34" charset="-120"/>
               </a:rPr>
               <a:t>GitHub 仓库 Star / Issue / PR（占位：github.com/…）· 交流群（占位）。</a:t>
             </a:r>
@@ -4498,13 +4690,12 @@
 
 <file path=ppt/slides/slide13.xml><?xml version="1.0" encoding="utf-8"?>
 <p:sld xmlns:a="http://schemas.openxmlformats.org/drawingml/2006/main" xmlns:r="http://schemas.openxmlformats.org/officeDocument/2006/relationships" xmlns:p="http://schemas.openxmlformats.org/presentationml/2006/main">
-  <p:cSld>
+  <p:cSld name="Slide 13">
     <p:bg>
       <p:bgPr>
         <a:solidFill>
           <a:srgbClr val="1E1E1E"/>
         </a:solidFill>
-        <a:effectLst/>
       </p:bgPr>
     </p:bg>
     <p:spTree>
@@ -4536,12 +4727,13 @@
             <a:avLst/>
           </a:prstGeom>
           <a:noFill/>
-        </p:spPr>
-        <p:txBody>
-          <a:bodyPr wrap="square" lIns="0" tIns="0" rIns="0" bIns="0" rtlCol="0" anchor="ctr"/>
-          <a:lstStyle/>
-          <a:p>
-            <a:pPr marL="0" indent="0">
+          <a:ln/>
+        </p:spPr>
+        <p:txBody>
+          <a:bodyPr wrap="square" lIns="0" tIns="0" rIns="0" bIns="0" rtlCol="0" anchor="ctr"/>
+          <a:lstStyle/>
+          <a:p>
+            <a:pPr indent="0" marL="0">
               <a:buNone/>
             </a:pPr>
             <a:r>
@@ -4549,9 +4741,9 @@
                 <a:solidFill>
                   <a:srgbClr val="6E6E6E"/>
                 </a:solidFill>
-                <a:latin typeface="Arial" panose="020B0604020202090204" pitchFamily="34" charset="0"/>
-                <a:ea typeface="Arial" panose="020B0604020202090204" pitchFamily="34" charset="-122"/>
-                <a:cs typeface="Arial" panose="020B0604020202090204" pitchFamily="34" charset="-120"/>
+                <a:latin typeface="Arial" pitchFamily="34" charset="0"/>
+                <a:ea typeface="Arial" pitchFamily="34" charset="-122"/>
+                <a:cs typeface="Arial" pitchFamily="34" charset="-120"/>
               </a:rPr>
               <a:t>第 54 节 · When 项目总结与后续规划</a:t>
             </a:r>
@@ -4574,12 +4766,13 @@
             <a:avLst/>
           </a:prstGeom>
           <a:noFill/>
-        </p:spPr>
-        <p:txBody>
-          <a:bodyPr wrap="square" lIns="0" tIns="0" rIns="0" bIns="0" rtlCol="0" anchor="ctr"/>
-          <a:lstStyle/>
-          <a:p>
-            <a:pPr marL="0" indent="0" algn="r">
+          <a:ln/>
+        </p:spPr>
+        <p:txBody>
+          <a:bodyPr wrap="square" lIns="0" tIns="0" rIns="0" bIns="0" rtlCol="0" anchor="ctr"/>
+          <a:lstStyle/>
+          <a:p>
+            <a:pPr algn="r" indent="0" marL="0">
               <a:buNone/>
             </a:pPr>
             <a:r>
@@ -4587,9 +4780,9 @@
                 <a:solidFill>
                   <a:srgbClr val="6E6E6E"/>
                 </a:solidFill>
-                <a:latin typeface="Arial" panose="020B0604020202090204" pitchFamily="34" charset="0"/>
-                <a:ea typeface="Arial" panose="020B0604020202090204" pitchFamily="34" charset="-122"/>
-                <a:cs typeface="Arial" panose="020B0604020202090204" pitchFamily="34" charset="-120"/>
+                <a:latin typeface="Arial" pitchFamily="34" charset="0"/>
+                <a:ea typeface="Arial" pitchFamily="34" charset="-122"/>
+                <a:cs typeface="Arial" pitchFamily="34" charset="-120"/>
               </a:rPr>
               <a:t>13 / 14</a:t>
             </a:r>
@@ -4636,22 +4829,23 @@
             <a:avLst/>
           </a:prstGeom>
           <a:noFill/>
-        </p:spPr>
-        <p:txBody>
-          <a:bodyPr wrap="square" lIns="0" tIns="0" rIns="0" bIns="0" rtlCol="0" anchor="ctr"/>
-          <a:lstStyle/>
-          <a:p>
-            <a:pPr marL="0" indent="0" algn="ctr">
-              <a:buNone/>
-            </a:pPr>
-            <a:r>
-              <a:rPr lang="en-US" sz="1050" b="1" kern="0" spc="100" dirty="0">
+          <a:ln/>
+        </p:spPr>
+        <p:txBody>
+          <a:bodyPr wrap="square" lIns="0" tIns="0" rIns="0" bIns="0" rtlCol="0" anchor="ctr"/>
+          <a:lstStyle/>
+          <a:p>
+            <a:pPr algn="ctr" indent="0" marL="0">
+              <a:buNone/>
+            </a:pPr>
+            <a:r>
+              <a:rPr lang="en-US" sz="1050" b="1" spc="100" kern="0" dirty="0">
                 <a:solidFill>
                   <a:srgbClr val="C9A96E"/>
                 </a:solidFill>
-                <a:latin typeface="Arial" panose="020B0604020202090204" pitchFamily="34" charset="0"/>
-                <a:ea typeface="Arial" panose="020B0604020202090204" pitchFamily="34" charset="-122"/>
-                <a:cs typeface="Arial" panose="020B0604020202090204" pitchFamily="34" charset="-120"/>
+                <a:latin typeface="Arial" pitchFamily="34" charset="0"/>
+                <a:ea typeface="Arial" pitchFamily="34" charset="-122"/>
+                <a:cs typeface="Arial" pitchFamily="34" charset="-120"/>
               </a:rPr>
               <a:t>收束</a:t>
             </a:r>
@@ -4674,12 +4868,13 @@
             <a:avLst/>
           </a:prstGeom>
           <a:noFill/>
-        </p:spPr>
-        <p:txBody>
-          <a:bodyPr wrap="square" lIns="0" tIns="0" rIns="0" bIns="0" rtlCol="0" anchor="ctr"/>
-          <a:lstStyle/>
-          <a:p>
-            <a:pPr marL="0" indent="0">
+          <a:ln/>
+        </p:spPr>
+        <p:txBody>
+          <a:bodyPr wrap="square" lIns="0" tIns="0" rIns="0" bIns="0" rtlCol="0" anchor="ctr"/>
+          <a:lstStyle/>
+          <a:p>
+            <a:pPr indent="0" marL="0">
               <a:buNone/>
             </a:pPr>
             <a:r>
@@ -4687,9 +4882,9 @@
                 <a:solidFill>
                   <a:srgbClr val="F0F0F0"/>
                 </a:solidFill>
-                <a:latin typeface="Arial" panose="020B0604020202090204" pitchFamily="34" charset="0"/>
-                <a:ea typeface="Arial" panose="020B0604020202090204" pitchFamily="34" charset="-122"/>
-                <a:cs typeface="Arial" panose="020B0604020202090204" pitchFamily="34" charset="-120"/>
+                <a:latin typeface="Arial" pitchFamily="34" charset="0"/>
+                <a:ea typeface="Arial" pitchFamily="34" charset="-122"/>
+                <a:cs typeface="Arial" pitchFamily="34" charset="-120"/>
               </a:rPr>
               <a:t>从一份技术方案，到一个能用的组件</a:t>
             </a:r>
@@ -4714,6 +4909,7 @@
           <a:solidFill>
             <a:srgbClr val="C9A96E"/>
           </a:solidFill>
+          <a:ln/>
         </p:spPr>
       </p:sp>
       <p:sp>
@@ -4731,12 +4927,13 @@
             <a:avLst/>
           </a:prstGeom>
           <a:noFill/>
+          <a:ln/>
         </p:spPr>
         <p:txBody>
           <a:bodyPr wrap="square" lIns="0" tIns="0" rIns="0" bIns="0" rtlCol="0" anchor="t"/>
           <a:lstStyle/>
           <a:p>
-            <a:pPr marL="0" indent="0">
+            <a:pPr indent="0" marL="0">
               <a:lnSpc>
                 <a:spcPct val="108000"/>
               </a:lnSpc>
@@ -4747,9 +4944,9 @@
                 <a:solidFill>
                   <a:srgbClr val="D6D6D6"/>
                 </a:solidFill>
-                <a:latin typeface="Arial" panose="020B0604020202090204" pitchFamily="34" charset="0"/>
-                <a:ea typeface="Arial" panose="020B0604020202090204" pitchFamily="34" charset="-122"/>
-                <a:cs typeface="Arial" panose="020B0604020202090204" pitchFamily="34" charset="-120"/>
+                <a:latin typeface="Arial" pitchFamily="34" charset="0"/>
+                <a:ea typeface="Arial" pitchFamily="34" charset="-122"/>
+                <a:cs typeface="Arial" pitchFamily="34" charset="-120"/>
               </a:rPr>
               <a:t>When：一个生产可用的分布式延时投递组件——集群、多副本、自动故障切换、不丢消息。</a:t>
             </a:r>
@@ -4774,6 +4971,7 @@
           <a:solidFill>
             <a:srgbClr val="C9A96E"/>
           </a:solidFill>
+          <a:ln/>
         </p:spPr>
       </p:sp>
       <p:sp>
@@ -4791,12 +4989,13 @@
             <a:avLst/>
           </a:prstGeom>
           <a:noFill/>
+          <a:ln/>
         </p:spPr>
         <p:txBody>
           <a:bodyPr wrap="square" lIns="0" tIns="0" rIns="0" bIns="0" rtlCol="0" anchor="t"/>
           <a:lstStyle/>
           <a:p>
-            <a:pPr marL="0" indent="0">
+            <a:pPr indent="0" marL="0">
               <a:lnSpc>
                 <a:spcPct val="108000"/>
               </a:lnSpc>
@@ -4807,9 +5006,9 @@
                 <a:solidFill>
                   <a:srgbClr val="D6D6D6"/>
                 </a:solidFill>
-                <a:latin typeface="Arial" panose="020B0604020202090204" pitchFamily="34" charset="0"/>
-                <a:ea typeface="Arial" panose="020B0604020202090204" pitchFamily="34" charset="-122"/>
-                <a:cs typeface="Arial" panose="020B0604020202090204" pitchFamily="34" charset="-120"/>
+                <a:latin typeface="Arial" pitchFamily="34" charset="0"/>
+                <a:ea typeface="Arial" pitchFamily="34" charset="-122"/>
+                <a:cs typeface="Arial" pitchFamily="34" charset="-120"/>
               </a:rPr>
               <a:t>怎么做的：底座定契约 → 逐节产出可验证原料 → 两次跑，循环自主实现、人在高风险点把关。</a:t>
             </a:r>
@@ -4834,6 +5033,7 @@
           <a:solidFill>
             <a:srgbClr val="C9A96E"/>
           </a:solidFill>
+          <a:ln/>
         </p:spPr>
       </p:sp>
       <p:sp>
@@ -4851,12 +5051,13 @@
             <a:avLst/>
           </a:prstGeom>
           <a:noFill/>
+          <a:ln/>
         </p:spPr>
         <p:txBody>
           <a:bodyPr wrap="square" lIns="0" tIns="0" rIns="0" bIns="0" rtlCol="0" anchor="t"/>
           <a:lstStyle/>
           <a:p>
-            <a:pPr marL="0" indent="0">
+            <a:pPr indent="0" marL="0">
               <a:lnSpc>
                 <a:spcPct val="108000"/>
               </a:lnSpc>
@@ -4867,9 +5068,9 @@
                 <a:solidFill>
                   <a:srgbClr val="D6D6D6"/>
                 </a:solidFill>
-                <a:latin typeface="Arial" panose="020B0604020202090204" pitchFamily="34" charset="0"/>
-                <a:ea typeface="Arial" panose="020B0604020202090204" pitchFamily="34" charset="-122"/>
-                <a:cs typeface="Arial" panose="020B0604020202090204" pitchFamily="34" charset="-120"/>
+                <a:latin typeface="Arial" pitchFamily="34" charset="0"/>
+                <a:ea typeface="Arial" pitchFamily="34" charset="-122"/>
+                <a:cs typeface="Arial" pitchFamily="34" charset="-120"/>
               </a:rPr>
               <a:t>真正学到的：用 AI 编程做企业级项目的方法——设计循环、设计判官，而 Loop 最重要的永远是 Harness。</a:t>
             </a:r>
@@ -4919,12 +5120,13 @@
             <a:avLst/>
           </a:prstGeom>
           <a:noFill/>
-        </p:spPr>
-        <p:txBody>
-          <a:bodyPr wrap="square" lIns="0" tIns="0" rIns="0" bIns="0" rtlCol="0" anchor="ctr"/>
-          <a:lstStyle/>
-          <a:p>
-            <a:pPr marL="0" indent="0">
+          <a:ln/>
+        </p:spPr>
+        <p:txBody>
+          <a:bodyPr wrap="square" lIns="0" tIns="0" rIns="0" bIns="0" rtlCol="0" anchor="ctr"/>
+          <a:lstStyle/>
+          <a:p>
+            <a:pPr indent="0" marL="0">
               <a:lnSpc>
                 <a:spcPct val="106000"/>
               </a:lnSpc>
@@ -4935,20 +5137,26 @@
                 <a:solidFill>
                   <a:srgbClr val="C9A96E"/>
                 </a:solidFill>
-                <a:latin typeface="Arial" panose="020B0604020202090204" pitchFamily="34" charset="0"/>
-                <a:ea typeface="Arial" panose="020B0604020202090204" pitchFamily="34" charset="-122"/>
-                <a:cs typeface="Arial" panose="020B0604020202090204" pitchFamily="34" charset="-120"/>
+                <a:latin typeface="Arial" pitchFamily="34" charset="0"/>
+                <a:ea typeface="Arial" pitchFamily="34" charset="-122"/>
+                <a:cs typeface="Arial" pitchFamily="34" charset="-120"/>
               </a:rPr>
               <a:t>一句话收口：</a:t>
             </a:r>
+            <a:pPr indent="0" marL="0">
+              <a:lnSpc>
+                <a:spcPct val="106000"/>
+              </a:lnSpc>
+              <a:buNone/>
+            </a:pPr>
             <a:r>
               <a:rPr lang="en-US" sz="1250" dirty="0">
                 <a:solidFill>
                   <a:srgbClr val="F0F0F0"/>
                 </a:solidFill>
-                <a:latin typeface="Arial" panose="020B0604020202090204" pitchFamily="34" charset="0"/>
-                <a:ea typeface="Arial" panose="020B0604020202090204" pitchFamily="34" charset="-122"/>
-                <a:cs typeface="Arial" panose="020B0604020202090204" pitchFamily="34" charset="-120"/>
+                <a:latin typeface="Arial" pitchFamily="34" charset="0"/>
+                <a:ea typeface="Arial" pitchFamily="34" charset="-122"/>
+                <a:cs typeface="Arial" pitchFamily="34" charset="-120"/>
               </a:rPr>
               <a:t>可验证的交给循环，判断留给人；When 是样本，方法才是带得走的东西。</a:t>
             </a:r>
@@ -4966,13 +5174,12 @@
 
 <file path=ppt/slides/slide14.xml><?xml version="1.0" encoding="utf-8"?>
 <p:sld xmlns:a="http://schemas.openxmlformats.org/drawingml/2006/main" xmlns:r="http://schemas.openxmlformats.org/officeDocument/2006/relationships" xmlns:p="http://schemas.openxmlformats.org/presentationml/2006/main">
-  <p:cSld>
+  <p:cSld name="Slide 14">
     <p:bg>
       <p:bgPr>
         <a:solidFill>
           <a:srgbClr val="1E1E1E"/>
         </a:solidFill>
-        <a:effectLst/>
       </p:bgPr>
     </p:bg>
     <p:spTree>
@@ -5004,12 +5211,13 @@
             <a:avLst/>
           </a:prstGeom>
           <a:noFill/>
-        </p:spPr>
-        <p:txBody>
-          <a:bodyPr wrap="square" lIns="0" tIns="0" rIns="0" bIns="0" rtlCol="0" anchor="ctr"/>
-          <a:lstStyle/>
-          <a:p>
-            <a:pPr marL="0" indent="0" algn="ctr">
+          <a:ln/>
+        </p:spPr>
+        <p:txBody>
+          <a:bodyPr wrap="square" lIns="0" tIns="0" rIns="0" bIns="0" rtlCol="0" anchor="ctr"/>
+          <a:lstStyle/>
+          <a:p>
+            <a:pPr algn="ctr" indent="0" marL="0">
               <a:buNone/>
             </a:pPr>
             <a:r>
@@ -5017,9 +5225,9 @@
                 <a:solidFill>
                   <a:srgbClr val="F0F0F0"/>
                 </a:solidFill>
-                <a:latin typeface="Arial" panose="020B0604020202090204" pitchFamily="34" charset="0"/>
-                <a:ea typeface="Arial" panose="020B0604020202090204" pitchFamily="34" charset="-122"/>
-                <a:cs typeface="Arial" panose="020B0604020202090204" pitchFamily="34" charset="-120"/>
+                <a:latin typeface="Arial" pitchFamily="34" charset="0"/>
+                <a:ea typeface="Arial" pitchFamily="34" charset="-122"/>
+                <a:cs typeface="Arial" pitchFamily="34" charset="-120"/>
               </a:rPr>
               <a:t>谢谢</a:t>
             </a:r>
@@ -5042,12 +5250,13 @@
             <a:avLst/>
           </a:prstGeom>
           <a:noFill/>
-        </p:spPr>
-        <p:txBody>
-          <a:bodyPr wrap="square" lIns="0" tIns="0" rIns="0" bIns="0" rtlCol="0" anchor="ctr"/>
-          <a:lstStyle/>
-          <a:p>
-            <a:pPr marL="0" indent="0" algn="ctr">
+          <a:ln/>
+        </p:spPr>
+        <p:txBody>
+          <a:bodyPr wrap="square" lIns="0" tIns="0" rIns="0" bIns="0" rtlCol="0" anchor="ctr"/>
+          <a:lstStyle/>
+          <a:p>
+            <a:pPr algn="ctr" indent="0" marL="0">
               <a:buNone/>
             </a:pPr>
             <a:r>
@@ -5055,9 +5264,9 @@
                 <a:solidFill>
                   <a:srgbClr val="C9A96E"/>
                 </a:solidFill>
-                <a:latin typeface="Arial" panose="020B0604020202090204" pitchFamily="34" charset="0"/>
-                <a:ea typeface="Arial" panose="020B0604020202090204" pitchFamily="34" charset="-122"/>
-                <a:cs typeface="Arial" panose="020B0604020202090204" pitchFamily="34" charset="-120"/>
+                <a:latin typeface="Arial" pitchFamily="34" charset="0"/>
+                <a:ea typeface="Arial" pitchFamily="34" charset="-122"/>
+                <a:cs typeface="Arial" pitchFamily="34" charset="-120"/>
               </a:rPr>
               <a:t>When 交给社区，方法带回你的项目</a:t>
             </a:r>
@@ -5080,12 +5289,13 @@
             <a:avLst/>
           </a:prstGeom>
           <a:noFill/>
-        </p:spPr>
-        <p:txBody>
-          <a:bodyPr wrap="square" lIns="0" tIns="0" rIns="0" bIns="0" rtlCol="0" anchor="ctr"/>
-          <a:lstStyle/>
-          <a:p>
-            <a:pPr marL="0" indent="0" algn="ctr">
+          <a:ln/>
+        </p:spPr>
+        <p:txBody>
+          <a:bodyPr wrap="square" lIns="0" tIns="0" rIns="0" bIns="0" rtlCol="0" anchor="ctr"/>
+          <a:lstStyle/>
+          <a:p>
+            <a:pPr algn="ctr" indent="0" marL="0">
               <a:buNone/>
             </a:pPr>
             <a:r>
@@ -5093,9 +5303,9 @@
                 <a:solidFill>
                   <a:srgbClr val="9A9A9A"/>
                 </a:solidFill>
-                <a:latin typeface="Arial" panose="020B0604020202090204" pitchFamily="34" charset="0"/>
-                <a:ea typeface="Arial" panose="020B0604020202090204" pitchFamily="34" charset="-122"/>
-                <a:cs typeface="Arial" panose="020B0604020202090204" pitchFamily="34" charset="-120"/>
+                <a:latin typeface="Arial" pitchFamily="34" charset="0"/>
+                <a:ea typeface="Arial" pitchFamily="34" charset="-122"/>
+                <a:cs typeface="Arial" pitchFamily="34" charset="-120"/>
               </a:rPr>
               <a:t>GitHub（占位）　·　交流群（占位）　·　欢迎认领 issue、提 PR</a:t>
             </a:r>
@@ -5113,13 +5323,12 @@
 
 <file path=ppt/slides/slide2.xml><?xml version="1.0" encoding="utf-8"?>
 <p:sld xmlns:a="http://schemas.openxmlformats.org/drawingml/2006/main" xmlns:r="http://schemas.openxmlformats.org/officeDocument/2006/relationships" xmlns:p="http://schemas.openxmlformats.org/presentationml/2006/main">
-  <p:cSld>
+  <p:cSld name="Slide 2">
     <p:bg>
       <p:bgPr>
         <a:solidFill>
           <a:srgbClr val="1E1E1E"/>
         </a:solidFill>
-        <a:effectLst/>
       </p:bgPr>
     </p:bg>
     <p:spTree>
@@ -5151,12 +5360,13 @@
             <a:avLst/>
           </a:prstGeom>
           <a:noFill/>
-        </p:spPr>
-        <p:txBody>
-          <a:bodyPr wrap="square" lIns="0" tIns="0" rIns="0" bIns="0" rtlCol="0" anchor="ctr"/>
-          <a:lstStyle/>
-          <a:p>
-            <a:pPr marL="0" indent="0">
+          <a:ln/>
+        </p:spPr>
+        <p:txBody>
+          <a:bodyPr wrap="square" lIns="0" tIns="0" rIns="0" bIns="0" rtlCol="0" anchor="ctr"/>
+          <a:lstStyle/>
+          <a:p>
+            <a:pPr indent="0" marL="0">
               <a:buNone/>
             </a:pPr>
             <a:r>
@@ -5164,9 +5374,9 @@
                 <a:solidFill>
                   <a:srgbClr val="6E6E6E"/>
                 </a:solidFill>
-                <a:latin typeface="Arial" panose="020B0604020202090204" pitchFamily="34" charset="0"/>
-                <a:ea typeface="Arial" panose="020B0604020202090204" pitchFamily="34" charset="-122"/>
-                <a:cs typeface="Arial" panose="020B0604020202090204" pitchFamily="34" charset="-120"/>
+                <a:latin typeface="Arial" pitchFamily="34" charset="0"/>
+                <a:ea typeface="Arial" pitchFamily="34" charset="-122"/>
+                <a:cs typeface="Arial" pitchFamily="34" charset="-120"/>
               </a:rPr>
               <a:t>第 54 节 · When 项目总结与后续规划</a:t>
             </a:r>
@@ -5189,12 +5399,13 @@
             <a:avLst/>
           </a:prstGeom>
           <a:noFill/>
-        </p:spPr>
-        <p:txBody>
-          <a:bodyPr wrap="square" lIns="0" tIns="0" rIns="0" bIns="0" rtlCol="0" anchor="ctr"/>
-          <a:lstStyle/>
-          <a:p>
-            <a:pPr marL="0" indent="0" algn="r">
+          <a:ln/>
+        </p:spPr>
+        <p:txBody>
+          <a:bodyPr wrap="square" lIns="0" tIns="0" rIns="0" bIns="0" rtlCol="0" anchor="ctr"/>
+          <a:lstStyle/>
+          <a:p>
+            <a:pPr algn="r" indent="0" marL="0">
               <a:buNone/>
             </a:pPr>
             <a:r>
@@ -5202,9 +5413,9 @@
                 <a:solidFill>
                   <a:srgbClr val="6E6E6E"/>
                 </a:solidFill>
-                <a:latin typeface="Arial" panose="020B0604020202090204" pitchFamily="34" charset="0"/>
-                <a:ea typeface="Arial" panose="020B0604020202090204" pitchFamily="34" charset="-122"/>
-                <a:cs typeface="Arial" panose="020B0604020202090204" pitchFamily="34" charset="-120"/>
+                <a:latin typeface="Arial" pitchFamily="34" charset="0"/>
+                <a:ea typeface="Arial" pitchFamily="34" charset="-122"/>
+                <a:cs typeface="Arial" pitchFamily="34" charset="-120"/>
               </a:rPr>
               <a:t>2 / 14</a:t>
             </a:r>
@@ -5251,22 +5462,23 @@
             <a:avLst/>
           </a:prstGeom>
           <a:noFill/>
-        </p:spPr>
-        <p:txBody>
-          <a:bodyPr wrap="square" lIns="0" tIns="0" rIns="0" bIns="0" rtlCol="0" anchor="ctr"/>
-          <a:lstStyle/>
-          <a:p>
-            <a:pPr marL="0" indent="0" algn="ctr">
-              <a:buNone/>
-            </a:pPr>
-            <a:r>
-              <a:rPr lang="en-US" sz="1050" b="1" kern="0" spc="100" dirty="0">
+          <a:ln/>
+        </p:spPr>
+        <p:txBody>
+          <a:bodyPr wrap="square" lIns="0" tIns="0" rIns="0" bIns="0" rtlCol="0" anchor="ctr"/>
+          <a:lstStyle/>
+          <a:p>
+            <a:pPr algn="ctr" indent="0" marL="0">
+              <a:buNone/>
+            </a:pPr>
+            <a:r>
+              <a:rPr lang="en-US" sz="1050" b="1" spc="100" kern="0" dirty="0">
                 <a:solidFill>
                   <a:srgbClr val="C9A96E"/>
                 </a:solidFill>
-                <a:latin typeface="Arial" panose="020B0604020202090204" pitchFamily="34" charset="0"/>
-                <a:ea typeface="Arial" panose="020B0604020202090204" pitchFamily="34" charset="-122"/>
-                <a:cs typeface="Arial" panose="020B0604020202090204" pitchFamily="34" charset="-120"/>
+                <a:latin typeface="Arial" pitchFamily="34" charset="0"/>
+                <a:ea typeface="Arial" pitchFamily="34" charset="-122"/>
+                <a:cs typeface="Arial" pitchFamily="34" charset="-120"/>
               </a:rPr>
               <a:t>做成了什么</a:t>
             </a:r>
@@ -5289,12 +5501,13 @@
             <a:avLst/>
           </a:prstGeom>
           <a:noFill/>
-        </p:spPr>
-        <p:txBody>
-          <a:bodyPr wrap="square" lIns="0" tIns="0" rIns="0" bIns="0" rtlCol="0" anchor="ctr"/>
-          <a:lstStyle/>
-          <a:p>
-            <a:pPr marL="0" indent="0">
+          <a:ln/>
+        </p:spPr>
+        <p:txBody>
+          <a:bodyPr wrap="square" lIns="0" tIns="0" rIns="0" bIns="0" rtlCol="0" anchor="ctr"/>
+          <a:lstStyle/>
+          <a:p>
+            <a:pPr indent="0" marL="0">
               <a:buNone/>
             </a:pPr>
             <a:r>
@@ -5302,9 +5515,9 @@
                 <a:solidFill>
                   <a:srgbClr val="F0F0F0"/>
                 </a:solidFill>
-                <a:latin typeface="Arial" panose="020B0604020202090204" pitchFamily="34" charset="0"/>
-                <a:ea typeface="Arial" panose="020B0604020202090204" pitchFamily="34" charset="-122"/>
-                <a:cs typeface="Arial" panose="020B0604020202090204" pitchFamily="34" charset="-120"/>
+                <a:latin typeface="Arial" pitchFamily="34" charset="0"/>
+                <a:ea typeface="Arial" pitchFamily="34" charset="-122"/>
+                <a:cs typeface="Arial" pitchFamily="34" charset="-120"/>
               </a:rPr>
               <a:t>When = 生产可用的分布式延时投递组件</a:t>
             </a:r>
@@ -5338,7 +5551,7 @@
             <a:prstDash val="solid"/>
           </a:ln>
           <a:effectLst>
-            <a:outerShdw blurRad="88900" dist="25400" dir="5400000" algn="bl" rotWithShape="0">
+            <a:outerShdw sx="100000" sy="100000" kx="0" ky="0" algn="bl" rotWithShape="0" blurRad="88900" dist="25400" dir="5400000">
               <a:srgbClr val="000000">
                 <a:alpha val="30000"/>
               </a:srgbClr>
@@ -5361,12 +5574,13 @@
             <a:avLst/>
           </a:prstGeom>
           <a:noFill/>
-        </p:spPr>
-        <p:txBody>
-          <a:bodyPr wrap="square" lIns="0" tIns="0" rIns="0" bIns="0" rtlCol="0" anchor="ctr"/>
-          <a:lstStyle/>
-          <a:p>
-            <a:pPr marL="0" indent="0" algn="ctr">
+          <a:ln/>
+        </p:spPr>
+        <p:txBody>
+          <a:bodyPr wrap="square" lIns="0" tIns="0" rIns="0" bIns="0" rtlCol="0" anchor="ctr"/>
+          <a:lstStyle/>
+          <a:p>
+            <a:pPr algn="ctr" indent="0" marL="0">
               <a:buNone/>
             </a:pPr>
             <a:r>
@@ -5374,9 +5588,9 @@
                 <a:solidFill>
                   <a:srgbClr val="C9A96E"/>
                 </a:solidFill>
-                <a:latin typeface="Arial" panose="020B0604020202090204" pitchFamily="34" charset="0"/>
-                <a:ea typeface="Arial" panose="020B0604020202090204" pitchFamily="34" charset="-122"/>
-                <a:cs typeface="Arial" panose="020B0604020202090204" pitchFamily="34" charset="-120"/>
+                <a:latin typeface="Arial" pitchFamily="34" charset="0"/>
+                <a:ea typeface="Arial" pitchFamily="34" charset="-122"/>
+                <a:cs typeface="Arial" pitchFamily="34" charset="-120"/>
               </a:rPr>
               <a:t>集群协调</a:t>
             </a:r>
@@ -5399,12 +5613,13 @@
             <a:avLst/>
           </a:prstGeom>
           <a:noFill/>
+          <a:ln/>
         </p:spPr>
         <p:txBody>
           <a:bodyPr wrap="square" lIns="0" tIns="0" rIns="0" bIns="0" rtlCol="0" anchor="t"/>
           <a:lstStyle/>
           <a:p>
-            <a:pPr marL="0" indent="0" algn="ctr">
+            <a:pPr algn="ctr" indent="0" marL="0">
               <a:lnSpc>
                 <a:spcPct val="110000"/>
               </a:lnSpc>
@@ -5415,9 +5630,9 @@
                 <a:solidFill>
                   <a:srgbClr val="D6D6D6"/>
                 </a:solidFill>
-                <a:latin typeface="Arial" panose="020B0604020202090204" pitchFamily="34" charset="0"/>
-                <a:ea typeface="Arial" panose="020B0604020202090204" pitchFamily="34" charset="-122"/>
-                <a:cs typeface="Arial" panose="020B0604020202090204" pitchFamily="34" charset="-120"/>
+                <a:latin typeface="Arial" pitchFamily="34" charset="0"/>
+                <a:ea typeface="Arial" pitchFamily="34" charset="-122"/>
+                <a:cs typeface="Arial" pitchFamily="34" charset="-120"/>
               </a:rPr>
               <a:t>ETCD 组集群、选主、感知</a:t>
             </a:r>
@@ -5451,7 +5666,7 @@
             <a:prstDash val="solid"/>
           </a:ln>
           <a:effectLst>
-            <a:outerShdw blurRad="88900" dist="25400" dir="5400000" algn="bl" rotWithShape="0">
+            <a:outerShdw sx="100000" sy="100000" kx="0" ky="0" algn="bl" rotWithShape="0" blurRad="88900" dist="25400" dir="5400000">
               <a:srgbClr val="000000">
                 <a:alpha val="30000"/>
               </a:srgbClr>
@@ -5474,12 +5689,13 @@
             <a:avLst/>
           </a:prstGeom>
           <a:noFill/>
-        </p:spPr>
-        <p:txBody>
-          <a:bodyPr wrap="square" lIns="0" tIns="0" rIns="0" bIns="0" rtlCol="0" anchor="ctr"/>
-          <a:lstStyle/>
-          <a:p>
-            <a:pPr marL="0" indent="0" algn="ctr">
+          <a:ln/>
+        </p:spPr>
+        <p:txBody>
+          <a:bodyPr wrap="square" lIns="0" tIns="0" rIns="0" bIns="0" rtlCol="0" anchor="ctr"/>
+          <a:lstStyle/>
+          <a:p>
+            <a:pPr algn="ctr" indent="0" marL="0">
               <a:buNone/>
             </a:pPr>
             <a:r>
@@ -5487,9 +5703,9 @@
                 <a:solidFill>
                   <a:srgbClr val="C9A96E"/>
                 </a:solidFill>
-                <a:latin typeface="Arial" panose="020B0604020202090204" pitchFamily="34" charset="0"/>
-                <a:ea typeface="Arial" panose="020B0604020202090204" pitchFamily="34" charset="-122"/>
-                <a:cs typeface="Arial" panose="020B0604020202090204" pitchFamily="34" charset="-120"/>
+                <a:latin typeface="Arial" pitchFamily="34" charset="0"/>
+                <a:ea typeface="Arial" pitchFamily="34" charset="-122"/>
+                <a:cs typeface="Arial" pitchFamily="34" charset="-120"/>
               </a:rPr>
               <a:t>多副本高可用</a:t>
             </a:r>
@@ -5512,12 +5728,13 @@
             <a:avLst/>
           </a:prstGeom>
           <a:noFill/>
+          <a:ln/>
         </p:spPr>
         <p:txBody>
           <a:bodyPr wrap="square" lIns="0" tIns="0" rIns="0" bIns="0" rtlCol="0" anchor="t"/>
           <a:lstStyle/>
           <a:p>
-            <a:pPr marL="0" indent="0" algn="ctr">
+            <a:pPr algn="ctr" indent="0" marL="0">
               <a:lnSpc>
                 <a:spcPct val="110000"/>
               </a:lnSpc>
@@ -5528,9 +5745,9 @@
                 <a:solidFill>
                   <a:srgbClr val="D6D6D6"/>
                 </a:solidFill>
-                <a:latin typeface="Arial" panose="020B0604020202090204" pitchFamily="34" charset="0"/>
-                <a:ea typeface="Arial" panose="020B0604020202090204" pitchFamily="34" charset="-122"/>
-                <a:cs typeface="Arial" panose="020B0604020202090204" pitchFamily="34" charset="-120"/>
+                <a:latin typeface="Arial" pitchFamily="34" charset="0"/>
+                <a:ea typeface="Arial" pitchFamily="34" charset="-122"/>
+                <a:cs typeface="Arial" pitchFamily="34" charset="-120"/>
               </a:rPr>
               <a:t>每个时间轮 Master/Slave</a:t>
             </a:r>
@@ -5564,7 +5781,7 @@
             <a:prstDash val="solid"/>
           </a:ln>
           <a:effectLst>
-            <a:outerShdw blurRad="88900" dist="25400" dir="5400000" algn="bl" rotWithShape="0">
+            <a:outerShdw sx="100000" sy="100000" kx="0" ky="0" algn="bl" rotWithShape="0" blurRad="88900" dist="25400" dir="5400000">
               <a:srgbClr val="000000">
                 <a:alpha val="30000"/>
               </a:srgbClr>
@@ -5587,12 +5804,13 @@
             <a:avLst/>
           </a:prstGeom>
           <a:noFill/>
-        </p:spPr>
-        <p:txBody>
-          <a:bodyPr wrap="square" lIns="0" tIns="0" rIns="0" bIns="0" rtlCol="0" anchor="ctr"/>
-          <a:lstStyle/>
-          <a:p>
-            <a:pPr marL="0" indent="0" algn="ctr">
+          <a:ln/>
+        </p:spPr>
+        <p:txBody>
+          <a:bodyPr wrap="square" lIns="0" tIns="0" rIns="0" bIns="0" rtlCol="0" anchor="ctr"/>
+          <a:lstStyle/>
+          <a:p>
+            <a:pPr algn="ctr" indent="0" marL="0">
               <a:buNone/>
             </a:pPr>
             <a:r>
@@ -5600,9 +5818,9 @@
                 <a:solidFill>
                   <a:srgbClr val="C9A96E"/>
                 </a:solidFill>
-                <a:latin typeface="Arial" panose="020B0604020202090204" pitchFamily="34" charset="0"/>
-                <a:ea typeface="Arial" panose="020B0604020202090204" pitchFamily="34" charset="-122"/>
-                <a:cs typeface="Arial" panose="020B0604020202090204" pitchFamily="34" charset="-120"/>
+                <a:latin typeface="Arial" pitchFamily="34" charset="0"/>
+                <a:ea typeface="Arial" pitchFamily="34" charset="-122"/>
+                <a:cs typeface="Arial" pitchFamily="34" charset="-120"/>
               </a:rPr>
               <a:t>自动故障切换</a:t>
             </a:r>
@@ -5625,12 +5843,13 @@
             <a:avLst/>
           </a:prstGeom>
           <a:noFill/>
+          <a:ln/>
         </p:spPr>
         <p:txBody>
           <a:bodyPr wrap="square" lIns="0" tIns="0" rIns="0" bIns="0" rtlCol="0" anchor="t"/>
           <a:lstStyle/>
           <a:p>
-            <a:pPr marL="0" indent="0" algn="ctr">
+            <a:pPr algn="ctr" indent="0" marL="0">
               <a:lnSpc>
                 <a:spcPct val="110000"/>
               </a:lnSpc>
@@ -5641,9 +5860,9 @@
                 <a:solidFill>
                   <a:srgbClr val="D6D6D6"/>
                 </a:solidFill>
-                <a:latin typeface="Arial" panose="020B0604020202090204" pitchFamily="34" charset="0"/>
-                <a:ea typeface="Arial" panose="020B0604020202090204" pitchFamily="34" charset="-122"/>
-                <a:cs typeface="Arial" panose="020B0604020202090204" pitchFamily="34" charset="-120"/>
+                <a:latin typeface="Arial" pitchFamily="34" charset="0"/>
+                <a:ea typeface="Arial" pitchFamily="34" charset="-122"/>
+                <a:cs typeface="Arial" pitchFamily="34" charset="-120"/>
               </a:rPr>
               <a:t>Master 挂 10 秒内接管</a:t>
             </a:r>
@@ -5677,7 +5896,7 @@
             <a:prstDash val="solid"/>
           </a:ln>
           <a:effectLst>
-            <a:outerShdw blurRad="88900" dist="25400" dir="5400000" algn="bl" rotWithShape="0">
+            <a:outerShdw sx="100000" sy="100000" kx="0" ky="0" algn="bl" rotWithShape="0" blurRad="88900" dist="25400" dir="5400000">
               <a:srgbClr val="000000">
                 <a:alpha val="30000"/>
               </a:srgbClr>
@@ -5700,12 +5919,13 @@
             <a:avLst/>
           </a:prstGeom>
           <a:noFill/>
-        </p:spPr>
-        <p:txBody>
-          <a:bodyPr wrap="square" lIns="0" tIns="0" rIns="0" bIns="0" rtlCol="0" anchor="ctr"/>
-          <a:lstStyle/>
-          <a:p>
-            <a:pPr marL="0" indent="0" algn="ctr">
+          <a:ln/>
+        </p:spPr>
+        <p:txBody>
+          <a:bodyPr wrap="square" lIns="0" tIns="0" rIns="0" bIns="0" rtlCol="0" anchor="ctr"/>
+          <a:lstStyle/>
+          <a:p>
+            <a:pPr algn="ctr" indent="0" marL="0">
               <a:buNone/>
             </a:pPr>
             <a:r>
@@ -5713,9 +5933,9 @@
                 <a:solidFill>
                   <a:srgbClr val="C9A96E"/>
                 </a:solidFill>
-                <a:latin typeface="Arial" panose="020B0604020202090204" pitchFamily="34" charset="0"/>
-                <a:ea typeface="Arial" panose="020B0604020202090204" pitchFamily="34" charset="-122"/>
-                <a:cs typeface="Arial" panose="020B0604020202090204" pitchFamily="34" charset="-120"/>
+                <a:latin typeface="Arial" pitchFamily="34" charset="0"/>
+                <a:ea typeface="Arial" pitchFamily="34" charset="-122"/>
+                <a:cs typeface="Arial" pitchFamily="34" charset="-120"/>
               </a:rPr>
               <a:t>不丢消息</a:t>
             </a:r>
@@ -5738,12 +5958,13 @@
             <a:avLst/>
           </a:prstGeom>
           <a:noFill/>
+          <a:ln/>
         </p:spPr>
         <p:txBody>
           <a:bodyPr wrap="square" lIns="0" tIns="0" rIns="0" bIns="0" rtlCol="0" anchor="t"/>
           <a:lstStyle/>
           <a:p>
-            <a:pPr marL="0" indent="0" algn="ctr">
+            <a:pPr algn="ctr" indent="0" marL="0">
               <a:lnSpc>
                 <a:spcPct val="110000"/>
               </a:lnSpc>
@@ -5754,9 +5975,9 @@
                 <a:solidFill>
                   <a:srgbClr val="D6D6D6"/>
                 </a:solidFill>
-                <a:latin typeface="Arial" panose="020B0604020202090204" pitchFamily="34" charset="0"/>
-                <a:ea typeface="Arial" panose="020B0604020202090204" pitchFamily="34" charset="-122"/>
-                <a:cs typeface="Arial" panose="020B0604020202090204" pitchFamily="34" charset="-120"/>
+                <a:latin typeface="Arial" pitchFamily="34" charset="0"/>
+                <a:ea typeface="Arial" pitchFamily="34" charset="-122"/>
+                <a:cs typeface="Arial" pitchFamily="34" charset="-120"/>
               </a:rPr>
               <a:t>先落库、Redis 是真源</a:t>
             </a:r>
@@ -5790,7 +6011,7 @@
             <a:prstDash val="solid"/>
           </a:ln>
           <a:effectLst>
-            <a:outerShdw blurRad="88900" dist="25400" dir="5400000" algn="bl" rotWithShape="0">
+            <a:outerShdw sx="100000" sy="100000" kx="0" ky="0" algn="bl" rotWithShape="0" blurRad="88900" dist="25400" dir="5400000">
               <a:srgbClr val="000000">
                 <a:alpha val="30000"/>
               </a:srgbClr>
@@ -5813,12 +6034,13 @@
             <a:avLst/>
           </a:prstGeom>
           <a:noFill/>
-        </p:spPr>
-        <p:txBody>
-          <a:bodyPr wrap="square" lIns="0" tIns="0" rIns="0" bIns="0" rtlCol="0" anchor="ctr"/>
-          <a:lstStyle/>
-          <a:p>
-            <a:pPr marL="0" indent="0" algn="ctr">
+          <a:ln/>
+        </p:spPr>
+        <p:txBody>
+          <a:bodyPr wrap="square" lIns="0" tIns="0" rIns="0" bIns="0" rtlCol="0" anchor="ctr"/>
+          <a:lstStyle/>
+          <a:p>
+            <a:pPr algn="ctr" indent="0" marL="0">
               <a:buNone/>
             </a:pPr>
             <a:r>
@@ -5826,9 +6048,9 @@
                 <a:solidFill>
                   <a:srgbClr val="C9A96E"/>
                 </a:solidFill>
-                <a:latin typeface="Arial" panose="020B0604020202090204" pitchFamily="34" charset="0"/>
-                <a:ea typeface="Arial" panose="020B0604020202090204" pitchFamily="34" charset="-122"/>
-                <a:cs typeface="Arial" panose="020B0604020202090204" pitchFamily="34" charset="-120"/>
+                <a:latin typeface="Arial" pitchFamily="34" charset="0"/>
+                <a:ea typeface="Arial" pitchFamily="34" charset="-122"/>
+                <a:cs typeface="Arial" pitchFamily="34" charset="-120"/>
               </a:rPr>
               <a:t>多层时间轮</a:t>
             </a:r>
@@ -5851,12 +6073,13 @@
             <a:avLst/>
           </a:prstGeom>
           <a:noFill/>
+          <a:ln/>
         </p:spPr>
         <p:txBody>
           <a:bodyPr wrap="square" lIns="0" tIns="0" rIns="0" bIns="0" rtlCol="0" anchor="t"/>
           <a:lstStyle/>
           <a:p>
-            <a:pPr marL="0" indent="0" algn="ctr">
+            <a:pPr algn="ctr" indent="0" marL="0">
               <a:lnSpc>
                 <a:spcPct val="110000"/>
               </a:lnSpc>
@@ -5867,9 +6090,9 @@
                 <a:solidFill>
                   <a:srgbClr val="D6D6D6"/>
                 </a:solidFill>
-                <a:latin typeface="Arial" panose="020B0604020202090204" pitchFamily="34" charset="0"/>
-                <a:ea typeface="Arial" panose="020B0604020202090204" pitchFamily="34" charset="-122"/>
-                <a:cs typeface="Arial" panose="020B0604020202090204" pitchFamily="34" charset="-120"/>
+                <a:latin typeface="Arial" pitchFamily="34" charset="0"/>
+                <a:ea typeface="Arial" pitchFamily="34" charset="-122"/>
+                <a:cs typeface="Arial" pitchFamily="34" charset="-120"/>
               </a:rPr>
               <a:t>O(1)、秒到 30 天、精度稳</a:t>
             </a:r>
@@ -5903,7 +6126,7 @@
             <a:prstDash val="solid"/>
           </a:ln>
           <a:effectLst>
-            <a:outerShdw blurRad="88900" dist="25400" dir="5400000" algn="bl" rotWithShape="0">
+            <a:outerShdw sx="100000" sy="100000" kx="0" ky="0" algn="bl" rotWithShape="0" blurRad="88900" dist="25400" dir="5400000">
               <a:srgbClr val="000000">
                 <a:alpha val="30000"/>
               </a:srgbClr>
@@ -5926,12 +6149,13 @@
             <a:avLst/>
           </a:prstGeom>
           <a:noFill/>
-        </p:spPr>
-        <p:txBody>
-          <a:bodyPr wrap="square" lIns="0" tIns="0" rIns="0" bIns="0" rtlCol="0" anchor="ctr"/>
-          <a:lstStyle/>
-          <a:p>
-            <a:pPr marL="0" indent="0" algn="ctr">
+          <a:ln/>
+        </p:spPr>
+        <p:txBody>
+          <a:bodyPr wrap="square" lIns="0" tIns="0" rIns="0" bIns="0" rtlCol="0" anchor="ctr"/>
+          <a:lstStyle/>
+          <a:p>
+            <a:pPr algn="ctr" indent="0" marL="0">
               <a:buNone/>
             </a:pPr>
             <a:r>
@@ -5939,9 +6163,9 @@
                 <a:solidFill>
                   <a:srgbClr val="C9A96E"/>
                 </a:solidFill>
-                <a:latin typeface="Arial" panose="020B0604020202090204" pitchFamily="34" charset="0"/>
-                <a:ea typeface="Arial" panose="020B0604020202090204" pitchFamily="34" charset="-122"/>
-                <a:cs typeface="Arial" panose="020B0604020202090204" pitchFamily="34" charset="-120"/>
+                <a:latin typeface="Arial" pitchFamily="34" charset="0"/>
+                <a:ea typeface="Arial" pitchFamily="34" charset="-122"/>
+                <a:cs typeface="Arial" pitchFamily="34" charset="-120"/>
               </a:rPr>
               <a:t>一键部署</a:t>
             </a:r>
@@ -5964,12 +6188,13 @@
             <a:avLst/>
           </a:prstGeom>
           <a:noFill/>
+          <a:ln/>
         </p:spPr>
         <p:txBody>
           <a:bodyPr wrap="square" lIns="0" tIns="0" rIns="0" bIns="0" rtlCol="0" anchor="t"/>
           <a:lstStyle/>
           <a:p>
-            <a:pPr marL="0" indent="0" algn="ctr">
+            <a:pPr algn="ctr" indent="0" marL="0">
               <a:lnSpc>
                 <a:spcPct val="110000"/>
               </a:lnSpc>
@@ -5980,9 +6205,9 @@
                 <a:solidFill>
                   <a:srgbClr val="D6D6D6"/>
                 </a:solidFill>
-                <a:latin typeface="Arial" panose="020B0604020202090204" pitchFamily="34" charset="0"/>
-                <a:ea typeface="Arial" panose="020B0604020202090204" pitchFamily="34" charset="-122"/>
-                <a:cs typeface="Arial" panose="020B0604020202090204" pitchFamily="34" charset="-120"/>
+                <a:latin typeface="Arial" pitchFamily="34" charset="0"/>
+                <a:ea typeface="Arial" pitchFamily="34" charset="-122"/>
+                <a:cs typeface="Arial" pitchFamily="34" charset="-120"/>
               </a:rPr>
               <a:t>compose / 单机 / K8s</a:t>
             </a:r>
@@ -6032,12 +6257,13 @@
             <a:avLst/>
           </a:prstGeom>
           <a:noFill/>
-        </p:spPr>
-        <p:txBody>
-          <a:bodyPr wrap="square" lIns="0" tIns="0" rIns="0" bIns="0" rtlCol="0" anchor="ctr"/>
-          <a:lstStyle/>
-          <a:p>
-            <a:pPr marL="0" indent="0">
+          <a:ln/>
+        </p:spPr>
+        <p:txBody>
+          <a:bodyPr wrap="square" lIns="0" tIns="0" rIns="0" bIns="0" rtlCol="0" anchor="ctr"/>
+          <a:lstStyle/>
+          <a:p>
+            <a:pPr indent="0" marL="0">
               <a:lnSpc>
                 <a:spcPct val="106000"/>
               </a:lnSpc>
@@ -6048,20 +6274,26 @@
                 <a:solidFill>
                   <a:srgbClr val="C9A96E"/>
                 </a:solidFill>
-                <a:latin typeface="Arial" panose="020B0604020202090204" pitchFamily="34" charset="0"/>
-                <a:ea typeface="Arial" panose="020B0604020202090204" pitchFamily="34" charset="-122"/>
-                <a:cs typeface="Arial" panose="020B0604020202090204" pitchFamily="34" charset="-120"/>
+                <a:latin typeface="Arial" pitchFamily="34" charset="0"/>
+                <a:ea typeface="Arial" pitchFamily="34" charset="-122"/>
+                <a:cs typeface="Arial" pitchFamily="34" charset="-120"/>
               </a:rPr>
               <a:t>一句话：</a:t>
             </a:r>
+            <a:pPr indent="0" marL="0">
+              <a:lnSpc>
+                <a:spcPct val="106000"/>
+              </a:lnSpc>
+              <a:buNone/>
+            </a:pPr>
             <a:r>
               <a:rPr lang="en-US" sz="1250" dirty="0">
                 <a:solidFill>
                   <a:srgbClr val="F0F0F0"/>
                 </a:solidFill>
-                <a:latin typeface="Arial" panose="020B0604020202090204" pitchFamily="34" charset="0"/>
-                <a:ea typeface="Arial" panose="020B0604020202090204" pitchFamily="34" charset="-122"/>
-                <a:cs typeface="Arial" panose="020B0604020202090204" pitchFamily="34" charset="-120"/>
+                <a:latin typeface="Arial" pitchFamily="34" charset="0"/>
+                <a:ea typeface="Arial" pitchFamily="34" charset="-122"/>
+                <a:cs typeface="Arial" pitchFamily="34" charset="-120"/>
               </a:rPr>
               <a:t>不是单机 toy，是带 HA 的集群版——这些分布式硬指标做到了，When 才算“生产可用”，作为 AI 编程样本才有说服力。</a:t>
             </a:r>
@@ -6079,13 +6311,12 @@
 
 <file path=ppt/slides/slide3.xml><?xml version="1.0" encoding="utf-8"?>
 <p:sld xmlns:a="http://schemas.openxmlformats.org/drawingml/2006/main" xmlns:r="http://schemas.openxmlformats.org/officeDocument/2006/relationships" xmlns:p="http://schemas.openxmlformats.org/presentationml/2006/main">
-  <p:cSld>
+  <p:cSld name="Slide 3">
     <p:bg>
       <p:bgPr>
         <a:solidFill>
           <a:srgbClr val="1E1E1E"/>
         </a:solidFill>
-        <a:effectLst/>
       </p:bgPr>
     </p:bg>
     <p:spTree>
@@ -6117,12 +6348,13 @@
             <a:avLst/>
           </a:prstGeom>
           <a:noFill/>
-        </p:spPr>
-        <p:txBody>
-          <a:bodyPr wrap="square" lIns="0" tIns="0" rIns="0" bIns="0" rtlCol="0" anchor="ctr"/>
-          <a:lstStyle/>
-          <a:p>
-            <a:pPr marL="0" indent="0">
+          <a:ln/>
+        </p:spPr>
+        <p:txBody>
+          <a:bodyPr wrap="square" lIns="0" tIns="0" rIns="0" bIns="0" rtlCol="0" anchor="ctr"/>
+          <a:lstStyle/>
+          <a:p>
+            <a:pPr indent="0" marL="0">
               <a:buNone/>
             </a:pPr>
             <a:r>
@@ -6130,9 +6362,9 @@
                 <a:solidFill>
                   <a:srgbClr val="6E6E6E"/>
                 </a:solidFill>
-                <a:latin typeface="Arial" panose="020B0604020202090204" pitchFamily="34" charset="0"/>
-                <a:ea typeface="Arial" panose="020B0604020202090204" pitchFamily="34" charset="-122"/>
-                <a:cs typeface="Arial" panose="020B0604020202090204" pitchFamily="34" charset="-120"/>
+                <a:latin typeface="Arial" pitchFamily="34" charset="0"/>
+                <a:ea typeface="Arial" pitchFamily="34" charset="-122"/>
+                <a:cs typeface="Arial" pitchFamily="34" charset="-120"/>
               </a:rPr>
               <a:t>第 54 节 · When 项目总结与后续规划</a:t>
             </a:r>
@@ -6155,12 +6387,13 @@
             <a:avLst/>
           </a:prstGeom>
           <a:noFill/>
-        </p:spPr>
-        <p:txBody>
-          <a:bodyPr wrap="square" lIns="0" tIns="0" rIns="0" bIns="0" rtlCol="0" anchor="ctr"/>
-          <a:lstStyle/>
-          <a:p>
-            <a:pPr marL="0" indent="0" algn="r">
+          <a:ln/>
+        </p:spPr>
+        <p:txBody>
+          <a:bodyPr wrap="square" lIns="0" tIns="0" rIns="0" bIns="0" rtlCol="0" anchor="ctr"/>
+          <a:lstStyle/>
+          <a:p>
+            <a:pPr algn="r" indent="0" marL="0">
               <a:buNone/>
             </a:pPr>
             <a:r>
@@ -6168,9 +6401,9 @@
                 <a:solidFill>
                   <a:srgbClr val="6E6E6E"/>
                 </a:solidFill>
-                <a:latin typeface="Arial" panose="020B0604020202090204" pitchFamily="34" charset="0"/>
-                <a:ea typeface="Arial" panose="020B0604020202090204" pitchFamily="34" charset="-122"/>
-                <a:cs typeface="Arial" panose="020B0604020202090204" pitchFamily="34" charset="-120"/>
+                <a:latin typeface="Arial" pitchFamily="34" charset="0"/>
+                <a:ea typeface="Arial" pitchFamily="34" charset="-122"/>
+                <a:cs typeface="Arial" pitchFamily="34" charset="-120"/>
               </a:rPr>
               <a:t>3 / 14</a:t>
             </a:r>
@@ -6217,22 +6450,23 @@
             <a:avLst/>
           </a:prstGeom>
           <a:noFill/>
-        </p:spPr>
-        <p:txBody>
-          <a:bodyPr wrap="square" lIns="0" tIns="0" rIns="0" bIns="0" rtlCol="0" anchor="ctr"/>
-          <a:lstStyle/>
-          <a:p>
-            <a:pPr marL="0" indent="0" algn="ctr">
-              <a:buNone/>
-            </a:pPr>
-            <a:r>
-              <a:rPr lang="en-US" sz="1050" b="1" kern="0" spc="100" dirty="0">
+          <a:ln/>
+        </p:spPr>
+        <p:txBody>
+          <a:bodyPr wrap="square" lIns="0" tIns="0" rIns="0" bIns="0" rtlCol="0" anchor="ctr"/>
+          <a:lstStyle/>
+          <a:p>
+            <a:pPr algn="ctr" indent="0" marL="0">
+              <a:buNone/>
+            </a:pPr>
+            <a:r>
+              <a:rPr lang="en-US" sz="1050" b="1" spc="100" kern="0" dirty="0">
                 <a:solidFill>
                   <a:srgbClr val="C9A96E"/>
                 </a:solidFill>
-                <a:latin typeface="Arial" panose="020B0604020202090204" pitchFamily="34" charset="0"/>
-                <a:ea typeface="Arial" panose="020B0604020202090204" pitchFamily="34" charset="-122"/>
-                <a:cs typeface="Arial" panose="020B0604020202090204" pitchFamily="34" charset="-120"/>
+                <a:latin typeface="Arial" pitchFamily="34" charset="0"/>
+                <a:ea typeface="Arial" pitchFamily="34" charset="-122"/>
+                <a:cs typeface="Arial" pitchFamily="34" charset="-120"/>
               </a:rPr>
               <a:t>全景回顾</a:t>
             </a:r>
@@ -6255,12 +6489,13 @@
             <a:avLst/>
           </a:prstGeom>
           <a:noFill/>
-        </p:spPr>
-        <p:txBody>
-          <a:bodyPr wrap="square" lIns="0" tIns="0" rIns="0" bIns="0" rtlCol="0" anchor="ctr"/>
-          <a:lstStyle/>
-          <a:p>
-            <a:pPr marL="0" indent="0">
+          <a:ln/>
+        </p:spPr>
+        <p:txBody>
+          <a:bodyPr wrap="square" lIns="0" tIns="0" rIns="0" bIns="0" rtlCol="0" anchor="ctr"/>
+          <a:lstStyle/>
+          <a:p>
+            <a:pPr indent="0" marL="0">
               <a:buNone/>
             </a:pPr>
             <a:r>
@@ -6268,9 +6503,9 @@
                 <a:solidFill>
                   <a:srgbClr val="F0F0F0"/>
                 </a:solidFill>
-                <a:latin typeface="Arial" panose="020B0604020202090204" pitchFamily="34" charset="0"/>
-                <a:ea typeface="Arial" panose="020B0604020202090204" pitchFamily="34" charset="-122"/>
-                <a:cs typeface="Arial" panose="020B0604020202090204" pitchFamily="34" charset="-120"/>
+                <a:latin typeface="Arial" pitchFamily="34" charset="0"/>
+                <a:ea typeface="Arial" pitchFamily="34" charset="-122"/>
+                <a:cs typeface="Arial" pitchFamily="34" charset="-120"/>
               </a:rPr>
               <a:t>一条延时消息，从进来到投出去</a:t>
             </a:r>
@@ -6320,12 +6555,13 @@
             <a:avLst/>
           </a:prstGeom>
           <a:noFill/>
-        </p:spPr>
-        <p:txBody>
-          <a:bodyPr wrap="square" lIns="0" tIns="0" rIns="0" bIns="0" rtlCol="0" anchor="ctr"/>
-          <a:lstStyle/>
-          <a:p>
-            <a:pPr marL="0" indent="0" algn="ctr">
+          <a:ln/>
+        </p:spPr>
+        <p:txBody>
+          <a:bodyPr wrap="square" lIns="0" tIns="0" rIns="0" bIns="0" rtlCol="0" anchor="ctr"/>
+          <a:lstStyle/>
+          <a:p>
+            <a:pPr algn="ctr" indent="0" marL="0">
               <a:lnSpc>
                 <a:spcPct val="100000"/>
               </a:lnSpc>
@@ -6336,9 +6572,9 @@
                 <a:solidFill>
                   <a:srgbClr val="7FA8C9"/>
                 </a:solidFill>
-                <a:latin typeface="Arial" panose="020B0604020202090204" pitchFamily="34" charset="0"/>
-                <a:ea typeface="Arial" panose="020B0604020202090204" pitchFamily="34" charset="-122"/>
-                <a:cs typeface="Arial" panose="020B0604020202090204" pitchFamily="34" charset="-120"/>
+                <a:latin typeface="Arial" pitchFamily="34" charset="0"/>
+                <a:ea typeface="Arial" pitchFamily="34" charset="-122"/>
+                <a:cs typeface="Arial" pitchFamily="34" charset="-120"/>
               </a:rPr>
               <a:t>业务方</a:t>
             </a:r>
@@ -6388,12 +6624,13 @@
             <a:avLst/>
           </a:prstGeom>
           <a:noFill/>
-        </p:spPr>
-        <p:txBody>
-          <a:bodyPr wrap="square" lIns="0" tIns="0" rIns="0" bIns="0" rtlCol="0" anchor="ctr"/>
-          <a:lstStyle/>
-          <a:p>
-            <a:pPr marL="0" indent="0" algn="ctr">
+          <a:ln/>
+        </p:spPr>
+        <p:txBody>
+          <a:bodyPr wrap="square" lIns="0" tIns="0" rIns="0" bIns="0" rtlCol="0" anchor="ctr"/>
+          <a:lstStyle/>
+          <a:p>
+            <a:pPr algn="ctr" indent="0" marL="0">
               <a:lnSpc>
                 <a:spcPct val="102000"/>
               </a:lnSpc>
@@ -6404,9 +6641,9 @@
                 <a:solidFill>
                   <a:srgbClr val="C9A96E"/>
                 </a:solidFill>
-                <a:latin typeface="Arial" panose="020B0604020202090204" pitchFamily="34" charset="0"/>
-                <a:ea typeface="Arial" panose="020B0604020202090204" pitchFamily="34" charset="-122"/>
-                <a:cs typeface="Arial" panose="020B0604020202090204" pitchFamily="34" charset="-120"/>
+                <a:latin typeface="Arial" pitchFamily="34" charset="0"/>
+                <a:ea typeface="Arial" pitchFamily="34" charset="-122"/>
+                <a:cs typeface="Arial" pitchFamily="34" charset="-120"/>
               </a:rPr>
               <a:t>When 集群（同构多节点）</a:t>
             </a:r>
@@ -6456,12 +6693,13 @@
             <a:avLst/>
           </a:prstGeom>
           <a:noFill/>
-        </p:spPr>
-        <p:txBody>
-          <a:bodyPr wrap="square" lIns="0" tIns="0" rIns="0" bIns="0" rtlCol="0" anchor="ctr"/>
-          <a:lstStyle/>
-          <a:p>
-            <a:pPr marL="0" indent="0" algn="ctr">
+          <a:ln/>
+        </p:spPr>
+        <p:txBody>
+          <a:bodyPr wrap="square" lIns="0" tIns="0" rIns="0" bIns="0" rtlCol="0" anchor="ctr"/>
+          <a:lstStyle/>
+          <a:p>
+            <a:pPr algn="ctr" indent="0" marL="0">
               <a:lnSpc>
                 <a:spcPct val="100000"/>
               </a:lnSpc>
@@ -6472,9 +6710,9 @@
                 <a:solidFill>
                   <a:srgbClr val="D6D6D6"/>
                 </a:solidFill>
-                <a:latin typeface="Arial" panose="020B0604020202090204" pitchFamily="34" charset="0"/>
-                <a:ea typeface="Arial" panose="020B0604020202090204" pitchFamily="34" charset="-122"/>
-                <a:cs typeface="Arial" panose="020B0604020202090204" pitchFamily="34" charset="-120"/>
+                <a:latin typeface="Arial" pitchFamily="34" charset="0"/>
+                <a:ea typeface="Arial" pitchFamily="34" charset="-122"/>
+                <a:cs typeface="Arial" pitchFamily="34" charset="-120"/>
               </a:rPr>
               <a:t>接入/路由</a:t>
             </a:r>
@@ -6524,12 +6762,13 @@
             <a:avLst/>
           </a:prstGeom>
           <a:noFill/>
-        </p:spPr>
-        <p:txBody>
-          <a:bodyPr wrap="square" lIns="0" tIns="0" rIns="0" bIns="0" rtlCol="0" anchor="ctr"/>
-          <a:lstStyle/>
-          <a:p>
-            <a:pPr marL="0" indent="0" algn="ctr">
+          <a:ln/>
+        </p:spPr>
+        <p:txBody>
+          <a:bodyPr wrap="square" lIns="0" tIns="0" rIns="0" bIns="0" rtlCol="0" anchor="ctr"/>
+          <a:lstStyle/>
+          <a:p>
+            <a:pPr algn="ctr" indent="0" marL="0">
               <a:lnSpc>
                 <a:spcPct val="100000"/>
               </a:lnSpc>
@@ -6540,9 +6779,9 @@
                 <a:solidFill>
                   <a:srgbClr val="D6D6D6"/>
                 </a:solidFill>
-                <a:latin typeface="Arial" panose="020B0604020202090204" pitchFamily="34" charset="0"/>
-                <a:ea typeface="Arial" panose="020B0604020202090204" pitchFamily="34" charset="-122"/>
-                <a:cs typeface="Arial" panose="020B0604020202090204" pitchFamily="34" charset="-120"/>
+                <a:latin typeface="Arial" pitchFamily="34" charset="0"/>
+                <a:ea typeface="Arial" pitchFamily="34" charset="-122"/>
+                <a:cs typeface="Arial" pitchFamily="34" charset="-120"/>
               </a:rPr>
               <a:t>时间轮</a:t>
             </a:r>
@@ -6592,12 +6831,13 @@
             <a:avLst/>
           </a:prstGeom>
           <a:noFill/>
-        </p:spPr>
-        <p:txBody>
-          <a:bodyPr wrap="square" lIns="0" tIns="0" rIns="0" bIns="0" rtlCol="0" anchor="ctr"/>
-          <a:lstStyle/>
-          <a:p>
-            <a:pPr marL="0" indent="0" algn="ctr">
+          <a:ln/>
+        </p:spPr>
+        <p:txBody>
+          <a:bodyPr wrap="square" lIns="0" tIns="0" rIns="0" bIns="0" rtlCol="0" anchor="ctr"/>
+          <a:lstStyle/>
+          <a:p>
+            <a:pPr algn="ctr" indent="0" marL="0">
               <a:lnSpc>
                 <a:spcPct val="100000"/>
               </a:lnSpc>
@@ -6608,9 +6848,9 @@
                 <a:solidFill>
                   <a:srgbClr val="D6D6D6"/>
                 </a:solidFill>
-                <a:latin typeface="Arial" panose="020B0604020202090204" pitchFamily="34" charset="0"/>
-                <a:ea typeface="Arial" panose="020B0604020202090204" pitchFamily="34" charset="-122"/>
-                <a:cs typeface="Arial" panose="020B0604020202090204" pitchFamily="34" charset="-120"/>
+                <a:latin typeface="Arial" pitchFamily="34" charset="0"/>
+                <a:ea typeface="Arial" pitchFamily="34" charset="-122"/>
+                <a:cs typeface="Arial" pitchFamily="34" charset="-120"/>
               </a:rPr>
               <a:t>Master/Slave</a:t>
             </a:r>
@@ -6660,12 +6900,13 @@
             <a:avLst/>
           </a:prstGeom>
           <a:noFill/>
-        </p:spPr>
-        <p:txBody>
-          <a:bodyPr wrap="square" lIns="0" tIns="0" rIns="0" bIns="0" rtlCol="0" anchor="ctr"/>
-          <a:lstStyle/>
-          <a:p>
-            <a:pPr marL="0" indent="0" algn="ctr">
+          <a:ln/>
+        </p:spPr>
+        <p:txBody>
+          <a:bodyPr wrap="square" lIns="0" tIns="0" rIns="0" bIns="0" rtlCol="0" anchor="ctr"/>
+          <a:lstStyle/>
+          <a:p>
+            <a:pPr algn="ctr" indent="0" marL="0">
               <a:lnSpc>
                 <a:spcPct val="100000"/>
               </a:lnSpc>
@@ -6676,9 +6917,9 @@
                 <a:solidFill>
                   <a:srgbClr val="D6D6D6"/>
                 </a:solidFill>
-                <a:latin typeface="Arial" panose="020B0604020202090204" pitchFamily="34" charset="0"/>
-                <a:ea typeface="Arial" panose="020B0604020202090204" pitchFamily="34" charset="-122"/>
-                <a:cs typeface="Arial" panose="020B0604020202090204" pitchFamily="34" charset="-120"/>
+                <a:latin typeface="Arial" pitchFamily="34" charset="0"/>
+                <a:ea typeface="Arial" pitchFamily="34" charset="-122"/>
+                <a:cs typeface="Arial" pitchFamily="34" charset="-120"/>
               </a:rPr>
               <a:t>Sink 投递</a:t>
             </a:r>
@@ -6728,12 +6969,13 @@
             <a:avLst/>
           </a:prstGeom>
           <a:noFill/>
-        </p:spPr>
-        <p:txBody>
-          <a:bodyPr wrap="square" lIns="0" tIns="0" rIns="0" bIns="0" rtlCol="0" anchor="ctr"/>
-          <a:lstStyle/>
-          <a:p>
-            <a:pPr marL="0" indent="0" algn="ctr">
+          <a:ln/>
+        </p:spPr>
+        <p:txBody>
+          <a:bodyPr wrap="square" lIns="0" tIns="0" rIns="0" bIns="0" rtlCol="0" anchor="ctr"/>
+          <a:lstStyle/>
+          <a:p>
+            <a:pPr algn="ctr" indent="0" marL="0">
               <a:lnSpc>
                 <a:spcPct val="100000"/>
               </a:lnSpc>
@@ -6744,9 +6986,9 @@
                 <a:solidFill>
                   <a:srgbClr val="D6D6D6"/>
                 </a:solidFill>
-                <a:latin typeface="Arial" panose="020B0604020202090204" pitchFamily="34" charset="0"/>
-                <a:ea typeface="Arial" panose="020B0604020202090204" pitchFamily="34" charset="-122"/>
-                <a:cs typeface="Arial" panose="020B0604020202090204" pitchFamily="34" charset="-120"/>
+                <a:latin typeface="Arial" pitchFamily="34" charset="0"/>
+                <a:ea typeface="Arial" pitchFamily="34" charset="-122"/>
+                <a:cs typeface="Arial" pitchFamily="34" charset="-120"/>
               </a:rPr>
               <a:t>Controller · 选主/切换/rebalance</a:t>
             </a:r>
@@ -6796,12 +7038,13 @@
             <a:avLst/>
           </a:prstGeom>
           <a:noFill/>
-        </p:spPr>
-        <p:txBody>
-          <a:bodyPr wrap="square" lIns="0" tIns="0" rIns="0" bIns="0" rtlCol="0" anchor="ctr"/>
-          <a:lstStyle/>
-          <a:p>
-            <a:pPr marL="0" indent="0" algn="ctr">
+          <a:ln/>
+        </p:spPr>
+        <p:txBody>
+          <a:bodyPr wrap="square" lIns="0" tIns="0" rIns="0" bIns="0" rtlCol="0" anchor="ctr"/>
+          <a:lstStyle/>
+          <a:p>
+            <a:pPr algn="ctr" indent="0" marL="0">
               <a:lnSpc>
                 <a:spcPct val="100000"/>
               </a:lnSpc>
@@ -6812,9 +7055,9 @@
                 <a:solidFill>
                   <a:srgbClr val="7FB08A"/>
                 </a:solidFill>
-                <a:latin typeface="Arial" panose="020B0604020202090204" pitchFamily="34" charset="0"/>
-                <a:ea typeface="Arial" panose="020B0604020202090204" pitchFamily="34" charset="-122"/>
-                <a:cs typeface="Arial" panose="020B0604020202090204" pitchFamily="34" charset="-120"/>
+                <a:latin typeface="Arial" pitchFamily="34" charset="0"/>
+                <a:ea typeface="Arial" pitchFamily="34" charset="-122"/>
+                <a:cs typeface="Arial" pitchFamily="34" charset="-120"/>
               </a:rPr>
               <a:t>ETCD（协调）</a:t>
             </a:r>
@@ -6864,12 +7107,13 @@
             <a:avLst/>
           </a:prstGeom>
           <a:noFill/>
-        </p:spPr>
-        <p:txBody>
-          <a:bodyPr wrap="square" lIns="0" tIns="0" rIns="0" bIns="0" rtlCol="0" anchor="ctr"/>
-          <a:lstStyle/>
-          <a:p>
-            <a:pPr marL="0" indent="0" algn="ctr">
+          <a:ln/>
+        </p:spPr>
+        <p:txBody>
+          <a:bodyPr wrap="square" lIns="0" tIns="0" rIns="0" bIns="0" rtlCol="0" anchor="ctr"/>
+          <a:lstStyle/>
+          <a:p>
+            <a:pPr algn="ctr" indent="0" marL="0">
               <a:lnSpc>
                 <a:spcPct val="100000"/>
               </a:lnSpc>
@@ -6880,9 +7124,9 @@
                 <a:solidFill>
                   <a:srgbClr val="7FB08A"/>
                 </a:solidFill>
-                <a:latin typeface="Arial" panose="020B0604020202090204" pitchFamily="34" charset="0"/>
-                <a:ea typeface="Arial" panose="020B0604020202090204" pitchFamily="34" charset="-122"/>
-                <a:cs typeface="Arial" panose="020B0604020202090204" pitchFamily="34" charset="-120"/>
+                <a:latin typeface="Arial" pitchFamily="34" charset="0"/>
+                <a:ea typeface="Arial" pitchFamily="34" charset="-122"/>
+                <a:cs typeface="Arial" pitchFamily="34" charset="-120"/>
               </a:rPr>
               <a:t>Redis（真源）</a:t>
             </a:r>
@@ -6932,12 +7176,13 @@
             <a:avLst/>
           </a:prstGeom>
           <a:noFill/>
-        </p:spPr>
-        <p:txBody>
-          <a:bodyPr wrap="square" lIns="0" tIns="0" rIns="0" bIns="0" rtlCol="0" anchor="ctr"/>
-          <a:lstStyle/>
-          <a:p>
-            <a:pPr marL="0" indent="0" algn="ctr">
+          <a:ln/>
+        </p:spPr>
+        <p:txBody>
+          <a:bodyPr wrap="square" lIns="0" tIns="0" rIns="0" bIns="0" rtlCol="0" anchor="ctr"/>
+          <a:lstStyle/>
+          <a:p>
+            <a:pPr algn="ctr" indent="0" marL="0">
               <a:lnSpc>
                 <a:spcPct val="100000"/>
               </a:lnSpc>
@@ -6948,9 +7193,9 @@
                 <a:solidFill>
                   <a:srgbClr val="9A9A9A"/>
                 </a:solidFill>
-                <a:latin typeface="Arial" panose="020B0604020202090204" pitchFamily="34" charset="0"/>
-                <a:ea typeface="Arial" panose="020B0604020202090204" pitchFamily="34" charset="-122"/>
-                <a:cs typeface="Arial" panose="020B0604020202090204" pitchFamily="34" charset="-120"/>
+                <a:latin typeface="Arial" pitchFamily="34" charset="0"/>
+                <a:ea typeface="Arial" pitchFamily="34" charset="-122"/>
+                <a:cs typeface="Arial" pitchFamily="34" charset="-120"/>
               </a:rPr>
               <a:t>下游 HTTP/Kafka</a:t>
             </a:r>
@@ -6996,12 +7241,13 @@
             <a:avLst/>
           </a:prstGeom>
           <a:noFill/>
-        </p:spPr>
-        <p:txBody>
-          <a:bodyPr wrap="square" lIns="0" tIns="0" rIns="0" bIns="0" rtlCol="0" anchor="ctr"/>
-          <a:lstStyle/>
-          <a:p>
-            <a:pPr marL="0" indent="0" algn="ctr">
+          <a:ln/>
+        </p:spPr>
+        <p:txBody>
+          <a:bodyPr wrap="square" lIns="0" tIns="0" rIns="0" bIns="0" rtlCol="0" anchor="ctr"/>
+          <a:lstStyle/>
+          <a:p>
+            <a:pPr algn="ctr" indent="0" marL="0">
               <a:buNone/>
             </a:pPr>
             <a:r>
@@ -7009,9 +7255,9 @@
                 <a:solidFill>
                   <a:srgbClr val="C9A96E"/>
                 </a:solidFill>
-                <a:latin typeface="Arial" panose="020B0604020202090204" pitchFamily="34" charset="0"/>
-                <a:ea typeface="Arial" panose="020B0604020202090204" pitchFamily="34" charset="-122"/>
-                <a:cs typeface="Arial" panose="020B0604020202090204" pitchFamily="34" charset="-120"/>
+                <a:latin typeface="Arial" pitchFamily="34" charset="0"/>
+                <a:ea typeface="Arial" pitchFamily="34" charset="-122"/>
+                <a:cs typeface="Arial" pitchFamily="34" charset="-120"/>
               </a:rPr>
               <a:t>→</a:t>
             </a:r>
@@ -7103,12 +7349,13 @@
             <a:avLst/>
           </a:prstGeom>
           <a:noFill/>
-        </p:spPr>
-        <p:txBody>
-          <a:bodyPr wrap="square" lIns="0" tIns="0" rIns="0" bIns="0" rtlCol="0" anchor="ctr"/>
-          <a:lstStyle/>
-          <a:p>
-            <a:pPr marL="0" indent="0" algn="ctr">
+          <a:ln/>
+        </p:spPr>
+        <p:txBody>
+          <a:bodyPr wrap="square" lIns="0" tIns="0" rIns="0" bIns="0" rtlCol="0" anchor="ctr"/>
+          <a:lstStyle/>
+          <a:p>
+            <a:pPr algn="ctr" indent="0" marL="0">
               <a:buNone/>
             </a:pPr>
             <a:r>
@@ -7116,9 +7363,9 @@
                 <a:solidFill>
                   <a:srgbClr val="9A9A9A"/>
                 </a:solidFill>
-                <a:latin typeface="Arial" panose="020B0604020202090204" pitchFamily="34" charset="0"/>
-                <a:ea typeface="Arial" panose="020B0604020202090204" pitchFamily="34" charset="-122"/>
-                <a:cs typeface="Arial" panose="020B0604020202090204" pitchFamily="34" charset="-120"/>
+                <a:latin typeface="Arial" pitchFamily="34" charset="0"/>
+                <a:ea typeface="Arial" pitchFamily="34" charset="-122"/>
+                <a:cs typeface="Arial" pitchFamily="34" charset="-120"/>
               </a:rPr>
               <a:t>到点投递 →</a:t>
             </a:r>
@@ -7214,12 +7461,13 @@
             <a:avLst/>
           </a:prstGeom>
           <a:noFill/>
-        </p:spPr>
-        <p:txBody>
-          <a:bodyPr wrap="square" lIns="0" tIns="0" rIns="0" bIns="0" rtlCol="0" anchor="ctr"/>
-          <a:lstStyle/>
-          <a:p>
-            <a:pPr marL="0" indent="0">
+          <a:ln/>
+        </p:spPr>
+        <p:txBody>
+          <a:bodyPr wrap="square" lIns="0" tIns="0" rIns="0" bIns="0" rtlCol="0" anchor="ctr"/>
+          <a:lstStyle/>
+          <a:p>
+            <a:pPr indent="0" marL="0">
               <a:lnSpc>
                 <a:spcPct val="106000"/>
               </a:lnSpc>
@@ -7230,20 +7478,26 @@
                 <a:solidFill>
                   <a:srgbClr val="C9A96E"/>
                 </a:solidFill>
-                <a:latin typeface="Arial" panose="020B0604020202090204" pitchFamily="34" charset="0"/>
-                <a:ea typeface="Arial" panose="020B0604020202090204" pitchFamily="34" charset="-122"/>
-                <a:cs typeface="Arial" panose="020B0604020202090204" pitchFamily="34" charset="-120"/>
+                <a:latin typeface="Arial" pitchFamily="34" charset="0"/>
+                <a:ea typeface="Arial" pitchFamily="34" charset="-122"/>
+                <a:cs typeface="Arial" pitchFamily="34" charset="-120"/>
               </a:rPr>
               <a:t>外 HTTP 内 gRPC　·　</a:t>
             </a:r>
+            <a:pPr indent="0" marL="0">
+              <a:lnSpc>
+                <a:spcPct val="106000"/>
+              </a:lnSpc>
+              <a:buNone/>
+            </a:pPr>
             <a:r>
               <a:rPr lang="en-US" sz="1250" dirty="0">
                 <a:solidFill>
                   <a:srgbClr val="F0F0F0"/>
                 </a:solidFill>
-                <a:latin typeface="Arial" panose="020B0604020202090204" pitchFamily="34" charset="0"/>
-                <a:ea typeface="Arial" panose="020B0604020202090204" pitchFamily="34" charset="-122"/>
-                <a:cs typeface="Arial" panose="020B0604020202090204" pitchFamily="34" charset="-120"/>
+                <a:latin typeface="Arial" pitchFamily="34" charset="0"/>
+                <a:ea typeface="Arial" pitchFamily="34" charset="-122"/>
+                <a:cs typeface="Arial" pitchFamily="34" charset="-120"/>
               </a:rPr>
               <a:t>消息先落 Redis 再入内存时间轮；到点触发交 Sink 投递；ETCD 管集群、Redis 管数据，都不重复造轮子。</a:t>
             </a:r>
@@ -7261,13 +7515,12 @@
 
 <file path=ppt/slides/slide4.xml><?xml version="1.0" encoding="utf-8"?>
 <p:sld xmlns:a="http://schemas.openxmlformats.org/drawingml/2006/main" xmlns:r="http://schemas.openxmlformats.org/officeDocument/2006/relationships" xmlns:p="http://schemas.openxmlformats.org/presentationml/2006/main">
-  <p:cSld>
+  <p:cSld name="Slide 4">
     <p:bg>
       <p:bgPr>
         <a:solidFill>
           <a:srgbClr val="1E1E1E"/>
         </a:solidFill>
-        <a:effectLst/>
       </p:bgPr>
     </p:bg>
     <p:spTree>
@@ -7299,12 +7552,13 @@
             <a:avLst/>
           </a:prstGeom>
           <a:noFill/>
-        </p:spPr>
-        <p:txBody>
-          <a:bodyPr wrap="square" lIns="0" tIns="0" rIns="0" bIns="0" rtlCol="0" anchor="ctr"/>
-          <a:lstStyle/>
-          <a:p>
-            <a:pPr marL="0" indent="0">
+          <a:ln/>
+        </p:spPr>
+        <p:txBody>
+          <a:bodyPr wrap="square" lIns="0" tIns="0" rIns="0" bIns="0" rtlCol="0" anchor="ctr"/>
+          <a:lstStyle/>
+          <a:p>
+            <a:pPr indent="0" marL="0">
               <a:buNone/>
             </a:pPr>
             <a:r>
@@ -7312,9 +7566,9 @@
                 <a:solidFill>
                   <a:srgbClr val="6E6E6E"/>
                 </a:solidFill>
-                <a:latin typeface="Arial" panose="020B0604020202090204" pitchFamily="34" charset="0"/>
-                <a:ea typeface="Arial" panose="020B0604020202090204" pitchFamily="34" charset="-122"/>
-                <a:cs typeface="Arial" panose="020B0604020202090204" pitchFamily="34" charset="-120"/>
+                <a:latin typeface="Arial" pitchFamily="34" charset="0"/>
+                <a:ea typeface="Arial" pitchFamily="34" charset="-122"/>
+                <a:cs typeface="Arial" pitchFamily="34" charset="-120"/>
               </a:rPr>
               <a:t>第 54 节 · When 项目总结与后续规划</a:t>
             </a:r>
@@ -7337,12 +7591,13 @@
             <a:avLst/>
           </a:prstGeom>
           <a:noFill/>
-        </p:spPr>
-        <p:txBody>
-          <a:bodyPr wrap="square" lIns="0" tIns="0" rIns="0" bIns="0" rtlCol="0" anchor="ctr"/>
-          <a:lstStyle/>
-          <a:p>
-            <a:pPr marL="0" indent="0" algn="r">
+          <a:ln/>
+        </p:spPr>
+        <p:txBody>
+          <a:bodyPr wrap="square" lIns="0" tIns="0" rIns="0" bIns="0" rtlCol="0" anchor="ctr"/>
+          <a:lstStyle/>
+          <a:p>
+            <a:pPr algn="r" indent="0" marL="0">
               <a:buNone/>
             </a:pPr>
             <a:r>
@@ -7350,9 +7605,9 @@
                 <a:solidFill>
                   <a:srgbClr val="6E6E6E"/>
                 </a:solidFill>
-                <a:latin typeface="Arial" panose="020B0604020202090204" pitchFamily="34" charset="0"/>
-                <a:ea typeface="Arial" panose="020B0604020202090204" pitchFamily="34" charset="-122"/>
-                <a:cs typeface="Arial" panose="020B0604020202090204" pitchFamily="34" charset="-120"/>
+                <a:latin typeface="Arial" pitchFamily="34" charset="0"/>
+                <a:ea typeface="Arial" pitchFamily="34" charset="-122"/>
+                <a:cs typeface="Arial" pitchFamily="34" charset="-120"/>
               </a:rPr>
               <a:t>4 / 14</a:t>
             </a:r>
@@ -7399,22 +7654,23 @@
             <a:avLst/>
           </a:prstGeom>
           <a:noFill/>
-        </p:spPr>
-        <p:txBody>
-          <a:bodyPr wrap="square" lIns="0" tIns="0" rIns="0" bIns="0" rtlCol="0" anchor="ctr"/>
-          <a:lstStyle/>
-          <a:p>
-            <a:pPr marL="0" indent="0" algn="ctr">
-              <a:buNone/>
-            </a:pPr>
-            <a:r>
-              <a:rPr lang="en-US" sz="1050" b="1" kern="0" spc="100" dirty="0">
+          <a:ln/>
+        </p:spPr>
+        <p:txBody>
+          <a:bodyPr wrap="square" lIns="0" tIns="0" rIns="0" bIns="0" rtlCol="0" anchor="ctr"/>
+          <a:lstStyle/>
+          <a:p>
+            <a:pPr algn="ctr" indent="0" marL="0">
+              <a:buNone/>
+            </a:pPr>
+            <a:r>
+              <a:rPr lang="en-US" sz="1050" b="1" spc="100" kern="0" dirty="0">
                 <a:solidFill>
                   <a:srgbClr val="C9A96E"/>
                 </a:solidFill>
-                <a:latin typeface="Arial" panose="020B0604020202090204" pitchFamily="34" charset="0"/>
-                <a:ea typeface="Arial" panose="020B0604020202090204" pitchFamily="34" charset="-122"/>
-                <a:cs typeface="Arial" panose="020B0604020202090204" pitchFamily="34" charset="-120"/>
+                <a:latin typeface="Arial" pitchFamily="34" charset="0"/>
+                <a:ea typeface="Arial" pitchFamily="34" charset="-122"/>
+                <a:cs typeface="Arial" pitchFamily="34" charset="-120"/>
               </a:rPr>
               <a:t>六大技术决策</a:t>
             </a:r>
@@ -7437,12 +7693,13 @@
             <a:avLst/>
           </a:prstGeom>
           <a:noFill/>
-        </p:spPr>
-        <p:txBody>
-          <a:bodyPr wrap="square" lIns="0" tIns="0" rIns="0" bIns="0" rtlCol="0" anchor="ctr"/>
-          <a:lstStyle/>
-          <a:p>
-            <a:pPr marL="0" indent="0">
+          <a:ln/>
+        </p:spPr>
+        <p:txBody>
+          <a:bodyPr wrap="square" lIns="0" tIns="0" rIns="0" bIns="0" rtlCol="0" anchor="ctr"/>
+          <a:lstStyle/>
+          <a:p>
+            <a:pPr indent="0" marL="0">
               <a:buNone/>
             </a:pPr>
             <a:r>
@@ -7450,9 +7707,9 @@
                 <a:solidFill>
                   <a:srgbClr val="F0F0F0"/>
                 </a:solidFill>
-                <a:latin typeface="Arial" panose="020B0604020202090204" pitchFamily="34" charset="0"/>
-                <a:ea typeface="Arial" panose="020B0604020202090204" pitchFamily="34" charset="-122"/>
-                <a:cs typeface="Arial" panose="020B0604020202090204" pitchFamily="34" charset="-120"/>
+                <a:latin typeface="Arial" pitchFamily="34" charset="0"/>
+                <a:ea typeface="Arial" pitchFamily="34" charset="-122"/>
+                <a:cs typeface="Arial" pitchFamily="34" charset="-120"/>
               </a:rPr>
               <a:t>每个决策都是一次工程取舍</a:t>
             </a:r>
@@ -7486,7 +7743,7 @@
             <a:prstDash val="solid"/>
           </a:ln>
           <a:effectLst>
-            <a:outerShdw blurRad="88900" dist="25400" dir="5400000" algn="bl" rotWithShape="0">
+            <a:outerShdw sx="100000" sy="100000" kx="0" ky="0" algn="bl" rotWithShape="0" blurRad="88900" dist="25400" dir="5400000">
               <a:srgbClr val="000000">
                 <a:alpha val="30000"/>
               </a:srgbClr>
@@ -7509,12 +7766,13 @@
             <a:avLst/>
           </a:prstGeom>
           <a:noFill/>
-        </p:spPr>
-        <p:txBody>
-          <a:bodyPr wrap="square" lIns="0" tIns="0" rIns="0" bIns="0" rtlCol="0" anchor="ctr"/>
-          <a:lstStyle/>
-          <a:p>
-            <a:pPr marL="0" indent="0">
+          <a:ln/>
+        </p:spPr>
+        <p:txBody>
+          <a:bodyPr wrap="square" lIns="0" tIns="0" rIns="0" bIns="0" rtlCol="0" anchor="ctr"/>
+          <a:lstStyle/>
+          <a:p>
+            <a:pPr indent="0" marL="0">
               <a:buNone/>
             </a:pPr>
             <a:r>
@@ -7522,9 +7780,9 @@
                 <a:solidFill>
                   <a:srgbClr val="C9A96E"/>
                 </a:solidFill>
-                <a:latin typeface="Arial" panose="020B0604020202090204" pitchFamily="34" charset="0"/>
-                <a:ea typeface="Arial" panose="020B0604020202090204" pitchFamily="34" charset="-122"/>
-                <a:cs typeface="Arial" panose="020B0604020202090204" pitchFamily="34" charset="-120"/>
+                <a:latin typeface="Arial" pitchFamily="34" charset="0"/>
+                <a:ea typeface="Arial" pitchFamily="34" charset="-122"/>
+                <a:cs typeface="Arial" pitchFamily="34" charset="-120"/>
               </a:rPr>
               <a:t>ETCD 做协调</a:t>
             </a:r>
@@ -7547,12 +7805,13 @@
             <a:avLst/>
           </a:prstGeom>
           <a:noFill/>
+          <a:ln/>
         </p:spPr>
         <p:txBody>
           <a:bodyPr wrap="square" lIns="0" tIns="0" rIns="0" bIns="0" rtlCol="0" anchor="t"/>
           <a:lstStyle/>
           <a:p>
-            <a:pPr marL="0" indent="0">
+            <a:pPr indent="0" marL="0">
               <a:buNone/>
             </a:pPr>
             <a:r>
@@ -7560,9 +7819,9 @@
                 <a:solidFill>
                   <a:srgbClr val="D6D6D6"/>
                 </a:solidFill>
-                <a:latin typeface="Arial" panose="020B0604020202090204" pitchFamily="34" charset="0"/>
-                <a:ea typeface="Arial" panose="020B0604020202090204" pitchFamily="34" charset="-122"/>
-                <a:cs typeface="Arial" panose="020B0604020202090204" pitchFamily="34" charset="-120"/>
+                <a:latin typeface="Arial" pitchFamily="34" charset="0"/>
+                <a:ea typeface="Arial" pitchFamily="34" charset="-122"/>
+                <a:cs typeface="Arial" pitchFamily="34" charset="-120"/>
               </a:rPr>
               <a:t>云原生标准、Lease/Watch 天生适配注册与切换</a:t>
             </a:r>
@@ -7596,7 +7855,7 @@
             <a:prstDash val="solid"/>
           </a:ln>
           <a:effectLst>
-            <a:outerShdw blurRad="88900" dist="25400" dir="5400000" algn="bl" rotWithShape="0">
+            <a:outerShdw sx="100000" sy="100000" kx="0" ky="0" algn="bl" rotWithShape="0" blurRad="88900" dist="25400" dir="5400000">
               <a:srgbClr val="000000">
                 <a:alpha val="30000"/>
               </a:srgbClr>
@@ -7619,12 +7878,13 @@
             <a:avLst/>
           </a:prstGeom>
           <a:noFill/>
-        </p:spPr>
-        <p:txBody>
-          <a:bodyPr wrap="square" lIns="0" tIns="0" rIns="0" bIns="0" rtlCol="0" anchor="ctr"/>
-          <a:lstStyle/>
-          <a:p>
-            <a:pPr marL="0" indent="0">
+          <a:ln/>
+        </p:spPr>
+        <p:txBody>
+          <a:bodyPr wrap="square" lIns="0" tIns="0" rIns="0" bIns="0" rtlCol="0" anchor="ctr"/>
+          <a:lstStyle/>
+          <a:p>
+            <a:pPr indent="0" marL="0">
               <a:buNone/>
             </a:pPr>
             <a:r>
@@ -7632,9 +7892,9 @@
                 <a:solidFill>
                   <a:srgbClr val="C9A96E"/>
                 </a:solidFill>
-                <a:latin typeface="Arial" panose="020B0604020202090204" pitchFamily="34" charset="0"/>
-                <a:ea typeface="Arial" panose="020B0604020202090204" pitchFamily="34" charset="-122"/>
-                <a:cs typeface="Arial" panose="020B0604020202090204" pitchFamily="34" charset="-120"/>
+                <a:latin typeface="Arial" pitchFamily="34" charset="0"/>
+                <a:ea typeface="Arial" pitchFamily="34" charset="-122"/>
+                <a:cs typeface="Arial" pitchFamily="34" charset="-120"/>
               </a:rPr>
               <a:t>Redis 做存储</a:t>
             </a:r>
@@ -7657,12 +7917,13 @@
             <a:avLst/>
           </a:prstGeom>
           <a:noFill/>
+          <a:ln/>
         </p:spPr>
         <p:txBody>
           <a:bodyPr wrap="square" lIns="0" tIns="0" rIns="0" bIns="0" rtlCol="0" anchor="t"/>
           <a:lstStyle/>
           <a:p>
-            <a:pPr marL="0" indent="0">
+            <a:pPr indent="0" marL="0">
               <a:buNone/>
             </a:pPr>
             <a:r>
@@ -7670,9 +7931,9 @@
                 <a:solidFill>
                   <a:srgbClr val="D6D6D6"/>
                 </a:solidFill>
-                <a:latin typeface="Arial" panose="020B0604020202090204" pitchFamily="34" charset="0"/>
-                <a:ea typeface="Arial" panose="020B0604020202090204" pitchFamily="34" charset="-122"/>
-                <a:cs typeface="Arial" panose="020B0604020202090204" pitchFamily="34" charset="-120"/>
+                <a:latin typeface="Arial" pitchFamily="34" charset="0"/>
+                <a:ea typeface="Arial" pitchFamily="34" charset="-122"/>
+                <a:cs typeface="Arial" pitchFamily="34" charset="-120"/>
               </a:rPr>
               <a:t>写快、有 TTL、普及度高；拆小 key 避大 Key</a:t>
             </a:r>
@@ -7706,7 +7967,7 @@
             <a:prstDash val="solid"/>
           </a:ln>
           <a:effectLst>
-            <a:outerShdw blurRad="88900" dist="25400" dir="5400000" algn="bl" rotWithShape="0">
+            <a:outerShdw sx="100000" sy="100000" kx="0" ky="0" algn="bl" rotWithShape="0" blurRad="88900" dist="25400" dir="5400000">
               <a:srgbClr val="000000">
                 <a:alpha val="30000"/>
               </a:srgbClr>
@@ -7729,12 +7990,13 @@
             <a:avLst/>
           </a:prstGeom>
           <a:noFill/>
-        </p:spPr>
-        <p:txBody>
-          <a:bodyPr wrap="square" lIns="0" tIns="0" rIns="0" bIns="0" rtlCol="0" anchor="ctr"/>
-          <a:lstStyle/>
-          <a:p>
-            <a:pPr marL="0" indent="0">
+          <a:ln/>
+        </p:spPr>
+        <p:txBody>
+          <a:bodyPr wrap="square" lIns="0" tIns="0" rIns="0" bIns="0" rtlCol="0" anchor="ctr"/>
+          <a:lstStyle/>
+          <a:p>
+            <a:pPr indent="0" marL="0">
               <a:buNone/>
             </a:pPr>
             <a:r>
@@ -7742,9 +8004,9 @@
                 <a:solidFill>
                   <a:srgbClr val="C9A96E"/>
                 </a:solidFill>
-                <a:latin typeface="Arial" panose="020B0604020202090204" pitchFamily="34" charset="0"/>
-                <a:ea typeface="Arial" panose="020B0604020202090204" pitchFamily="34" charset="-122"/>
-                <a:cs typeface="Arial" panose="020B0604020202090204" pitchFamily="34" charset="-120"/>
+                <a:latin typeface="Arial" pitchFamily="34" charset="0"/>
+                <a:ea typeface="Arial" pitchFamily="34" charset="-122"/>
+                <a:cs typeface="Arial" pitchFamily="34" charset="-120"/>
               </a:rPr>
               <a:t>多层时间轮</a:t>
             </a:r>
@@ -7767,12 +8029,13 @@
             <a:avLst/>
           </a:prstGeom>
           <a:noFill/>
+          <a:ln/>
         </p:spPr>
         <p:txBody>
           <a:bodyPr wrap="square" lIns="0" tIns="0" rIns="0" bIns="0" rtlCol="0" anchor="t"/>
           <a:lstStyle/>
           <a:p>
-            <a:pPr marL="0" indent="0">
+            <a:pPr indent="0" marL="0">
               <a:buNone/>
             </a:pPr>
             <a:r>
@@ -7780,9 +8043,9 @@
                 <a:solidFill>
                   <a:srgbClr val="D6D6D6"/>
                 </a:solidFill>
-                <a:latin typeface="Arial" panose="020B0604020202090204" pitchFamily="34" charset="0"/>
-                <a:ea typeface="Arial" panose="020B0604020202090204" pitchFamily="34" charset="-122"/>
-                <a:cs typeface="Arial" panose="020B0604020202090204" pitchFamily="34" charset="-120"/>
+                <a:latin typeface="Arial" pitchFamily="34" charset="0"/>
+                <a:ea typeface="Arial" pitchFamily="34" charset="-122"/>
+                <a:cs typeface="Arial" pitchFamily="34" charset="-120"/>
               </a:rPr>
               <a:t>O(1) 内存调度，覆盖秒到 30 天</a:t>
             </a:r>
@@ -7816,7 +8079,7 @@
             <a:prstDash val="solid"/>
           </a:ln>
           <a:effectLst>
-            <a:outerShdw blurRad="88900" dist="25400" dir="5400000" algn="bl" rotWithShape="0">
+            <a:outerShdw sx="100000" sy="100000" kx="0" ky="0" algn="bl" rotWithShape="0" blurRad="88900" dist="25400" dir="5400000">
               <a:srgbClr val="000000">
                 <a:alpha val="30000"/>
               </a:srgbClr>
@@ -7839,12 +8102,13 @@
             <a:avLst/>
           </a:prstGeom>
           <a:noFill/>
-        </p:spPr>
-        <p:txBody>
-          <a:bodyPr wrap="square" lIns="0" tIns="0" rIns="0" bIns="0" rtlCol="0" anchor="ctr"/>
-          <a:lstStyle/>
-          <a:p>
-            <a:pPr marL="0" indent="0">
+          <a:ln/>
+        </p:spPr>
+        <p:txBody>
+          <a:bodyPr wrap="square" lIns="0" tIns="0" rIns="0" bIns="0" rtlCol="0" anchor="ctr"/>
+          <a:lstStyle/>
+          <a:p>
+            <a:pPr indent="0" marL="0">
               <a:buNone/>
             </a:pPr>
             <a:r>
@@ -7852,9 +8116,9 @@
                 <a:solidFill>
                   <a:srgbClr val="C9A96E"/>
                 </a:solidFill>
-                <a:latin typeface="Arial" panose="020B0604020202090204" pitchFamily="34" charset="0"/>
-                <a:ea typeface="Arial" panose="020B0604020202090204" pitchFamily="34" charset="-122"/>
-                <a:cs typeface="Arial" panose="020B0604020202090204" pitchFamily="34" charset="-120"/>
+                <a:latin typeface="Arial" pitchFamily="34" charset="0"/>
+                <a:ea typeface="Arial" pitchFamily="34" charset="-122"/>
+                <a:cs typeface="Arial" pitchFamily="34" charset="-120"/>
               </a:rPr>
               <a:t>Master/Slave</a:t>
             </a:r>
@@ -7877,12 +8141,13 @@
             <a:avLst/>
           </a:prstGeom>
           <a:noFill/>
+          <a:ln/>
         </p:spPr>
         <p:txBody>
           <a:bodyPr wrap="square" lIns="0" tIns="0" rIns="0" bIns="0" rtlCol="0" anchor="t"/>
           <a:lstStyle/>
           <a:p>
-            <a:pPr marL="0" indent="0">
+            <a:pPr indent="0" marL="0">
               <a:buNone/>
             </a:pPr>
             <a:r>
@@ -7890,9 +8155,9 @@
                 <a:solidFill>
                   <a:srgbClr val="D6D6D6"/>
                 </a:solidFill>
-                <a:latin typeface="Arial" panose="020B0604020202090204" pitchFamily="34" charset="0"/>
-                <a:ea typeface="Arial" panose="020B0604020202090204" pitchFamily="34" charset="-122"/>
-                <a:cs typeface="Arial" panose="020B0604020202090204" pitchFamily="34" charset="-120"/>
+                <a:latin typeface="Arial" pitchFamily="34" charset="0"/>
+                <a:ea typeface="Arial" pitchFamily="34" charset="-122"/>
+                <a:cs typeface="Arial" pitchFamily="34" charset="-120"/>
               </a:rPr>
               <a:t>要的是快速切换，不是强一致；不上 Raft</a:t>
             </a:r>
@@ -7926,7 +8191,7 @@
             <a:prstDash val="solid"/>
           </a:ln>
           <a:effectLst>
-            <a:outerShdw blurRad="88900" dist="25400" dir="5400000" algn="bl" rotWithShape="0">
+            <a:outerShdw sx="100000" sy="100000" kx="0" ky="0" algn="bl" rotWithShape="0" blurRad="88900" dist="25400" dir="5400000">
               <a:srgbClr val="000000">
                 <a:alpha val="30000"/>
               </a:srgbClr>
@@ -7949,12 +8214,13 @@
             <a:avLst/>
           </a:prstGeom>
           <a:noFill/>
-        </p:spPr>
-        <p:txBody>
-          <a:bodyPr wrap="square" lIns="0" tIns="0" rIns="0" bIns="0" rtlCol="0" anchor="ctr"/>
-          <a:lstStyle/>
-          <a:p>
-            <a:pPr marL="0" indent="0">
+          <a:ln/>
+        </p:spPr>
+        <p:txBody>
+          <a:bodyPr wrap="square" lIns="0" tIns="0" rIns="0" bIns="0" rtlCol="0" anchor="ctr"/>
+          <a:lstStyle/>
+          <a:p>
+            <a:pPr indent="0" marL="0">
               <a:buNone/>
             </a:pPr>
             <a:r>
@@ -7962,9 +8228,9 @@
                 <a:solidFill>
                   <a:srgbClr val="C9A96E"/>
                 </a:solidFill>
-                <a:latin typeface="Arial" panose="020B0604020202090204" pitchFamily="34" charset="0"/>
-                <a:ea typeface="Arial" panose="020B0604020202090204" pitchFamily="34" charset="-122"/>
-                <a:cs typeface="Arial" panose="020B0604020202090204" pitchFamily="34" charset="-120"/>
+                <a:latin typeface="Arial" pitchFamily="34" charset="0"/>
+                <a:ea typeface="Arial" pitchFamily="34" charset="-122"/>
+                <a:cs typeface="Arial" pitchFamily="34" charset="-120"/>
               </a:rPr>
               <a:t>外 HTTP 内 gRPC</a:t>
             </a:r>
@@ -7987,12 +8253,13 @@
             <a:avLst/>
           </a:prstGeom>
           <a:noFill/>
+          <a:ln/>
         </p:spPr>
         <p:txBody>
           <a:bodyPr wrap="square" lIns="0" tIns="0" rIns="0" bIns="0" rtlCol="0" anchor="t"/>
           <a:lstStyle/>
           <a:p>
-            <a:pPr marL="0" indent="0">
+            <a:pPr indent="0" marL="0">
               <a:buNone/>
             </a:pPr>
             <a:r>
@@ -8000,9 +8267,9 @@
                 <a:solidFill>
                   <a:srgbClr val="D6D6D6"/>
                 </a:solidFill>
-                <a:latin typeface="Arial" panose="020B0604020202090204" pitchFamily="34" charset="0"/>
-                <a:ea typeface="Arial" panose="020B0604020202090204" pitchFamily="34" charset="-122"/>
-                <a:cs typeface="Arial" panose="020B0604020202090204" pitchFamily="34" charset="-120"/>
+                <a:latin typeface="Arial" pitchFamily="34" charset="0"/>
+                <a:ea typeface="Arial" pitchFamily="34" charset="-122"/>
+                <a:cs typeface="Arial" pitchFamily="34" charset="-120"/>
               </a:rPr>
               <a:t>外接门槛最低，内传高效强类型</a:t>
             </a:r>
@@ -8036,7 +8303,7 @@
             <a:prstDash val="solid"/>
           </a:ln>
           <a:effectLst>
-            <a:outerShdw blurRad="88900" dist="25400" dir="5400000" algn="bl" rotWithShape="0">
+            <a:outerShdw sx="100000" sy="100000" kx="0" ky="0" algn="bl" rotWithShape="0" blurRad="88900" dist="25400" dir="5400000">
               <a:srgbClr val="000000">
                 <a:alpha val="30000"/>
               </a:srgbClr>
@@ -8059,12 +8326,13 @@
             <a:avLst/>
           </a:prstGeom>
           <a:noFill/>
-        </p:spPr>
-        <p:txBody>
-          <a:bodyPr wrap="square" lIns="0" tIns="0" rIns="0" bIns="0" rtlCol="0" anchor="ctr"/>
-          <a:lstStyle/>
-          <a:p>
-            <a:pPr marL="0" indent="0">
+          <a:ln/>
+        </p:spPr>
+        <p:txBody>
+          <a:bodyPr wrap="square" lIns="0" tIns="0" rIns="0" bIns="0" rtlCol="0" anchor="ctr"/>
+          <a:lstStyle/>
+          <a:p>
+            <a:pPr indent="0" marL="0">
               <a:buNone/>
             </a:pPr>
             <a:r>
@@ -8072,9 +8340,9 @@
                 <a:solidFill>
                   <a:srgbClr val="C9A96E"/>
                 </a:solidFill>
-                <a:latin typeface="Arial" panose="020B0604020202090204" pitchFamily="34" charset="0"/>
-                <a:ea typeface="Arial" panose="020B0604020202090204" pitchFamily="34" charset="-122"/>
-                <a:cs typeface="Arial" panose="020B0604020202090204" pitchFamily="34" charset="-120"/>
+                <a:latin typeface="Arial" pitchFamily="34" charset="0"/>
+                <a:ea typeface="Arial" pitchFamily="34" charset="-122"/>
+                <a:cs typeface="Arial" pitchFamily="34" charset="-120"/>
               </a:rPr>
               <a:t>Java</a:t>
             </a:r>
@@ -8097,12 +8365,13 @@
             <a:avLst/>
           </a:prstGeom>
           <a:noFill/>
+          <a:ln/>
         </p:spPr>
         <p:txBody>
           <a:bodyPr wrap="square" lIns="0" tIns="0" rIns="0" bIns="0" rtlCol="0" anchor="t"/>
           <a:lstStyle/>
           <a:p>
-            <a:pPr marL="0" indent="0">
+            <a:pPr indent="0" marL="0">
               <a:buNone/>
             </a:pPr>
             <a:r>
@@ -8110,9 +8379,9 @@
                 <a:solidFill>
                   <a:srgbClr val="D6D6D6"/>
                 </a:solidFill>
-                <a:latin typeface="Arial" panose="020B0604020202090204" pitchFamily="34" charset="0"/>
-                <a:ea typeface="Arial" panose="020B0604020202090204" pitchFamily="34" charset="-122"/>
-                <a:cs typeface="Arial" panose="020B0604020202090204" pitchFamily="34" charset="-120"/>
+                <a:latin typeface="Arial" pitchFamily="34" charset="0"/>
+                <a:ea typeface="Arial" pitchFamily="34" charset="-122"/>
+                <a:cs typeface="Arial" pitchFamily="34" charset="-120"/>
               </a:rPr>
               <a:t>中间件生态成熟、运维与人才现实最优</a:t>
             </a:r>
@@ -8162,12 +8431,13 @@
             <a:avLst/>
           </a:prstGeom>
           <a:noFill/>
-        </p:spPr>
-        <p:txBody>
-          <a:bodyPr wrap="square" lIns="0" tIns="0" rIns="0" bIns="0" rtlCol="0" anchor="ctr"/>
-          <a:lstStyle/>
-          <a:p>
-            <a:pPr marL="0" indent="0">
+          <a:ln/>
+        </p:spPr>
+        <p:txBody>
+          <a:bodyPr wrap="square" lIns="0" tIns="0" rIns="0" bIns="0" rtlCol="0" anchor="ctr"/>
+          <a:lstStyle/>
+          <a:p>
+            <a:pPr indent="0" marL="0">
               <a:lnSpc>
                 <a:spcPct val="106000"/>
               </a:lnSpc>
@@ -8178,20 +8448,26 @@
                 <a:solidFill>
                   <a:srgbClr val="C9A96E"/>
                 </a:solidFill>
-                <a:latin typeface="Arial" panose="020B0604020202090204" pitchFamily="34" charset="0"/>
-                <a:ea typeface="Arial" panose="020B0604020202090204" pitchFamily="34" charset="-122"/>
-                <a:cs typeface="Arial" panose="020B0604020202090204" pitchFamily="34" charset="-120"/>
+                <a:latin typeface="Arial" pitchFamily="34" charset="0"/>
+                <a:ea typeface="Arial" pitchFamily="34" charset="-122"/>
+                <a:cs typeface="Arial" pitchFamily="34" charset="-120"/>
               </a:rPr>
               <a:t>共同底色：</a:t>
             </a:r>
+            <a:pPr indent="0" marL="0">
+              <a:lnSpc>
+                <a:spcPct val="106000"/>
+              </a:lnSpc>
+              <a:buNone/>
+            </a:pPr>
             <a:r>
               <a:rPr lang="en-US" sz="1250" dirty="0">
                 <a:solidFill>
                   <a:srgbClr val="F0F0F0"/>
                 </a:solidFill>
-                <a:latin typeface="Arial" panose="020B0604020202090204" pitchFamily="34" charset="0"/>
-                <a:ea typeface="Arial" panose="020B0604020202090204" pitchFamily="34" charset="-122"/>
-                <a:cs typeface="Arial" panose="020B0604020202090204" pitchFamily="34" charset="-120"/>
+                <a:latin typeface="Arial" pitchFamily="34" charset="0"/>
+                <a:ea typeface="Arial" pitchFamily="34" charset="-122"/>
+                <a:cs typeface="Arial" pitchFamily="34" charset="-120"/>
               </a:rPr>
               <a:t>能借成熟组件就不自造、状态外置到 Redis、按场景选型不追理论完美——简单够用胜过复杂完美。</a:t>
             </a:r>
@@ -8209,13 +8485,12 @@
 
 <file path=ppt/slides/slide5.xml><?xml version="1.0" encoding="utf-8"?>
 <p:sld xmlns:a="http://schemas.openxmlformats.org/drawingml/2006/main" xmlns:r="http://schemas.openxmlformats.org/officeDocument/2006/relationships" xmlns:p="http://schemas.openxmlformats.org/presentationml/2006/main">
-  <p:cSld>
+  <p:cSld name="Slide 5">
     <p:bg>
       <p:bgPr>
         <a:solidFill>
           <a:srgbClr val="1E1E1E"/>
         </a:solidFill>
-        <a:effectLst/>
       </p:bgPr>
     </p:bg>
     <p:spTree>
@@ -8247,12 +8522,13 @@
             <a:avLst/>
           </a:prstGeom>
           <a:noFill/>
-        </p:spPr>
-        <p:txBody>
-          <a:bodyPr wrap="square" lIns="0" tIns="0" rIns="0" bIns="0" rtlCol="0" anchor="ctr"/>
-          <a:lstStyle/>
-          <a:p>
-            <a:pPr marL="0" indent="0">
+          <a:ln/>
+        </p:spPr>
+        <p:txBody>
+          <a:bodyPr wrap="square" lIns="0" tIns="0" rIns="0" bIns="0" rtlCol="0" anchor="ctr"/>
+          <a:lstStyle/>
+          <a:p>
+            <a:pPr indent="0" marL="0">
               <a:buNone/>
             </a:pPr>
             <a:r>
@@ -8260,9 +8536,9 @@
                 <a:solidFill>
                   <a:srgbClr val="6E6E6E"/>
                 </a:solidFill>
-                <a:latin typeface="Arial" panose="020B0604020202090204" pitchFamily="34" charset="0"/>
-                <a:ea typeface="Arial" panose="020B0604020202090204" pitchFamily="34" charset="-122"/>
-                <a:cs typeface="Arial" panose="020B0604020202090204" pitchFamily="34" charset="-120"/>
+                <a:latin typeface="Arial" pitchFamily="34" charset="0"/>
+                <a:ea typeface="Arial" pitchFamily="34" charset="-122"/>
+                <a:cs typeface="Arial" pitchFamily="34" charset="-120"/>
               </a:rPr>
               <a:t>第 54 节 · When 项目总结与后续规划</a:t>
             </a:r>
@@ -8285,12 +8561,13 @@
             <a:avLst/>
           </a:prstGeom>
           <a:noFill/>
-        </p:spPr>
-        <p:txBody>
-          <a:bodyPr wrap="square" lIns="0" tIns="0" rIns="0" bIns="0" rtlCol="0" anchor="ctr"/>
-          <a:lstStyle/>
-          <a:p>
-            <a:pPr marL="0" indent="0" algn="r">
+          <a:ln/>
+        </p:spPr>
+        <p:txBody>
+          <a:bodyPr wrap="square" lIns="0" tIns="0" rIns="0" bIns="0" rtlCol="0" anchor="ctr"/>
+          <a:lstStyle/>
+          <a:p>
+            <a:pPr algn="r" indent="0" marL="0">
               <a:buNone/>
             </a:pPr>
             <a:r>
@@ -8298,9 +8575,9 @@
                 <a:solidFill>
                   <a:srgbClr val="6E6E6E"/>
                 </a:solidFill>
-                <a:latin typeface="Arial" panose="020B0604020202090204" pitchFamily="34" charset="0"/>
-                <a:ea typeface="Arial" panose="020B0604020202090204" pitchFamily="34" charset="-122"/>
-                <a:cs typeface="Arial" panose="020B0604020202090204" pitchFamily="34" charset="-120"/>
+                <a:latin typeface="Arial" pitchFamily="34" charset="0"/>
+                <a:ea typeface="Arial" pitchFamily="34" charset="-122"/>
+                <a:cs typeface="Arial" pitchFamily="34" charset="-120"/>
               </a:rPr>
               <a:t>5 / 14</a:t>
             </a:r>
@@ -8347,22 +8624,23 @@
             <a:avLst/>
           </a:prstGeom>
           <a:noFill/>
-        </p:spPr>
-        <p:txBody>
-          <a:bodyPr wrap="square" lIns="0" tIns="0" rIns="0" bIns="0" rtlCol="0" anchor="ctr"/>
-          <a:lstStyle/>
-          <a:p>
-            <a:pPr marL="0" indent="0" algn="ctr">
-              <a:buNone/>
-            </a:pPr>
-            <a:r>
-              <a:rPr lang="en-US" sz="1050" b="1" kern="0" spc="100" dirty="0">
+          <a:ln/>
+        </p:spPr>
+        <p:txBody>
+          <a:bodyPr wrap="square" lIns="0" tIns="0" rIns="0" bIns="0" rtlCol="0" anchor="ctr"/>
+          <a:lstStyle/>
+          <a:p>
+            <a:pPr algn="ctr" indent="0" marL="0">
+              <a:buNone/>
+            </a:pPr>
+            <a:r>
+              <a:rPr lang="en-US" sz="1050" b="1" spc="100" kern="0" dirty="0">
                 <a:solidFill>
                   <a:srgbClr val="C9A96E"/>
                 </a:solidFill>
-                <a:latin typeface="Arial" panose="020B0604020202090204" pitchFamily="34" charset="0"/>
-                <a:ea typeface="Arial" panose="020B0604020202090204" pitchFamily="34" charset="-122"/>
-                <a:cs typeface="Arial" panose="020B0604020202090204" pitchFamily="34" charset="-120"/>
+                <a:latin typeface="Arial" pitchFamily="34" charset="0"/>
+                <a:ea typeface="Arial" pitchFamily="34" charset="-122"/>
+                <a:cs typeface="Arial" pitchFamily="34" charset="-120"/>
               </a:rPr>
               <a:t>硬指标兑现</a:t>
             </a:r>
@@ -8385,12 +8663,13 @@
             <a:avLst/>
           </a:prstGeom>
           <a:noFill/>
-        </p:spPr>
-        <p:txBody>
-          <a:bodyPr wrap="square" lIns="0" tIns="0" rIns="0" bIns="0" rtlCol="0" anchor="ctr"/>
-          <a:lstStyle/>
-          <a:p>
-            <a:pPr marL="0" indent="0">
+          <a:ln/>
+        </p:spPr>
+        <p:txBody>
+          <a:bodyPr wrap="square" lIns="0" tIns="0" rIns="0" bIns="0" rtlCol="0" anchor="ctr"/>
+          <a:lstStyle/>
+          <a:p>
+            <a:pPr indent="0" marL="0">
               <a:buNone/>
             </a:pPr>
             <a:r>
@@ -8398,9 +8677,9 @@
                 <a:solidFill>
                   <a:srgbClr val="F0F0F0"/>
                 </a:solidFill>
-                <a:latin typeface="Arial" panose="020B0604020202090204" pitchFamily="34" charset="0"/>
-                <a:ea typeface="Arial" panose="020B0604020202090204" pitchFamily="34" charset="-122"/>
-                <a:cs typeface="Arial" panose="020B0604020202090204" pitchFamily="34" charset="-120"/>
+                <a:latin typeface="Arial" pitchFamily="34" charset="0"/>
+                <a:ea typeface="Arial" pitchFamily="34" charset="-122"/>
+                <a:cs typeface="Arial" pitchFamily="34" charset="-120"/>
               </a:rPr>
               <a:t>“生产可用”不是口号，是可验证的断言</a:t>
             </a:r>
@@ -8434,7 +8713,7 @@
             <a:prstDash val="solid"/>
           </a:ln>
           <a:effectLst>
-            <a:outerShdw blurRad="88900" dist="25400" dir="5400000" algn="bl" rotWithShape="0">
+            <a:outerShdw sx="100000" sy="100000" kx="0" ky="0" algn="bl" rotWithShape="0" blurRad="88900" dist="25400" dir="5400000">
               <a:srgbClr val="000000">
                 <a:alpha val="30000"/>
               </a:srgbClr>
@@ -8457,12 +8736,13 @@
             <a:avLst/>
           </a:prstGeom>
           <a:noFill/>
-        </p:spPr>
-        <p:txBody>
-          <a:bodyPr wrap="square" lIns="0" tIns="0" rIns="0" bIns="0" rtlCol="0" anchor="ctr"/>
-          <a:lstStyle/>
-          <a:p>
-            <a:pPr marL="0" indent="0" algn="ctr">
+          <a:ln/>
+        </p:spPr>
+        <p:txBody>
+          <a:bodyPr wrap="square" lIns="0" tIns="0" rIns="0" bIns="0" rtlCol="0" anchor="ctr"/>
+          <a:lstStyle/>
+          <a:p>
+            <a:pPr algn="ctr" indent="0" marL="0">
               <a:buNone/>
             </a:pPr>
             <a:r>
@@ -8470,9 +8750,9 @@
                 <a:solidFill>
                   <a:srgbClr val="7FB08A"/>
                 </a:solidFill>
-                <a:latin typeface="Arial" panose="020B0604020202090204" pitchFamily="34" charset="0"/>
-                <a:ea typeface="Arial" panose="020B0604020202090204" pitchFamily="34" charset="-122"/>
-                <a:cs typeface="Arial" panose="020B0604020202090204" pitchFamily="34" charset="-120"/>
+                <a:latin typeface="Arial" pitchFamily="34" charset="0"/>
+                <a:ea typeface="Arial" pitchFamily="34" charset="-122"/>
+                <a:cs typeface="Arial" pitchFamily="34" charset="-120"/>
               </a:rPr>
               <a:t>不丢消息</a:t>
             </a:r>
@@ -8495,12 +8775,13 @@
             <a:avLst/>
           </a:prstGeom>
           <a:noFill/>
+          <a:ln/>
         </p:spPr>
         <p:txBody>
           <a:bodyPr wrap="square" lIns="0" tIns="0" rIns="0" bIns="0" rtlCol="0" anchor="t"/>
           <a:lstStyle/>
           <a:p>
-            <a:pPr marL="0" indent="0" algn="ctr">
+            <a:pPr algn="ctr" indent="0" marL="0">
               <a:lnSpc>
                 <a:spcPct val="110000"/>
               </a:lnSpc>
@@ -8511,9 +8792,9 @@
                 <a:solidFill>
                   <a:srgbClr val="D6D6D6"/>
                 </a:solidFill>
-                <a:latin typeface="Arial" panose="020B0604020202090204" pitchFamily="34" charset="0"/>
-                <a:ea typeface="Arial" panose="020B0604020202090204" pitchFamily="34" charset="-122"/>
-                <a:cs typeface="Arial" panose="020B0604020202090204" pitchFamily="34" charset="-120"/>
+                <a:latin typeface="Arial" pitchFamily="34" charset="0"/>
+                <a:ea typeface="Arial" pitchFamily="34" charset="-122"/>
+                <a:cs typeface="Arial" pitchFamily="34" charset="-120"/>
               </a:rPr>
               <a:t>杀 Master，已落库消息一条不丢</a:t>
             </a:r>
@@ -8547,7 +8828,7 @@
             <a:prstDash val="solid"/>
           </a:ln>
           <a:effectLst>
-            <a:outerShdw blurRad="88900" dist="25400" dir="5400000" algn="bl" rotWithShape="0">
+            <a:outerShdw sx="100000" sy="100000" kx="0" ky="0" algn="bl" rotWithShape="0" blurRad="88900" dist="25400" dir="5400000">
               <a:srgbClr val="000000">
                 <a:alpha val="30000"/>
               </a:srgbClr>
@@ -8570,12 +8851,13 @@
             <a:avLst/>
           </a:prstGeom>
           <a:noFill/>
-        </p:spPr>
-        <p:txBody>
-          <a:bodyPr wrap="square" lIns="0" tIns="0" rIns="0" bIns="0" rtlCol="0" anchor="ctr"/>
-          <a:lstStyle/>
-          <a:p>
-            <a:pPr marL="0" indent="0" algn="ctr">
+          <a:ln/>
+        </p:spPr>
+        <p:txBody>
+          <a:bodyPr wrap="square" lIns="0" tIns="0" rIns="0" bIns="0" rtlCol="0" anchor="ctr"/>
+          <a:lstStyle/>
+          <a:p>
+            <a:pPr algn="ctr" indent="0" marL="0">
               <a:buNone/>
             </a:pPr>
             <a:r>
@@ -8583,9 +8865,9 @@
                 <a:solidFill>
                   <a:srgbClr val="C9A96E"/>
                 </a:solidFill>
-                <a:latin typeface="Arial" panose="020B0604020202090204" pitchFamily="34" charset="0"/>
-                <a:ea typeface="Arial" panose="020B0604020202090204" pitchFamily="34" charset="-122"/>
-                <a:cs typeface="Arial" panose="020B0604020202090204" pitchFamily="34" charset="-120"/>
+                <a:latin typeface="Arial" pitchFamily="34" charset="0"/>
+                <a:ea typeface="Arial" pitchFamily="34" charset="-122"/>
+                <a:cs typeface="Arial" pitchFamily="34" charset="-120"/>
               </a:rPr>
               <a:t>10 秒切换</a:t>
             </a:r>
@@ -8608,12 +8890,13 @@
             <a:avLst/>
           </a:prstGeom>
           <a:noFill/>
+          <a:ln/>
         </p:spPr>
         <p:txBody>
           <a:bodyPr wrap="square" lIns="0" tIns="0" rIns="0" bIns="0" rtlCol="0" anchor="t"/>
           <a:lstStyle/>
           <a:p>
-            <a:pPr marL="0" indent="0" algn="ctr">
+            <a:pPr algn="ctr" indent="0" marL="0">
               <a:lnSpc>
                 <a:spcPct val="110000"/>
               </a:lnSpc>
@@ -8624,9 +8907,9 @@
                 <a:solidFill>
                   <a:srgbClr val="D6D6D6"/>
                 </a:solidFill>
-                <a:latin typeface="Arial" panose="020B0604020202090204" pitchFamily="34" charset="0"/>
-                <a:ea typeface="Arial" panose="020B0604020202090204" pitchFamily="34" charset="-122"/>
-                <a:cs typeface="Arial" panose="020B0604020202090204" pitchFamily="34" charset="-120"/>
+                <a:latin typeface="Arial" pitchFamily="34" charset="0"/>
+                <a:ea typeface="Arial" pitchFamily="34" charset="-122"/>
+                <a:cs typeface="Arial" pitchFamily="34" charset="-120"/>
               </a:rPr>
               <a:t>故障到新 Master 接管 &lt; 10s</a:t>
             </a:r>
@@ -8660,7 +8943,7 @@
             <a:prstDash val="solid"/>
           </a:ln>
           <a:effectLst>
-            <a:outerShdw blurRad="88900" dist="25400" dir="5400000" algn="bl" rotWithShape="0">
+            <a:outerShdw sx="100000" sy="100000" kx="0" ky="0" algn="bl" rotWithShape="0" blurRad="88900" dist="25400" dir="5400000">
               <a:srgbClr val="000000">
                 <a:alpha val="30000"/>
               </a:srgbClr>
@@ -8683,12 +8966,13 @@
             <a:avLst/>
           </a:prstGeom>
           <a:noFill/>
-        </p:spPr>
-        <p:txBody>
-          <a:bodyPr wrap="square" lIns="0" tIns="0" rIns="0" bIns="0" rtlCol="0" anchor="ctr"/>
-          <a:lstStyle/>
-          <a:p>
-            <a:pPr marL="0" indent="0" algn="ctr">
+          <a:ln/>
+        </p:spPr>
+        <p:txBody>
+          <a:bodyPr wrap="square" lIns="0" tIns="0" rIns="0" bIns="0" rtlCol="0" anchor="ctr"/>
+          <a:lstStyle/>
+          <a:p>
+            <a:pPr algn="ctr" indent="0" marL="0">
               <a:buNone/>
             </a:pPr>
             <a:r>
@@ -8696,9 +8980,9 @@
                 <a:solidFill>
                   <a:srgbClr val="C9A96E"/>
                 </a:solidFill>
-                <a:latin typeface="Arial" panose="020B0604020202090204" pitchFamily="34" charset="0"/>
-                <a:ea typeface="Arial" panose="020B0604020202090204" pitchFamily="34" charset="-122"/>
-                <a:cs typeface="Arial" panose="020B0604020202090204" pitchFamily="34" charset="-120"/>
+                <a:latin typeface="Arial" pitchFamily="34" charset="0"/>
+                <a:ea typeface="Arial" pitchFamily="34" charset="-122"/>
+                <a:cs typeface="Arial" pitchFamily="34" charset="-120"/>
               </a:rPr>
               <a:t>投递精度</a:t>
             </a:r>
@@ -8721,12 +9005,13 @@
             <a:avLst/>
           </a:prstGeom>
           <a:noFill/>
+          <a:ln/>
         </p:spPr>
         <p:txBody>
           <a:bodyPr wrap="square" lIns="0" tIns="0" rIns="0" bIns="0" rtlCol="0" anchor="t"/>
           <a:lstStyle/>
           <a:p>
-            <a:pPr marL="0" indent="0" algn="ctr">
+            <a:pPr algn="ctr" indent="0" marL="0">
               <a:lnSpc>
                 <a:spcPct val="110000"/>
               </a:lnSpc>
@@ -8737,9 +9022,9 @@
                 <a:solidFill>
                   <a:srgbClr val="D6D6D6"/>
                 </a:solidFill>
-                <a:latin typeface="Arial" panose="020B0604020202090204" pitchFamily="34" charset="0"/>
-                <a:ea typeface="Arial" panose="020B0604020202090204" pitchFamily="34" charset="-122"/>
-                <a:cs typeface="Arial" panose="020B0604020202090204" pitchFamily="34" charset="-120"/>
+                <a:latin typeface="Arial" pitchFamily="34" charset="0"/>
+                <a:ea typeface="Arial" pitchFamily="34" charset="-122"/>
+                <a:cs typeface="Arial" pitchFamily="34" charset="-120"/>
               </a:rPr>
               <a:t>到期延迟 P99 在阈值内</a:t>
             </a:r>
@@ -8773,7 +9058,7 @@
             <a:prstDash val="solid"/>
           </a:ln>
           <a:effectLst>
-            <a:outerShdw blurRad="88900" dist="25400" dir="5400000" algn="bl" rotWithShape="0">
+            <a:outerShdw sx="100000" sy="100000" kx="0" ky="0" algn="bl" rotWithShape="0" blurRad="88900" dist="25400" dir="5400000">
               <a:srgbClr val="000000">
                 <a:alpha val="30000"/>
               </a:srgbClr>
@@ -8796,12 +9081,13 @@
             <a:avLst/>
           </a:prstGeom>
           <a:noFill/>
-        </p:spPr>
-        <p:txBody>
-          <a:bodyPr wrap="square" lIns="0" tIns="0" rIns="0" bIns="0" rtlCol="0" anchor="ctr"/>
-          <a:lstStyle/>
-          <a:p>
-            <a:pPr marL="0" indent="0" algn="ctr">
+          <a:ln/>
+        </p:spPr>
+        <p:txBody>
+          <a:bodyPr wrap="square" lIns="0" tIns="0" rIns="0" bIns="0" rtlCol="0" anchor="ctr"/>
+          <a:lstStyle/>
+          <a:p>
+            <a:pPr algn="ctr" indent="0" marL="0">
               <a:buNone/>
             </a:pPr>
             <a:r>
@@ -8809,9 +9095,9 @@
                 <a:solidFill>
                   <a:srgbClr val="7FB08A"/>
                 </a:solidFill>
-                <a:latin typeface="Arial" panose="020B0604020202090204" pitchFamily="34" charset="0"/>
-                <a:ea typeface="Arial" panose="020B0604020202090204" pitchFamily="34" charset="-122"/>
-                <a:cs typeface="Arial" panose="020B0604020202090204" pitchFamily="34" charset="-120"/>
+                <a:latin typeface="Arial" pitchFamily="34" charset="0"/>
+                <a:ea typeface="Arial" pitchFamily="34" charset="-122"/>
+                <a:cs typeface="Arial" pitchFamily="34" charset="-120"/>
               </a:rPr>
               <a:t>规避大 Key</a:t>
             </a:r>
@@ -8834,12 +9120,13 @@
             <a:avLst/>
           </a:prstGeom>
           <a:noFill/>
+          <a:ln/>
         </p:spPr>
         <p:txBody>
           <a:bodyPr wrap="square" lIns="0" tIns="0" rIns="0" bIns="0" rtlCol="0" anchor="t"/>
           <a:lstStyle/>
           <a:p>
-            <a:pPr marL="0" indent="0" algn="ctr">
+            <a:pPr algn="ctr" indent="0" marL="0">
               <a:lnSpc>
                 <a:spcPct val="110000"/>
               </a:lnSpc>
@@ -8850,9 +9137,9 @@
                 <a:solidFill>
                   <a:srgbClr val="D6D6D6"/>
                 </a:solidFill>
-                <a:latin typeface="Arial" panose="020B0604020202090204" pitchFamily="34" charset="0"/>
-                <a:ea typeface="Arial" panose="020B0604020202090204" pitchFamily="34" charset="-122"/>
-                <a:cs typeface="Arial" panose="020B0604020202090204" pitchFamily="34" charset="-120"/>
+                <a:latin typeface="Arial" pitchFamily="34" charset="0"/>
+                <a:ea typeface="Arial" pitchFamily="34" charset="-122"/>
+                <a:cs typeface="Arial" pitchFamily="34" charset="-120"/>
               </a:rPr>
               <a:t>每条消息独立小 key，不用 ZSet</a:t>
             </a:r>
@@ -8886,7 +9173,7 @@
             <a:prstDash val="solid"/>
           </a:ln>
           <a:effectLst>
-            <a:outerShdw blurRad="88900" dist="25400" dir="5400000" algn="bl" rotWithShape="0">
+            <a:outerShdw sx="100000" sy="100000" kx="0" ky="0" algn="bl" rotWithShape="0" blurRad="88900" dist="25400" dir="5400000">
               <a:srgbClr val="000000">
                 <a:alpha val="30000"/>
               </a:srgbClr>
@@ -8909,12 +9196,13 @@
             <a:avLst/>
           </a:prstGeom>
           <a:noFill/>
-        </p:spPr>
-        <p:txBody>
-          <a:bodyPr wrap="square" lIns="0" tIns="0" rIns="0" bIns="0" rtlCol="0" anchor="ctr"/>
-          <a:lstStyle/>
-          <a:p>
-            <a:pPr marL="0" indent="0" algn="ctr">
+          <a:ln/>
+        </p:spPr>
+        <p:txBody>
+          <a:bodyPr wrap="square" lIns="0" tIns="0" rIns="0" bIns="0" rtlCol="0" anchor="ctr"/>
+          <a:lstStyle/>
+          <a:p>
+            <a:pPr algn="ctr" indent="0" marL="0">
               <a:buNone/>
             </a:pPr>
             <a:r>
@@ -8922,9 +9210,9 @@
                 <a:solidFill>
                   <a:srgbClr val="7FA8C9"/>
                 </a:solidFill>
-                <a:latin typeface="Arial" panose="020B0604020202090204" pitchFamily="34" charset="0"/>
-                <a:ea typeface="Arial" panose="020B0604020202090204" pitchFamily="34" charset="-122"/>
-                <a:cs typeface="Arial" panose="020B0604020202090204" pitchFamily="34" charset="-120"/>
+                <a:latin typeface="Arial" pitchFamily="34" charset="0"/>
+                <a:ea typeface="Arial" pitchFamily="34" charset="-122"/>
+                <a:cs typeface="Arial" pitchFamily="34" charset="-120"/>
               </a:rPr>
               <a:t>至少一次</a:t>
             </a:r>
@@ -8947,12 +9235,13 @@
             <a:avLst/>
           </a:prstGeom>
           <a:noFill/>
+          <a:ln/>
         </p:spPr>
         <p:txBody>
           <a:bodyPr wrap="square" lIns="0" tIns="0" rIns="0" bIns="0" rtlCol="0" anchor="t"/>
           <a:lstStyle/>
           <a:p>
-            <a:pPr marL="0" indent="0" algn="ctr">
+            <a:pPr algn="ctr" indent="0" marL="0">
               <a:lnSpc>
                 <a:spcPct val="110000"/>
               </a:lnSpc>
@@ -8963,9 +9252,9 @@
                 <a:solidFill>
                   <a:srgbClr val="D6D6D6"/>
                 </a:solidFill>
-                <a:latin typeface="Arial" panose="020B0604020202090204" pitchFamily="34" charset="0"/>
-                <a:ea typeface="Arial" panose="020B0604020202090204" pitchFamily="34" charset="-122"/>
-                <a:cs typeface="Arial" panose="020B0604020202090204" pitchFamily="34" charset="-120"/>
+                <a:latin typeface="Arial" pitchFamily="34" charset="0"/>
+                <a:ea typeface="Arial" pitchFamily="34" charset="-122"/>
+                <a:cs typeface="Arial" pitchFamily="34" charset="-120"/>
               </a:rPr>
               <a:t>不丢、可能重复 + 下游幂等</a:t>
             </a:r>
@@ -8999,7 +9288,7 @@
             <a:prstDash val="solid"/>
           </a:ln>
           <a:effectLst>
-            <a:outerShdw blurRad="88900" dist="25400" dir="5400000" algn="bl" rotWithShape="0">
+            <a:outerShdw sx="100000" sy="100000" kx="0" ky="0" algn="bl" rotWithShape="0" blurRad="88900" dist="25400" dir="5400000">
               <a:srgbClr val="000000">
                 <a:alpha val="30000"/>
               </a:srgbClr>
@@ -9022,12 +9311,13 @@
             <a:avLst/>
           </a:prstGeom>
           <a:noFill/>
-        </p:spPr>
-        <p:txBody>
-          <a:bodyPr wrap="square" lIns="0" tIns="0" rIns="0" bIns="0" rtlCol="0" anchor="ctr"/>
-          <a:lstStyle/>
-          <a:p>
-            <a:pPr marL="0" indent="0" algn="ctr">
+          <a:ln/>
+        </p:spPr>
+        <p:txBody>
+          <a:bodyPr wrap="square" lIns="0" tIns="0" rIns="0" bIns="0" rtlCol="0" anchor="ctr"/>
+          <a:lstStyle/>
+          <a:p>
+            <a:pPr algn="ctr" indent="0" marL="0">
               <a:buNone/>
             </a:pPr>
             <a:r>
@@ -9035,9 +9325,9 @@
                 <a:solidFill>
                   <a:srgbClr val="7FA8C9"/>
                 </a:solidFill>
-                <a:latin typeface="Arial" panose="020B0604020202090204" pitchFamily="34" charset="0"/>
-                <a:ea typeface="Arial" panose="020B0604020202090204" pitchFamily="34" charset="-122"/>
-                <a:cs typeface="Arial" panose="020B0604020202090204" pitchFamily="34" charset="-120"/>
+                <a:latin typeface="Arial" pitchFamily="34" charset="0"/>
+                <a:ea typeface="Arial" pitchFamily="34" charset="-122"/>
+                <a:cs typeface="Arial" pitchFamily="34" charset="-120"/>
               </a:rPr>
               <a:t>一键部署</a:t>
             </a:r>
@@ -9060,12 +9350,13 @@
             <a:avLst/>
           </a:prstGeom>
           <a:noFill/>
+          <a:ln/>
         </p:spPr>
         <p:txBody>
           <a:bodyPr wrap="square" lIns="0" tIns="0" rIns="0" bIns="0" rtlCol="0" anchor="t"/>
           <a:lstStyle/>
           <a:p>
-            <a:pPr marL="0" indent="0" algn="ctr">
+            <a:pPr algn="ctr" indent="0" marL="0">
               <a:lnSpc>
                 <a:spcPct val="110000"/>
               </a:lnSpc>
@@ -9076,9 +9367,9 @@
                 <a:solidFill>
                   <a:srgbClr val="D6D6D6"/>
                 </a:solidFill>
-                <a:latin typeface="Arial" panose="020B0604020202090204" pitchFamily="34" charset="0"/>
-                <a:ea typeface="Arial" panose="020B0604020202090204" pitchFamily="34" charset="-122"/>
-                <a:cs typeface="Arial" panose="020B0604020202090204" pitchFamily="34" charset="-120"/>
+                <a:latin typeface="Arial" pitchFamily="34" charset="0"/>
+                <a:ea typeface="Arial" pitchFamily="34" charset="-122"/>
+                <a:cs typeface="Arial" pitchFamily="34" charset="-120"/>
               </a:rPr>
               <a:t>compose/K8s 起 3 节点集群</a:t>
             </a:r>
@@ -9128,12 +9419,13 @@
             <a:avLst/>
           </a:prstGeom>
           <a:noFill/>
-        </p:spPr>
-        <p:txBody>
-          <a:bodyPr wrap="square" lIns="0" tIns="0" rIns="0" bIns="0" rtlCol="0" anchor="ctr"/>
-          <a:lstStyle/>
-          <a:p>
-            <a:pPr marL="0" indent="0">
+          <a:ln/>
+        </p:spPr>
+        <p:txBody>
+          <a:bodyPr wrap="square" lIns="0" tIns="0" rIns="0" bIns="0" rtlCol="0" anchor="ctr"/>
+          <a:lstStyle/>
+          <a:p>
+            <a:pPr indent="0" marL="0">
               <a:lnSpc>
                 <a:spcPct val="106000"/>
               </a:lnSpc>
@@ -9144,20 +9436,26 @@
                 <a:solidFill>
                   <a:srgbClr val="C9A96E"/>
                 </a:solidFill>
-                <a:latin typeface="Arial" panose="020B0604020202090204" pitchFamily="34" charset="0"/>
-                <a:ea typeface="Arial" panose="020B0604020202090204" pitchFamily="34" charset="-122"/>
-                <a:cs typeface="Arial" panose="020B0604020202090204" pitchFamily="34" charset="-120"/>
+                <a:latin typeface="Arial" pitchFamily="34" charset="0"/>
+                <a:ea typeface="Arial" pitchFamily="34" charset="-122"/>
+                <a:cs typeface="Arial" pitchFamily="34" charset="-120"/>
               </a:rPr>
               <a:t>每条都有对应的自动化 / 混沌测试当判官——</a:t>
             </a:r>
+            <a:pPr indent="0" marL="0">
+              <a:lnSpc>
+                <a:spcPct val="106000"/>
+              </a:lnSpc>
+              <a:buNone/>
+            </a:pPr>
             <a:r>
               <a:rPr lang="en-US" sz="1250" dirty="0">
                 <a:solidFill>
                   <a:srgbClr val="F0F0F0"/>
                 </a:solidFill>
-                <a:latin typeface="Arial" panose="020B0604020202090204" pitchFamily="34" charset="0"/>
-                <a:ea typeface="Arial" panose="020B0604020202090204" pitchFamily="34" charset="-122"/>
-                <a:cs typeface="Arial" panose="020B0604020202090204" pitchFamily="34" charset="-120"/>
+                <a:latin typeface="Arial" pitchFamily="34" charset="0"/>
+                <a:ea typeface="Arial" pitchFamily="34" charset="-122"/>
+                <a:cs typeface="Arial" pitchFamily="34" charset="-120"/>
               </a:rPr>
               <a:t>这正是第 38 节讲的：验收不写“覆盖率≥X%”，写“注入故障后 N 条零丢失”这种直指失败模式的断言。</a:t>
             </a:r>
@@ -9175,13 +9473,12 @@
 
 <file path=ppt/slides/slide6.xml><?xml version="1.0" encoding="utf-8"?>
 <p:sld xmlns:a="http://schemas.openxmlformats.org/drawingml/2006/main" xmlns:r="http://schemas.openxmlformats.org/officeDocument/2006/relationships" xmlns:p="http://schemas.openxmlformats.org/presentationml/2006/main">
-  <p:cSld>
+  <p:cSld name="Slide 6">
     <p:bg>
       <p:bgPr>
         <a:solidFill>
           <a:srgbClr val="1E1E1E"/>
         </a:solidFill>
-        <a:effectLst/>
       </p:bgPr>
     </p:bg>
     <p:spTree>
@@ -9213,12 +9510,13 @@
             <a:avLst/>
           </a:prstGeom>
           <a:noFill/>
-        </p:spPr>
-        <p:txBody>
-          <a:bodyPr wrap="square" lIns="0" tIns="0" rIns="0" bIns="0" rtlCol="0" anchor="ctr"/>
-          <a:lstStyle/>
-          <a:p>
-            <a:pPr marL="0" indent="0">
+          <a:ln/>
+        </p:spPr>
+        <p:txBody>
+          <a:bodyPr wrap="square" lIns="0" tIns="0" rIns="0" bIns="0" rtlCol="0" anchor="ctr"/>
+          <a:lstStyle/>
+          <a:p>
+            <a:pPr indent="0" marL="0">
               <a:buNone/>
             </a:pPr>
             <a:r>
@@ -9226,9 +9524,9 @@
                 <a:solidFill>
                   <a:srgbClr val="6E6E6E"/>
                 </a:solidFill>
-                <a:latin typeface="Arial" panose="020B0604020202090204" pitchFamily="34" charset="0"/>
-                <a:ea typeface="Arial" panose="020B0604020202090204" pitchFamily="34" charset="-122"/>
-                <a:cs typeface="Arial" panose="020B0604020202090204" pitchFamily="34" charset="-120"/>
+                <a:latin typeface="Arial" pitchFamily="34" charset="0"/>
+                <a:ea typeface="Arial" pitchFamily="34" charset="-122"/>
+                <a:cs typeface="Arial" pitchFamily="34" charset="-120"/>
               </a:rPr>
               <a:t>第 54 节 · When 项目总结与后续规划</a:t>
             </a:r>
@@ -9251,12 +9549,13 @@
             <a:avLst/>
           </a:prstGeom>
           <a:noFill/>
-        </p:spPr>
-        <p:txBody>
-          <a:bodyPr wrap="square" lIns="0" tIns="0" rIns="0" bIns="0" rtlCol="0" anchor="ctr"/>
-          <a:lstStyle/>
-          <a:p>
-            <a:pPr marL="0" indent="0" algn="r">
+          <a:ln/>
+        </p:spPr>
+        <p:txBody>
+          <a:bodyPr wrap="square" lIns="0" tIns="0" rIns="0" bIns="0" rtlCol="0" anchor="ctr"/>
+          <a:lstStyle/>
+          <a:p>
+            <a:pPr algn="r" indent="0" marL="0">
               <a:buNone/>
             </a:pPr>
             <a:r>
@@ -9264,9 +9563,9 @@
                 <a:solidFill>
                   <a:srgbClr val="6E6E6E"/>
                 </a:solidFill>
-                <a:latin typeface="Arial" panose="020B0604020202090204" pitchFamily="34" charset="0"/>
-                <a:ea typeface="Arial" panose="020B0604020202090204" pitchFamily="34" charset="-122"/>
-                <a:cs typeface="Arial" panose="020B0604020202090204" pitchFamily="34" charset="-120"/>
+                <a:latin typeface="Arial" pitchFamily="34" charset="0"/>
+                <a:ea typeface="Arial" pitchFamily="34" charset="-122"/>
+                <a:cs typeface="Arial" pitchFamily="34" charset="-120"/>
               </a:rPr>
               <a:t>6 / 14</a:t>
             </a:r>
@@ -9313,22 +9612,23 @@
             <a:avLst/>
           </a:prstGeom>
           <a:noFill/>
-        </p:spPr>
-        <p:txBody>
-          <a:bodyPr wrap="square" lIns="0" tIns="0" rIns="0" bIns="0" rtlCol="0" anchor="ctr"/>
-          <a:lstStyle/>
-          <a:p>
-            <a:pPr marL="0" indent="0" algn="ctr">
-              <a:buNone/>
-            </a:pPr>
-            <a:r>
-              <a:rPr lang="en-US" sz="1050" b="1" kern="0" spc="100" dirty="0">
+          <a:ln/>
+        </p:spPr>
+        <p:txBody>
+          <a:bodyPr wrap="square" lIns="0" tIns="0" rIns="0" bIns="0" rtlCol="0" anchor="ctr"/>
+          <a:lstStyle/>
+          <a:p>
+            <a:pPr algn="ctr" indent="0" marL="0">
+              <a:buNone/>
+            </a:pPr>
+            <a:r>
+              <a:rPr lang="en-US" sz="1050" b="1" spc="100" kern="0" dirty="0">
                 <a:solidFill>
                   <a:srgbClr val="C9A96E"/>
                 </a:solidFill>
-                <a:latin typeface="Arial" panose="020B0604020202090204" pitchFamily="34" charset="0"/>
-                <a:ea typeface="Arial" panose="020B0604020202090204" pitchFamily="34" charset="-122"/>
-                <a:cs typeface="Arial" panose="020B0604020202090204" pitchFamily="34" charset="-120"/>
+                <a:latin typeface="Arial" pitchFamily="34" charset="0"/>
+                <a:ea typeface="Arial" pitchFamily="34" charset="-122"/>
+                <a:cs typeface="Arial" pitchFamily="34" charset="-120"/>
               </a:rPr>
               <a:t>但这门课真正的主角</a:t>
             </a:r>
@@ -9351,12 +9651,13 @@
             <a:avLst/>
           </a:prstGeom>
           <a:noFill/>
-        </p:spPr>
-        <p:txBody>
-          <a:bodyPr wrap="square" lIns="0" tIns="0" rIns="0" bIns="0" rtlCol="0" anchor="ctr"/>
-          <a:lstStyle/>
-          <a:p>
-            <a:pPr marL="0" indent="0">
+          <a:ln/>
+        </p:spPr>
+        <p:txBody>
+          <a:bodyPr wrap="square" lIns="0" tIns="0" rIns="0" bIns="0" rtlCol="0" anchor="ctr"/>
+          <a:lstStyle/>
+          <a:p>
+            <a:pPr indent="0" marL="0">
               <a:buNone/>
             </a:pPr>
             <a:r>
@@ -9364,9 +9665,9 @@
                 <a:solidFill>
                   <a:srgbClr val="F0F0F0"/>
                 </a:solidFill>
-                <a:latin typeface="Arial" panose="020B0604020202090204" pitchFamily="34" charset="0"/>
-                <a:ea typeface="Arial" panose="020B0604020202090204" pitchFamily="34" charset="-122"/>
-                <a:cs typeface="Arial" panose="020B0604020202090204" pitchFamily="34" charset="-120"/>
+                <a:latin typeface="Arial" pitchFamily="34" charset="0"/>
+                <a:ea typeface="Arial" pitchFamily="34" charset="-122"/>
+                <a:cs typeface="Arial" pitchFamily="34" charset="-120"/>
               </a:rPr>
               <a:t>不是 When，是把 When 做出来的方式</a:t>
             </a:r>
@@ -9389,12 +9690,13 @@
             <a:avLst/>
           </a:prstGeom>
           <a:noFill/>
-        </p:spPr>
-        <p:txBody>
-          <a:bodyPr wrap="square" lIns="0" tIns="0" rIns="0" bIns="0" rtlCol="0" anchor="ctr"/>
-          <a:lstStyle/>
-          <a:p>
-            <a:pPr marL="0" indent="0" algn="ctr">
+          <a:ln/>
+        </p:spPr>
+        <p:txBody>
+          <a:bodyPr wrap="square" lIns="0" tIns="0" rIns="0" bIns="0" rtlCol="0" anchor="ctr"/>
+          <a:lstStyle/>
+          <a:p>
+            <a:pPr algn="ctr" indent="0" marL="0">
               <a:buNone/>
             </a:pPr>
             <a:r>
@@ -9402,9 +9704,9 @@
                 <a:solidFill>
                   <a:srgbClr val="C9A96E"/>
                 </a:solidFill>
-                <a:latin typeface="Arial" panose="020B0604020202090204" pitchFamily="34" charset="0"/>
-                <a:ea typeface="Arial" panose="020B0604020202090204" pitchFamily="34" charset="-122"/>
-                <a:cs typeface="Arial" panose="020B0604020202090204" pitchFamily="34" charset="-120"/>
+                <a:latin typeface="Arial" pitchFamily="34" charset="0"/>
+                <a:ea typeface="Arial" pitchFamily="34" charset="-122"/>
+                <a:cs typeface="Arial" pitchFamily="34" charset="-120"/>
               </a:rPr>
               <a:t>Loop Engineering</a:t>
             </a:r>
@@ -9429,6 +9731,7 @@
           <a:solidFill>
             <a:srgbClr val="C9A96E"/>
           </a:solidFill>
+          <a:ln/>
         </p:spPr>
       </p:sp>
       <p:sp>
@@ -9446,12 +9749,13 @@
             <a:avLst/>
           </a:prstGeom>
           <a:noFill/>
+          <a:ln/>
         </p:spPr>
         <p:txBody>
           <a:bodyPr wrap="square" lIns="0" tIns="0" rIns="0" bIns="0" rtlCol="0" anchor="t"/>
           <a:lstStyle/>
           <a:p>
-            <a:pPr marL="0" indent="0">
+            <a:pPr indent="0" marL="0">
               <a:lnSpc>
                 <a:spcPct val="108000"/>
               </a:lnSpc>
@@ -9462,9 +9766,9 @@
                 <a:solidFill>
                   <a:srgbClr val="D6D6D6"/>
                 </a:solidFill>
-                <a:latin typeface="Arial" panose="020B0604020202090204" pitchFamily="34" charset="0"/>
-                <a:ea typeface="Arial" panose="020B0604020202090204" pitchFamily="34" charset="-122"/>
-                <a:cs typeface="Arial" panose="020B0604020202090204" pitchFamily="34" charset="-120"/>
+                <a:latin typeface="Arial" pitchFamily="34" charset="0"/>
+                <a:ea typeface="Arial" pitchFamily="34" charset="-122"/>
+                <a:cs typeface="Arial" pitchFamily="34" charset="-120"/>
               </a:rPr>
               <a:t>When 只是样本——要证明的是：企业级中间件，能用 AI 编程做出来，核心代码 90%+ 由 AI 写。</a:t>
             </a:r>
@@ -9489,6 +9793,7 @@
           <a:solidFill>
             <a:srgbClr val="C9A96E"/>
           </a:solidFill>
+          <a:ln/>
         </p:spPr>
       </p:sp>
       <p:sp>
@@ -9506,12 +9811,13 @@
             <a:avLst/>
           </a:prstGeom>
           <a:noFill/>
+          <a:ln/>
         </p:spPr>
         <p:txBody>
           <a:bodyPr wrap="square" lIns="0" tIns="0" rIns="0" bIns="0" rtlCol="0" anchor="t"/>
           <a:lstStyle/>
           <a:p>
-            <a:pPr marL="0" indent="0">
+            <a:pPr indent="0" marL="0">
               <a:lnSpc>
                 <a:spcPct val="108000"/>
               </a:lnSpc>
@@ -9522,9 +9828,9 @@
                 <a:solidFill>
                   <a:srgbClr val="D6D6D6"/>
                 </a:solidFill>
-                <a:latin typeface="Arial" panose="020B0604020202090204" pitchFamily="34" charset="0"/>
-                <a:ea typeface="Arial" panose="020B0604020202090204" pitchFamily="34" charset="-122"/>
-                <a:cs typeface="Arial" panose="020B0604020202090204" pitchFamily="34" charset="-120"/>
+                <a:latin typeface="Arial" pitchFamily="34" charset="0"/>
+                <a:ea typeface="Arial" pitchFamily="34" charset="-122"/>
+                <a:cs typeface="Arial" pitchFamily="34" charset="-120"/>
               </a:rPr>
               <a:t>做法不是坐着一条条下指令，而是设计一个能让 AI 自主循环工作的环境和规则，让它自己转。</a:t>
             </a:r>
@@ -9549,6 +9855,7 @@
           <a:solidFill>
             <a:srgbClr val="C9A96E"/>
           </a:solidFill>
+          <a:ln/>
         </p:spPr>
       </p:sp>
       <p:sp>
@@ -9566,12 +9873,13 @@
             <a:avLst/>
           </a:prstGeom>
           <a:noFill/>
+          <a:ln/>
         </p:spPr>
         <p:txBody>
           <a:bodyPr wrap="square" lIns="0" tIns="0" rIns="0" bIns="0" rtlCol="0" anchor="t"/>
           <a:lstStyle/>
           <a:p>
-            <a:pPr marL="0" indent="0">
+            <a:pPr indent="0" marL="0">
               <a:lnSpc>
                 <a:spcPct val="108000"/>
               </a:lnSpc>
@@ -9582,9 +9890,9 @@
                 <a:solidFill>
                   <a:srgbClr val="D6D6D6"/>
                 </a:solidFill>
-                <a:latin typeface="Arial" panose="020B0604020202090204" pitchFamily="34" charset="0"/>
-                <a:ea typeface="Arial" panose="020B0604020202090204" pitchFamily="34" charset="-122"/>
-                <a:cs typeface="Arial" panose="020B0604020202090204" pitchFamily="34" charset="-120"/>
+                <a:latin typeface="Arial" pitchFamily="34" charset="0"/>
+                <a:ea typeface="Arial" pitchFamily="34" charset="-122"/>
+                <a:cs typeface="Arial" pitchFamily="34" charset="-120"/>
               </a:rPr>
               <a:t>人的精力，从“写提示词”转移到“设计循环、设计判官、在关键点把关”。</a:t>
             </a:r>
@@ -9634,12 +9942,13 @@
             <a:avLst/>
           </a:prstGeom>
           <a:noFill/>
-        </p:spPr>
-        <p:txBody>
-          <a:bodyPr wrap="square" lIns="0" tIns="0" rIns="0" bIns="0" rtlCol="0" anchor="ctr"/>
-          <a:lstStyle/>
-          <a:p>
-            <a:pPr marL="0" indent="0">
+          <a:ln/>
+        </p:spPr>
+        <p:txBody>
+          <a:bodyPr wrap="square" lIns="0" tIns="0" rIns="0" bIns="0" rtlCol="0" anchor="ctr"/>
+          <a:lstStyle/>
+          <a:p>
+            <a:pPr indent="0" marL="0">
               <a:lnSpc>
                 <a:spcPct val="106000"/>
               </a:lnSpc>
@@ -9650,20 +9959,26 @@
                 <a:solidFill>
                   <a:srgbClr val="C9A96E"/>
                 </a:solidFill>
-                <a:latin typeface="Arial" panose="020B0604020202090204" pitchFamily="34" charset="0"/>
-                <a:ea typeface="Arial" panose="020B0604020202090204" pitchFamily="34" charset="-122"/>
-                <a:cs typeface="Arial" panose="020B0604020202090204" pitchFamily="34" charset="-120"/>
+                <a:latin typeface="Arial" pitchFamily="34" charset="0"/>
+                <a:ea typeface="Arial" pitchFamily="34" charset="-122"/>
+                <a:cs typeface="Arial" pitchFamily="34" charset="-120"/>
               </a:rPr>
               <a:t>一句话：</a:t>
             </a:r>
+            <a:pPr indent="0" marL="0">
+              <a:lnSpc>
+                <a:spcPct val="106000"/>
+              </a:lnSpc>
+              <a:buNone/>
+            </a:pPr>
             <a:r>
               <a:rPr lang="en-US" sz="1250" dirty="0">
                 <a:solidFill>
                   <a:srgbClr val="F0F0F0"/>
                 </a:solidFill>
-                <a:latin typeface="Arial" panose="020B0604020202090204" pitchFamily="34" charset="0"/>
-                <a:ea typeface="Arial" panose="020B0604020202090204" pitchFamily="34" charset="-122"/>
-                <a:cs typeface="Arial" panose="020B0604020202090204" pitchFamily="34" charset="-120"/>
+                <a:latin typeface="Arial" pitchFamily="34" charset="0"/>
+                <a:ea typeface="Arial" pitchFamily="34" charset="-122"/>
+                <a:cs typeface="Arial" pitchFamily="34" charset="-120"/>
               </a:rPr>
               <a:t>执行交给循环，判断留给人。</a:t>
             </a:r>
@@ -9681,13 +9996,12 @@
 
 <file path=ppt/slides/slide7.xml><?xml version="1.0" encoding="utf-8"?>
 <p:sld xmlns:a="http://schemas.openxmlformats.org/drawingml/2006/main" xmlns:r="http://schemas.openxmlformats.org/officeDocument/2006/relationships" xmlns:p="http://schemas.openxmlformats.org/presentationml/2006/main">
-  <p:cSld>
+  <p:cSld name="Slide 7">
     <p:bg>
       <p:bgPr>
         <a:solidFill>
           <a:srgbClr val="1E1E1E"/>
         </a:solidFill>
-        <a:effectLst/>
       </p:bgPr>
     </p:bg>
     <p:spTree>
@@ -9719,12 +10033,13 @@
             <a:avLst/>
           </a:prstGeom>
           <a:noFill/>
-        </p:spPr>
-        <p:txBody>
-          <a:bodyPr wrap="square" lIns="0" tIns="0" rIns="0" bIns="0" rtlCol="0" anchor="ctr"/>
-          <a:lstStyle/>
-          <a:p>
-            <a:pPr marL="0" indent="0">
+          <a:ln/>
+        </p:spPr>
+        <p:txBody>
+          <a:bodyPr wrap="square" lIns="0" tIns="0" rIns="0" bIns="0" rtlCol="0" anchor="ctr"/>
+          <a:lstStyle/>
+          <a:p>
+            <a:pPr indent="0" marL="0">
               <a:buNone/>
             </a:pPr>
             <a:r>
@@ -9732,9 +10047,9 @@
                 <a:solidFill>
                   <a:srgbClr val="6E6E6E"/>
                 </a:solidFill>
-                <a:latin typeface="Arial" panose="020B0604020202090204" pitchFamily="34" charset="0"/>
-                <a:ea typeface="Arial" panose="020B0604020202090204" pitchFamily="34" charset="-122"/>
-                <a:cs typeface="Arial" panose="020B0604020202090204" pitchFamily="34" charset="-120"/>
+                <a:latin typeface="Arial" pitchFamily="34" charset="0"/>
+                <a:ea typeface="Arial" pitchFamily="34" charset="-122"/>
+                <a:cs typeface="Arial" pitchFamily="34" charset="-120"/>
               </a:rPr>
               <a:t>第 54 节 · When 项目总结与后续规划</a:t>
             </a:r>
@@ -9757,12 +10072,13 @@
             <a:avLst/>
           </a:prstGeom>
           <a:noFill/>
-        </p:spPr>
-        <p:txBody>
-          <a:bodyPr wrap="square" lIns="0" tIns="0" rIns="0" bIns="0" rtlCol="0" anchor="ctr"/>
-          <a:lstStyle/>
-          <a:p>
-            <a:pPr marL="0" indent="0" algn="r">
+          <a:ln/>
+        </p:spPr>
+        <p:txBody>
+          <a:bodyPr wrap="square" lIns="0" tIns="0" rIns="0" bIns="0" rtlCol="0" anchor="ctr"/>
+          <a:lstStyle/>
+          <a:p>
+            <a:pPr algn="r" indent="0" marL="0">
               <a:buNone/>
             </a:pPr>
             <a:r>
@@ -9770,9 +10086,9 @@
                 <a:solidFill>
                   <a:srgbClr val="6E6E6E"/>
                 </a:solidFill>
-                <a:latin typeface="Arial" panose="020B0604020202090204" pitchFamily="34" charset="0"/>
-                <a:ea typeface="Arial" panose="020B0604020202090204" pitchFamily="34" charset="-122"/>
-                <a:cs typeface="Arial" panose="020B0604020202090204" pitchFamily="34" charset="-120"/>
+                <a:latin typeface="Arial" pitchFamily="34" charset="0"/>
+                <a:ea typeface="Arial" pitchFamily="34" charset="-122"/>
+                <a:cs typeface="Arial" pitchFamily="34" charset="-120"/>
               </a:rPr>
               <a:t>7 / 14</a:t>
             </a:r>
@@ -9819,22 +10135,23 @@
             <a:avLst/>
           </a:prstGeom>
           <a:noFill/>
-        </p:spPr>
-        <p:txBody>
-          <a:bodyPr wrap="square" lIns="0" tIns="0" rIns="0" bIns="0" rtlCol="0" anchor="ctr"/>
-          <a:lstStyle/>
-          <a:p>
-            <a:pPr marL="0" indent="0" algn="ctr">
-              <a:buNone/>
-            </a:pPr>
-            <a:r>
-              <a:rPr lang="en-US" sz="1050" b="1" kern="0" spc="100" dirty="0">
+          <a:ln/>
+        </p:spPr>
+        <p:txBody>
+          <a:bodyPr wrap="square" lIns="0" tIns="0" rIns="0" bIns="0" rtlCol="0" anchor="ctr"/>
+          <a:lstStyle/>
+          <a:p>
+            <a:pPr algn="ctr" indent="0" marL="0">
+              <a:buNone/>
+            </a:pPr>
+            <a:r>
+              <a:rPr lang="en-US" sz="1050" b="1" spc="100" kern="0" dirty="0">
                 <a:solidFill>
                   <a:srgbClr val="C9A96E"/>
                 </a:solidFill>
-                <a:latin typeface="Arial" panose="020B0604020202090204" pitchFamily="34" charset="0"/>
-                <a:ea typeface="Arial" panose="020B0604020202090204" pitchFamily="34" charset="-122"/>
-                <a:cs typeface="Arial" panose="020B0604020202090204" pitchFamily="34" charset="-120"/>
+                <a:latin typeface="Arial" pitchFamily="34" charset="0"/>
+                <a:ea typeface="Arial" pitchFamily="34" charset="-122"/>
+                <a:cs typeface="Arial" pitchFamily="34" charset="-120"/>
               </a:rPr>
               <a:t>方法论</a:t>
             </a:r>
@@ -9857,12 +10174,13 @@
             <a:avLst/>
           </a:prstGeom>
           <a:noFill/>
-        </p:spPr>
-        <p:txBody>
-          <a:bodyPr wrap="square" lIns="0" tIns="0" rIns="0" bIns="0" rtlCol="0" anchor="ctr"/>
-          <a:lstStyle/>
-          <a:p>
-            <a:pPr marL="0" indent="0">
+          <a:ln/>
+        </p:spPr>
+        <p:txBody>
+          <a:bodyPr wrap="square" lIns="0" tIns="0" rIns="0" bIns="0" rtlCol="0" anchor="ctr"/>
+          <a:lstStyle/>
+          <a:p>
+            <a:pPr indent="0" marL="0">
               <a:buNone/>
             </a:pPr>
             <a:r>
@@ -9870,9 +10188,9 @@
                 <a:solidFill>
                   <a:srgbClr val="F0F0F0"/>
                 </a:solidFill>
-                <a:latin typeface="Arial" panose="020B0604020202090204" pitchFamily="34" charset="0"/>
-                <a:ea typeface="Arial" panose="020B0604020202090204" pitchFamily="34" charset="-122"/>
-                <a:cs typeface="Arial" panose="020B0604020202090204" pitchFamily="34" charset="-120"/>
+                <a:latin typeface="Arial" pitchFamily="34" charset="0"/>
+                <a:ea typeface="Arial" pitchFamily="34" charset="-122"/>
+                <a:cs typeface="Arial" pitchFamily="34" charset="-120"/>
               </a:rPr>
               <a:t>底座 → 逐节原料 → 两次跑</a:t>
             </a:r>
@@ -9906,7 +10224,7 @@
             <a:prstDash val="solid"/>
           </a:ln>
           <a:effectLst>
-            <a:outerShdw blurRad="88900" dist="25400" dir="5400000" algn="bl" rotWithShape="0">
+            <a:outerShdw sx="100000" sy="100000" kx="0" ky="0" algn="bl" rotWithShape="0" blurRad="88900" dist="25400" dir="5400000">
               <a:srgbClr val="000000">
                 <a:alpha val="30000"/>
               </a:srgbClr>
@@ -9929,12 +10247,13 @@
             <a:avLst/>
           </a:prstGeom>
           <a:noFill/>
-        </p:spPr>
-        <p:txBody>
-          <a:bodyPr wrap="square" lIns="0" tIns="0" rIns="0" bIns="0" rtlCol="0" anchor="ctr"/>
-          <a:lstStyle/>
-          <a:p>
-            <a:pPr marL="0" indent="0">
+          <a:ln/>
+        </p:spPr>
+        <p:txBody>
+          <a:bodyPr wrap="square" lIns="0" tIns="0" rIns="0" bIns="0" rtlCol="0" anchor="ctr"/>
+          <a:lstStyle/>
+          <a:p>
+            <a:pPr indent="0" marL="0">
               <a:buNone/>
             </a:pPr>
             <a:r>
@@ -9942,9 +10261,9 @@
                 <a:solidFill>
                   <a:srgbClr val="C9A96E"/>
                 </a:solidFill>
-                <a:latin typeface="Arial" panose="020B0604020202090204" pitchFamily="34" charset="0"/>
-                <a:ea typeface="Arial" panose="020B0604020202090204" pitchFamily="34" charset="-122"/>
-                <a:cs typeface="Arial" panose="020B0604020202090204" pitchFamily="34" charset="-120"/>
+                <a:latin typeface="Arial" pitchFamily="34" charset="0"/>
+                <a:ea typeface="Arial" pitchFamily="34" charset="-122"/>
+                <a:cs typeface="Arial" pitchFamily="34" charset="-120"/>
               </a:rPr>
               <a:t>① 底座</a:t>
             </a:r>
@@ -9967,12 +10286,13 @@
             <a:avLst/>
           </a:prstGeom>
           <a:noFill/>
-        </p:spPr>
-        <p:txBody>
-          <a:bodyPr wrap="square" lIns="0" tIns="0" rIns="0" bIns="0" rtlCol="0" anchor="ctr"/>
-          <a:lstStyle/>
-          <a:p>
-            <a:pPr marL="0" indent="0">
+          <a:ln/>
+        </p:spPr>
+        <p:txBody>
+          <a:bodyPr wrap="square" lIns="0" tIns="0" rIns="0" bIns="0" rtlCol="0" anchor="ctr"/>
+          <a:lstStyle/>
+          <a:p>
+            <a:pPr indent="0" marL="0">
               <a:lnSpc>
                 <a:spcPct val="105000"/>
               </a:lnSpc>
@@ -9983,9 +10303,9 @@
                 <a:solidFill>
                   <a:srgbClr val="D6D6D6"/>
                 </a:solidFill>
-                <a:latin typeface="Arial" panose="020B0604020202090204" pitchFamily="34" charset="0"/>
-                <a:ea typeface="Arial" panose="020B0604020202090204" pitchFamily="34" charset="-122"/>
-                <a:cs typeface="Arial" panose="020B0604020202090204" pitchFamily="34" charset="-120"/>
+                <a:latin typeface="Arial" pitchFamily="34" charset="0"/>
+                <a:ea typeface="Arial" pitchFamily="34" charset="-122"/>
+                <a:cs typeface="Arial" pitchFamily="34" charset="-120"/>
               </a:rPr>
               <a:t>领域模型 Message + 模块间契约（SPI）——所有模块的共同词汇表</a:t>
             </a:r>
@@ -10008,12 +10328,13 @@
             <a:avLst/>
           </a:prstGeom>
           <a:noFill/>
-        </p:spPr>
-        <p:txBody>
-          <a:bodyPr wrap="square" lIns="0" tIns="0" rIns="0" bIns="0" rtlCol="0" anchor="ctr"/>
-          <a:lstStyle/>
-          <a:p>
-            <a:pPr marL="0" indent="0" algn="ctr">
+          <a:ln/>
+        </p:spPr>
+        <p:txBody>
+          <a:bodyPr wrap="square" lIns="0" tIns="0" rIns="0" bIns="0" rtlCol="0" anchor="ctr"/>
+          <a:lstStyle/>
+          <a:p>
+            <a:pPr algn="ctr" indent="0" marL="0">
               <a:buNone/>
             </a:pPr>
             <a:r>
@@ -10021,9 +10342,9 @@
                 <a:solidFill>
                   <a:srgbClr val="8C7647"/>
                 </a:solidFill>
-                <a:latin typeface="Arial" panose="020B0604020202090204" pitchFamily="34" charset="0"/>
-                <a:ea typeface="Arial" panose="020B0604020202090204" pitchFamily="34" charset="-122"/>
-                <a:cs typeface="Arial" panose="020B0604020202090204" pitchFamily="34" charset="-120"/>
+                <a:latin typeface="Arial" pitchFamily="34" charset="0"/>
+                <a:ea typeface="Arial" pitchFamily="34" charset="-122"/>
+                <a:cs typeface="Arial" pitchFamily="34" charset="-120"/>
               </a:rPr>
               <a:t>↓</a:t>
             </a:r>
@@ -10057,7 +10378,7 @@
             <a:prstDash val="solid"/>
           </a:ln>
           <a:effectLst>
-            <a:outerShdw blurRad="88900" dist="25400" dir="5400000" algn="bl" rotWithShape="0">
+            <a:outerShdw sx="100000" sy="100000" kx="0" ky="0" algn="bl" rotWithShape="0" blurRad="88900" dist="25400" dir="5400000">
               <a:srgbClr val="000000">
                 <a:alpha val="30000"/>
               </a:srgbClr>
@@ -10080,12 +10401,13 @@
             <a:avLst/>
           </a:prstGeom>
           <a:noFill/>
-        </p:spPr>
-        <p:txBody>
-          <a:bodyPr wrap="square" lIns="0" tIns="0" rIns="0" bIns="0" rtlCol="0" anchor="ctr"/>
-          <a:lstStyle/>
-          <a:p>
-            <a:pPr marL="0" indent="0">
+          <a:ln/>
+        </p:spPr>
+        <p:txBody>
+          <a:bodyPr wrap="square" lIns="0" tIns="0" rIns="0" bIns="0" rtlCol="0" anchor="ctr"/>
+          <a:lstStyle/>
+          <a:p>
+            <a:pPr indent="0" marL="0">
               <a:buNone/>
             </a:pPr>
             <a:r>
@@ -10093,9 +10415,9 @@
                 <a:solidFill>
                   <a:srgbClr val="C9A96E"/>
                 </a:solidFill>
-                <a:latin typeface="Arial" panose="020B0604020202090204" pitchFamily="34" charset="0"/>
-                <a:ea typeface="Arial" panose="020B0604020202090204" pitchFamily="34" charset="-122"/>
-                <a:cs typeface="Arial" panose="020B0604020202090204" pitchFamily="34" charset="-120"/>
+                <a:latin typeface="Arial" pitchFamily="34" charset="0"/>
+                <a:ea typeface="Arial" pitchFamily="34" charset="-122"/>
+                <a:cs typeface="Arial" pitchFamily="34" charset="-120"/>
               </a:rPr>
               <a:t>② 逐节原料</a:t>
             </a:r>
@@ -10118,12 +10440,13 @@
             <a:avLst/>
           </a:prstGeom>
           <a:noFill/>
-        </p:spPr>
-        <p:txBody>
-          <a:bodyPr wrap="square" lIns="0" tIns="0" rIns="0" bIns="0" rtlCol="0" anchor="ctr"/>
-          <a:lstStyle/>
-          <a:p>
-            <a:pPr marL="0" indent="0">
+          <a:ln/>
+        </p:spPr>
+        <p:txBody>
+          <a:bodyPr wrap="square" lIns="0" tIns="0" rIns="0" bIns="0" rtlCol="0" anchor="ctr"/>
+          <a:lstStyle/>
+          <a:p>
+            <a:pPr indent="0" marL="0">
               <a:lnSpc>
                 <a:spcPct val="105000"/>
               </a:lnSpc>
@@ -10134,9 +10457,9 @@
                 <a:solidFill>
                   <a:srgbClr val="D6D6D6"/>
                 </a:solidFill>
-                <a:latin typeface="Arial" panose="020B0604020202090204" pitchFamily="34" charset="0"/>
-                <a:ea typeface="Arial" panose="020B0604020202090204" pitchFamily="34" charset="-122"/>
-                <a:cs typeface="Arial" panose="020B0604020202090204" pitchFamily="34" charset="-120"/>
+                <a:latin typeface="Arial" pitchFamily="34" charset="0"/>
+                <a:ea typeface="Arial" pitchFamily="34" charset="-122"/>
+                <a:cs typeface="Arial" pitchFamily="34" charset="-120"/>
               </a:rPr>
               <a:t>每节一份 part：功能 + task + Harness + 验收，引用底座、彼此咬合</a:t>
             </a:r>
@@ -10159,12 +10482,13 @@
             <a:avLst/>
           </a:prstGeom>
           <a:noFill/>
-        </p:spPr>
-        <p:txBody>
-          <a:bodyPr wrap="square" lIns="0" tIns="0" rIns="0" bIns="0" rtlCol="0" anchor="ctr"/>
-          <a:lstStyle/>
-          <a:p>
-            <a:pPr marL="0" indent="0" algn="ctr">
+          <a:ln/>
+        </p:spPr>
+        <p:txBody>
+          <a:bodyPr wrap="square" lIns="0" tIns="0" rIns="0" bIns="0" rtlCol="0" anchor="ctr"/>
+          <a:lstStyle/>
+          <a:p>
+            <a:pPr algn="ctr" indent="0" marL="0">
               <a:buNone/>
             </a:pPr>
             <a:r>
@@ -10172,9 +10496,9 @@
                 <a:solidFill>
                   <a:srgbClr val="8C7647"/>
                 </a:solidFill>
-                <a:latin typeface="Arial" panose="020B0604020202090204" pitchFamily="34" charset="0"/>
-                <a:ea typeface="Arial" panose="020B0604020202090204" pitchFamily="34" charset="-122"/>
-                <a:cs typeface="Arial" panose="020B0604020202090204" pitchFamily="34" charset="-120"/>
+                <a:latin typeface="Arial" pitchFamily="34" charset="0"/>
+                <a:ea typeface="Arial" pitchFamily="34" charset="-122"/>
+                <a:cs typeface="Arial" pitchFamily="34" charset="-120"/>
               </a:rPr>
               <a:t>↓</a:t>
             </a:r>
@@ -10208,7 +10532,7 @@
             <a:prstDash val="solid"/>
           </a:ln>
           <a:effectLst>
-            <a:outerShdw blurRad="88900" dist="25400" dir="5400000" algn="bl" rotWithShape="0">
+            <a:outerShdw sx="100000" sy="100000" kx="0" ky="0" algn="bl" rotWithShape="0" blurRad="88900" dist="25400" dir="5400000">
               <a:srgbClr val="000000">
                 <a:alpha val="30000"/>
               </a:srgbClr>
@@ -10231,12 +10555,13 @@
             <a:avLst/>
           </a:prstGeom>
           <a:noFill/>
-        </p:spPr>
-        <p:txBody>
-          <a:bodyPr wrap="square" lIns="0" tIns="0" rIns="0" bIns="0" rtlCol="0" anchor="ctr"/>
-          <a:lstStyle/>
-          <a:p>
-            <a:pPr marL="0" indent="0">
+          <a:ln/>
+        </p:spPr>
+        <p:txBody>
+          <a:bodyPr wrap="square" lIns="0" tIns="0" rIns="0" bIns="0" rtlCol="0" anchor="ctr"/>
+          <a:lstStyle/>
+          <a:p>
+            <a:pPr indent="0" marL="0">
               <a:buNone/>
             </a:pPr>
             <a:r>
@@ -10244,9 +10569,9 @@
                 <a:solidFill>
                   <a:srgbClr val="C9A96E"/>
                 </a:solidFill>
-                <a:latin typeface="Arial" panose="020B0604020202090204" pitchFamily="34" charset="0"/>
-                <a:ea typeface="Arial" panose="020B0604020202090204" pitchFamily="34" charset="-122"/>
-                <a:cs typeface="Arial" panose="020B0604020202090204" pitchFamily="34" charset="-120"/>
+                <a:latin typeface="Arial" pitchFamily="34" charset="0"/>
+                <a:ea typeface="Arial" pitchFamily="34" charset="-122"/>
+                <a:cs typeface="Arial" pitchFamily="34" charset="-120"/>
               </a:rPr>
               <a:t>③ 两次跑</a:t>
             </a:r>
@@ -10269,12 +10594,13 @@
             <a:avLst/>
           </a:prstGeom>
           <a:noFill/>
-        </p:spPr>
-        <p:txBody>
-          <a:bodyPr wrap="square" lIns="0" tIns="0" rIns="0" bIns="0" rtlCol="0" anchor="ctr"/>
-          <a:lstStyle/>
-          <a:p>
-            <a:pPr marL="0" indent="0">
+          <a:ln/>
+        </p:spPr>
+        <p:txBody>
+          <a:bodyPr wrap="square" lIns="0" tIns="0" rIns="0" bIns="0" rtlCol="0" anchor="ctr"/>
+          <a:lstStyle/>
+          <a:p>
+            <a:pPr indent="0" marL="0">
               <a:lnSpc>
                 <a:spcPct val="105000"/>
               </a:lnSpc>
@@ -10285,9 +10611,9 @@
                 <a:solidFill>
                   <a:srgbClr val="D6D6D6"/>
                 </a:solidFill>
-                <a:latin typeface="Arial" panose="020B0604020202090204" pitchFamily="34" charset="0"/>
-                <a:ea typeface="Arial" panose="020B0604020202090204" pitchFamily="34" charset="-122"/>
-                <a:cs typeface="Arial" panose="020B0604020202090204" pitchFamily="34" charset="-120"/>
+                <a:latin typeface="Arial" pitchFamily="34" charset="0"/>
+                <a:ea typeface="Arial" pitchFamily="34" charset="-122"/>
+                <a:cs typeface="Arial" pitchFamily="34" charset="-120"/>
               </a:rPr>
               <a:t>把原料喂给循环自主实现；跑 → 冒问题 → 回填原料 → 再跑</a:t>
             </a:r>
@@ -10337,12 +10663,13 @@
             <a:avLst/>
           </a:prstGeom>
           <a:noFill/>
-        </p:spPr>
-        <p:txBody>
-          <a:bodyPr wrap="square" lIns="0" tIns="0" rIns="0" bIns="0" rtlCol="0" anchor="ctr"/>
-          <a:lstStyle/>
-          <a:p>
-            <a:pPr marL="0" indent="0">
+          <a:ln/>
+        </p:spPr>
+        <p:txBody>
+          <a:bodyPr wrap="square" lIns="0" tIns="0" rIns="0" bIns="0" rtlCol="0" anchor="ctr"/>
+          <a:lstStyle/>
+          <a:p>
+            <a:pPr indent="0" marL="0">
               <a:lnSpc>
                 <a:spcPct val="106000"/>
               </a:lnSpc>
@@ -10353,20 +10680,26 @@
                 <a:solidFill>
                   <a:srgbClr val="C9A96E"/>
                 </a:solidFill>
-                <a:latin typeface="Arial" panose="020B0604020202090204" pitchFamily="34" charset="0"/>
-                <a:ea typeface="Arial" panose="020B0604020202090204" pitchFamily="34" charset="-122"/>
-                <a:cs typeface="Arial" panose="020B0604020202090204" pitchFamily="34" charset="-120"/>
+                <a:latin typeface="Arial" pitchFamily="34" charset="0"/>
+                <a:ea typeface="Arial" pitchFamily="34" charset="-122"/>
+                <a:cs typeface="Arial" pitchFamily="34" charset="-120"/>
               </a:rPr>
               <a:t>关键：</a:t>
             </a:r>
+            <a:pPr indent="0" marL="0">
+              <a:lnSpc>
+                <a:spcPct val="106000"/>
+              </a:lnSpc>
+              <a:buNone/>
+            </a:pPr>
             <a:r>
               <a:rPr lang="en-US" sz="1250" dirty="0">
                 <a:solidFill>
                   <a:srgbClr val="F0F0F0"/>
                 </a:solidFill>
-                <a:latin typeface="Arial" panose="020B0604020202090204" pitchFamily="34" charset="0"/>
-                <a:ea typeface="Arial" panose="020B0604020202090204" pitchFamily="34" charset="-122"/>
-                <a:cs typeface="Arial" panose="020B0604020202090204" pitchFamily="34" charset="-120"/>
+                <a:latin typeface="Arial" pitchFamily="34" charset="0"/>
+                <a:ea typeface="Arial" pitchFamily="34" charset="-122"/>
+                <a:cs typeface="Arial" pitchFamily="34" charset="-120"/>
               </a:rPr>
               <a:t>先有共同的模型和接口，循环各节的产出才是“同一台机器的零件”，最后拼得起来、一口气跑出来。</a:t>
             </a:r>
@@ -10384,13 +10717,12 @@
 
 <file path=ppt/slides/slide8.xml><?xml version="1.0" encoding="utf-8"?>
 <p:sld xmlns:a="http://schemas.openxmlformats.org/drawingml/2006/main" xmlns:r="http://schemas.openxmlformats.org/officeDocument/2006/relationships" xmlns:p="http://schemas.openxmlformats.org/presentationml/2006/main">
-  <p:cSld>
+  <p:cSld name="Slide 8">
     <p:bg>
       <p:bgPr>
         <a:solidFill>
           <a:srgbClr val="1E1E1E"/>
         </a:solidFill>
-        <a:effectLst/>
       </p:bgPr>
     </p:bg>
     <p:spTree>
@@ -10422,12 +10754,13 @@
             <a:avLst/>
           </a:prstGeom>
           <a:noFill/>
-        </p:spPr>
-        <p:txBody>
-          <a:bodyPr wrap="square" lIns="0" tIns="0" rIns="0" bIns="0" rtlCol="0" anchor="ctr"/>
-          <a:lstStyle/>
-          <a:p>
-            <a:pPr marL="0" indent="0">
+          <a:ln/>
+        </p:spPr>
+        <p:txBody>
+          <a:bodyPr wrap="square" lIns="0" tIns="0" rIns="0" bIns="0" rtlCol="0" anchor="ctr"/>
+          <a:lstStyle/>
+          <a:p>
+            <a:pPr indent="0" marL="0">
               <a:buNone/>
             </a:pPr>
             <a:r>
@@ -10435,9 +10768,9 @@
                 <a:solidFill>
                   <a:srgbClr val="6E6E6E"/>
                 </a:solidFill>
-                <a:latin typeface="Arial" panose="020B0604020202090204" pitchFamily="34" charset="0"/>
-                <a:ea typeface="Arial" panose="020B0604020202090204" pitchFamily="34" charset="-122"/>
-                <a:cs typeface="Arial" panose="020B0604020202090204" pitchFamily="34" charset="-120"/>
+                <a:latin typeface="Arial" pitchFamily="34" charset="0"/>
+                <a:ea typeface="Arial" pitchFamily="34" charset="-122"/>
+                <a:cs typeface="Arial" pitchFamily="34" charset="-120"/>
               </a:rPr>
               <a:t>第 54 节 · When 项目总结与后续规划</a:t>
             </a:r>
@@ -10460,12 +10793,13 @@
             <a:avLst/>
           </a:prstGeom>
           <a:noFill/>
-        </p:spPr>
-        <p:txBody>
-          <a:bodyPr wrap="square" lIns="0" tIns="0" rIns="0" bIns="0" rtlCol="0" anchor="ctr"/>
-          <a:lstStyle/>
-          <a:p>
-            <a:pPr marL="0" indent="0" algn="r">
+          <a:ln/>
+        </p:spPr>
+        <p:txBody>
+          <a:bodyPr wrap="square" lIns="0" tIns="0" rIns="0" bIns="0" rtlCol="0" anchor="ctr"/>
+          <a:lstStyle/>
+          <a:p>
+            <a:pPr algn="r" indent="0" marL="0">
               <a:buNone/>
             </a:pPr>
             <a:r>
@@ -10473,9 +10807,9 @@
                 <a:solidFill>
                   <a:srgbClr val="6E6E6E"/>
                 </a:solidFill>
-                <a:latin typeface="Arial" panose="020B0604020202090204" pitchFamily="34" charset="0"/>
-                <a:ea typeface="Arial" panose="020B0604020202090204" pitchFamily="34" charset="-122"/>
-                <a:cs typeface="Arial" panose="020B0604020202090204" pitchFamily="34" charset="-120"/>
+                <a:latin typeface="Arial" pitchFamily="34" charset="0"/>
+                <a:ea typeface="Arial" pitchFamily="34" charset="-122"/>
+                <a:cs typeface="Arial" pitchFamily="34" charset="-120"/>
               </a:rPr>
               <a:t>8 / 14</a:t>
             </a:r>
@@ -10522,22 +10856,23 @@
             <a:avLst/>
           </a:prstGeom>
           <a:noFill/>
-        </p:spPr>
-        <p:txBody>
-          <a:bodyPr wrap="square" lIns="0" tIns="0" rIns="0" bIns="0" rtlCol="0" anchor="ctr"/>
-          <a:lstStyle/>
-          <a:p>
-            <a:pPr marL="0" indent="0" algn="ctr">
-              <a:buNone/>
-            </a:pPr>
-            <a:r>
-              <a:rPr lang="en-US" sz="1050" b="1" kern="0" spc="100" dirty="0">
+          <a:ln/>
+        </p:spPr>
+        <p:txBody>
+          <a:bodyPr wrap="square" lIns="0" tIns="0" rIns="0" bIns="0" rtlCol="0" anchor="ctr"/>
+          <a:lstStyle/>
+          <a:p>
+            <a:pPr algn="ctr" indent="0" marL="0">
+              <a:buNone/>
+            </a:pPr>
+            <a:r>
+              <a:rPr lang="en-US" sz="1050" b="1" spc="100" kern="0" dirty="0">
                 <a:solidFill>
                   <a:srgbClr val="C9A96E"/>
                 </a:solidFill>
-                <a:latin typeface="Arial" panose="020B0604020202090204" pitchFamily="34" charset="0"/>
-                <a:ea typeface="Arial" panose="020B0604020202090204" pitchFamily="34" charset="-122"/>
-                <a:cs typeface="Arial" panose="020B0604020202090204" pitchFamily="34" charset="-120"/>
+                <a:latin typeface="Arial" pitchFamily="34" charset="0"/>
+                <a:ea typeface="Arial" pitchFamily="34" charset="-122"/>
+                <a:cs typeface="Arial" pitchFamily="34" charset="-120"/>
               </a:rPr>
               <a:t>Loop 最重要的是 Harness</a:t>
             </a:r>
@@ -10560,12 +10895,13 @@
             <a:avLst/>
           </a:prstGeom>
           <a:noFill/>
-        </p:spPr>
-        <p:txBody>
-          <a:bodyPr wrap="square" lIns="0" tIns="0" rIns="0" bIns="0" rtlCol="0" anchor="ctr"/>
-          <a:lstStyle/>
-          <a:p>
-            <a:pPr marL="0" indent="0">
+          <a:ln/>
+        </p:spPr>
+        <p:txBody>
+          <a:bodyPr wrap="square" lIns="0" tIns="0" rIns="0" bIns="0" rtlCol="0" anchor="ctr"/>
+          <a:lstStyle/>
+          <a:p>
+            <a:pPr indent="0" marL="0">
               <a:buNone/>
             </a:pPr>
             <a:r>
@@ -10573,9 +10909,9 @@
                 <a:solidFill>
                   <a:srgbClr val="F0F0F0"/>
                 </a:solidFill>
-                <a:latin typeface="Arial" panose="020B0604020202090204" pitchFamily="34" charset="0"/>
-                <a:ea typeface="Arial" panose="020B0604020202090204" pitchFamily="34" charset="-122"/>
-                <a:cs typeface="Arial" panose="020B0604020202090204" pitchFamily="34" charset="-120"/>
+                <a:latin typeface="Arial" pitchFamily="34" charset="0"/>
+                <a:ea typeface="Arial" pitchFamily="34" charset="-122"/>
+                <a:cs typeface="Arial" pitchFamily="34" charset="-120"/>
               </a:rPr>
               <a:t>循环放大的，是你事先设计的判官质量</a:t>
             </a:r>
@@ -10609,7 +10945,7 @@
             <a:prstDash val="solid"/>
           </a:ln>
           <a:effectLst>
-            <a:outerShdw blurRad="88900" dist="25400" dir="5400000" algn="bl" rotWithShape="0">
+            <a:outerShdw sx="100000" sy="100000" kx="0" ky="0" algn="bl" rotWithShape="0" blurRad="88900" dist="25400" dir="5400000">
               <a:srgbClr val="000000">
                 <a:alpha val="30000"/>
               </a:srgbClr>
@@ -10632,12 +10968,13 @@
             <a:avLst/>
           </a:prstGeom>
           <a:noFill/>
-        </p:spPr>
-        <p:txBody>
-          <a:bodyPr wrap="square" lIns="0" tIns="0" rIns="0" bIns="0" rtlCol="0" anchor="ctr"/>
-          <a:lstStyle/>
-          <a:p>
-            <a:pPr marL="0" indent="0" algn="ctr">
+          <a:ln/>
+        </p:spPr>
+        <p:txBody>
+          <a:bodyPr wrap="square" lIns="0" tIns="0" rIns="0" bIns="0" rtlCol="0" anchor="ctr"/>
+          <a:lstStyle/>
+          <a:p>
+            <a:pPr algn="ctr" indent="0" marL="0">
               <a:buNone/>
             </a:pPr>
             <a:r>
@@ -10645,9 +10982,9 @@
                 <a:solidFill>
                   <a:srgbClr val="7FA8C9"/>
                 </a:solidFill>
-                <a:latin typeface="Arial" panose="020B0604020202090204" pitchFamily="34" charset="0"/>
-                <a:ea typeface="Arial" panose="020B0604020202090204" pitchFamily="34" charset="-122"/>
-                <a:cs typeface="Arial" panose="020B0604020202090204" pitchFamily="34" charset="-120"/>
+                <a:latin typeface="Arial" pitchFamily="34" charset="0"/>
+                <a:ea typeface="Arial" pitchFamily="34" charset="-122"/>
+                <a:cs typeface="Arial" pitchFamily="34" charset="-120"/>
               </a:rPr>
               <a:t>代码</a:t>
             </a:r>
@@ -10670,12 +11007,13 @@
             <a:avLst/>
           </a:prstGeom>
           <a:noFill/>
+          <a:ln/>
         </p:spPr>
         <p:txBody>
           <a:bodyPr wrap="square" lIns="0" tIns="0" rIns="0" bIns="0" rtlCol="0" anchor="t"/>
           <a:lstStyle/>
           <a:p>
-            <a:pPr marL="0" indent="0" algn="ctr">
+            <a:pPr algn="ctr" indent="0" marL="0">
               <a:lnSpc>
                 <a:spcPct val="115000"/>
               </a:lnSpc>
@@ -10686,9 +11024,9 @@
                 <a:solidFill>
                   <a:srgbClr val="D6D6D6"/>
                 </a:solidFill>
-                <a:latin typeface="Arial" panose="020B0604020202090204" pitchFamily="34" charset="0"/>
-                <a:ea typeface="Arial" panose="020B0604020202090204" pitchFamily="34" charset="-122"/>
-                <a:cs typeface="Arial" panose="020B0604020202090204" pitchFamily="34" charset="-120"/>
+                <a:latin typeface="Arial" pitchFamily="34" charset="0"/>
+                <a:ea typeface="Arial" pitchFamily="34" charset="-122"/>
+                <a:cs typeface="Arial" pitchFamily="34" charset="-120"/>
               </a:rPr>
               <a:t>结构/命名/lint 规范</a:t>
             </a:r>
@@ -10722,7 +11060,7 @@
             <a:prstDash val="solid"/>
           </a:ln>
           <a:effectLst>
-            <a:outerShdw blurRad="88900" dist="25400" dir="5400000" algn="bl" rotWithShape="0">
+            <a:outerShdw sx="100000" sy="100000" kx="0" ky="0" algn="bl" rotWithShape="0" blurRad="88900" dist="25400" dir="5400000">
               <a:srgbClr val="000000">
                 <a:alpha val="30000"/>
               </a:srgbClr>
@@ -10745,12 +11083,13 @@
             <a:avLst/>
           </a:prstGeom>
           <a:noFill/>
-        </p:spPr>
-        <p:txBody>
-          <a:bodyPr wrap="square" lIns="0" tIns="0" rIns="0" bIns="0" rtlCol="0" anchor="ctr"/>
-          <a:lstStyle/>
-          <a:p>
-            <a:pPr marL="0" indent="0" algn="ctr">
+          <a:ln/>
+        </p:spPr>
+        <p:txBody>
+          <a:bodyPr wrap="square" lIns="0" tIns="0" rIns="0" bIns="0" rtlCol="0" anchor="ctr"/>
+          <a:lstStyle/>
+          <a:p>
+            <a:pPr algn="ctr" indent="0" marL="0">
               <a:buNone/>
             </a:pPr>
             <a:r>
@@ -10758,9 +11097,9 @@
                 <a:solidFill>
                   <a:srgbClr val="C98A82"/>
                 </a:solidFill>
-                <a:latin typeface="Arial" panose="020B0604020202090204" pitchFamily="34" charset="0"/>
-                <a:ea typeface="Arial" panose="020B0604020202090204" pitchFamily="34" charset="-122"/>
-                <a:cs typeface="Arial" panose="020B0604020202090204" pitchFamily="34" charset="-120"/>
+                <a:latin typeface="Arial" pitchFamily="34" charset="0"/>
+                <a:ea typeface="Arial" pitchFamily="34" charset="-122"/>
+                <a:cs typeface="Arial" pitchFamily="34" charset="-120"/>
               </a:rPr>
               <a:t>安全</a:t>
             </a:r>
@@ -10783,12 +11122,13 @@
             <a:avLst/>
           </a:prstGeom>
           <a:noFill/>
+          <a:ln/>
         </p:spPr>
         <p:txBody>
           <a:bodyPr wrap="square" lIns="0" tIns="0" rIns="0" bIns="0" rtlCol="0" anchor="t"/>
           <a:lstStyle/>
           <a:p>
-            <a:pPr marL="0" indent="0" algn="ctr">
+            <a:pPr algn="ctr" indent="0" marL="0">
               <a:lnSpc>
                 <a:spcPct val="115000"/>
               </a:lnSpc>
@@ -10799,9 +11139,9 @@
                 <a:solidFill>
                   <a:srgbClr val="D6D6D6"/>
                 </a:solidFill>
-                <a:latin typeface="Arial" panose="020B0604020202090204" pitchFamily="34" charset="0"/>
-                <a:ea typeface="Arial" panose="020B0604020202090204" pitchFamily="34" charset="-122"/>
-                <a:cs typeface="Arial" panose="020B0604020202090204" pitchFamily="34" charset="-120"/>
+                <a:latin typeface="Arial" pitchFamily="34" charset="0"/>
+                <a:ea typeface="Arial" pitchFamily="34" charset="-122"/>
+                <a:cs typeface="Arial" pitchFamily="34" charset="-120"/>
               </a:rPr>
               <a:t>不硬编码密钥、不越权、环境变量注入</a:t>
             </a:r>
@@ -10835,7 +11175,7 @@
             <a:prstDash val="solid"/>
           </a:ln>
           <a:effectLst>
-            <a:outerShdw blurRad="88900" dist="25400" dir="5400000" algn="bl" rotWithShape="0">
+            <a:outerShdw sx="100000" sy="100000" kx="0" ky="0" algn="bl" rotWithShape="0" blurRad="88900" dist="25400" dir="5400000">
               <a:srgbClr val="000000">
                 <a:alpha val="30000"/>
               </a:srgbClr>
@@ -10858,12 +11198,13 @@
             <a:avLst/>
           </a:prstGeom>
           <a:noFill/>
-        </p:spPr>
-        <p:txBody>
-          <a:bodyPr wrap="square" lIns="0" tIns="0" rIns="0" bIns="0" rtlCol="0" anchor="ctr"/>
-          <a:lstStyle/>
-          <a:p>
-            <a:pPr marL="0" indent="0" algn="ctr">
+          <a:ln/>
+        </p:spPr>
+        <p:txBody>
+          <a:bodyPr wrap="square" lIns="0" tIns="0" rIns="0" bIns="0" rtlCol="0" anchor="ctr"/>
+          <a:lstStyle/>
+          <a:p>
+            <a:pPr algn="ctr" indent="0" marL="0">
               <a:buNone/>
             </a:pPr>
             <a:r>
@@ -10871,9 +11212,9 @@
                 <a:solidFill>
                   <a:srgbClr val="C9A96E"/>
                 </a:solidFill>
-                <a:latin typeface="Arial" panose="020B0604020202090204" pitchFamily="34" charset="0"/>
-                <a:ea typeface="Arial" panose="020B0604020202090204" pitchFamily="34" charset="-122"/>
-                <a:cs typeface="Arial" panose="020B0604020202090204" pitchFamily="34" charset="-120"/>
+                <a:latin typeface="Arial" pitchFamily="34" charset="0"/>
+                <a:ea typeface="Arial" pitchFamily="34" charset="-122"/>
+                <a:cs typeface="Arial" pitchFamily="34" charset="-120"/>
               </a:rPr>
               <a:t>验收</a:t>
             </a:r>
@@ -10896,12 +11237,13 @@
             <a:avLst/>
           </a:prstGeom>
           <a:noFill/>
+          <a:ln/>
         </p:spPr>
         <p:txBody>
           <a:bodyPr wrap="square" lIns="0" tIns="0" rIns="0" bIns="0" rtlCol="0" anchor="t"/>
           <a:lstStyle/>
           <a:p>
-            <a:pPr marL="0" indent="0" algn="ctr">
+            <a:pPr algn="ctr" indent="0" marL="0">
               <a:lnSpc>
                 <a:spcPct val="115000"/>
               </a:lnSpc>
@@ -10912,9 +11254,9 @@
                 <a:solidFill>
                   <a:srgbClr val="D6D6D6"/>
                 </a:solidFill>
-                <a:latin typeface="Arial" panose="020B0604020202090204" pitchFamily="34" charset="0"/>
-                <a:ea typeface="Arial" panose="020B0604020202090204" pitchFamily="34" charset="-122"/>
-                <a:cs typeface="Arial" panose="020B0604020202090204" pitchFamily="34" charset="-120"/>
+                <a:latin typeface="Arial" pitchFamily="34" charset="0"/>
+                <a:ea typeface="Arial" pitchFamily="34" charset="-122"/>
+                <a:cs typeface="Arial" pitchFamily="34" charset="-120"/>
               </a:rPr>
               <a:t>单测/集成/CI/混沌——循环的判官</a:t>
             </a:r>
@@ -10964,12 +11306,13 @@
             <a:avLst/>
           </a:prstGeom>
           <a:noFill/>
-        </p:spPr>
-        <p:txBody>
-          <a:bodyPr wrap="square" lIns="0" tIns="0" rIns="0" bIns="0" rtlCol="0" anchor="ctr"/>
-          <a:lstStyle/>
-          <a:p>
-            <a:pPr marL="0" indent="0">
+          <a:ln/>
+        </p:spPr>
+        <p:txBody>
+          <a:bodyPr wrap="square" lIns="0" tIns="0" rIns="0" bIns="0" rtlCol="0" anchor="ctr"/>
+          <a:lstStyle/>
+          <a:p>
+            <a:pPr indent="0" marL="0">
               <a:lnSpc>
                 <a:spcPct val="106000"/>
               </a:lnSpc>
@@ -10980,20 +11323,26 @@
                 <a:solidFill>
                   <a:srgbClr val="C9A96E"/>
                 </a:solidFill>
-                <a:latin typeface="Arial" panose="020B0604020202090204" pitchFamily="34" charset="0"/>
-                <a:ea typeface="Arial" panose="020B0604020202090204" pitchFamily="34" charset="-122"/>
-                <a:cs typeface="Arial" panose="020B0604020202090204" pitchFamily="34" charset="-120"/>
+                <a:latin typeface="Arial" pitchFamily="34" charset="0"/>
+                <a:ea typeface="Arial" pitchFamily="34" charset="-122"/>
+                <a:cs typeface="Arial" pitchFamily="34" charset="-120"/>
               </a:rPr>
               <a:t>判官不能被收买：</a:t>
             </a:r>
+            <a:pPr indent="0" marL="0">
+              <a:lnSpc>
+                <a:spcPct val="106000"/>
+              </a:lnSpc>
+              <a:buNone/>
+            </a:pPr>
             <a:r>
               <a:rPr lang="en-US" sz="1250" dirty="0">
                 <a:solidFill>
                   <a:srgbClr val="F0F0F0"/>
                 </a:solidFill>
-                <a:latin typeface="Arial" panose="020B0604020202090204" pitchFamily="34" charset="0"/>
-                <a:ea typeface="Arial" panose="020B0604020202090204" pitchFamily="34" charset="-122"/>
-                <a:cs typeface="Arial" panose="020B0604020202090204" pitchFamily="34" charset="-120"/>
+                <a:latin typeface="Arial" pitchFamily="34" charset="0"/>
+                <a:ea typeface="Arial" pitchFamily="34" charset="-122"/>
+                <a:cs typeface="Arial" pitchFamily="34" charset="-120"/>
               </a:rPr>
               <a:t>禁止循环改/删测试、实现者与验证者分离、CI 当循环够不着的外部判官。没有靠谱的判官，循环就是在高速地放大错误。</a:t>
             </a:r>
@@ -11043,12 +11392,13 @@
             <a:avLst/>
           </a:prstGeom>
           <a:noFill/>
-        </p:spPr>
-        <p:txBody>
-          <a:bodyPr wrap="square" lIns="0" tIns="0" rIns="0" bIns="0" rtlCol="0" anchor="ctr"/>
-          <a:lstStyle/>
-          <a:p>
-            <a:pPr marL="0" indent="0">
+          <a:ln/>
+        </p:spPr>
+        <p:txBody>
+          <a:bodyPr wrap="square" lIns="0" tIns="0" rIns="0" bIns="0" rtlCol="0" anchor="ctr"/>
+          <a:lstStyle/>
+          <a:p>
+            <a:pPr indent="0" marL="0">
               <a:lnSpc>
                 <a:spcPct val="106000"/>
               </a:lnSpc>
@@ -11059,20 +11409,26 @@
                 <a:solidFill>
                   <a:srgbClr val="9A9A9A"/>
                 </a:solidFill>
-                <a:latin typeface="Arial" panose="020B0604020202090204" pitchFamily="34" charset="0"/>
-                <a:ea typeface="Arial" panose="020B0604020202090204" pitchFamily="34" charset="-122"/>
-                <a:cs typeface="Arial" panose="020B0604020202090204" pitchFamily="34" charset="-120"/>
+                <a:latin typeface="Arial" pitchFamily="34" charset="0"/>
+                <a:ea typeface="Arial" pitchFamily="34" charset="-122"/>
+                <a:cs typeface="Arial" pitchFamily="34" charset="-120"/>
               </a:rPr>
               <a:t>When 的实践：</a:t>
             </a:r>
+            <a:pPr indent="0" marL="0">
+              <a:lnSpc>
+                <a:spcPct val="106000"/>
+              </a:lnSpc>
+              <a:buNone/>
+            </a:pPr>
             <a:r>
               <a:rPr lang="en-US" sz="1250" dirty="0">
                 <a:solidFill>
                   <a:srgbClr val="D6D6D6"/>
                 </a:solidFill>
-                <a:latin typeface="Arial" panose="020B0604020202090204" pitchFamily="34" charset="0"/>
-                <a:ea typeface="Arial" panose="020B0604020202090204" pitchFamily="34" charset="-122"/>
-                <a:cs typeface="Arial" panose="020B0604020202090204" pitchFamily="34" charset="-120"/>
+                <a:latin typeface="Arial" pitchFamily="34" charset="0"/>
+                <a:ea typeface="Arial" pitchFamily="34" charset="-122"/>
+                <a:cs typeface="Arial" pitchFamily="34" charset="-120"/>
               </a:rPr>
               <a:t>混沌测试（杀节点/分区）交 CI；不丢、10 秒切换、脑裂唯一性，都是可判定断言。</a:t>
             </a:r>
@@ -11090,13 +11446,12 @@
 
 <file path=ppt/slides/slide9.xml><?xml version="1.0" encoding="utf-8"?>
 <p:sld xmlns:a="http://schemas.openxmlformats.org/drawingml/2006/main" xmlns:r="http://schemas.openxmlformats.org/officeDocument/2006/relationships" xmlns:p="http://schemas.openxmlformats.org/presentationml/2006/main">
-  <p:cSld>
+  <p:cSld name="Slide 9">
     <p:bg>
       <p:bgPr>
         <a:solidFill>
           <a:srgbClr val="1E1E1E"/>
         </a:solidFill>
-        <a:effectLst/>
       </p:bgPr>
     </p:bg>
     <p:spTree>
@@ -11128,12 +11483,13 @@
             <a:avLst/>
           </a:prstGeom>
           <a:noFill/>
-        </p:spPr>
-        <p:txBody>
-          <a:bodyPr wrap="square" lIns="0" tIns="0" rIns="0" bIns="0" rtlCol="0" anchor="ctr"/>
-          <a:lstStyle/>
-          <a:p>
-            <a:pPr marL="0" indent="0">
+          <a:ln/>
+        </p:spPr>
+        <p:txBody>
+          <a:bodyPr wrap="square" lIns="0" tIns="0" rIns="0" bIns="0" rtlCol="0" anchor="ctr"/>
+          <a:lstStyle/>
+          <a:p>
+            <a:pPr indent="0" marL="0">
               <a:buNone/>
             </a:pPr>
             <a:r>
@@ -11141,9 +11497,9 @@
                 <a:solidFill>
                   <a:srgbClr val="6E6E6E"/>
                 </a:solidFill>
-                <a:latin typeface="Arial" panose="020B0604020202090204" pitchFamily="34" charset="0"/>
-                <a:ea typeface="Arial" panose="020B0604020202090204" pitchFamily="34" charset="-122"/>
-                <a:cs typeface="Arial" panose="020B0604020202090204" pitchFamily="34" charset="-120"/>
+                <a:latin typeface="Arial" pitchFamily="34" charset="0"/>
+                <a:ea typeface="Arial" pitchFamily="34" charset="-122"/>
+                <a:cs typeface="Arial" pitchFamily="34" charset="-120"/>
               </a:rPr>
               <a:t>第 54 节 · When 项目总结与后续规划</a:t>
             </a:r>
@@ -11166,12 +11522,13 @@
             <a:avLst/>
           </a:prstGeom>
           <a:noFill/>
-        </p:spPr>
-        <p:txBody>
-          <a:bodyPr wrap="square" lIns="0" tIns="0" rIns="0" bIns="0" rtlCol="0" anchor="ctr"/>
-          <a:lstStyle/>
-          <a:p>
-            <a:pPr marL="0" indent="0" algn="r">
+          <a:ln/>
+        </p:spPr>
+        <p:txBody>
+          <a:bodyPr wrap="square" lIns="0" tIns="0" rIns="0" bIns="0" rtlCol="0" anchor="ctr"/>
+          <a:lstStyle/>
+          <a:p>
+            <a:pPr algn="r" indent="0" marL="0">
               <a:buNone/>
             </a:pPr>
             <a:r>
@@ -11179,9 +11536,9 @@
                 <a:solidFill>
                   <a:srgbClr val="6E6E6E"/>
                 </a:solidFill>
-                <a:latin typeface="Arial" panose="020B0604020202090204" pitchFamily="34" charset="0"/>
-                <a:ea typeface="Arial" panose="020B0604020202090204" pitchFamily="34" charset="-122"/>
-                <a:cs typeface="Arial" panose="020B0604020202090204" pitchFamily="34" charset="-120"/>
+                <a:latin typeface="Arial" pitchFamily="34" charset="0"/>
+                <a:ea typeface="Arial" pitchFamily="34" charset="-122"/>
+                <a:cs typeface="Arial" pitchFamily="34" charset="-120"/>
               </a:rPr>
               <a:t>9 / 14</a:t>
             </a:r>
@@ -11228,22 +11585,23 @@
             <a:avLst/>
           </a:prstGeom>
           <a:noFill/>
-        </p:spPr>
-        <p:txBody>
-          <a:bodyPr wrap="square" lIns="0" tIns="0" rIns="0" bIns="0" rtlCol="0" anchor="ctr"/>
-          <a:lstStyle/>
-          <a:p>
-            <a:pPr marL="0" indent="0" algn="ctr">
-              <a:buNone/>
-            </a:pPr>
-            <a:r>
-              <a:rPr lang="en-US" sz="1050" b="1" kern="0" spc="100" dirty="0">
+          <a:ln/>
+        </p:spPr>
+        <p:txBody>
+          <a:bodyPr wrap="square" lIns="0" tIns="0" rIns="0" bIns="0" rtlCol="0" anchor="ctr"/>
+          <a:lstStyle/>
+          <a:p>
+            <a:pPr algn="ctr" indent="0" marL="0">
+              <a:buNone/>
+            </a:pPr>
+            <a:r>
+              <a:rPr lang="en-US" sz="1050" b="1" spc="100" kern="0" dirty="0">
                 <a:solidFill>
                   <a:srgbClr val="C9A96E"/>
                 </a:solidFill>
-                <a:latin typeface="Arial" panose="020B0604020202090204" pitchFamily="34" charset="0"/>
-                <a:ea typeface="Arial" panose="020B0604020202090204" pitchFamily="34" charset="-122"/>
-                <a:cs typeface="Arial" panose="020B0604020202090204" pitchFamily="34" charset="-120"/>
+                <a:latin typeface="Arial" pitchFamily="34" charset="0"/>
+                <a:ea typeface="Arial" pitchFamily="34" charset="-122"/>
+                <a:cs typeface="Arial" pitchFamily="34" charset="-120"/>
               </a:rPr>
               <a:t>两次跑</a:t>
             </a:r>
@@ -11266,12 +11624,13 @@
             <a:avLst/>
           </a:prstGeom>
           <a:noFill/>
-        </p:spPr>
-        <p:txBody>
-          <a:bodyPr wrap="square" lIns="0" tIns="0" rIns="0" bIns="0" rtlCol="0" anchor="ctr"/>
-          <a:lstStyle/>
-          <a:p>
-            <a:pPr marL="0" indent="0">
+          <a:ln/>
+        </p:spPr>
+        <p:txBody>
+          <a:bodyPr wrap="square" lIns="0" tIns="0" rIns="0" bIns="0" rtlCol="0" anchor="ctr"/>
+          <a:lstStyle/>
+          <a:p>
+            <a:pPr indent="0" marL="0">
               <a:buNone/>
             </a:pPr>
             <a:r>
@@ -11279,9 +11638,9 @@
                 <a:solidFill>
                   <a:srgbClr val="F0F0F0"/>
                 </a:solidFill>
-                <a:latin typeface="Arial" panose="020B0604020202090204" pitchFamily="34" charset="0"/>
-                <a:ea typeface="Arial" panose="020B0604020202090204" pitchFamily="34" charset="-122"/>
-                <a:cs typeface="Arial" panose="020B0604020202090204" pitchFamily="34" charset="-120"/>
+                <a:latin typeface="Arial" pitchFamily="34" charset="0"/>
+                <a:ea typeface="Arial" pitchFamily="34" charset="-122"/>
+                <a:cs typeface="Arial" pitchFamily="34" charset="-120"/>
               </a:rPr>
               <a:t>第一次单机核心，第二次完整 HA</a:t>
             </a:r>
@@ -11315,7 +11674,7 @@
             <a:prstDash val="solid"/>
           </a:ln>
           <a:effectLst>
-            <a:outerShdw blurRad="88900" dist="25400" dir="5400000" algn="bl" rotWithShape="0">
+            <a:outerShdw sx="100000" sy="100000" kx="0" ky="0" algn="bl" rotWithShape="0" blurRad="88900" dist="25400" dir="5400000">
               <a:srgbClr val="000000">
                 <a:alpha val="30000"/>
               </a:srgbClr>
@@ -11338,12 +11697,13 @@
             <a:avLst/>
           </a:prstGeom>
           <a:noFill/>
-        </p:spPr>
-        <p:txBody>
-          <a:bodyPr wrap="square" lIns="0" tIns="0" rIns="0" bIns="0" rtlCol="0" anchor="ctr"/>
-          <a:lstStyle/>
-          <a:p>
-            <a:pPr marL="0" indent="0" algn="ctr">
+          <a:ln/>
+        </p:spPr>
+        <p:txBody>
+          <a:bodyPr wrap="square" lIns="0" tIns="0" rIns="0" bIns="0" rtlCol="0" anchor="ctr"/>
+          <a:lstStyle/>
+          <a:p>
+            <a:pPr algn="ctr" indent="0" marL="0">
               <a:lnSpc>
                 <a:spcPct val="102000"/>
               </a:lnSpc>
@@ -11354,9 +11714,9 @@
                 <a:solidFill>
                   <a:srgbClr val="7FB08A"/>
                 </a:solidFill>
-                <a:latin typeface="Arial" panose="020B0604020202090204" pitchFamily="34" charset="0"/>
-                <a:ea typeface="Arial" panose="020B0604020202090204" pitchFamily="34" charset="-122"/>
-                <a:cs typeface="Arial" panose="020B0604020202090204" pitchFamily="34" charset="-120"/>
+                <a:latin typeface="Arial" pitchFamily="34" charset="0"/>
+                <a:ea typeface="Arial" pitchFamily="34" charset="-122"/>
+                <a:cs typeface="Arial" pitchFamily="34" charset="-120"/>
               </a:rPr>
               <a:t>第 46 节 · 第一次跑</a:t>
             </a:r>
@@ -11381,6 +11741,7 @@
           <a:solidFill>
             <a:srgbClr val="7FB08A"/>
           </a:solidFill>
+          <a:ln/>
         </p:spPr>
       </p:sp>
       <p:sp>
@@ -11398,12 +11759,13 @@
             <a:avLst/>
           </a:prstGeom>
           <a:noFill/>
+          <a:ln/>
         </p:spPr>
         <p:txBody>
           <a:bodyPr wrap="square" lIns="0" tIns="0" rIns="0" bIns="0" rtlCol="0" anchor="t"/>
           <a:lstStyle/>
           <a:p>
-            <a:pPr marL="0" indent="0">
+            <a:pPr indent="0" marL="0">
               <a:lnSpc>
                 <a:spcPct val="108000"/>
               </a:lnSpc>
@@ -11414,9 +11776,9 @@
                 <a:solidFill>
                   <a:srgbClr val="D6D6D6"/>
                 </a:solidFill>
-                <a:latin typeface="Arial" panose="020B0604020202090204" pitchFamily="34" charset="0"/>
-                <a:ea typeface="Arial" panose="020B0604020202090204" pitchFamily="34" charset="-122"/>
-                <a:cs typeface="Arial" panose="020B0604020202090204" pitchFamily="34" charset="-120"/>
+                <a:latin typeface="Arial" pitchFamily="34" charset="0"/>
+                <a:ea typeface="Arial" pitchFamily="34" charset="-122"/>
+                <a:cs typeface="Arial" pitchFamily="34" charset="-120"/>
               </a:rPr>
               <a:t>单机核心链路：收→存→路由→到点触发</a:t>
             </a:r>
@@ -11441,6 +11803,7 @@
           <a:solidFill>
             <a:srgbClr val="7FB08A"/>
           </a:solidFill>
+          <a:ln/>
         </p:spPr>
       </p:sp>
       <p:sp>
@@ -11458,12 +11821,13 @@
             <a:avLst/>
           </a:prstGeom>
           <a:noFill/>
+          <a:ln/>
         </p:spPr>
         <p:txBody>
           <a:bodyPr wrap="square" lIns="0" tIns="0" rIns="0" bIns="0" rtlCol="0" anchor="t"/>
           <a:lstStyle/>
           <a:p>
-            <a:pPr marL="0" indent="0">
+            <a:pPr indent="0" marL="0">
               <a:lnSpc>
                 <a:spcPct val="108000"/>
               </a:lnSpc>
@@ -11474,9 +11838,9 @@
                 <a:solidFill>
                   <a:srgbClr val="D6D6D6"/>
                 </a:solidFill>
-                <a:latin typeface="Arial" panose="020B0604020202090204" pitchFamily="34" charset="0"/>
-                <a:ea typeface="Arial" panose="020B0604020202090204" pitchFamily="34" charset="-122"/>
-                <a:cs typeface="Arial" panose="020B0604020202090204" pitchFamily="34" charset="-120"/>
+                <a:latin typeface="Arial" pitchFamily="34" charset="0"/>
+                <a:ea typeface="Arial" pitchFamily="34" charset="-122"/>
+                <a:cs typeface="Arial" pitchFamily="34" charset="-120"/>
               </a:rPr>
               <a:t>集群组建、选主、上下线感知</a:t>
             </a:r>
@@ -11501,6 +11865,7 @@
           <a:solidFill>
             <a:srgbClr val="7FB08A"/>
           </a:solidFill>
+          <a:ln/>
         </p:spPr>
       </p:sp>
       <p:sp>
@@ -11518,12 +11883,13 @@
             <a:avLst/>
           </a:prstGeom>
           <a:noFill/>
+          <a:ln/>
         </p:spPr>
         <p:txBody>
           <a:bodyPr wrap="square" lIns="0" tIns="0" rIns="0" bIns="0" rtlCol="0" anchor="t"/>
           <a:lstStyle/>
           <a:p>
-            <a:pPr marL="0" indent="0">
+            <a:pPr indent="0" marL="0">
               <a:lnSpc>
                 <a:spcPct val="108000"/>
               </a:lnSpc>
@@ -11534,9 +11900,9 @@
                 <a:solidFill>
                   <a:srgbClr val="D6D6D6"/>
                 </a:solidFill>
-                <a:latin typeface="Arial" panose="020B0604020202090204" pitchFamily="34" charset="0"/>
-                <a:ea typeface="Arial" panose="020B0604020202090204" pitchFamily="34" charset="-122"/>
-                <a:cs typeface="Arial" panose="020B0604020202090204" pitchFamily="34" charset="-120"/>
+                <a:latin typeface="Arial" pitchFamily="34" charset="0"/>
+                <a:ea typeface="Arial" pitchFamily="34" charset="-122"/>
+                <a:cs typeface="Arial" pitchFamily="34" charset="-120"/>
               </a:rPr>
               <a:t>投递先用桩，闭合链路</a:t>
             </a:r>
@@ -11570,7 +11936,7 @@
             <a:prstDash val="solid"/>
           </a:ln>
           <a:effectLst>
-            <a:outerShdw blurRad="88900" dist="25400" dir="5400000" algn="bl" rotWithShape="0">
+            <a:outerShdw sx="100000" sy="100000" kx="0" ky="0" algn="bl" rotWithShape="0" blurRad="88900" dist="25400" dir="5400000">
               <a:srgbClr val="000000">
                 <a:alpha val="30000"/>
               </a:srgbClr>
@@ -11593,12 +11959,13 @@
             <a:avLst/>
           </a:prstGeom>
           <a:noFill/>
-        </p:spPr>
-        <p:txBody>
-          <a:bodyPr wrap="square" lIns="0" tIns="0" rIns="0" bIns="0" rtlCol="0" anchor="ctr"/>
-          <a:lstStyle/>
-          <a:p>
-            <a:pPr marL="0" indent="0" algn="ctr">
+          <a:ln/>
+        </p:spPr>
+        <p:txBody>
+          <a:bodyPr wrap="square" lIns="0" tIns="0" rIns="0" bIns="0" rtlCol="0" anchor="ctr"/>
+          <a:lstStyle/>
+          <a:p>
+            <a:pPr algn="ctr" indent="0" marL="0">
               <a:lnSpc>
                 <a:spcPct val="102000"/>
               </a:lnSpc>
@@ -11609,9 +11976,9 @@
                 <a:solidFill>
                   <a:srgbClr val="C9A96E"/>
                 </a:solidFill>
-                <a:latin typeface="Arial" panose="020B0604020202090204" pitchFamily="34" charset="0"/>
-                <a:ea typeface="Arial" panose="020B0604020202090204" pitchFamily="34" charset="-122"/>
-                <a:cs typeface="Arial" panose="020B0604020202090204" pitchFamily="34" charset="-120"/>
+                <a:latin typeface="Arial" pitchFamily="34" charset="0"/>
+                <a:ea typeface="Arial" pitchFamily="34" charset="-122"/>
+                <a:cs typeface="Arial" pitchFamily="34" charset="-120"/>
               </a:rPr>
               <a:t>第 53 节 · 第二次跑</a:t>
             </a:r>
@@ -11636,6 +12003,7 @@
           <a:solidFill>
             <a:srgbClr val="C9A96E"/>
           </a:solidFill>
+          <a:ln/>
         </p:spPr>
       </p:sp>
       <p:sp>
@@ -11653,12 +12021,13 @@
             <a:avLst/>
           </a:prstGeom>
           <a:noFill/>
+          <a:ln/>
         </p:spPr>
         <p:txBody>
           <a:bodyPr wrap="square" lIns="0" tIns="0" rIns="0" bIns="0" rtlCol="0" anchor="t"/>
           <a:lstStyle/>
           <a:p>
-            <a:pPr marL="0" indent="0">
+            <a:pPr indent="0" marL="0">
               <a:lnSpc>
                 <a:spcPct val="108000"/>
               </a:lnSpc>
@@ -11669,9 +12038,9 @@
                 <a:solidFill>
                   <a:srgbClr val="D6D6D6"/>
                 </a:solidFill>
-                <a:latin typeface="Arial" panose="020B0604020202090204" pitchFamily="34" charset="0"/>
-                <a:ea typeface="Arial" panose="020B0604020202090204" pitchFamily="34" charset="-122"/>
-                <a:cs typeface="Arial" panose="020B0604020202090204" pitchFamily="34" charset="-120"/>
+                <a:latin typeface="Arial" pitchFamily="34" charset="0"/>
+                <a:ea typeface="Arial" pitchFamily="34" charset="-122"/>
+                <a:cs typeface="Arial" pitchFamily="34" charset="-120"/>
               </a:rPr>
               <a:t>真 HTTP/Kafka 投递、副本 + 10 秒切换</a:t>
             </a:r>
@@ -11696,6 +12065,7 @@
           <a:solidFill>
             <a:srgbClr val="C9A96E"/>
           </a:solidFill>
+          <a:ln/>
         </p:spPr>
       </p:sp>
       <p:sp>
@@ -11713,12 +12083,13 @@
             <a:avLst/>
           </a:prstGeom>
           <a:noFill/>
+          <a:ln/>
         </p:spPr>
         <p:txBody>
           <a:bodyPr wrap="square" lIns="0" tIns="0" rIns="0" bIns="0" rtlCol="0" anchor="t"/>
           <a:lstStyle/>
           <a:p>
-            <a:pPr marL="0" indent="0">
+            <a:pPr indent="0" marL="0">
               <a:lnSpc>
                 <a:spcPct val="108000"/>
               </a:lnSpc>
@@ -11729,9 +12100,9 @@
                 <a:solidFill>
                   <a:srgbClr val="D6D6D6"/>
                 </a:solidFill>
-                <a:latin typeface="Arial" panose="020B0604020202090204" pitchFamily="34" charset="0"/>
-                <a:ea typeface="Arial" panose="020B0604020202090204" pitchFamily="34" charset="-122"/>
-                <a:cs typeface="Arial" panose="020B0604020202090204" pitchFamily="34" charset="-120"/>
+                <a:latin typeface="Arial" pitchFamily="34" charset="0"/>
+                <a:ea typeface="Arial" pitchFamily="34" charset="-122"/>
+                <a:cs typeface="Arial" pitchFamily="34" charset="-120"/>
               </a:rPr>
               <a:t>Controller rebalance、多节点分发</a:t>
             </a:r>
@@ -11756,6 +12127,7 @@
           <a:solidFill>
             <a:srgbClr val="C9A96E"/>
           </a:solidFill>
+          <a:ln/>
         </p:spPr>
       </p:sp>
       <p:sp>
@@ -11773,12 +12145,13 @@
             <a:avLst/>
           </a:prstGeom>
           <a:noFill/>
+          <a:ln/>
         </p:spPr>
         <p:txBody>
           <a:bodyPr wrap="square" lIns="0" tIns="0" rIns="0" bIns="0" rtlCol="0" anchor="t"/>
           <a:lstStyle/>
           <a:p>
-            <a:pPr marL="0" indent="0">
+            <a:pPr indent="0" marL="0">
               <a:lnSpc>
                 <a:spcPct val="108000"/>
               </a:lnSpc>
@@ -11789,9 +12162,9 @@
                 <a:solidFill>
                   <a:srgbClr val="D6D6D6"/>
                 </a:solidFill>
-                <a:latin typeface="Arial" panose="020B0604020202090204" pitchFamily="34" charset="0"/>
-                <a:ea typeface="Arial" panose="020B0604020202090204" pitchFamily="34" charset="-122"/>
-                <a:cs typeface="Arial" panose="020B0604020202090204" pitchFamily="34" charset="-120"/>
+                <a:latin typeface="Arial" pitchFamily="34" charset="0"/>
+                <a:ea typeface="Arial" pitchFamily="34" charset="-122"/>
+                <a:cs typeface="Arial" pitchFamily="34" charset="-120"/>
               </a:rPr>
               <a:t>自动部署 + SDK 测 + 管理台看 + 演示 HA</a:t>
             </a:r>
@@ -11841,12 +12214,13 @@
             <a:avLst/>
           </a:prstGeom>
           <a:noFill/>
-        </p:spPr>
-        <p:txBody>
-          <a:bodyPr wrap="square" lIns="0" tIns="0" rIns="0" bIns="0" rtlCol="0" anchor="ctr"/>
-          <a:lstStyle/>
-          <a:p>
-            <a:pPr marL="0" indent="0">
+          <a:ln/>
+        </p:spPr>
+        <p:txBody>
+          <a:bodyPr wrap="square" lIns="0" tIns="0" rIns="0" bIns="0" rtlCol="0" anchor="ctr"/>
+          <a:lstStyle/>
+          <a:p>
+            <a:pPr indent="0" marL="0">
               <a:lnSpc>
                 <a:spcPct val="106000"/>
               </a:lnSpc>
@@ -11857,20 +12231,26 @@
                 <a:solidFill>
                   <a:srgbClr val="C9A96E"/>
                 </a:solidFill>
-                <a:latin typeface="Arial" panose="020B0604020202090204" pitchFamily="34" charset="0"/>
-                <a:ea typeface="Arial" panose="020B0604020202090204" pitchFamily="34" charset="-122"/>
-                <a:cs typeface="Arial" panose="020B0604020202090204" pitchFamily="34" charset="-120"/>
+                <a:latin typeface="Arial" pitchFamily="34" charset="0"/>
+                <a:ea typeface="Arial" pitchFamily="34" charset="-122"/>
+                <a:cs typeface="Arial" pitchFamily="34" charset="-120"/>
               </a:rPr>
               <a:t>每次都是：</a:t>
             </a:r>
+            <a:pPr indent="0" marL="0">
+              <a:lnSpc>
+                <a:spcPct val="106000"/>
+              </a:lnSpc>
+              <a:buNone/>
+            </a:pPr>
             <a:r>
               <a:rPr lang="en-US" sz="1250" dirty="0">
                 <a:solidFill>
                   <a:srgbClr val="F0F0F0"/>
                 </a:solidFill>
-                <a:latin typeface="Arial" panose="020B0604020202090204" pitchFamily="34" charset="0"/>
-                <a:ea typeface="Arial" panose="020B0604020202090204" pitchFamily="34" charset="-122"/>
-                <a:cs typeface="Arial" panose="020B0604020202090204" pitchFamily="34" charset="-120"/>
+                <a:latin typeface="Arial" pitchFamily="34" charset="0"/>
+                <a:ea typeface="Arial" pitchFamily="34" charset="-122"/>
+                <a:cs typeface="Arial" pitchFamily="34" charset="-120"/>
               </a:rPr>
               <a:t>跑 → 冒问题 → 回填到对应节的原料（不打补丁）→ 从干净状态再跑，直到判官全绿。改输入，比在对话里跟 AI 掰扯十回合更有效。</a:t>
             </a:r>
@@ -11929,7 +12309,7 @@
     </a:clrScheme>
     <a:fontScheme name="Office">
       <a:majorFont>
-        <a:latin typeface="Calibri Light"/>
+        <a:latin typeface="Calibri Light" panose="020F0302020204030204"/>
         <a:ea typeface=""/>
         <a:cs typeface=""/>
         <a:font script="Jpan" typeface="游ゴシック Light"/>
@@ -11962,9 +12342,26 @@
         <a:font script="Viet" typeface="Times New Roman"/>
         <a:font script="Uigh" typeface="Microsoft Uighur"/>
         <a:font script="Geor" typeface="Sylfaen"/>
+        <a:font script="Armn" typeface="Arial"/>
+        <a:font script="Bugi" typeface="Leelawadee UI"/>
+        <a:font script="Bopo" typeface="Microsoft JhengHei"/>
+        <a:font script="Java" typeface="Javanese Text"/>
+        <a:font script="Lisu" typeface="Segoe UI"/>
+        <a:font script="Mymr" typeface="Myanmar Text"/>
+        <a:font script="Nkoo" typeface="Ebrima"/>
+        <a:font script="Olck" typeface="Nirmala UI"/>
+        <a:font script="Osma" typeface="Ebrima"/>
+        <a:font script="Phag" typeface="Phagspa"/>
+        <a:font script="Syrn" typeface="Estrangelo Edessa"/>
+        <a:font script="Syrj" typeface="Estrangelo Edessa"/>
+        <a:font script="Syre" typeface="Estrangelo Edessa"/>
+        <a:font script="Sora" typeface="Nirmala UI"/>
+        <a:font script="Tale" typeface="Microsoft Tai Le"/>
+        <a:font script="Talu" typeface="Microsoft New Tai Lue"/>
+        <a:font script="Tfng" typeface="Ebrima"/>
       </a:majorFont>
       <a:minorFont>
-        <a:latin typeface="Calibri"/>
+        <a:latin typeface="Calibri" panose="020F0502020204030204"/>
         <a:ea typeface=""/>
         <a:cs typeface=""/>
         <a:font script="Jpan" typeface="游ゴシック"/>
@@ -11997,6 +12394,23 @@
         <a:font script="Viet" typeface="Arial"/>
         <a:font script="Uigh" typeface="Microsoft Uighur"/>
         <a:font script="Geor" typeface="Sylfaen"/>
+        <a:font script="Armn" typeface="Arial"/>
+        <a:font script="Bugi" typeface="Leelawadee UI"/>
+        <a:font script="Bopo" typeface="Microsoft JhengHei"/>
+        <a:font script="Java" typeface="Javanese Text"/>
+        <a:font script="Lisu" typeface="Segoe UI"/>
+        <a:font script="Mymr" typeface="Myanmar Text"/>
+        <a:font script="Nkoo" typeface="Ebrima"/>
+        <a:font script="Olck" typeface="Nirmala UI"/>
+        <a:font script="Osma" typeface="Ebrima"/>
+        <a:font script="Phag" typeface="Phagspa"/>
+        <a:font script="Syrn" typeface="Estrangelo Edessa"/>
+        <a:font script="Syrj" typeface="Estrangelo Edessa"/>
+        <a:font script="Syre" typeface="Estrangelo Edessa"/>
+        <a:font script="Sora" typeface="Nirmala UI"/>
+        <a:font script="Tale" typeface="Microsoft Tai Le"/>
+        <a:font script="Talu" typeface="Microsoft New Tai Lue"/>
+        <a:font script="Tfng" typeface="Ebrima"/>
       </a:minorFont>
     </a:fontScheme>
     <a:fmtScheme name="Office">
@@ -12137,265 +12551,8 @@
       </a:bgFillStyleLst>
     </a:fmtScheme>
   </a:themeElements>
-  <a:extLst>
-    <a:ext uri="{05A4C25C-085E-4340-85A3-A5531E510DB2}">
-      <thm15:themeFamily xmlns:thm15="http://schemas.microsoft.com/office/thememl/2012/main" name="Office Theme" id="{62F939B6-93AF-4DB8-9C6B-D6C7DFDC589F}" vid="{4A3C46E8-61CC-4603-A589-7422A47A8E4A}"/>
-    </a:ext>
-  </a:extLst>
-</a:theme>
-</file>
-
-<file path=ppt/theme/theme2.xml><?xml version="1.0" encoding="utf-8"?>
-<a:theme xmlns:a="http://schemas.openxmlformats.org/drawingml/2006/main" name="Office Theme">
-  <a:themeElements>
-    <a:clrScheme name="Office">
-      <a:dk1>
-        <a:sysClr val="windowText" lastClr="000000"/>
-      </a:dk1>
-      <a:lt1>
-        <a:sysClr val="window" lastClr="FFFFFF"/>
-      </a:lt1>
-      <a:dk2>
-        <a:srgbClr val="44546A"/>
-      </a:dk2>
-      <a:lt2>
-        <a:srgbClr val="E7E6E6"/>
-      </a:lt2>
-      <a:accent1>
-        <a:srgbClr val="4472C4"/>
-      </a:accent1>
-      <a:accent2>
-        <a:srgbClr val="ED7D31"/>
-      </a:accent2>
-      <a:accent3>
-        <a:srgbClr val="A5A5A5"/>
-      </a:accent3>
-      <a:accent4>
-        <a:srgbClr val="FFC000"/>
-      </a:accent4>
-      <a:accent5>
-        <a:srgbClr val="5B9BD5"/>
-      </a:accent5>
-      <a:accent6>
-        <a:srgbClr val="70AD47"/>
-      </a:accent6>
-      <a:hlink>
-        <a:srgbClr val="0563C1"/>
-      </a:hlink>
-      <a:folHlink>
-        <a:srgbClr val="954F72"/>
-      </a:folHlink>
-    </a:clrScheme>
-    <a:fontScheme name="Office">
-      <a:majorFont>
-        <a:latin typeface="Calibri Light"/>
-        <a:ea typeface=""/>
-        <a:cs typeface=""/>
-        <a:font script="Jpan" typeface="游ゴシック Light"/>
-        <a:font script="Hang" typeface="맑은 고딕"/>
-        <a:font script="Hans" typeface="等线 Light"/>
-        <a:font script="Hant" typeface="新細明體"/>
-        <a:font script="Arab" typeface="Times New Roman"/>
-        <a:font script="Hebr" typeface="Times New Roman"/>
-        <a:font script="Thai" typeface="Angsana New"/>
-        <a:font script="Ethi" typeface="Nyala"/>
-        <a:font script="Beng" typeface="Vrinda"/>
-        <a:font script="Gujr" typeface="Shruti"/>
-        <a:font script="Khmr" typeface="MoolBoran"/>
-        <a:font script="Knda" typeface="Tunga"/>
-        <a:font script="Guru" typeface="Raavi"/>
-        <a:font script="Cans" typeface="Euphemia"/>
-        <a:font script="Cher" typeface="Plantagenet Cherokee"/>
-        <a:font script="Yiii" typeface="Microsoft Yi Baiti"/>
-        <a:font script="Tibt" typeface="Microsoft Himalaya"/>
-        <a:font script="Thaa" typeface="MV Boli"/>
-        <a:font script="Deva" typeface="Mangal"/>
-        <a:font script="Telu" typeface="Gautami"/>
-        <a:font script="Taml" typeface="Latha"/>
-        <a:font script="Syrc" typeface="Estrangelo Edessa"/>
-        <a:font script="Orya" typeface="Kalinga"/>
-        <a:font script="Mlym" typeface="Kartika"/>
-        <a:font script="Laoo" typeface="DokChampa"/>
-        <a:font script="Sinh" typeface="Iskoola Pota"/>
-        <a:font script="Mong" typeface="Mongolian Baiti"/>
-        <a:font script="Viet" typeface="Times New Roman"/>
-        <a:font script="Uigh" typeface="Microsoft Uighur"/>
-        <a:font script="Geor" typeface="Sylfaen"/>
-      </a:majorFont>
-      <a:minorFont>
-        <a:latin typeface="Calibri"/>
-        <a:ea typeface=""/>
-        <a:cs typeface=""/>
-        <a:font script="Jpan" typeface="游ゴシック"/>
-        <a:font script="Hang" typeface="맑은 고딕"/>
-        <a:font script="Hans" typeface="等线"/>
-        <a:font script="Hant" typeface="新細明體"/>
-        <a:font script="Arab" typeface="Arial"/>
-        <a:font script="Hebr" typeface="Arial"/>
-        <a:font script="Thai" typeface="Cordia New"/>
-        <a:font script="Ethi" typeface="Nyala"/>
-        <a:font script="Beng" typeface="Vrinda"/>
-        <a:font script="Gujr" typeface="Shruti"/>
-        <a:font script="Khmr" typeface="DaunPenh"/>
-        <a:font script="Knda" typeface="Tunga"/>
-        <a:font script="Guru" typeface="Raavi"/>
-        <a:font script="Cans" typeface="Euphemia"/>
-        <a:font script="Cher" typeface="Plantagenet Cherokee"/>
-        <a:font script="Yiii" typeface="Microsoft Yi Baiti"/>
-        <a:font script="Tibt" typeface="Microsoft Himalaya"/>
-        <a:font script="Thaa" typeface="MV Boli"/>
-        <a:font script="Deva" typeface="Mangal"/>
-        <a:font script="Telu" typeface="Gautami"/>
-        <a:font script="Taml" typeface="Latha"/>
-        <a:font script="Syrc" typeface="Estrangelo Edessa"/>
-        <a:font script="Orya" typeface="Kalinga"/>
-        <a:font script="Mlym" typeface="Kartika"/>
-        <a:font script="Laoo" typeface="DokChampa"/>
-        <a:font script="Sinh" typeface="Iskoola Pota"/>
-        <a:font script="Mong" typeface="Mongolian Baiti"/>
-        <a:font script="Viet" typeface="Arial"/>
-        <a:font script="Uigh" typeface="Microsoft Uighur"/>
-        <a:font script="Geor" typeface="Sylfaen"/>
-      </a:minorFont>
-    </a:fontScheme>
-    <a:fmtScheme name="Office">
-      <a:fillStyleLst>
-        <a:solidFill>
-          <a:schemeClr val="phClr"/>
-        </a:solidFill>
-        <a:gradFill rotWithShape="1">
-          <a:gsLst>
-            <a:gs pos="0">
-              <a:schemeClr val="phClr">
-                <a:lumMod val="110000"/>
-                <a:satMod val="105000"/>
-                <a:tint val="67000"/>
-              </a:schemeClr>
-            </a:gs>
-            <a:gs pos="50000">
-              <a:schemeClr val="phClr">
-                <a:lumMod val="105000"/>
-                <a:satMod val="103000"/>
-                <a:tint val="73000"/>
-              </a:schemeClr>
-            </a:gs>
-            <a:gs pos="100000">
-              <a:schemeClr val="phClr">
-                <a:lumMod val="105000"/>
-                <a:satMod val="109000"/>
-                <a:tint val="81000"/>
-              </a:schemeClr>
-            </a:gs>
-          </a:gsLst>
-          <a:lin ang="5400000" scaled="0"/>
-        </a:gradFill>
-        <a:gradFill rotWithShape="1">
-          <a:gsLst>
-            <a:gs pos="0">
-              <a:schemeClr val="phClr">
-                <a:satMod val="103000"/>
-                <a:lumMod val="102000"/>
-                <a:tint val="94000"/>
-              </a:schemeClr>
-            </a:gs>
-            <a:gs pos="50000">
-              <a:schemeClr val="phClr">
-                <a:satMod val="110000"/>
-                <a:lumMod val="100000"/>
-                <a:shade val="100000"/>
-              </a:schemeClr>
-            </a:gs>
-            <a:gs pos="100000">
-              <a:schemeClr val="phClr">
-                <a:lumMod val="99000"/>
-                <a:satMod val="120000"/>
-                <a:shade val="78000"/>
-              </a:schemeClr>
-            </a:gs>
-          </a:gsLst>
-          <a:lin ang="5400000" scaled="0"/>
-        </a:gradFill>
-      </a:fillStyleLst>
-      <a:lnStyleLst>
-        <a:ln w="6350" cap="flat" cmpd="sng" algn="ctr">
-          <a:solidFill>
-            <a:schemeClr val="phClr"/>
-          </a:solidFill>
-          <a:prstDash val="solid"/>
-          <a:miter lim="800000"/>
-        </a:ln>
-        <a:ln w="12700" cap="flat" cmpd="sng" algn="ctr">
-          <a:solidFill>
-            <a:schemeClr val="phClr"/>
-          </a:solidFill>
-          <a:prstDash val="solid"/>
-          <a:miter lim="800000"/>
-        </a:ln>
-        <a:ln w="19050" cap="flat" cmpd="sng" algn="ctr">
-          <a:solidFill>
-            <a:schemeClr val="phClr"/>
-          </a:solidFill>
-          <a:prstDash val="solid"/>
-          <a:miter lim="800000"/>
-        </a:ln>
-      </a:lnStyleLst>
-      <a:effectStyleLst>
-        <a:effectStyle>
-          <a:effectLst/>
-        </a:effectStyle>
-        <a:effectStyle>
-          <a:effectLst/>
-        </a:effectStyle>
-        <a:effectStyle>
-          <a:effectLst>
-            <a:outerShdw blurRad="57150" dist="19050" dir="5400000" algn="ctr" rotWithShape="0">
-              <a:srgbClr val="000000">
-                <a:alpha val="63000"/>
-              </a:srgbClr>
-            </a:outerShdw>
-          </a:effectLst>
-        </a:effectStyle>
-      </a:effectStyleLst>
-      <a:bgFillStyleLst>
-        <a:solidFill>
-          <a:schemeClr val="phClr"/>
-        </a:solidFill>
-        <a:solidFill>
-          <a:schemeClr val="phClr">
-            <a:tint val="95000"/>
-            <a:satMod val="170000"/>
-          </a:schemeClr>
-        </a:solidFill>
-        <a:gradFill rotWithShape="1">
-          <a:gsLst>
-            <a:gs pos="0">
-              <a:schemeClr val="phClr">
-                <a:tint val="93000"/>
-                <a:satMod val="150000"/>
-                <a:shade val="98000"/>
-                <a:lumMod val="102000"/>
-              </a:schemeClr>
-            </a:gs>
-            <a:gs pos="50000">
-              <a:schemeClr val="phClr">
-                <a:tint val="98000"/>
-                <a:satMod val="130000"/>
-                <a:shade val="90000"/>
-                <a:lumMod val="103000"/>
-              </a:schemeClr>
-            </a:gs>
-            <a:gs pos="100000">
-              <a:schemeClr val="phClr">
-                <a:shade val="63000"/>
-                <a:satMod val="120000"/>
-              </a:schemeClr>
-            </a:gs>
-          </a:gsLst>
-          <a:lin ang="5400000" scaled="0"/>
-        </a:gradFill>
-      </a:bgFillStyleLst>
-    </a:fmtScheme>
-  </a:themeElements>
+  <a:objectDefaults/>
+  <a:extraClrSchemeLst/>
   <a:extLst>
     <a:ext uri="{05A4C25C-085E-4340-85A3-A5531E510DB2}">
       <thm15:themeFamily xmlns:thm15="http://schemas.microsoft.com/office/thememl/2012/main" name="Office Theme" id="{62F939B6-93AF-4DB8-9C6B-D6C7DFDC589F}" vid="{4A3C46E8-61CC-4603-A589-7422A47A8E4A}"/>

--- a/docs/第54节：When 项目总结与后续规划.pptx
+++ b/docs/第54节：When 项目总结与后续规划.pptx
@@ -1,28 +1,28 @@
 
 <file path=ppt/presentation.xml><?xml version="1.0" encoding="utf-8"?>
-<p:presentation xmlns:a="http://schemas.openxmlformats.org/drawingml/2006/main" xmlns:r="http://schemas.openxmlformats.org/officeDocument/2006/relationships" xmlns:p="http://schemas.openxmlformats.org/presentationml/2006/main" saveSubsetFonts="1" autoCompressPictures="0">
+<p:presentation xmlns:a="http://schemas.openxmlformats.org/drawingml/2006/main" xmlns:r="http://schemas.openxmlformats.org/officeDocument/2006/relationships" xmlns:p="http://schemas.openxmlformats.org/presentationml/2006/main" autoCompressPictures="0">
   <p:sldMasterIdLst>
     <p:sldMasterId id="2147483648" r:id="rId1"/>
   </p:sldMasterIdLst>
+  <p:notesMasterIdLst>
+    <p:notesMasterId r:id="rId4"/>
+  </p:notesMasterIdLst>
   <p:sldIdLst>
-    <p:sldId id="256" r:id="rId2"/>
-    <p:sldId id="257" r:id="rId3"/>
-    <p:sldId id="258" r:id="rId4"/>
-    <p:sldId id="259" r:id="rId5"/>
-    <p:sldId id="260" r:id="rId6"/>
-    <p:sldId id="261" r:id="rId7"/>
-    <p:sldId id="262" r:id="rId8"/>
-    <p:sldId id="263" r:id="rId9"/>
-    <p:sldId id="264" r:id="rId10"/>
-    <p:sldId id="265" r:id="rId11"/>
-    <p:sldId id="266" r:id="rId12"/>
-    <p:sldId id="267" r:id="rId13"/>
-    <p:sldId id="268" r:id="rId14"/>
-    <p:sldId id="269" r:id="rId15"/>
+    <p:sldId id="256" r:id="rId3"/>
+    <p:sldId id="257" r:id="rId5"/>
+    <p:sldId id="258" r:id="rId6"/>
+    <p:sldId id="259" r:id="rId7"/>
+    <p:sldId id="260" r:id="rId8"/>
+    <p:sldId id="261" r:id="rId9"/>
+    <p:sldId id="262" r:id="rId10"/>
+    <p:sldId id="263" r:id="rId11"/>
+    <p:sldId id="264" r:id="rId12"/>
+    <p:sldId id="265" r:id="rId13"/>
+    <p:sldId id="266" r:id="rId14"/>
+    <p:sldId id="267" r:id="rId15"/>
+    <p:sldId id="268" r:id="rId16"/>
+    <p:sldId id="269" r:id="rId17"/>
   </p:sldIdLst>
-  <p:notesMasterIdLst>
-    <p:notesMasterId r:id="rId16"/>
-  </p:notesMasterIdLst>
   <p:sldSz cx="9144000" cy="5143500"/>
   <p:notesSz cx="5143500" cy="9144000"/>
   <p:defaultTextStyle>
@@ -202,7 +202,6 @@
           <a:p>
             <a:fld id="{5282F153-3F37-0F45-9E97-73ACFA13230C}" type="datetimeFigureOut">
               <a:rPr lang="en-US"/>
-              <a:t>7/23/19</a:t>
             </a:fld>
             <a:endParaRPr lang="en-US"/>
           </a:p>
@@ -269,6 +268,7 @@
               <a:rPr lang="en-US"/>
               <a:t>Click to edit Master text styles</a:t>
             </a:r>
+            <a:endParaRPr lang="en-US"/>
           </a:p>
           <a:p>
             <a:pPr lvl="1"/>
@@ -276,6 +276,7 @@
               <a:rPr lang="en-US"/>
               <a:t>Second level</a:t>
             </a:r>
+            <a:endParaRPr lang="en-US"/>
           </a:p>
           <a:p>
             <a:pPr lvl="2"/>
@@ -283,6 +284,7 @@
               <a:rPr lang="en-US"/>
               <a:t>Third level</a:t>
             </a:r>
+            <a:endParaRPr lang="en-US"/>
           </a:p>
           <a:p>
             <a:pPr lvl="3"/>
@@ -290,6 +292,7 @@
               <a:rPr lang="en-US"/>
               <a:t>Fourth level</a:t>
             </a:r>
+            <a:endParaRPr lang="en-US"/>
           </a:p>
           <a:p>
             <a:pPr lvl="4"/>
@@ -297,6 +300,7 @@
               <a:rPr lang="en-US"/>
               <a:t>Fifth level</a:t>
             </a:r>
+            <a:endParaRPr lang="en-US"/>
           </a:p>
         </p:txBody>
       </p:sp>
@@ -360,18 +364,12 @@
           <a:p>
             <a:fld id="{CE5E9CC1-C706-0F49-92D6-E571CC5EEA8F}" type="slidenum">
               <a:rPr lang="en-US"/>
-              <a:t>‹#›</a:t>
             </a:fld>
             <a:endParaRPr lang="en-US"/>
           </a:p>
         </p:txBody>
       </p:sp>
     </p:spTree>
-    <p:extLst>
-      <p:ext uri="{BB962C8B-B14F-4D97-AF65-F5344CB8AC3E}">
-        <p14:creationId xmlns:p14="http://schemas.microsoft.com/office/powerpoint/2010/main" val="1024086991"/>
-      </p:ext>
-    </p:extLst>
   </p:cSld>
   <p:clrMap bg1="lt1" tx1="dk1" bg2="lt2" tx2="dk2" accent1="accent1" accent2="accent2" accent3="accent3" accent4="accent4" accent5="accent5" accent6="accent6" hlink="hlink" folHlink="folHlink"/>
   <p:notesStyle>
@@ -513,10 +511,6 @@
           <a:bodyPr/>
           <a:lstStyle/>
           <a:p>
-            <a:r>
-              <a:rPr lang="en-US" dirty="0"/>
-              <a:t/>
-            </a:r>
             <a:endParaRPr lang="en-US" dirty="0"/>
           </a:p>
         </p:txBody>
@@ -538,18 +532,12 @@
           <a:p>
             <a:fld id="{F7021451-1387-4CA6-816F-3879F97B5CBC}" type="slidenum">
               <a:rPr lang="en-US"/>
-              <a:t>1</a:t>
             </a:fld>
             <a:endParaRPr lang="en-US"/>
           </a:p>
         </p:txBody>
       </p:sp>
     </p:spTree>
-    <p:extLst>
-      <p:ext uri="{BB962C8B-B14F-4D97-AF65-F5344CB8AC3E}">
-        <p14:creationId xmlns:p14="http://schemas.microsoft.com/office/powerpoint/2010/main" val="1024086991"/>
-      </p:ext>
-    </p:extLst>
   </p:cSld>
   <p:clrMapOvr>
     <a:masterClrMapping/>
@@ -601,10 +589,6 @@
           <a:bodyPr/>
           <a:lstStyle/>
           <a:p>
-            <a:r>
-              <a:rPr lang="en-US" dirty="0"/>
-              <a:t/>
-            </a:r>
             <a:endParaRPr lang="en-US" dirty="0"/>
           </a:p>
         </p:txBody>
@@ -626,18 +610,12 @@
           <a:p>
             <a:fld id="{F7021451-1387-4CA6-816F-3879F97B5CBC}" type="slidenum">
               <a:rPr lang="en-US"/>
-              <a:t>10</a:t>
             </a:fld>
             <a:endParaRPr lang="en-US"/>
           </a:p>
         </p:txBody>
       </p:sp>
     </p:spTree>
-    <p:extLst>
-      <p:ext uri="{BB962C8B-B14F-4D97-AF65-F5344CB8AC3E}">
-        <p14:creationId xmlns:p14="http://schemas.microsoft.com/office/powerpoint/2010/main" val="1024086991"/>
-      </p:ext>
-    </p:extLst>
   </p:cSld>
   <p:clrMapOvr>
     <a:masterClrMapping/>
@@ -689,10 +667,6 @@
           <a:bodyPr/>
           <a:lstStyle/>
           <a:p>
-            <a:r>
-              <a:rPr lang="en-US" dirty="0"/>
-              <a:t/>
-            </a:r>
             <a:endParaRPr lang="en-US" dirty="0"/>
           </a:p>
         </p:txBody>
@@ -714,18 +688,12 @@
           <a:p>
             <a:fld id="{F7021451-1387-4CA6-816F-3879F97B5CBC}" type="slidenum">
               <a:rPr lang="en-US"/>
-              <a:t>11</a:t>
             </a:fld>
             <a:endParaRPr lang="en-US"/>
           </a:p>
         </p:txBody>
       </p:sp>
     </p:spTree>
-    <p:extLst>
-      <p:ext uri="{BB962C8B-B14F-4D97-AF65-F5344CB8AC3E}">
-        <p14:creationId xmlns:p14="http://schemas.microsoft.com/office/powerpoint/2010/main" val="1024086991"/>
-      </p:ext>
-    </p:extLst>
   </p:cSld>
   <p:clrMapOvr>
     <a:masterClrMapping/>
@@ -777,10 +745,6 @@
           <a:bodyPr/>
           <a:lstStyle/>
           <a:p>
-            <a:r>
-              <a:rPr lang="en-US" dirty="0"/>
-              <a:t/>
-            </a:r>
             <a:endParaRPr lang="en-US" dirty="0"/>
           </a:p>
         </p:txBody>
@@ -802,18 +766,12 @@
           <a:p>
             <a:fld id="{F7021451-1387-4CA6-816F-3879F97B5CBC}" type="slidenum">
               <a:rPr lang="en-US"/>
-              <a:t>12</a:t>
             </a:fld>
             <a:endParaRPr lang="en-US"/>
           </a:p>
         </p:txBody>
       </p:sp>
     </p:spTree>
-    <p:extLst>
-      <p:ext uri="{BB962C8B-B14F-4D97-AF65-F5344CB8AC3E}">
-        <p14:creationId xmlns:p14="http://schemas.microsoft.com/office/powerpoint/2010/main" val="1024086991"/>
-      </p:ext>
-    </p:extLst>
   </p:cSld>
   <p:clrMapOvr>
     <a:masterClrMapping/>
@@ -865,10 +823,6 @@
           <a:bodyPr/>
           <a:lstStyle/>
           <a:p>
-            <a:r>
-              <a:rPr lang="en-US" dirty="0"/>
-              <a:t/>
-            </a:r>
             <a:endParaRPr lang="en-US" dirty="0"/>
           </a:p>
         </p:txBody>
@@ -890,18 +844,12 @@
           <a:p>
             <a:fld id="{F7021451-1387-4CA6-816F-3879F97B5CBC}" type="slidenum">
               <a:rPr lang="en-US"/>
-              <a:t>13</a:t>
             </a:fld>
             <a:endParaRPr lang="en-US"/>
           </a:p>
         </p:txBody>
       </p:sp>
     </p:spTree>
-    <p:extLst>
-      <p:ext uri="{BB962C8B-B14F-4D97-AF65-F5344CB8AC3E}">
-        <p14:creationId xmlns:p14="http://schemas.microsoft.com/office/powerpoint/2010/main" val="1024086991"/>
-      </p:ext>
-    </p:extLst>
   </p:cSld>
   <p:clrMapOvr>
     <a:masterClrMapping/>
@@ -953,10 +901,6 @@
           <a:bodyPr/>
           <a:lstStyle/>
           <a:p>
-            <a:r>
-              <a:rPr lang="en-US" dirty="0"/>
-              <a:t/>
-            </a:r>
             <a:endParaRPr lang="en-US" dirty="0"/>
           </a:p>
         </p:txBody>
@@ -978,18 +922,12 @@
           <a:p>
             <a:fld id="{F7021451-1387-4CA6-816F-3879F97B5CBC}" type="slidenum">
               <a:rPr lang="en-US"/>
-              <a:t>14</a:t>
             </a:fld>
             <a:endParaRPr lang="en-US"/>
           </a:p>
         </p:txBody>
       </p:sp>
     </p:spTree>
-    <p:extLst>
-      <p:ext uri="{BB962C8B-B14F-4D97-AF65-F5344CB8AC3E}">
-        <p14:creationId xmlns:p14="http://schemas.microsoft.com/office/powerpoint/2010/main" val="1024086991"/>
-      </p:ext>
-    </p:extLst>
   </p:cSld>
   <p:clrMapOvr>
     <a:masterClrMapping/>
@@ -1041,10 +979,6 @@
           <a:bodyPr/>
           <a:lstStyle/>
           <a:p>
-            <a:r>
-              <a:rPr lang="en-US" dirty="0"/>
-              <a:t/>
-            </a:r>
             <a:endParaRPr lang="en-US" dirty="0"/>
           </a:p>
         </p:txBody>
@@ -1066,18 +1000,12 @@
           <a:p>
             <a:fld id="{F7021451-1387-4CA6-816F-3879F97B5CBC}" type="slidenum">
               <a:rPr lang="en-US"/>
-              <a:t>2</a:t>
             </a:fld>
             <a:endParaRPr lang="en-US"/>
           </a:p>
         </p:txBody>
       </p:sp>
     </p:spTree>
-    <p:extLst>
-      <p:ext uri="{BB962C8B-B14F-4D97-AF65-F5344CB8AC3E}">
-        <p14:creationId xmlns:p14="http://schemas.microsoft.com/office/powerpoint/2010/main" val="1024086991"/>
-      </p:ext>
-    </p:extLst>
   </p:cSld>
   <p:clrMapOvr>
     <a:masterClrMapping/>
@@ -1129,10 +1057,6 @@
           <a:bodyPr/>
           <a:lstStyle/>
           <a:p>
-            <a:r>
-              <a:rPr lang="en-US" dirty="0"/>
-              <a:t/>
-            </a:r>
             <a:endParaRPr lang="en-US" dirty="0"/>
           </a:p>
         </p:txBody>
@@ -1154,18 +1078,12 @@
           <a:p>
             <a:fld id="{F7021451-1387-4CA6-816F-3879F97B5CBC}" type="slidenum">
               <a:rPr lang="en-US"/>
-              <a:t>3</a:t>
             </a:fld>
             <a:endParaRPr lang="en-US"/>
           </a:p>
         </p:txBody>
       </p:sp>
     </p:spTree>
-    <p:extLst>
-      <p:ext uri="{BB962C8B-B14F-4D97-AF65-F5344CB8AC3E}">
-        <p14:creationId xmlns:p14="http://schemas.microsoft.com/office/powerpoint/2010/main" val="1024086991"/>
-      </p:ext>
-    </p:extLst>
   </p:cSld>
   <p:clrMapOvr>
     <a:masterClrMapping/>
@@ -1217,10 +1135,6 @@
           <a:bodyPr/>
           <a:lstStyle/>
           <a:p>
-            <a:r>
-              <a:rPr lang="en-US" dirty="0"/>
-              <a:t/>
-            </a:r>
             <a:endParaRPr lang="en-US" dirty="0"/>
           </a:p>
         </p:txBody>
@@ -1242,18 +1156,12 @@
           <a:p>
             <a:fld id="{F7021451-1387-4CA6-816F-3879F97B5CBC}" type="slidenum">
               <a:rPr lang="en-US"/>
-              <a:t>4</a:t>
             </a:fld>
             <a:endParaRPr lang="en-US"/>
           </a:p>
         </p:txBody>
       </p:sp>
     </p:spTree>
-    <p:extLst>
-      <p:ext uri="{BB962C8B-B14F-4D97-AF65-F5344CB8AC3E}">
-        <p14:creationId xmlns:p14="http://schemas.microsoft.com/office/powerpoint/2010/main" val="1024086991"/>
-      </p:ext>
-    </p:extLst>
   </p:cSld>
   <p:clrMapOvr>
     <a:masterClrMapping/>
@@ -1305,10 +1213,6 @@
           <a:bodyPr/>
           <a:lstStyle/>
           <a:p>
-            <a:r>
-              <a:rPr lang="en-US" dirty="0"/>
-              <a:t/>
-            </a:r>
             <a:endParaRPr lang="en-US" dirty="0"/>
           </a:p>
         </p:txBody>
@@ -1330,18 +1234,12 @@
           <a:p>
             <a:fld id="{F7021451-1387-4CA6-816F-3879F97B5CBC}" type="slidenum">
               <a:rPr lang="en-US"/>
-              <a:t>5</a:t>
             </a:fld>
             <a:endParaRPr lang="en-US"/>
           </a:p>
         </p:txBody>
       </p:sp>
     </p:spTree>
-    <p:extLst>
-      <p:ext uri="{BB962C8B-B14F-4D97-AF65-F5344CB8AC3E}">
-        <p14:creationId xmlns:p14="http://schemas.microsoft.com/office/powerpoint/2010/main" val="1024086991"/>
-      </p:ext>
-    </p:extLst>
   </p:cSld>
   <p:clrMapOvr>
     <a:masterClrMapping/>
@@ -1393,10 +1291,6 @@
           <a:bodyPr/>
           <a:lstStyle/>
           <a:p>
-            <a:r>
-              <a:rPr lang="en-US" dirty="0"/>
-              <a:t/>
-            </a:r>
             <a:endParaRPr lang="en-US" dirty="0"/>
           </a:p>
         </p:txBody>
@@ -1418,18 +1312,12 @@
           <a:p>
             <a:fld id="{F7021451-1387-4CA6-816F-3879F97B5CBC}" type="slidenum">
               <a:rPr lang="en-US"/>
-              <a:t>6</a:t>
             </a:fld>
             <a:endParaRPr lang="en-US"/>
           </a:p>
         </p:txBody>
       </p:sp>
     </p:spTree>
-    <p:extLst>
-      <p:ext uri="{BB962C8B-B14F-4D97-AF65-F5344CB8AC3E}">
-        <p14:creationId xmlns:p14="http://schemas.microsoft.com/office/powerpoint/2010/main" val="1024086991"/>
-      </p:ext>
-    </p:extLst>
   </p:cSld>
   <p:clrMapOvr>
     <a:masterClrMapping/>
@@ -1481,10 +1369,6 @@
           <a:bodyPr/>
           <a:lstStyle/>
           <a:p>
-            <a:r>
-              <a:rPr lang="en-US" dirty="0"/>
-              <a:t/>
-            </a:r>
             <a:endParaRPr lang="en-US" dirty="0"/>
           </a:p>
         </p:txBody>
@@ -1506,18 +1390,12 @@
           <a:p>
             <a:fld id="{F7021451-1387-4CA6-816F-3879F97B5CBC}" type="slidenum">
               <a:rPr lang="en-US"/>
-              <a:t>7</a:t>
             </a:fld>
             <a:endParaRPr lang="en-US"/>
           </a:p>
         </p:txBody>
       </p:sp>
     </p:spTree>
-    <p:extLst>
-      <p:ext uri="{BB962C8B-B14F-4D97-AF65-F5344CB8AC3E}">
-        <p14:creationId xmlns:p14="http://schemas.microsoft.com/office/powerpoint/2010/main" val="1024086991"/>
-      </p:ext>
-    </p:extLst>
   </p:cSld>
   <p:clrMapOvr>
     <a:masterClrMapping/>
@@ -1569,10 +1447,6 @@
           <a:bodyPr/>
           <a:lstStyle/>
           <a:p>
-            <a:r>
-              <a:rPr lang="en-US" dirty="0"/>
-              <a:t/>
-            </a:r>
             <a:endParaRPr lang="en-US" dirty="0"/>
           </a:p>
         </p:txBody>
@@ -1594,18 +1468,12 @@
           <a:p>
             <a:fld id="{F7021451-1387-4CA6-816F-3879F97B5CBC}" type="slidenum">
               <a:rPr lang="en-US"/>
-              <a:t>8</a:t>
             </a:fld>
             <a:endParaRPr lang="en-US"/>
           </a:p>
         </p:txBody>
       </p:sp>
     </p:spTree>
-    <p:extLst>
-      <p:ext uri="{BB962C8B-B14F-4D97-AF65-F5344CB8AC3E}">
-        <p14:creationId xmlns:p14="http://schemas.microsoft.com/office/powerpoint/2010/main" val="1024086991"/>
-      </p:ext>
-    </p:extLst>
   </p:cSld>
   <p:clrMapOvr>
     <a:masterClrMapping/>
@@ -1657,10 +1525,6 @@
           <a:bodyPr/>
           <a:lstStyle/>
           <a:p>
-            <a:r>
-              <a:rPr lang="en-US" dirty="0"/>
-              <a:t/>
-            </a:r>
             <a:endParaRPr lang="en-US" dirty="0"/>
           </a:p>
         </p:txBody>
@@ -1682,18 +1546,12 @@
           <a:p>
             <a:fld id="{F7021451-1387-4CA6-816F-3879F97B5CBC}" type="slidenum">
               <a:rPr lang="en-US"/>
-              <a:t>9</a:t>
             </a:fld>
             <a:endParaRPr lang="en-US"/>
           </a:p>
         </p:txBody>
       </p:sp>
     </p:spTree>
-    <p:extLst>
-      <p:ext uri="{BB962C8B-B14F-4D97-AF65-F5344CB8AC3E}">
-        <p14:creationId xmlns:p14="http://schemas.microsoft.com/office/powerpoint/2010/main" val="1024086991"/>
-      </p:ext>
-    </p:extLst>
   </p:cSld>
   <p:clrMapOvr>
     <a:masterClrMapping/>
@@ -1734,6 +1592,11 @@
 <file path=ppt/slideMasters/slideMaster1.xml><?xml version="1.0" encoding="utf-8"?>
 <p:sldMaster xmlns:a="http://schemas.openxmlformats.org/drawingml/2006/main" xmlns:r="http://schemas.openxmlformats.org/officeDocument/2006/relationships" xmlns:p="http://schemas.openxmlformats.org/presentationml/2006/main">
   <p:cSld>
+    <p:bg>
+      <p:bgRef idx="1001">
+        <a:schemeClr val="bg1"/>
+      </p:bgRef>
+    </p:bg>
     <p:spTree>
       <p:nvGrpSpPr>
         <p:cNvPr id="1" name=""/>
@@ -1777,7 +1640,7 @@
         <a:spcBef>
           <a:spcPct val="20000"/>
         </a:spcBef>
-        <a:buFont typeface="Arial" pitchFamily="34" charset="0"/>
+        <a:buFont typeface="Arial" panose="020B0604020202090204" pitchFamily="34" charset="0"/>
         <a:buChar char="•"/>
         <a:defRPr sz="3200" kern="1200">
           <a:solidFill>
@@ -1792,7 +1655,7 @@
         <a:spcBef>
           <a:spcPct val="20000"/>
         </a:spcBef>
-        <a:buFont typeface="Arial" pitchFamily="34" charset="0"/>
+        <a:buFont typeface="Arial" panose="020B0604020202090204" pitchFamily="34" charset="0"/>
         <a:buChar char="–"/>
         <a:defRPr sz="2800" kern="1200">
           <a:solidFill>
@@ -1807,7 +1670,7 @@
         <a:spcBef>
           <a:spcPct val="20000"/>
         </a:spcBef>
-        <a:buFont typeface="Arial" pitchFamily="34" charset="0"/>
+        <a:buFont typeface="Arial" panose="020B0604020202090204" pitchFamily="34" charset="0"/>
         <a:buChar char="•"/>
         <a:defRPr sz="2400" kern="1200">
           <a:solidFill>
@@ -1822,7 +1685,7 @@
         <a:spcBef>
           <a:spcPct val="20000"/>
         </a:spcBef>
-        <a:buFont typeface="Arial" pitchFamily="34" charset="0"/>
+        <a:buFont typeface="Arial" panose="020B0604020202090204" pitchFamily="34" charset="0"/>
         <a:buChar char="–"/>
         <a:defRPr sz="2000" kern="1200">
           <a:solidFill>
@@ -1837,7 +1700,7 @@
         <a:spcBef>
           <a:spcPct val="20000"/>
         </a:spcBef>
-        <a:buFont typeface="Arial" pitchFamily="34" charset="0"/>
+        <a:buFont typeface="Arial" panose="020B0604020202090204" pitchFamily="34" charset="0"/>
         <a:buChar char="»"/>
         <a:defRPr sz="2000" kern="1200">
           <a:solidFill>
@@ -1852,7 +1715,7 @@
         <a:spcBef>
           <a:spcPct val="20000"/>
         </a:spcBef>
-        <a:buFont typeface="Arial" pitchFamily="34" charset="0"/>
+        <a:buFont typeface="Arial" panose="020B0604020202090204" pitchFamily="34" charset="0"/>
         <a:buChar char="•"/>
         <a:defRPr sz="2000" kern="1200">
           <a:solidFill>
@@ -1867,7 +1730,7 @@
         <a:spcBef>
           <a:spcPct val="20000"/>
         </a:spcBef>
-        <a:buFont typeface="Arial" pitchFamily="34" charset="0"/>
+        <a:buFont typeface="Arial" panose="020B0604020202090204" pitchFamily="34" charset="0"/>
         <a:buChar char="•"/>
         <a:defRPr sz="2000" kern="1200">
           <a:solidFill>
@@ -1882,7 +1745,7 @@
         <a:spcBef>
           <a:spcPct val="20000"/>
         </a:spcBef>
-        <a:buFont typeface="Arial" pitchFamily="34" charset="0"/>
+        <a:buFont typeface="Arial" panose="020B0604020202090204" pitchFamily="34" charset="0"/>
         <a:buChar char="•"/>
         <a:defRPr sz="2000" kern="1200">
           <a:solidFill>
@@ -1897,7 +1760,7 @@
         <a:spcBef>
           <a:spcPct val="20000"/>
         </a:spcBef>
-        <a:buFont typeface="Arial" pitchFamily="34" charset="0"/>
+        <a:buFont typeface="Arial" panose="020B0604020202090204" pitchFamily="34" charset="0"/>
         <a:buChar char="•"/>
         <a:defRPr sz="2000" kern="1200">
           <a:solidFill>
@@ -2010,12 +1873,13 @@
 
 <file path=ppt/slides/slide1.xml><?xml version="1.0" encoding="utf-8"?>
 <p:sld xmlns:a="http://schemas.openxmlformats.org/drawingml/2006/main" xmlns:r="http://schemas.openxmlformats.org/officeDocument/2006/relationships" xmlns:p="http://schemas.openxmlformats.org/presentationml/2006/main">
-  <p:cSld name="Slide 1">
+  <p:cSld>
     <p:bg>
       <p:bgPr>
         <a:solidFill>
           <a:srgbClr val="1E1E1E"/>
         </a:solidFill>
+        <a:effectLst/>
       </p:bgPr>
     </p:bg>
     <p:spTree>
@@ -2071,13 +1935,12 @@
             <a:avLst/>
           </a:prstGeom>
           <a:noFill/>
-          <a:ln/>
-        </p:spPr>
-        <p:txBody>
-          <a:bodyPr wrap="square" lIns="0" tIns="0" rIns="0" bIns="0" rtlCol="0" anchor="ctr"/>
-          <a:lstStyle/>
-          <a:p>
-            <a:pPr algn="ctr" indent="0" marL="0">
+        </p:spPr>
+        <p:txBody>
+          <a:bodyPr wrap="square" lIns="0" tIns="0" rIns="0" bIns="0" rtlCol="0" anchor="ctr"/>
+          <a:lstStyle/>
+          <a:p>
+            <a:pPr marL="0" indent="0" algn="ctr">
               <a:buNone/>
             </a:pPr>
             <a:r>
@@ -2085,9 +1948,9 @@
                 <a:solidFill>
                   <a:srgbClr val="C9A96E"/>
                 </a:solidFill>
-                <a:latin typeface="Arial" pitchFamily="34" charset="0"/>
-                <a:ea typeface="Arial" pitchFamily="34" charset="-122"/>
-                <a:cs typeface="Arial" pitchFamily="34" charset="-120"/>
+                <a:latin typeface="Arial" panose="020B0604020202090204" pitchFamily="34" charset="0"/>
+                <a:ea typeface="Arial" panose="020B0604020202090204" pitchFamily="34" charset="-122"/>
+                <a:cs typeface="Arial" panose="020B0604020202090204" pitchFamily="34" charset="-120"/>
               </a:rPr>
               <a:t>第 54 节</a:t>
             </a:r>
@@ -2103,20 +1966,19 @@
         </p:nvSpPr>
         <p:spPr>
           <a:xfrm>
-            <a:off x="502920" y="1554480"/>
+            <a:off x="509905" y="1554480"/>
             <a:ext cx="8412480" cy="822960"/>
           </a:xfrm>
           <a:prstGeom prst="rect">
             <a:avLst/>
           </a:prstGeom>
           <a:noFill/>
-          <a:ln/>
-        </p:spPr>
-        <p:txBody>
-          <a:bodyPr wrap="square" lIns="0" tIns="0" rIns="0" bIns="0" rtlCol="0" anchor="ctr"/>
-          <a:lstStyle/>
-          <a:p>
-            <a:pPr indent="0" marL="0">
+        </p:spPr>
+        <p:txBody>
+          <a:bodyPr wrap="square" lIns="0" tIns="0" rIns="0" bIns="0" rtlCol="0" anchor="ctr"/>
+          <a:lstStyle/>
+          <a:p>
+            <a:pPr marL="0" indent="0">
               <a:buNone/>
             </a:pPr>
             <a:r>
@@ -2124,9 +1986,9 @@
                 <a:solidFill>
                   <a:srgbClr val="F0F0F0"/>
                 </a:solidFill>
-                <a:latin typeface="Arial" pitchFamily="34" charset="0"/>
-                <a:ea typeface="Arial" pitchFamily="34" charset="-122"/>
-                <a:cs typeface="Arial" pitchFamily="34" charset="-120"/>
+                <a:latin typeface="Arial" panose="020B0604020202090204" pitchFamily="34" charset="0"/>
+                <a:ea typeface="Arial" panose="020B0604020202090204" pitchFamily="34" charset="-122"/>
+                <a:cs typeface="Arial" panose="020B0604020202090204" pitchFamily="34" charset="-120"/>
               </a:rPr>
               <a:t>When 项目总结与后续规划</a:t>
             </a:r>
@@ -2149,13 +2011,12 @@
             <a:avLst/>
           </a:prstGeom>
           <a:noFill/>
-          <a:ln/>
-        </p:spPr>
-        <p:txBody>
-          <a:bodyPr wrap="square" lIns="0" tIns="0" rIns="0" bIns="0" rtlCol="0" anchor="ctr"/>
-          <a:lstStyle/>
-          <a:p>
-            <a:pPr indent="0" marL="0">
+        </p:spPr>
+        <p:txBody>
+          <a:bodyPr wrap="square" lIns="0" tIns="0" rIns="0" bIns="0" rtlCol="0" anchor="ctr"/>
+          <a:lstStyle/>
+          <a:p>
+            <a:pPr marL="0" indent="0">
               <a:buNone/>
             </a:pPr>
             <a:r>
@@ -2163,9 +2024,9 @@
                 <a:solidFill>
                   <a:srgbClr val="C9A96E"/>
                 </a:solidFill>
-                <a:latin typeface="Arial" pitchFamily="34" charset="0"/>
-                <a:ea typeface="Arial" pitchFamily="34" charset="-122"/>
-                <a:cs typeface="Arial" pitchFamily="34" charset="-120"/>
+                <a:latin typeface="Arial" panose="020B0604020202090204" pitchFamily="34" charset="0"/>
+                <a:ea typeface="Arial" panose="020B0604020202090204" pitchFamily="34" charset="-122"/>
+                <a:cs typeface="Arial" panose="020B0604020202090204" pitchFamily="34" charset="-120"/>
               </a:rPr>
               <a:t>用 AI 编程，做出一个生产可用的分布式延时投递组件</a:t>
             </a:r>
@@ -2188,13 +2049,12 @@
             <a:avLst/>
           </a:prstGeom>
           <a:noFill/>
-          <a:ln/>
-        </p:spPr>
-        <p:txBody>
-          <a:bodyPr wrap="square" lIns="0" tIns="0" rIns="0" bIns="0" rtlCol="0" anchor="ctr"/>
-          <a:lstStyle/>
-          <a:p>
-            <a:pPr indent="0" marL="0">
+        </p:spPr>
+        <p:txBody>
+          <a:bodyPr wrap="square" lIns="0" tIns="0" rIns="0" bIns="0" rtlCol="0" anchor="ctr"/>
+          <a:lstStyle/>
+          <a:p>
+            <a:pPr marL="0" indent="0">
               <a:buNone/>
             </a:pPr>
             <a:r>
@@ -2202,9 +2062,9 @@
                 <a:solidFill>
                   <a:srgbClr val="9A9A9A"/>
                 </a:solidFill>
-                <a:latin typeface="Arial" pitchFamily="34" charset="0"/>
-                <a:ea typeface="Arial" pitchFamily="34" charset="-122"/>
-                <a:cs typeface="Arial" pitchFamily="34" charset="-120"/>
+                <a:latin typeface="Arial" panose="020B0604020202090204" pitchFamily="34" charset="0"/>
+                <a:ea typeface="Arial" panose="020B0604020202090204" pitchFamily="34" charset="-122"/>
+                <a:cs typeface="Arial" panose="020B0604020202090204" pitchFamily="34" charset="-120"/>
               </a:rPr>
               <a:t>成果 · Loop Engineering 方法论 · AI 编程总结 · 后续规划 · 社区推进</a:t>
             </a:r>
@@ -2222,12 +2082,13 @@
 
 <file path=ppt/slides/slide10.xml><?xml version="1.0" encoding="utf-8"?>
 <p:sld xmlns:a="http://schemas.openxmlformats.org/drawingml/2006/main" xmlns:r="http://schemas.openxmlformats.org/officeDocument/2006/relationships" xmlns:p="http://schemas.openxmlformats.org/presentationml/2006/main">
-  <p:cSld name="Slide 10">
+  <p:cSld>
     <p:bg>
       <p:bgPr>
         <a:solidFill>
           <a:srgbClr val="1E1E1E"/>
         </a:solidFill>
+        <a:effectLst/>
       </p:bgPr>
     </p:bg>
     <p:spTree>
@@ -2259,13 +2120,12 @@
             <a:avLst/>
           </a:prstGeom>
           <a:noFill/>
-          <a:ln/>
-        </p:spPr>
-        <p:txBody>
-          <a:bodyPr wrap="square" lIns="0" tIns="0" rIns="0" bIns="0" rtlCol="0" anchor="ctr"/>
-          <a:lstStyle/>
-          <a:p>
-            <a:pPr indent="0" marL="0">
+        </p:spPr>
+        <p:txBody>
+          <a:bodyPr wrap="square" lIns="0" tIns="0" rIns="0" bIns="0" rtlCol="0" anchor="ctr"/>
+          <a:lstStyle/>
+          <a:p>
+            <a:pPr marL="0" indent="0">
               <a:buNone/>
             </a:pPr>
             <a:r>
@@ -2273,9 +2133,9 @@
                 <a:solidFill>
                   <a:srgbClr val="6E6E6E"/>
                 </a:solidFill>
-                <a:latin typeface="Arial" pitchFamily="34" charset="0"/>
-                <a:ea typeface="Arial" pitchFamily="34" charset="-122"/>
-                <a:cs typeface="Arial" pitchFamily="34" charset="-120"/>
+                <a:latin typeface="Arial" panose="020B0604020202090204" pitchFamily="34" charset="0"/>
+                <a:ea typeface="Arial" panose="020B0604020202090204" pitchFamily="34" charset="-122"/>
+                <a:cs typeface="Arial" panose="020B0604020202090204" pitchFamily="34" charset="-120"/>
               </a:rPr>
               <a:t>第 54 节 · When 项目总结与后续规划</a:t>
             </a:r>
@@ -2298,13 +2158,12 @@
             <a:avLst/>
           </a:prstGeom>
           <a:noFill/>
-          <a:ln/>
-        </p:spPr>
-        <p:txBody>
-          <a:bodyPr wrap="square" lIns="0" tIns="0" rIns="0" bIns="0" rtlCol="0" anchor="ctr"/>
-          <a:lstStyle/>
-          <a:p>
-            <a:pPr algn="r" indent="0" marL="0">
+        </p:spPr>
+        <p:txBody>
+          <a:bodyPr wrap="square" lIns="0" tIns="0" rIns="0" bIns="0" rtlCol="0" anchor="ctr"/>
+          <a:lstStyle/>
+          <a:p>
+            <a:pPr marL="0" indent="0" algn="r">
               <a:buNone/>
             </a:pPr>
             <a:r>
@@ -2312,9 +2171,9 @@
                 <a:solidFill>
                   <a:srgbClr val="6E6E6E"/>
                 </a:solidFill>
-                <a:latin typeface="Arial" pitchFamily="34" charset="0"/>
-                <a:ea typeface="Arial" pitchFamily="34" charset="-122"/>
-                <a:cs typeface="Arial" pitchFamily="34" charset="-120"/>
+                <a:latin typeface="Arial" panose="020B0604020202090204" pitchFamily="34" charset="0"/>
+                <a:ea typeface="Arial" panose="020B0604020202090204" pitchFamily="34" charset="-122"/>
+                <a:cs typeface="Arial" panose="020B0604020202090204" pitchFamily="34" charset="-120"/>
               </a:rPr>
               <a:t>10 / 14</a:t>
             </a:r>
@@ -2361,23 +2220,22 @@
             <a:avLst/>
           </a:prstGeom>
           <a:noFill/>
-          <a:ln/>
-        </p:spPr>
-        <p:txBody>
-          <a:bodyPr wrap="square" lIns="0" tIns="0" rIns="0" bIns="0" rtlCol="0" anchor="ctr"/>
-          <a:lstStyle/>
-          <a:p>
-            <a:pPr algn="ctr" indent="0" marL="0">
-              <a:buNone/>
-            </a:pPr>
-            <a:r>
-              <a:rPr lang="en-US" sz="1050" b="1" spc="100" kern="0" dirty="0">
+        </p:spPr>
+        <p:txBody>
+          <a:bodyPr wrap="square" lIns="0" tIns="0" rIns="0" bIns="0" rtlCol="0" anchor="ctr"/>
+          <a:lstStyle/>
+          <a:p>
+            <a:pPr marL="0" indent="0" algn="ctr">
+              <a:buNone/>
+            </a:pPr>
+            <a:r>
+              <a:rPr lang="en-US" sz="1050" b="1" kern="0" spc="100" dirty="0">
                 <a:solidFill>
                   <a:srgbClr val="C9A96E"/>
                 </a:solidFill>
-                <a:latin typeface="Arial" pitchFamily="34" charset="0"/>
-                <a:ea typeface="Arial" pitchFamily="34" charset="-122"/>
-                <a:cs typeface="Arial" pitchFamily="34" charset="-120"/>
+                <a:latin typeface="Arial" panose="020B0604020202090204" pitchFamily="34" charset="0"/>
+                <a:ea typeface="Arial" panose="020B0604020202090204" pitchFamily="34" charset="-122"/>
+                <a:cs typeface="Arial" panose="020B0604020202090204" pitchFamily="34" charset="-120"/>
               </a:rPr>
               <a:t>AI 编程总结</a:t>
             </a:r>
@@ -2400,13 +2258,12 @@
             <a:avLst/>
           </a:prstGeom>
           <a:noFill/>
-          <a:ln/>
-        </p:spPr>
-        <p:txBody>
-          <a:bodyPr wrap="square" lIns="0" tIns="0" rIns="0" bIns="0" rtlCol="0" anchor="ctr"/>
-          <a:lstStyle/>
-          <a:p>
-            <a:pPr indent="0" marL="0">
+        </p:spPr>
+        <p:txBody>
+          <a:bodyPr wrap="square" lIns="0" tIns="0" rIns="0" bIns="0" rtlCol="0" anchor="ctr"/>
+          <a:lstStyle/>
+          <a:p>
+            <a:pPr marL="0" indent="0">
               <a:buNone/>
             </a:pPr>
             <a:r>
@@ -2414,9 +2271,9 @@
                 <a:solidFill>
                   <a:srgbClr val="F0F0F0"/>
                 </a:solidFill>
-                <a:latin typeface="Arial" pitchFamily="34" charset="0"/>
-                <a:ea typeface="Arial" pitchFamily="34" charset="-122"/>
-                <a:cs typeface="Arial" pitchFamily="34" charset="-120"/>
+                <a:latin typeface="Arial" panose="020B0604020202090204" pitchFamily="34" charset="0"/>
+                <a:ea typeface="Arial" panose="020B0604020202090204" pitchFamily="34" charset="-122"/>
+                <a:cs typeface="Arial" panose="020B0604020202090204" pitchFamily="34" charset="-120"/>
               </a:rPr>
               <a:t>三句能带走的话</a:t>
             </a:r>
@@ -2450,7 +2307,7 @@
             <a:prstDash val="solid"/>
           </a:ln>
           <a:effectLst>
-            <a:outerShdw sx="100000" sy="100000" kx="0" ky="0" algn="bl" rotWithShape="0" blurRad="88900" dist="25400" dir="5400000">
+            <a:outerShdw blurRad="88900" dist="25400" dir="5400000" algn="bl" rotWithShape="0">
               <a:srgbClr val="000000">
                 <a:alpha val="30000"/>
               </a:srgbClr>
@@ -2473,13 +2330,12 @@
             <a:avLst/>
           </a:prstGeom>
           <a:noFill/>
-          <a:ln/>
-        </p:spPr>
-        <p:txBody>
-          <a:bodyPr wrap="square" lIns="0" tIns="0" rIns="0" bIns="0" rtlCol="0" anchor="ctr"/>
-          <a:lstStyle/>
-          <a:p>
-            <a:pPr indent="0" marL="0">
+        </p:spPr>
+        <p:txBody>
+          <a:bodyPr wrap="square" lIns="0" tIns="0" rIns="0" bIns="0" rtlCol="0" anchor="ctr"/>
+          <a:lstStyle/>
+          <a:p>
+            <a:pPr marL="0" indent="0">
               <a:buNone/>
             </a:pPr>
             <a:r>
@@ -2487,9 +2343,9 @@
                 <a:solidFill>
                   <a:srgbClr val="C9A96E"/>
                 </a:solidFill>
-                <a:latin typeface="Arial" pitchFamily="34" charset="0"/>
-                <a:ea typeface="Arial" pitchFamily="34" charset="-122"/>
-                <a:cs typeface="Arial" pitchFamily="34" charset="-120"/>
+                <a:latin typeface="Arial" panose="020B0604020202090204" pitchFamily="34" charset="0"/>
+                <a:ea typeface="Arial" panose="020B0604020202090204" pitchFamily="34" charset="-122"/>
+                <a:cs typeface="Arial" panose="020B0604020202090204" pitchFamily="34" charset="-120"/>
               </a:rPr>
               <a:t>杠杆变了</a:t>
             </a:r>
@@ -2512,13 +2368,12 @@
             <a:avLst/>
           </a:prstGeom>
           <a:noFill/>
-          <a:ln/>
-        </p:spPr>
-        <p:txBody>
-          <a:bodyPr wrap="square" lIns="0" tIns="0" rIns="0" bIns="0" rtlCol="0" anchor="ctr"/>
-          <a:lstStyle/>
-          <a:p>
-            <a:pPr indent="0" marL="0">
+        </p:spPr>
+        <p:txBody>
+          <a:bodyPr wrap="square" lIns="0" tIns="0" rIns="0" bIns="0" rtlCol="0" anchor="ctr"/>
+          <a:lstStyle/>
+          <a:p>
+            <a:pPr marL="0" indent="0">
               <a:lnSpc>
                 <a:spcPct val="110000"/>
               </a:lnSpc>
@@ -2529,9 +2384,9 @@
                 <a:solidFill>
                   <a:srgbClr val="D6D6D6"/>
                 </a:solidFill>
-                <a:latin typeface="Arial" pitchFamily="34" charset="0"/>
-                <a:ea typeface="Arial" pitchFamily="34" charset="-122"/>
-                <a:cs typeface="Arial" pitchFamily="34" charset="-120"/>
+                <a:latin typeface="Arial" panose="020B0604020202090204" pitchFamily="34" charset="0"/>
+                <a:ea typeface="Arial" panose="020B0604020202090204" pitchFamily="34" charset="-122"/>
+                <a:cs typeface="Arial" panose="020B0604020202090204" pitchFamily="34" charset="-120"/>
               </a:rPr>
               <a:t>从“写好一句提示词”，到“设计一个能自主循环的环境和规则”。</a:t>
             </a:r>
@@ -2565,7 +2420,7 @@
             <a:prstDash val="solid"/>
           </a:ln>
           <a:effectLst>
-            <a:outerShdw sx="100000" sy="100000" kx="0" ky="0" algn="bl" rotWithShape="0" blurRad="88900" dist="25400" dir="5400000">
+            <a:outerShdw blurRad="88900" dist="25400" dir="5400000" algn="bl" rotWithShape="0">
               <a:srgbClr val="000000">
                 <a:alpha val="30000"/>
               </a:srgbClr>
@@ -2588,13 +2443,12 @@
             <a:avLst/>
           </a:prstGeom>
           <a:noFill/>
-          <a:ln/>
-        </p:spPr>
-        <p:txBody>
-          <a:bodyPr wrap="square" lIns="0" tIns="0" rIns="0" bIns="0" rtlCol="0" anchor="ctr"/>
-          <a:lstStyle/>
-          <a:p>
-            <a:pPr indent="0" marL="0">
+        </p:spPr>
+        <p:txBody>
+          <a:bodyPr wrap="square" lIns="0" tIns="0" rIns="0" bIns="0" rtlCol="0" anchor="ctr"/>
+          <a:lstStyle/>
+          <a:p>
+            <a:pPr marL="0" indent="0">
               <a:buNone/>
             </a:pPr>
             <a:r>
@@ -2602,9 +2456,9 @@
                 <a:solidFill>
                   <a:srgbClr val="C9A96E"/>
                 </a:solidFill>
-                <a:latin typeface="Arial" pitchFamily="34" charset="0"/>
-                <a:ea typeface="Arial" pitchFamily="34" charset="-122"/>
-                <a:cs typeface="Arial" pitchFamily="34" charset="-120"/>
+                <a:latin typeface="Arial" panose="020B0604020202090204" pitchFamily="34" charset="0"/>
+                <a:ea typeface="Arial" panose="020B0604020202090204" pitchFamily="34" charset="-122"/>
+                <a:cs typeface="Arial" panose="020B0604020202090204" pitchFamily="34" charset="-120"/>
               </a:rPr>
               <a:t>人退到检查点</a:t>
             </a:r>
@@ -2627,13 +2481,12 @@
             <a:avLst/>
           </a:prstGeom>
           <a:noFill/>
-          <a:ln/>
-        </p:spPr>
-        <p:txBody>
-          <a:bodyPr wrap="square" lIns="0" tIns="0" rIns="0" bIns="0" rtlCol="0" anchor="ctr"/>
-          <a:lstStyle/>
-          <a:p>
-            <a:pPr indent="0" marL="0">
+        </p:spPr>
+        <p:txBody>
+          <a:bodyPr wrap="square" lIns="0" tIns="0" rIns="0" bIns="0" rtlCol="0" anchor="ctr"/>
+          <a:lstStyle/>
+          <a:p>
+            <a:pPr marL="0" indent="0">
               <a:lnSpc>
                 <a:spcPct val="110000"/>
               </a:lnSpc>
@@ -2644,9 +2497,9 @@
                 <a:solidFill>
                   <a:srgbClr val="D6D6D6"/>
                 </a:solidFill>
-                <a:latin typeface="Arial" pitchFamily="34" charset="0"/>
-                <a:ea typeface="Arial" pitchFamily="34" charset="-122"/>
-                <a:cs typeface="Arial" pitchFamily="34" charset="-120"/>
+                <a:latin typeface="Arial" panose="020B0604020202090204" pitchFamily="34" charset="0"/>
+                <a:ea typeface="Arial" panose="020B0604020202090204" pitchFamily="34" charset="-122"/>
+                <a:cs typeface="Arial" panose="020B0604020202090204" pitchFamily="34" charset="-120"/>
               </a:rPr>
               <a:t>AI 干执行，人做判断——定目标、设规则、看关键处、拍板高风险。</a:t>
             </a:r>
@@ -2680,7 +2533,7 @@
             <a:prstDash val="solid"/>
           </a:ln>
           <a:effectLst>
-            <a:outerShdw sx="100000" sy="100000" kx="0" ky="0" algn="bl" rotWithShape="0" blurRad="88900" dist="25400" dir="5400000">
+            <a:outerShdw blurRad="88900" dist="25400" dir="5400000" algn="bl" rotWithShape="0">
               <a:srgbClr val="000000">
                 <a:alpha val="30000"/>
               </a:srgbClr>
@@ -2703,13 +2556,12 @@
             <a:avLst/>
           </a:prstGeom>
           <a:noFill/>
-          <a:ln/>
-        </p:spPr>
-        <p:txBody>
-          <a:bodyPr wrap="square" lIns="0" tIns="0" rIns="0" bIns="0" rtlCol="0" anchor="ctr"/>
-          <a:lstStyle/>
-          <a:p>
-            <a:pPr indent="0" marL="0">
+        </p:spPr>
+        <p:txBody>
+          <a:bodyPr wrap="square" lIns="0" tIns="0" rIns="0" bIns="0" rtlCol="0" anchor="ctr"/>
+          <a:lstStyle/>
+          <a:p>
+            <a:pPr marL="0" indent="0">
               <a:buNone/>
             </a:pPr>
             <a:r>
@@ -2717,9 +2569,9 @@
                 <a:solidFill>
                   <a:srgbClr val="C9A96E"/>
                 </a:solidFill>
-                <a:latin typeface="Arial" pitchFamily="34" charset="0"/>
-                <a:ea typeface="Arial" pitchFamily="34" charset="-122"/>
-                <a:cs typeface="Arial" pitchFamily="34" charset="-120"/>
+                <a:latin typeface="Arial" panose="020B0604020202090204" pitchFamily="34" charset="0"/>
+                <a:ea typeface="Arial" panose="020B0604020202090204" pitchFamily="34" charset="-122"/>
+                <a:cs typeface="Arial" panose="020B0604020202090204" pitchFamily="34" charset="-120"/>
               </a:rPr>
               <a:t>按可验证性分工</a:t>
             </a:r>
@@ -2742,13 +2594,12 @@
             <a:avLst/>
           </a:prstGeom>
           <a:noFill/>
-          <a:ln/>
-        </p:spPr>
-        <p:txBody>
-          <a:bodyPr wrap="square" lIns="0" tIns="0" rIns="0" bIns="0" rtlCol="0" anchor="ctr"/>
-          <a:lstStyle/>
-          <a:p>
-            <a:pPr indent="0" marL="0">
+        </p:spPr>
+        <p:txBody>
+          <a:bodyPr wrap="square" lIns="0" tIns="0" rIns="0" bIns="0" rtlCol="0" anchor="ctr"/>
+          <a:lstStyle/>
+          <a:p>
+            <a:pPr marL="0" indent="0">
               <a:lnSpc>
                 <a:spcPct val="110000"/>
               </a:lnSpc>
@@ -2759,9 +2610,9 @@
                 <a:solidFill>
                   <a:srgbClr val="D6D6D6"/>
                 </a:solidFill>
-                <a:latin typeface="Arial" pitchFamily="34" charset="0"/>
-                <a:ea typeface="Arial" pitchFamily="34" charset="-122"/>
-                <a:cs typeface="Arial" pitchFamily="34" charset="-120"/>
+                <a:latin typeface="Arial" panose="020B0604020202090204" pitchFamily="34" charset="0"/>
+                <a:ea typeface="Arial" panose="020B0604020202090204" pitchFamily="34" charset="-122"/>
+                <a:cs typeface="Arial" panose="020B0604020202090204" pitchFamily="34" charset="-120"/>
               </a:rPr>
               <a:t>能廉价确定验证 → 交循环；错不起又难验证（分布式一致性/资金安全）→ 人主导。</a:t>
             </a:r>
@@ -2779,12 +2630,13 @@
 
 <file path=ppt/slides/slide11.xml><?xml version="1.0" encoding="utf-8"?>
 <p:sld xmlns:a="http://schemas.openxmlformats.org/drawingml/2006/main" xmlns:r="http://schemas.openxmlformats.org/officeDocument/2006/relationships" xmlns:p="http://schemas.openxmlformats.org/presentationml/2006/main">
-  <p:cSld name="Slide 11">
+  <p:cSld>
     <p:bg>
       <p:bgPr>
         <a:solidFill>
           <a:srgbClr val="1E1E1E"/>
         </a:solidFill>
+        <a:effectLst/>
       </p:bgPr>
     </p:bg>
     <p:spTree>
@@ -2816,13 +2668,12 @@
             <a:avLst/>
           </a:prstGeom>
           <a:noFill/>
-          <a:ln/>
-        </p:spPr>
-        <p:txBody>
-          <a:bodyPr wrap="square" lIns="0" tIns="0" rIns="0" bIns="0" rtlCol="0" anchor="ctr"/>
-          <a:lstStyle/>
-          <a:p>
-            <a:pPr indent="0" marL="0">
+        </p:spPr>
+        <p:txBody>
+          <a:bodyPr wrap="square" lIns="0" tIns="0" rIns="0" bIns="0" rtlCol="0" anchor="ctr"/>
+          <a:lstStyle/>
+          <a:p>
+            <a:pPr marL="0" indent="0">
               <a:buNone/>
             </a:pPr>
             <a:r>
@@ -2830,9 +2681,9 @@
                 <a:solidFill>
                   <a:srgbClr val="6E6E6E"/>
                 </a:solidFill>
-                <a:latin typeface="Arial" pitchFamily="34" charset="0"/>
-                <a:ea typeface="Arial" pitchFamily="34" charset="-122"/>
-                <a:cs typeface="Arial" pitchFamily="34" charset="-120"/>
+                <a:latin typeface="Arial" panose="020B0604020202090204" pitchFamily="34" charset="0"/>
+                <a:ea typeface="Arial" panose="020B0604020202090204" pitchFamily="34" charset="-122"/>
+                <a:cs typeface="Arial" panose="020B0604020202090204" pitchFamily="34" charset="-120"/>
               </a:rPr>
               <a:t>第 54 节 · When 项目总结与后续规划</a:t>
             </a:r>
@@ -2855,13 +2706,12 @@
             <a:avLst/>
           </a:prstGeom>
           <a:noFill/>
-          <a:ln/>
-        </p:spPr>
-        <p:txBody>
-          <a:bodyPr wrap="square" lIns="0" tIns="0" rIns="0" bIns="0" rtlCol="0" anchor="ctr"/>
-          <a:lstStyle/>
-          <a:p>
-            <a:pPr algn="r" indent="0" marL="0">
+        </p:spPr>
+        <p:txBody>
+          <a:bodyPr wrap="square" lIns="0" tIns="0" rIns="0" bIns="0" rtlCol="0" anchor="ctr"/>
+          <a:lstStyle/>
+          <a:p>
+            <a:pPr marL="0" indent="0" algn="r">
               <a:buNone/>
             </a:pPr>
             <a:r>
@@ -2869,9 +2719,9 @@
                 <a:solidFill>
                   <a:srgbClr val="6E6E6E"/>
                 </a:solidFill>
-                <a:latin typeface="Arial" pitchFamily="34" charset="0"/>
-                <a:ea typeface="Arial" pitchFamily="34" charset="-122"/>
-                <a:cs typeface="Arial" pitchFamily="34" charset="-120"/>
+                <a:latin typeface="Arial" panose="020B0604020202090204" pitchFamily="34" charset="0"/>
+                <a:ea typeface="Arial" panose="020B0604020202090204" pitchFamily="34" charset="-122"/>
+                <a:cs typeface="Arial" panose="020B0604020202090204" pitchFamily="34" charset="-120"/>
               </a:rPr>
               <a:t>11 / 14</a:t>
             </a:r>
@@ -2918,23 +2768,22 @@
             <a:avLst/>
           </a:prstGeom>
           <a:noFill/>
-          <a:ln/>
-        </p:spPr>
-        <p:txBody>
-          <a:bodyPr wrap="square" lIns="0" tIns="0" rIns="0" bIns="0" rtlCol="0" anchor="ctr"/>
-          <a:lstStyle/>
-          <a:p>
-            <a:pPr algn="ctr" indent="0" marL="0">
-              <a:buNone/>
-            </a:pPr>
-            <a:r>
-              <a:rPr lang="en-US" sz="1050" b="1" spc="100" kern="0" dirty="0">
+        </p:spPr>
+        <p:txBody>
+          <a:bodyPr wrap="square" lIns="0" tIns="0" rIns="0" bIns="0" rtlCol="0" anchor="ctr"/>
+          <a:lstStyle/>
+          <a:p>
+            <a:pPr marL="0" indent="0" algn="ctr">
+              <a:buNone/>
+            </a:pPr>
+            <a:r>
+              <a:rPr lang="en-US" sz="1050" b="1" kern="0" spc="100" dirty="0">
                 <a:solidFill>
                   <a:srgbClr val="C9A96E"/>
                 </a:solidFill>
-                <a:latin typeface="Arial" pitchFamily="34" charset="0"/>
-                <a:ea typeface="Arial" pitchFamily="34" charset="-122"/>
-                <a:cs typeface="Arial" pitchFamily="34" charset="-120"/>
+                <a:latin typeface="Arial" panose="020B0604020202090204" pitchFamily="34" charset="0"/>
+                <a:ea typeface="Arial" panose="020B0604020202090204" pitchFamily="34" charset="-122"/>
+                <a:cs typeface="Arial" panose="020B0604020202090204" pitchFamily="34" charset="-120"/>
               </a:rPr>
               <a:t>后续规划</a:t>
             </a:r>
@@ -2957,13 +2806,12 @@
             <a:avLst/>
           </a:prstGeom>
           <a:noFill/>
-          <a:ln/>
-        </p:spPr>
-        <p:txBody>
-          <a:bodyPr wrap="square" lIns="0" tIns="0" rIns="0" bIns="0" rtlCol="0" anchor="ctr"/>
-          <a:lstStyle/>
-          <a:p>
-            <a:pPr indent="0" marL="0">
+        </p:spPr>
+        <p:txBody>
+          <a:bodyPr wrap="square" lIns="0" tIns="0" rIns="0" bIns="0" rtlCol="0" anchor="ctr"/>
+          <a:lstStyle/>
+          <a:p>
+            <a:pPr marL="0" indent="0">
               <a:buNone/>
             </a:pPr>
             <a:r>
@@ -2971,9 +2819,9 @@
                 <a:solidFill>
                   <a:srgbClr val="F0F0F0"/>
                 </a:solidFill>
-                <a:latin typeface="Arial" pitchFamily="34" charset="0"/>
-                <a:ea typeface="Arial" pitchFamily="34" charset="-122"/>
-                <a:cs typeface="Arial" pitchFamily="34" charset="-120"/>
+                <a:latin typeface="Arial" panose="020B0604020202090204" pitchFamily="34" charset="0"/>
+                <a:ea typeface="Arial" panose="020B0604020202090204" pitchFamily="34" charset="-122"/>
+                <a:cs typeface="Arial" panose="020B0604020202090204" pitchFamily="34" charset="-120"/>
               </a:rPr>
               <a:t>3 周 MVP 之外，社区接力</a:t>
             </a:r>
@@ -3007,7 +2855,7 @@
             <a:prstDash val="solid"/>
           </a:ln>
           <a:effectLst>
-            <a:outerShdw sx="100000" sy="100000" kx="0" ky="0" algn="bl" rotWithShape="0" blurRad="88900" dist="25400" dir="5400000">
+            <a:outerShdw blurRad="88900" dist="25400" dir="5400000" algn="bl" rotWithShape="0">
               <a:srgbClr val="000000">
                 <a:alpha val="30000"/>
               </a:srgbClr>
@@ -3030,13 +2878,12 @@
             <a:avLst/>
           </a:prstGeom>
           <a:noFill/>
-          <a:ln/>
-        </p:spPr>
-        <p:txBody>
-          <a:bodyPr wrap="square" lIns="0" tIns="0" rIns="0" bIns="0" rtlCol="0" anchor="ctr"/>
-          <a:lstStyle/>
-          <a:p>
-            <a:pPr algn="ctr" indent="0" marL="0">
+        </p:spPr>
+        <p:txBody>
+          <a:bodyPr wrap="square" lIns="0" tIns="0" rIns="0" bIns="0" rtlCol="0" anchor="ctr"/>
+          <a:lstStyle/>
+          <a:p>
+            <a:pPr marL="0" indent="0" algn="ctr">
               <a:buNone/>
             </a:pPr>
             <a:r>
@@ -3044,9 +2891,9 @@
                 <a:solidFill>
                   <a:srgbClr val="C9A96E"/>
                 </a:solidFill>
-                <a:latin typeface="Arial" pitchFamily="34" charset="0"/>
-                <a:ea typeface="Arial" pitchFamily="34" charset="-122"/>
-                <a:cs typeface="Arial" pitchFamily="34" charset="-120"/>
+                <a:latin typeface="Arial" panose="020B0604020202090204" pitchFamily="34" charset="0"/>
+                <a:ea typeface="Arial" panose="020B0604020202090204" pitchFamily="34" charset="-122"/>
+                <a:cs typeface="Arial" panose="020B0604020202090204" pitchFamily="34" charset="-120"/>
               </a:rPr>
               <a:t>更多 Sink</a:t>
             </a:r>
@@ -3069,13 +2916,12 @@
             <a:avLst/>
           </a:prstGeom>
           <a:noFill/>
-          <a:ln/>
         </p:spPr>
         <p:txBody>
           <a:bodyPr wrap="square" lIns="0" tIns="0" rIns="0" bIns="0" rtlCol="0" anchor="t"/>
           <a:lstStyle/>
           <a:p>
-            <a:pPr algn="ctr" indent="0" marL="0">
+            <a:pPr marL="0" indent="0" algn="ctr">
               <a:lnSpc>
                 <a:spcPct val="112000"/>
               </a:lnSpc>
@@ -3086,9 +2932,9 @@
                 <a:solidFill>
                   <a:srgbClr val="D6D6D6"/>
                 </a:solidFill>
-                <a:latin typeface="Arial" pitchFamily="34" charset="0"/>
-                <a:ea typeface="Arial" pitchFamily="34" charset="-122"/>
-                <a:cs typeface="Arial" pitchFamily="34" charset="-120"/>
+                <a:latin typeface="Arial" panose="020B0604020202090204" pitchFamily="34" charset="0"/>
+                <a:ea typeface="Arial" panose="020B0604020202090204" pitchFamily="34" charset="-122"/>
+                <a:cs typeface="Arial" panose="020B0604020202090204" pitchFamily="34" charset="-120"/>
               </a:rPr>
               <a:t>gRPC / RocketMQ / NATS / Pulsar，SPI 加载</a:t>
             </a:r>
@@ -3122,7 +2968,7 @@
             <a:prstDash val="solid"/>
           </a:ln>
           <a:effectLst>
-            <a:outerShdw sx="100000" sy="100000" kx="0" ky="0" algn="bl" rotWithShape="0" blurRad="88900" dist="25400" dir="5400000">
+            <a:outerShdw blurRad="88900" dist="25400" dir="5400000" algn="bl" rotWithShape="0">
               <a:srgbClr val="000000">
                 <a:alpha val="30000"/>
               </a:srgbClr>
@@ -3145,13 +2991,12 @@
             <a:avLst/>
           </a:prstGeom>
           <a:noFill/>
-          <a:ln/>
-        </p:spPr>
-        <p:txBody>
-          <a:bodyPr wrap="square" lIns="0" tIns="0" rIns="0" bIns="0" rtlCol="0" anchor="ctr"/>
-          <a:lstStyle/>
-          <a:p>
-            <a:pPr algn="ctr" indent="0" marL="0">
+        </p:spPr>
+        <p:txBody>
+          <a:bodyPr wrap="square" lIns="0" tIns="0" rIns="0" bIns="0" rtlCol="0" anchor="ctr"/>
+          <a:lstStyle/>
+          <a:p>
+            <a:pPr marL="0" indent="0" algn="ctr">
               <a:buNone/>
             </a:pPr>
             <a:r>
@@ -3159,9 +3004,9 @@
                 <a:solidFill>
                   <a:srgbClr val="C9A96E"/>
                 </a:solidFill>
-                <a:latin typeface="Arial" pitchFamily="34" charset="0"/>
-                <a:ea typeface="Arial" pitchFamily="34" charset="-122"/>
-                <a:cs typeface="Arial" pitchFamily="34" charset="-120"/>
+                <a:latin typeface="Arial" panose="020B0604020202090204" pitchFamily="34" charset="0"/>
+                <a:ea typeface="Arial" panose="020B0604020202090204" pitchFamily="34" charset="-122"/>
+                <a:cs typeface="Arial" panose="020B0604020202090204" pitchFamily="34" charset="-120"/>
               </a:rPr>
               <a:t>鉴权与限流</a:t>
             </a:r>
@@ -3184,13 +3029,12 @@
             <a:avLst/>
           </a:prstGeom>
           <a:noFill/>
-          <a:ln/>
         </p:spPr>
         <p:txBody>
           <a:bodyPr wrap="square" lIns="0" tIns="0" rIns="0" bIns="0" rtlCol="0" anchor="t"/>
           <a:lstStyle/>
           <a:p>
-            <a:pPr algn="ctr" indent="0" marL="0">
+            <a:pPr marL="0" indent="0" algn="ctr">
               <a:lnSpc>
                 <a:spcPct val="112000"/>
               </a:lnSpc>
@@ -3201,9 +3045,9 @@
                 <a:solidFill>
                   <a:srgbClr val="D6D6D6"/>
                 </a:solidFill>
-                <a:latin typeface="Arial" pitchFamily="34" charset="0"/>
-                <a:ea typeface="Arial" pitchFamily="34" charset="-122"/>
-                <a:cs typeface="Arial" pitchFamily="34" charset="-120"/>
+                <a:latin typeface="Arial" panose="020B0604020202090204" pitchFamily="34" charset="0"/>
+                <a:ea typeface="Arial" panose="020B0604020202090204" pitchFamily="34" charset="-122"/>
+                <a:cs typeface="Arial" panose="020B0604020202090204" pitchFamily="34" charset="-120"/>
               </a:rPr>
               <a:t>token 鉴权、按调用方 QPS/配额</a:t>
             </a:r>
@@ -3237,7 +3081,7 @@
             <a:prstDash val="solid"/>
           </a:ln>
           <a:effectLst>
-            <a:outerShdw sx="100000" sy="100000" kx="0" ky="0" algn="bl" rotWithShape="0" blurRad="88900" dist="25400" dir="5400000">
+            <a:outerShdw blurRad="88900" dist="25400" dir="5400000" algn="bl" rotWithShape="0">
               <a:srgbClr val="000000">
                 <a:alpha val="30000"/>
               </a:srgbClr>
@@ -3260,13 +3104,12 @@
             <a:avLst/>
           </a:prstGeom>
           <a:noFill/>
-          <a:ln/>
-        </p:spPr>
-        <p:txBody>
-          <a:bodyPr wrap="square" lIns="0" tIns="0" rIns="0" bIns="0" rtlCol="0" anchor="ctr"/>
-          <a:lstStyle/>
-          <a:p>
-            <a:pPr algn="ctr" indent="0" marL="0">
+        </p:spPr>
+        <p:txBody>
+          <a:bodyPr wrap="square" lIns="0" tIns="0" rIns="0" bIns="0" rtlCol="0" anchor="ctr"/>
+          <a:lstStyle/>
+          <a:p>
+            <a:pPr marL="0" indent="0" algn="ctr">
               <a:buNone/>
             </a:pPr>
             <a:r>
@@ -3274,9 +3117,9 @@
                 <a:solidFill>
                   <a:srgbClr val="C9A96E"/>
                 </a:solidFill>
-                <a:latin typeface="Arial" pitchFamily="34" charset="0"/>
-                <a:ea typeface="Arial" pitchFamily="34" charset="-122"/>
-                <a:cs typeface="Arial" pitchFamily="34" charset="-120"/>
+                <a:latin typeface="Arial" panose="020B0604020202090204" pitchFamily="34" charset="0"/>
+                <a:ea typeface="Arial" panose="020B0604020202090204" pitchFamily="34" charset="-122"/>
+                <a:cs typeface="Arial" panose="020B0604020202090204" pitchFamily="34" charset="-120"/>
               </a:rPr>
               <a:t>死信队列</a:t>
             </a:r>
@@ -3299,13 +3142,12 @@
             <a:avLst/>
           </a:prstGeom>
           <a:noFill/>
-          <a:ln/>
         </p:spPr>
         <p:txBody>
           <a:bodyPr wrap="square" lIns="0" tIns="0" rIns="0" bIns="0" rtlCol="0" anchor="t"/>
           <a:lstStyle/>
           <a:p>
-            <a:pPr algn="ctr" indent="0" marL="0">
+            <a:pPr marL="0" indent="0" algn="ctr">
               <a:lnSpc>
                 <a:spcPct val="112000"/>
               </a:lnSpc>
@@ -3316,9 +3158,9 @@
                 <a:solidFill>
                   <a:srgbClr val="D6D6D6"/>
                 </a:solidFill>
-                <a:latin typeface="Arial" pitchFamily="34" charset="0"/>
-                <a:ea typeface="Arial" pitchFamily="34" charset="-122"/>
-                <a:cs typeface="Arial" pitchFamily="34" charset="-120"/>
+                <a:latin typeface="Arial" panose="020B0604020202090204" pitchFamily="34" charset="0"/>
+                <a:ea typeface="Arial" panose="020B0604020202090204" pitchFamily="34" charset="-122"/>
+                <a:cs typeface="Arial" panose="020B0604020202090204" pitchFamily="34" charset="-120"/>
               </a:rPr>
               <a:t>多次失败进死信，可查可重投</a:t>
             </a:r>
@@ -3352,7 +3194,7 @@
             <a:prstDash val="solid"/>
           </a:ln>
           <a:effectLst>
-            <a:outerShdw sx="100000" sy="100000" kx="0" ky="0" algn="bl" rotWithShape="0" blurRad="88900" dist="25400" dir="5400000">
+            <a:outerShdw blurRad="88900" dist="25400" dir="5400000" algn="bl" rotWithShape="0">
               <a:srgbClr val="000000">
                 <a:alpha val="30000"/>
               </a:srgbClr>
@@ -3375,13 +3217,12 @@
             <a:avLst/>
           </a:prstGeom>
           <a:noFill/>
-          <a:ln/>
-        </p:spPr>
-        <p:txBody>
-          <a:bodyPr wrap="square" lIns="0" tIns="0" rIns="0" bIns="0" rtlCol="0" anchor="ctr"/>
-          <a:lstStyle/>
-          <a:p>
-            <a:pPr algn="ctr" indent="0" marL="0">
+        </p:spPr>
+        <p:txBody>
+          <a:bodyPr wrap="square" lIns="0" tIns="0" rIns="0" bIns="0" rtlCol="0" anchor="ctr"/>
+          <a:lstStyle/>
+          <a:p>
+            <a:pPr marL="0" indent="0" algn="ctr">
               <a:buNone/>
             </a:pPr>
             <a:r>
@@ -3389,9 +3230,9 @@
                 <a:solidFill>
                   <a:srgbClr val="C9A96E"/>
                 </a:solidFill>
-                <a:latin typeface="Arial" pitchFamily="34" charset="0"/>
-                <a:ea typeface="Arial" pitchFamily="34" charset="-122"/>
-                <a:cs typeface="Arial" pitchFamily="34" charset="-120"/>
+                <a:latin typeface="Arial" panose="020B0604020202090204" pitchFamily="34" charset="0"/>
+                <a:ea typeface="Arial" panose="020B0604020202090204" pitchFamily="34" charset="-122"/>
+                <a:cs typeface="Arial" panose="020B0604020202090204" pitchFamily="34" charset="-120"/>
               </a:rPr>
               <a:t>优先级队列</a:t>
             </a:r>
@@ -3414,13 +3255,12 @@
             <a:avLst/>
           </a:prstGeom>
           <a:noFill/>
-          <a:ln/>
         </p:spPr>
         <p:txBody>
           <a:bodyPr wrap="square" lIns="0" tIns="0" rIns="0" bIns="0" rtlCol="0" anchor="t"/>
           <a:lstStyle/>
           <a:p>
-            <a:pPr algn="ctr" indent="0" marL="0">
+            <a:pPr marL="0" indent="0" algn="ctr">
               <a:lnSpc>
                 <a:spcPct val="112000"/>
               </a:lnSpc>
@@ -3431,9 +3271,9 @@
                 <a:solidFill>
                   <a:srgbClr val="D6D6D6"/>
                 </a:solidFill>
-                <a:latin typeface="Arial" pitchFamily="34" charset="0"/>
-                <a:ea typeface="Arial" pitchFamily="34" charset="-122"/>
-                <a:cs typeface="Arial" pitchFamily="34" charset="-120"/>
+                <a:latin typeface="Arial" panose="020B0604020202090204" pitchFamily="34" charset="0"/>
+                <a:ea typeface="Arial" panose="020B0604020202090204" pitchFamily="34" charset="-122"/>
+                <a:cs typeface="Arial" panose="020B0604020202090204" pitchFamily="34" charset="-120"/>
               </a:rPr>
               <a:t>P0–P3，到期高优先先投</a:t>
             </a:r>
@@ -3467,7 +3307,7 @@
             <a:prstDash val="solid"/>
           </a:ln>
           <a:effectLst>
-            <a:outerShdw sx="100000" sy="100000" kx="0" ky="0" algn="bl" rotWithShape="0" blurRad="88900" dist="25400" dir="5400000">
+            <a:outerShdw blurRad="88900" dist="25400" dir="5400000" algn="bl" rotWithShape="0">
               <a:srgbClr val="000000">
                 <a:alpha val="30000"/>
               </a:srgbClr>
@@ -3490,13 +3330,12 @@
             <a:avLst/>
           </a:prstGeom>
           <a:noFill/>
-          <a:ln/>
-        </p:spPr>
-        <p:txBody>
-          <a:bodyPr wrap="square" lIns="0" tIns="0" rIns="0" bIns="0" rtlCol="0" anchor="ctr"/>
-          <a:lstStyle/>
-          <a:p>
-            <a:pPr algn="ctr" indent="0" marL="0">
+        </p:spPr>
+        <p:txBody>
+          <a:bodyPr wrap="square" lIns="0" tIns="0" rIns="0" bIns="0" rtlCol="0" anchor="ctr"/>
+          <a:lstStyle/>
+          <a:p>
+            <a:pPr marL="0" indent="0" algn="ctr">
               <a:buNone/>
             </a:pPr>
             <a:r>
@@ -3504,9 +3343,9 @@
                 <a:solidFill>
                   <a:srgbClr val="C9A96E"/>
                 </a:solidFill>
-                <a:latin typeface="Arial" pitchFamily="34" charset="0"/>
-                <a:ea typeface="Arial" pitchFamily="34" charset="-122"/>
-                <a:cs typeface="Arial" pitchFamily="34" charset="-120"/>
+                <a:latin typeface="Arial" panose="020B0604020202090204" pitchFamily="34" charset="0"/>
+                <a:ea typeface="Arial" panose="020B0604020202090204" pitchFamily="34" charset="-122"/>
+                <a:cs typeface="Arial" panose="020B0604020202090204" pitchFamily="34" charset="-120"/>
               </a:rPr>
               <a:t>跨地域部署</a:t>
             </a:r>
@@ -3529,13 +3368,12 @@
             <a:avLst/>
           </a:prstGeom>
           <a:noFill/>
-          <a:ln/>
         </p:spPr>
         <p:txBody>
           <a:bodyPr wrap="square" lIns="0" tIns="0" rIns="0" bIns="0" rtlCol="0" anchor="t"/>
           <a:lstStyle/>
           <a:p>
-            <a:pPr algn="ctr" indent="0" marL="0">
+            <a:pPr marL="0" indent="0" algn="ctr">
               <a:lnSpc>
                 <a:spcPct val="112000"/>
               </a:lnSpc>
@@ -3546,9 +3384,9 @@
                 <a:solidFill>
                   <a:srgbClr val="D6D6D6"/>
                 </a:solidFill>
-                <a:latin typeface="Arial" pitchFamily="34" charset="0"/>
-                <a:ea typeface="Arial" pitchFamily="34" charset="-122"/>
-                <a:cs typeface="Arial" pitchFamily="34" charset="-120"/>
+                <a:latin typeface="Arial" panose="020B0604020202090204" pitchFamily="34" charset="0"/>
+                <a:ea typeface="Arial" panose="020B0604020202090204" pitchFamily="34" charset="-122"/>
+                <a:cs typeface="Arial" panose="020B0604020202090204" pitchFamily="34" charset="-120"/>
               </a:rPr>
               <a:t>时间轮按地域、跨地域 ETCD/Redis</a:t>
             </a:r>
@@ -3582,7 +3420,7 @@
             <a:prstDash val="solid"/>
           </a:ln>
           <a:effectLst>
-            <a:outerShdw sx="100000" sy="100000" kx="0" ky="0" algn="bl" rotWithShape="0" blurRad="88900" dist="25400" dir="5400000">
+            <a:outerShdw blurRad="88900" dist="25400" dir="5400000" algn="bl" rotWithShape="0">
               <a:srgbClr val="000000">
                 <a:alpha val="30000"/>
               </a:srgbClr>
@@ -3605,13 +3443,12 @@
             <a:avLst/>
           </a:prstGeom>
           <a:noFill/>
-          <a:ln/>
-        </p:spPr>
-        <p:txBody>
-          <a:bodyPr wrap="square" lIns="0" tIns="0" rIns="0" bIns="0" rtlCol="0" anchor="ctr"/>
-          <a:lstStyle/>
-          <a:p>
-            <a:pPr algn="ctr" indent="0" marL="0">
+        </p:spPr>
+        <p:txBody>
+          <a:bodyPr wrap="square" lIns="0" tIns="0" rIns="0" bIns="0" rtlCol="0" anchor="ctr"/>
+          <a:lstStyle/>
+          <a:p>
+            <a:pPr marL="0" indent="0" algn="ctr">
               <a:buNone/>
             </a:pPr>
             <a:r>
@@ -3619,9 +3456,9 @@
                 <a:solidFill>
                   <a:srgbClr val="C9A96E"/>
                 </a:solidFill>
-                <a:latin typeface="Arial" pitchFamily="34" charset="0"/>
-                <a:ea typeface="Arial" pitchFamily="34" charset="-122"/>
-                <a:cs typeface="Arial" pitchFamily="34" charset="-120"/>
+                <a:latin typeface="Arial" panose="020B0604020202090204" pitchFamily="34" charset="0"/>
+                <a:ea typeface="Arial" panose="020B0604020202090204" pitchFamily="34" charset="-122"/>
+                <a:cs typeface="Arial" panose="020B0604020202090204" pitchFamily="34" charset="-120"/>
               </a:rPr>
               <a:t>Operator / MCP</a:t>
             </a:r>
@@ -3644,13 +3481,12 @@
             <a:avLst/>
           </a:prstGeom>
           <a:noFill/>
-          <a:ln/>
         </p:spPr>
         <p:txBody>
           <a:bodyPr wrap="square" lIns="0" tIns="0" rIns="0" bIns="0" rtlCol="0" anchor="t"/>
           <a:lstStyle/>
           <a:p>
-            <a:pPr algn="ctr" indent="0" marL="0">
+            <a:pPr marL="0" indent="0" algn="ctr">
               <a:lnSpc>
                 <a:spcPct val="112000"/>
               </a:lnSpc>
@@ -3661,9 +3497,9 @@
                 <a:solidFill>
                   <a:srgbClr val="D6D6D6"/>
                 </a:solidFill>
-                <a:latin typeface="Arial" pitchFamily="34" charset="0"/>
-                <a:ea typeface="Arial" pitchFamily="34" charset="-122"/>
-                <a:cs typeface="Arial" pitchFamily="34" charset="-120"/>
+                <a:latin typeface="Arial" panose="020B0604020202090204" pitchFamily="34" charset="0"/>
+                <a:ea typeface="Arial" panose="020B0604020202090204" pitchFamily="34" charset="-122"/>
+                <a:cs typeface="Arial" panose="020B0604020202090204" pitchFamily="34" charset="-120"/>
               </a:rPr>
               <a:t>K8s Operator 工程化；暴露为 MCP 让 Agent 直接调</a:t>
             </a:r>
@@ -3713,13 +3549,12 @@
             <a:avLst/>
           </a:prstGeom>
           <a:noFill/>
-          <a:ln/>
-        </p:spPr>
-        <p:txBody>
-          <a:bodyPr wrap="square" lIns="0" tIns="0" rIns="0" bIns="0" rtlCol="0" anchor="ctr"/>
-          <a:lstStyle/>
-          <a:p>
-            <a:pPr indent="0" marL="0">
+        </p:spPr>
+        <p:txBody>
+          <a:bodyPr wrap="square" lIns="0" tIns="0" rIns="0" bIns="0" rtlCol="0" anchor="ctr"/>
+          <a:lstStyle/>
+          <a:p>
+            <a:pPr marL="0" indent="0">
               <a:lnSpc>
                 <a:spcPct val="106000"/>
               </a:lnSpc>
@@ -3730,26 +3565,20 @@
                 <a:solidFill>
                   <a:srgbClr val="C9A96E"/>
                 </a:solidFill>
-                <a:latin typeface="Arial" pitchFamily="34" charset="0"/>
-                <a:ea typeface="Arial" pitchFamily="34" charset="-122"/>
-                <a:cs typeface="Arial" pitchFamily="34" charset="-120"/>
+                <a:latin typeface="Arial" panose="020B0604020202090204" pitchFamily="34" charset="0"/>
+                <a:ea typeface="Arial" panose="020B0604020202090204" pitchFamily="34" charset="-122"/>
+                <a:cs typeface="Arial" panose="020B0604020202090204" pitchFamily="34" charset="-120"/>
               </a:rPr>
               <a:t>边界清晰：</a:t>
             </a:r>
-            <a:pPr indent="0" marL="0">
-              <a:lnSpc>
-                <a:spcPct val="106000"/>
-              </a:lnSpc>
-              <a:buNone/>
-            </a:pPr>
             <a:r>
               <a:rPr lang="en-US" sz="1250" dirty="0">
                 <a:solidFill>
                   <a:srgbClr val="F0F0F0"/>
                 </a:solidFill>
-                <a:latin typeface="Arial" pitchFamily="34" charset="0"/>
-                <a:ea typeface="Arial" pitchFamily="34" charset="-122"/>
-                <a:cs typeface="Arial" pitchFamily="34" charset="-120"/>
+                <a:latin typeface="Arial" panose="020B0604020202090204" pitchFamily="34" charset="0"/>
+                <a:ea typeface="Arial" panose="020B0604020202090204" pitchFamily="34" charset="-122"/>
+                <a:cs typeface="Arial" panose="020B0604020202090204" pitchFamily="34" charset="-120"/>
               </a:rPr>
               <a:t>这些都不在 3 周 MVP 内，通过 GitHub 社区接力持续推进，由从学员中产生的 maintainer 主导。</a:t>
             </a:r>
@@ -3767,12 +3596,13 @@
 
 <file path=ppt/slides/slide12.xml><?xml version="1.0" encoding="utf-8"?>
 <p:sld xmlns:a="http://schemas.openxmlformats.org/drawingml/2006/main" xmlns:r="http://schemas.openxmlformats.org/officeDocument/2006/relationships" xmlns:p="http://schemas.openxmlformats.org/presentationml/2006/main">
-  <p:cSld name="Slide 12">
+  <p:cSld>
     <p:bg>
       <p:bgPr>
         <a:solidFill>
           <a:srgbClr val="1E1E1E"/>
         </a:solidFill>
+        <a:effectLst/>
       </p:bgPr>
     </p:bg>
     <p:spTree>
@@ -3804,13 +3634,12 @@
             <a:avLst/>
           </a:prstGeom>
           <a:noFill/>
-          <a:ln/>
-        </p:spPr>
-        <p:txBody>
-          <a:bodyPr wrap="square" lIns="0" tIns="0" rIns="0" bIns="0" rtlCol="0" anchor="ctr"/>
-          <a:lstStyle/>
-          <a:p>
-            <a:pPr indent="0" marL="0">
+        </p:spPr>
+        <p:txBody>
+          <a:bodyPr wrap="square" lIns="0" tIns="0" rIns="0" bIns="0" rtlCol="0" anchor="ctr"/>
+          <a:lstStyle/>
+          <a:p>
+            <a:pPr marL="0" indent="0">
               <a:buNone/>
             </a:pPr>
             <a:r>
@@ -3818,9 +3647,9 @@
                 <a:solidFill>
                   <a:srgbClr val="6E6E6E"/>
                 </a:solidFill>
-                <a:latin typeface="Arial" pitchFamily="34" charset="0"/>
-                <a:ea typeface="Arial" pitchFamily="34" charset="-122"/>
-                <a:cs typeface="Arial" pitchFamily="34" charset="-120"/>
+                <a:latin typeface="Arial" panose="020B0604020202090204" pitchFamily="34" charset="0"/>
+                <a:ea typeface="Arial" panose="020B0604020202090204" pitchFamily="34" charset="-122"/>
+                <a:cs typeface="Arial" panose="020B0604020202090204" pitchFamily="34" charset="-120"/>
               </a:rPr>
               <a:t>第 54 节 · When 项目总结与后续规划</a:t>
             </a:r>
@@ -3843,13 +3672,12 @@
             <a:avLst/>
           </a:prstGeom>
           <a:noFill/>
-          <a:ln/>
-        </p:spPr>
-        <p:txBody>
-          <a:bodyPr wrap="square" lIns="0" tIns="0" rIns="0" bIns="0" rtlCol="0" anchor="ctr"/>
-          <a:lstStyle/>
-          <a:p>
-            <a:pPr algn="r" indent="0" marL="0">
+        </p:spPr>
+        <p:txBody>
+          <a:bodyPr wrap="square" lIns="0" tIns="0" rIns="0" bIns="0" rtlCol="0" anchor="ctr"/>
+          <a:lstStyle/>
+          <a:p>
+            <a:pPr marL="0" indent="0" algn="r">
               <a:buNone/>
             </a:pPr>
             <a:r>
@@ -3857,9 +3685,9 @@
                 <a:solidFill>
                   <a:srgbClr val="6E6E6E"/>
                 </a:solidFill>
-                <a:latin typeface="Arial" pitchFamily="34" charset="0"/>
-                <a:ea typeface="Arial" pitchFamily="34" charset="-122"/>
-                <a:cs typeface="Arial" pitchFamily="34" charset="-120"/>
+                <a:latin typeface="Arial" panose="020B0604020202090204" pitchFamily="34" charset="0"/>
+                <a:ea typeface="Arial" panose="020B0604020202090204" pitchFamily="34" charset="-122"/>
+                <a:cs typeface="Arial" panose="020B0604020202090204" pitchFamily="34" charset="-120"/>
               </a:rPr>
               <a:t>12 / 14</a:t>
             </a:r>
@@ -3906,23 +3734,22 @@
             <a:avLst/>
           </a:prstGeom>
           <a:noFill/>
-          <a:ln/>
-        </p:spPr>
-        <p:txBody>
-          <a:bodyPr wrap="square" lIns="0" tIns="0" rIns="0" bIns="0" rtlCol="0" anchor="ctr"/>
-          <a:lstStyle/>
-          <a:p>
-            <a:pPr algn="ctr" indent="0" marL="0">
-              <a:buNone/>
-            </a:pPr>
-            <a:r>
-              <a:rPr lang="en-US" sz="1050" b="1" spc="100" kern="0" dirty="0">
+        </p:spPr>
+        <p:txBody>
+          <a:bodyPr wrap="square" lIns="0" tIns="0" rIns="0" bIns="0" rtlCol="0" anchor="ctr"/>
+          <a:lstStyle/>
+          <a:p>
+            <a:pPr marL="0" indent="0" algn="ctr">
+              <a:buNone/>
+            </a:pPr>
+            <a:r>
+              <a:rPr lang="en-US" sz="1050" b="1" kern="0" spc="100" dirty="0">
                 <a:solidFill>
                   <a:srgbClr val="C9A96E"/>
                 </a:solidFill>
-                <a:latin typeface="Arial" pitchFamily="34" charset="0"/>
-                <a:ea typeface="Arial" pitchFamily="34" charset="-122"/>
-                <a:cs typeface="Arial" pitchFamily="34" charset="-120"/>
+                <a:latin typeface="Arial" panose="020B0604020202090204" pitchFamily="34" charset="0"/>
+                <a:ea typeface="Arial" panose="020B0604020202090204" pitchFamily="34" charset="-122"/>
+                <a:cs typeface="Arial" panose="020B0604020202090204" pitchFamily="34" charset="-120"/>
               </a:rPr>
               <a:t>社区推进</a:t>
             </a:r>
@@ -3945,13 +3772,12 @@
             <a:avLst/>
           </a:prstGeom>
           <a:noFill/>
-          <a:ln/>
-        </p:spPr>
-        <p:txBody>
-          <a:bodyPr wrap="square" lIns="0" tIns="0" rIns="0" bIns="0" rtlCol="0" anchor="ctr"/>
-          <a:lstStyle/>
-          <a:p>
-            <a:pPr indent="0" marL="0">
+        </p:spPr>
+        <p:txBody>
+          <a:bodyPr wrap="square" lIns="0" tIns="0" rIns="0" bIns="0" rtlCol="0" anchor="ctr"/>
+          <a:lstStyle/>
+          <a:p>
+            <a:pPr marL="0" indent="0">
               <a:buNone/>
             </a:pPr>
             <a:r>
@@ -3959,9 +3785,9 @@
                 <a:solidFill>
                   <a:srgbClr val="F0F0F0"/>
                 </a:solidFill>
-                <a:latin typeface="Arial" pitchFamily="34" charset="0"/>
-                <a:ea typeface="Arial" pitchFamily="34" charset="-122"/>
-                <a:cs typeface="Arial" pitchFamily="34" charset="-120"/>
+                <a:latin typeface="Arial" panose="020B0604020202090204" pitchFamily="34" charset="0"/>
+                <a:ea typeface="Arial" panose="020B0604020202090204" pitchFamily="34" charset="-122"/>
+                <a:cs typeface="Arial" panose="020B0604020202090204" pitchFamily="34" charset="-120"/>
               </a:rPr>
               <a:t>把项目交给对它感兴趣的人</a:t>
             </a:r>
@@ -3995,7 +3821,7 @@
             <a:prstDash val="solid"/>
           </a:ln>
           <a:effectLst>
-            <a:outerShdw sx="100000" sy="100000" kx="0" ky="0" algn="bl" rotWithShape="0" blurRad="88900" dist="25400" dir="5400000">
+            <a:outerShdw blurRad="88900" dist="25400" dir="5400000" algn="bl" rotWithShape="0">
               <a:srgbClr val="000000">
                 <a:alpha val="30000"/>
               </a:srgbClr>
@@ -4018,13 +3844,12 @@
             <a:avLst/>
           </a:prstGeom>
           <a:noFill/>
-          <a:ln/>
-        </p:spPr>
-        <p:txBody>
-          <a:bodyPr wrap="square" lIns="0" tIns="0" rIns="0" bIns="0" rtlCol="0" anchor="ctr"/>
-          <a:lstStyle/>
-          <a:p>
-            <a:pPr algn="ctr" indent="0" marL="0">
+        </p:spPr>
+        <p:txBody>
+          <a:bodyPr wrap="square" lIns="0" tIns="0" rIns="0" bIns="0" rtlCol="0" anchor="ctr"/>
+          <a:lstStyle/>
+          <a:p>
+            <a:pPr marL="0" indent="0" algn="ctr">
               <a:lnSpc>
                 <a:spcPct val="100000"/>
               </a:lnSpc>
@@ -4035,16 +3860,16 @@
                 <a:solidFill>
                   <a:srgbClr val="D6D6D6"/>
                 </a:solidFill>
-                <a:latin typeface="Arial" pitchFamily="34" charset="0"/>
-                <a:ea typeface="Arial" pitchFamily="34" charset="-122"/>
-                <a:cs typeface="Arial" pitchFamily="34" charset="-120"/>
+                <a:latin typeface="Arial" panose="020B0604020202090204" pitchFamily="34" charset="0"/>
+                <a:ea typeface="Arial" panose="020B0604020202090204" pitchFamily="34" charset="-122"/>
+                <a:cs typeface="Arial" panose="020B0604020202090204" pitchFamily="34" charset="-120"/>
               </a:rPr>
               <a:t>点 Star</a:t>
             </a:r>
             <a:endParaRPr lang="en-US" sz="1200" dirty="0"/>
           </a:p>
           <a:p>
-            <a:pPr algn="ctr" indent="0" marL="0">
+            <a:pPr marL="0" indent="0" algn="ctr">
               <a:lnSpc>
                 <a:spcPct val="100000"/>
               </a:lnSpc>
@@ -4055,9 +3880,9 @@
                 <a:solidFill>
                   <a:srgbClr val="D6D6D6"/>
                 </a:solidFill>
-                <a:latin typeface="Arial" pitchFamily="34" charset="0"/>
-                <a:ea typeface="Arial" pitchFamily="34" charset="-122"/>
-                <a:cs typeface="Arial" pitchFamily="34" charset="-120"/>
+                <a:latin typeface="Arial" panose="020B0604020202090204" pitchFamily="34" charset="0"/>
+                <a:ea typeface="Arial" panose="020B0604020202090204" pitchFamily="34" charset="-122"/>
+                <a:cs typeface="Arial" panose="020B0604020202090204" pitchFamily="34" charset="-120"/>
               </a:rPr>
               <a:t>了解项目</a:t>
             </a:r>
@@ -4080,13 +3905,12 @@
             <a:avLst/>
           </a:prstGeom>
           <a:noFill/>
-          <a:ln/>
-        </p:spPr>
-        <p:txBody>
-          <a:bodyPr wrap="square" lIns="0" tIns="0" rIns="0" bIns="0" rtlCol="0" anchor="ctr"/>
-          <a:lstStyle/>
-          <a:p>
-            <a:pPr algn="ctr" indent="0" marL="0">
+        </p:spPr>
+        <p:txBody>
+          <a:bodyPr wrap="square" lIns="0" tIns="0" rIns="0" bIns="0" rtlCol="0" anchor="ctr"/>
+          <a:lstStyle/>
+          <a:p>
+            <a:pPr marL="0" indent="0" algn="ctr">
               <a:buNone/>
             </a:pPr>
             <a:r>
@@ -4094,9 +3918,9 @@
                 <a:solidFill>
                   <a:srgbClr val="C9A96E"/>
                 </a:solidFill>
-                <a:latin typeface="Arial" pitchFamily="34" charset="0"/>
-                <a:ea typeface="Arial" pitchFamily="34" charset="-122"/>
-                <a:cs typeface="Arial" pitchFamily="34" charset="-120"/>
+                <a:latin typeface="Arial" panose="020B0604020202090204" pitchFamily="34" charset="0"/>
+                <a:ea typeface="Arial" panose="020B0604020202090204" pitchFamily="34" charset="-122"/>
+                <a:cs typeface="Arial" panose="020B0604020202090204" pitchFamily="34" charset="-120"/>
               </a:rPr>
               <a:t>→</a:t>
             </a:r>
@@ -4130,7 +3954,7 @@
             <a:prstDash val="solid"/>
           </a:ln>
           <a:effectLst>
-            <a:outerShdw sx="100000" sy="100000" kx="0" ky="0" algn="bl" rotWithShape="0" blurRad="88900" dist="25400" dir="5400000">
+            <a:outerShdw blurRad="88900" dist="25400" dir="5400000" algn="bl" rotWithShape="0">
               <a:srgbClr val="000000">
                 <a:alpha val="30000"/>
               </a:srgbClr>
@@ -4153,13 +3977,12 @@
             <a:avLst/>
           </a:prstGeom>
           <a:noFill/>
-          <a:ln/>
-        </p:spPr>
-        <p:txBody>
-          <a:bodyPr wrap="square" lIns="0" tIns="0" rIns="0" bIns="0" rtlCol="0" anchor="ctr"/>
-          <a:lstStyle/>
-          <a:p>
-            <a:pPr algn="ctr" indent="0" marL="0">
+        </p:spPr>
+        <p:txBody>
+          <a:bodyPr wrap="square" lIns="0" tIns="0" rIns="0" bIns="0" rtlCol="0" anchor="ctr"/>
+          <a:lstStyle/>
+          <a:p>
+            <a:pPr marL="0" indent="0" algn="ctr">
               <a:lnSpc>
                 <a:spcPct val="100000"/>
               </a:lnSpc>
@@ -4170,16 +3993,16 @@
                 <a:solidFill>
                   <a:srgbClr val="D6D6D6"/>
                 </a:solidFill>
-                <a:latin typeface="Arial" pitchFamily="34" charset="0"/>
-                <a:ea typeface="Arial" pitchFamily="34" charset="-122"/>
-                <a:cs typeface="Arial" pitchFamily="34" charset="-120"/>
+                <a:latin typeface="Arial" panose="020B0604020202090204" pitchFamily="34" charset="0"/>
+                <a:ea typeface="Arial" panose="020B0604020202090204" pitchFamily="34" charset="-122"/>
+                <a:cs typeface="Arial" panose="020B0604020202090204" pitchFamily="34" charset="-120"/>
               </a:rPr>
               <a:t>认领 issue</a:t>
             </a:r>
             <a:endParaRPr lang="en-US" sz="1200" dirty="0"/>
           </a:p>
           <a:p>
-            <a:pPr algn="ctr" indent="0" marL="0">
+            <a:pPr marL="0" indent="0" algn="ctr">
               <a:lnSpc>
                 <a:spcPct val="100000"/>
               </a:lnSpc>
@@ -4190,9 +4013,9 @@
                 <a:solidFill>
                   <a:srgbClr val="D6D6D6"/>
                 </a:solidFill>
-                <a:latin typeface="Arial" pitchFamily="34" charset="0"/>
-                <a:ea typeface="Arial" pitchFamily="34" charset="-122"/>
-                <a:cs typeface="Arial" pitchFamily="34" charset="-120"/>
+                <a:latin typeface="Arial" panose="020B0604020202090204" pitchFamily="34" charset="0"/>
+                <a:ea typeface="Arial" panose="020B0604020202090204" pitchFamily="34" charset="-122"/>
+                <a:cs typeface="Arial" panose="020B0604020202090204" pitchFamily="34" charset="-120"/>
               </a:rPr>
               <a:t>从小处上手</a:t>
             </a:r>
@@ -4215,13 +4038,12 @@
             <a:avLst/>
           </a:prstGeom>
           <a:noFill/>
-          <a:ln/>
-        </p:spPr>
-        <p:txBody>
-          <a:bodyPr wrap="square" lIns="0" tIns="0" rIns="0" bIns="0" rtlCol="0" anchor="ctr"/>
-          <a:lstStyle/>
-          <a:p>
-            <a:pPr algn="ctr" indent="0" marL="0">
+        </p:spPr>
+        <p:txBody>
+          <a:bodyPr wrap="square" lIns="0" tIns="0" rIns="0" bIns="0" rtlCol="0" anchor="ctr"/>
+          <a:lstStyle/>
+          <a:p>
+            <a:pPr marL="0" indent="0" algn="ctr">
               <a:buNone/>
             </a:pPr>
             <a:r>
@@ -4229,9 +4051,9 @@
                 <a:solidFill>
                   <a:srgbClr val="C9A96E"/>
                 </a:solidFill>
-                <a:latin typeface="Arial" pitchFamily="34" charset="0"/>
-                <a:ea typeface="Arial" pitchFamily="34" charset="-122"/>
-                <a:cs typeface="Arial" pitchFamily="34" charset="-120"/>
+                <a:latin typeface="Arial" panose="020B0604020202090204" pitchFamily="34" charset="0"/>
+                <a:ea typeface="Arial" panose="020B0604020202090204" pitchFamily="34" charset="-122"/>
+                <a:cs typeface="Arial" panose="020B0604020202090204" pitchFamily="34" charset="-120"/>
               </a:rPr>
               <a:t>→</a:t>
             </a:r>
@@ -4265,7 +4087,7 @@
             <a:prstDash val="solid"/>
           </a:ln>
           <a:effectLst>
-            <a:outerShdw sx="100000" sy="100000" kx="0" ky="0" algn="bl" rotWithShape="0" blurRad="88900" dist="25400" dir="5400000">
+            <a:outerShdw blurRad="88900" dist="25400" dir="5400000" algn="bl" rotWithShape="0">
               <a:srgbClr val="000000">
                 <a:alpha val="30000"/>
               </a:srgbClr>
@@ -4288,13 +4110,12 @@
             <a:avLst/>
           </a:prstGeom>
           <a:noFill/>
-          <a:ln/>
-        </p:spPr>
-        <p:txBody>
-          <a:bodyPr wrap="square" lIns="0" tIns="0" rIns="0" bIns="0" rtlCol="0" anchor="ctr"/>
-          <a:lstStyle/>
-          <a:p>
-            <a:pPr algn="ctr" indent="0" marL="0">
+        </p:spPr>
+        <p:txBody>
+          <a:bodyPr wrap="square" lIns="0" tIns="0" rIns="0" bIns="0" rtlCol="0" anchor="ctr"/>
+          <a:lstStyle/>
+          <a:p>
+            <a:pPr marL="0" indent="0" algn="ctr">
               <a:lnSpc>
                 <a:spcPct val="100000"/>
               </a:lnSpc>
@@ -4305,16 +4126,16 @@
                 <a:solidFill>
                   <a:srgbClr val="D6D6D6"/>
                 </a:solidFill>
-                <a:latin typeface="Arial" pitchFamily="34" charset="0"/>
-                <a:ea typeface="Arial" pitchFamily="34" charset="-122"/>
-                <a:cs typeface="Arial" pitchFamily="34" charset="-120"/>
+                <a:latin typeface="Arial" panose="020B0604020202090204" pitchFamily="34" charset="0"/>
+                <a:ea typeface="Arial" panose="020B0604020202090204" pitchFamily="34" charset="-122"/>
+                <a:cs typeface="Arial" panose="020B0604020202090204" pitchFamily="34" charset="-120"/>
               </a:rPr>
               <a:t>提第一个 PR</a:t>
             </a:r>
             <a:endParaRPr lang="en-US" sz="1200" dirty="0"/>
           </a:p>
           <a:p>
-            <a:pPr algn="ctr" indent="0" marL="0">
+            <a:pPr marL="0" indent="0" algn="ctr">
               <a:lnSpc>
                 <a:spcPct val="100000"/>
               </a:lnSpc>
@@ -4325,9 +4146,9 @@
                 <a:solidFill>
                   <a:srgbClr val="D6D6D6"/>
                 </a:solidFill>
-                <a:latin typeface="Arial" pitchFamily="34" charset="0"/>
-                <a:ea typeface="Arial" pitchFamily="34" charset="-122"/>
-                <a:cs typeface="Arial" pitchFamily="34" charset="-120"/>
+                <a:latin typeface="Arial" panose="020B0604020202090204" pitchFamily="34" charset="0"/>
+                <a:ea typeface="Arial" panose="020B0604020202090204" pitchFamily="34" charset="-122"/>
+                <a:cs typeface="Arial" panose="020B0604020202090204" pitchFamily="34" charset="-120"/>
               </a:rPr>
               <a:t>经 review 合并</a:t>
             </a:r>
@@ -4350,13 +4171,12 @@
             <a:avLst/>
           </a:prstGeom>
           <a:noFill/>
-          <a:ln/>
-        </p:spPr>
-        <p:txBody>
-          <a:bodyPr wrap="square" lIns="0" tIns="0" rIns="0" bIns="0" rtlCol="0" anchor="ctr"/>
-          <a:lstStyle/>
-          <a:p>
-            <a:pPr algn="ctr" indent="0" marL="0">
+        </p:spPr>
+        <p:txBody>
+          <a:bodyPr wrap="square" lIns="0" tIns="0" rIns="0" bIns="0" rtlCol="0" anchor="ctr"/>
+          <a:lstStyle/>
+          <a:p>
+            <a:pPr marL="0" indent="0" algn="ctr">
               <a:buNone/>
             </a:pPr>
             <a:r>
@@ -4364,9 +4184,9 @@
                 <a:solidFill>
                   <a:srgbClr val="C9A96E"/>
                 </a:solidFill>
-                <a:latin typeface="Arial" pitchFamily="34" charset="0"/>
-                <a:ea typeface="Arial" pitchFamily="34" charset="-122"/>
-                <a:cs typeface="Arial" pitchFamily="34" charset="-120"/>
+                <a:latin typeface="Arial" panose="020B0604020202090204" pitchFamily="34" charset="0"/>
+                <a:ea typeface="Arial" panose="020B0604020202090204" pitchFamily="34" charset="-122"/>
+                <a:cs typeface="Arial" panose="020B0604020202090204" pitchFamily="34" charset="-120"/>
               </a:rPr>
               <a:t>→</a:t>
             </a:r>
@@ -4400,7 +4220,7 @@
             <a:prstDash val="solid"/>
           </a:ln>
           <a:effectLst>
-            <a:outerShdw sx="100000" sy="100000" kx="0" ky="0" algn="bl" rotWithShape="0" blurRad="88900" dist="25400" dir="5400000">
+            <a:outerShdw blurRad="88900" dist="25400" dir="5400000" algn="bl" rotWithShape="0">
               <a:srgbClr val="000000">
                 <a:alpha val="30000"/>
               </a:srgbClr>
@@ -4423,13 +4243,12 @@
             <a:avLst/>
           </a:prstGeom>
           <a:noFill/>
-          <a:ln/>
-        </p:spPr>
-        <p:txBody>
-          <a:bodyPr wrap="square" lIns="0" tIns="0" rIns="0" bIns="0" rtlCol="0" anchor="ctr"/>
-          <a:lstStyle/>
-          <a:p>
-            <a:pPr algn="ctr" indent="0" marL="0">
+        </p:spPr>
+        <p:txBody>
+          <a:bodyPr wrap="square" lIns="0" tIns="0" rIns="0" bIns="0" rtlCol="0" anchor="ctr"/>
+          <a:lstStyle/>
+          <a:p>
+            <a:pPr marL="0" indent="0" algn="ctr">
               <a:lnSpc>
                 <a:spcPct val="100000"/>
               </a:lnSpc>
@@ -4440,16 +4259,16 @@
                 <a:solidFill>
                   <a:srgbClr val="C9A96E"/>
                 </a:solidFill>
-                <a:latin typeface="Arial" pitchFamily="34" charset="0"/>
-                <a:ea typeface="Arial" pitchFamily="34" charset="-122"/>
-                <a:cs typeface="Arial" pitchFamily="34" charset="-120"/>
+                <a:latin typeface="Arial" panose="020B0604020202090204" pitchFamily="34" charset="0"/>
+                <a:ea typeface="Arial" panose="020B0604020202090204" pitchFamily="34" charset="-122"/>
+                <a:cs typeface="Arial" panose="020B0604020202090204" pitchFamily="34" charset="-120"/>
               </a:rPr>
               <a:t>成为 maintainer</a:t>
             </a:r>
             <a:endParaRPr lang="en-US" sz="1200" dirty="0"/>
           </a:p>
           <a:p>
-            <a:pPr algn="ctr" indent="0" marL="0">
+            <a:pPr marL="0" indent="0" algn="ctr">
               <a:lnSpc>
                 <a:spcPct val="100000"/>
               </a:lnSpc>
@@ -4460,9 +4279,9 @@
                 <a:solidFill>
                   <a:srgbClr val="C9A96E"/>
                 </a:solidFill>
-                <a:latin typeface="Arial" pitchFamily="34" charset="0"/>
-                <a:ea typeface="Arial" pitchFamily="34" charset="-122"/>
-                <a:cs typeface="Arial" pitchFamily="34" charset="-120"/>
+                <a:latin typeface="Arial" panose="020B0604020202090204" pitchFamily="34" charset="0"/>
+                <a:ea typeface="Arial" panose="020B0604020202090204" pitchFamily="34" charset="-122"/>
+                <a:cs typeface="Arial" panose="020B0604020202090204" pitchFamily="34" charset="-120"/>
               </a:rPr>
               <a:t>主导一块</a:t>
             </a:r>
@@ -4487,7 +4306,6 @@
           <a:solidFill>
             <a:srgbClr val="C9A96E"/>
           </a:solidFill>
-          <a:ln/>
         </p:spPr>
       </p:sp>
       <p:sp>
@@ -4505,13 +4323,12 @@
             <a:avLst/>
           </a:prstGeom>
           <a:noFill/>
-          <a:ln/>
         </p:spPr>
         <p:txBody>
           <a:bodyPr wrap="square" lIns="0" tIns="0" rIns="0" bIns="0" rtlCol="0" anchor="t"/>
           <a:lstStyle/>
           <a:p>
-            <a:pPr indent="0" marL="0">
+            <a:pPr marL="0" indent="0">
               <a:lnSpc>
                 <a:spcPct val="108000"/>
               </a:lnSpc>
@@ -4522,9 +4339,9 @@
                 <a:solidFill>
                   <a:srgbClr val="D6D6D6"/>
                 </a:solidFill>
-                <a:latin typeface="Arial" pitchFamily="34" charset="0"/>
-                <a:ea typeface="Arial" pitchFamily="34" charset="-122"/>
-                <a:cs typeface="Arial" pitchFamily="34" charset="-120"/>
+                <a:latin typeface="Arial" panose="020B0604020202090204" pitchFamily="34" charset="0"/>
+                <a:ea typeface="Arial" panose="020B0604020202090204" pitchFamily="34" charset="-122"/>
+                <a:cs typeface="Arial" panose="020B0604020202090204" pitchFamily="34" charset="-120"/>
               </a:rPr>
               <a:t>核心是社区建设：找到真正对项目感兴趣的人，把它持续推动下去。</a:t>
             </a:r>
@@ -4549,7 +4366,6 @@
           <a:solidFill>
             <a:srgbClr val="C9A96E"/>
           </a:solidFill>
-          <a:ln/>
         </p:spPr>
       </p:sp>
       <p:sp>
@@ -4567,13 +4383,12 @@
             <a:avLst/>
           </a:prstGeom>
           <a:noFill/>
-          <a:ln/>
         </p:spPr>
         <p:txBody>
           <a:bodyPr wrap="square" lIns="0" tIns="0" rIns="0" bIns="0" rtlCol="0" anchor="t"/>
           <a:lstStyle/>
           <a:p>
-            <a:pPr indent="0" marL="0">
+            <a:pPr marL="0" indent="0">
               <a:lnSpc>
                 <a:spcPct val="108000"/>
               </a:lnSpc>
@@ -4584,9 +4399,9 @@
                 <a:solidFill>
                   <a:srgbClr val="D6D6D6"/>
                 </a:solidFill>
-                <a:latin typeface="Arial" pitchFamily="34" charset="0"/>
-                <a:ea typeface="Arial" pitchFamily="34" charset="-122"/>
-                <a:cs typeface="Arial" pitchFamily="34" charset="-120"/>
+                <a:latin typeface="Arial" panose="020B0604020202090204" pitchFamily="34" charset="0"/>
+                <a:ea typeface="Arial" panose="020B0604020202090204" pitchFamily="34" charset="-122"/>
+                <a:cs typeface="Arial" panose="020B0604020202090204" pitchFamily="34" charset="-120"/>
               </a:rPr>
               <a:t>我也会持续参与推动——不是做完就散，而是让 When 长期活着、被引用。</a:t>
             </a:r>
@@ -4636,13 +4451,12 @@
             <a:avLst/>
           </a:prstGeom>
           <a:noFill/>
-          <a:ln/>
-        </p:spPr>
-        <p:txBody>
-          <a:bodyPr wrap="square" lIns="0" tIns="0" rIns="0" bIns="0" rtlCol="0" anchor="ctr"/>
-          <a:lstStyle/>
-          <a:p>
-            <a:pPr indent="0" marL="0">
+        </p:spPr>
+        <p:txBody>
+          <a:bodyPr wrap="square" lIns="0" tIns="0" rIns="0" bIns="0" rtlCol="0" anchor="ctr"/>
+          <a:lstStyle/>
+          <a:p>
+            <a:pPr marL="0" indent="0">
               <a:lnSpc>
                 <a:spcPct val="106000"/>
               </a:lnSpc>
@@ -4653,26 +4467,20 @@
                 <a:solidFill>
                   <a:srgbClr val="C9A96E"/>
                 </a:solidFill>
-                <a:latin typeface="Arial" pitchFamily="34" charset="0"/>
-                <a:ea typeface="Arial" pitchFamily="34" charset="-122"/>
-                <a:cs typeface="Arial" pitchFamily="34" charset="-120"/>
+                <a:latin typeface="Arial" panose="020B0604020202090204" pitchFamily="34" charset="0"/>
+                <a:ea typeface="Arial" panose="020B0604020202090204" pitchFamily="34" charset="-122"/>
+                <a:cs typeface="Arial" panose="020B0604020202090204" pitchFamily="34" charset="-120"/>
               </a:rPr>
               <a:t>欢迎：</a:t>
             </a:r>
-            <a:pPr indent="0" marL="0">
-              <a:lnSpc>
-                <a:spcPct val="106000"/>
-              </a:lnSpc>
-              <a:buNone/>
-            </a:pPr>
             <a:r>
               <a:rPr lang="en-US" sz="1250" dirty="0">
                 <a:solidFill>
                   <a:srgbClr val="F0F0F0"/>
                 </a:solidFill>
-                <a:latin typeface="Arial" pitchFamily="34" charset="0"/>
-                <a:ea typeface="Arial" pitchFamily="34" charset="-122"/>
-                <a:cs typeface="Arial" pitchFamily="34" charset="-120"/>
+                <a:latin typeface="Arial" panose="020B0604020202090204" pitchFamily="34" charset="0"/>
+                <a:ea typeface="Arial" panose="020B0604020202090204" pitchFamily="34" charset="-122"/>
+                <a:cs typeface="Arial" panose="020B0604020202090204" pitchFamily="34" charset="-120"/>
               </a:rPr>
               <a:t>GitHub 仓库 Star / Issue / PR（占位：github.com/…）· 交流群（占位）。</a:t>
             </a:r>
@@ -4690,12 +4498,13 @@
 
 <file path=ppt/slides/slide13.xml><?xml version="1.0" encoding="utf-8"?>
 <p:sld xmlns:a="http://schemas.openxmlformats.org/drawingml/2006/main" xmlns:r="http://schemas.openxmlformats.org/officeDocument/2006/relationships" xmlns:p="http://schemas.openxmlformats.org/presentationml/2006/main">
-  <p:cSld name="Slide 13">
+  <p:cSld>
     <p:bg>
       <p:bgPr>
         <a:solidFill>
           <a:srgbClr val="1E1E1E"/>
         </a:solidFill>
+        <a:effectLst/>
       </p:bgPr>
     </p:bg>
     <p:spTree>
@@ -4727,13 +4536,12 @@
             <a:avLst/>
           </a:prstGeom>
           <a:noFill/>
-          <a:ln/>
-        </p:spPr>
-        <p:txBody>
-          <a:bodyPr wrap="square" lIns="0" tIns="0" rIns="0" bIns="0" rtlCol="0" anchor="ctr"/>
-          <a:lstStyle/>
-          <a:p>
-            <a:pPr indent="0" marL="0">
+        </p:spPr>
+        <p:txBody>
+          <a:bodyPr wrap="square" lIns="0" tIns="0" rIns="0" bIns="0" rtlCol="0" anchor="ctr"/>
+          <a:lstStyle/>
+          <a:p>
+            <a:pPr marL="0" indent="0">
               <a:buNone/>
             </a:pPr>
             <a:r>
@@ -4741,9 +4549,9 @@
                 <a:solidFill>
                   <a:srgbClr val="6E6E6E"/>
                 </a:solidFill>
-                <a:latin typeface="Arial" pitchFamily="34" charset="0"/>
-                <a:ea typeface="Arial" pitchFamily="34" charset="-122"/>
-                <a:cs typeface="Arial" pitchFamily="34" charset="-120"/>
+                <a:latin typeface="Arial" panose="020B0604020202090204" pitchFamily="34" charset="0"/>
+                <a:ea typeface="Arial" panose="020B0604020202090204" pitchFamily="34" charset="-122"/>
+                <a:cs typeface="Arial" panose="020B0604020202090204" pitchFamily="34" charset="-120"/>
               </a:rPr>
               <a:t>第 54 节 · When 项目总结与后续规划</a:t>
             </a:r>
@@ -4766,13 +4574,12 @@
             <a:avLst/>
           </a:prstGeom>
           <a:noFill/>
-          <a:ln/>
-        </p:spPr>
-        <p:txBody>
-          <a:bodyPr wrap="square" lIns="0" tIns="0" rIns="0" bIns="0" rtlCol="0" anchor="ctr"/>
-          <a:lstStyle/>
-          <a:p>
-            <a:pPr algn="r" indent="0" marL="0">
+        </p:spPr>
+        <p:txBody>
+          <a:bodyPr wrap="square" lIns="0" tIns="0" rIns="0" bIns="0" rtlCol="0" anchor="ctr"/>
+          <a:lstStyle/>
+          <a:p>
+            <a:pPr marL="0" indent="0" algn="r">
               <a:buNone/>
             </a:pPr>
             <a:r>
@@ -4780,9 +4587,9 @@
                 <a:solidFill>
                   <a:srgbClr val="6E6E6E"/>
                 </a:solidFill>
-                <a:latin typeface="Arial" pitchFamily="34" charset="0"/>
-                <a:ea typeface="Arial" pitchFamily="34" charset="-122"/>
-                <a:cs typeface="Arial" pitchFamily="34" charset="-120"/>
+                <a:latin typeface="Arial" panose="020B0604020202090204" pitchFamily="34" charset="0"/>
+                <a:ea typeface="Arial" panose="020B0604020202090204" pitchFamily="34" charset="-122"/>
+                <a:cs typeface="Arial" panose="020B0604020202090204" pitchFamily="34" charset="-120"/>
               </a:rPr>
               <a:t>13 / 14</a:t>
             </a:r>
@@ -4829,23 +4636,22 @@
             <a:avLst/>
           </a:prstGeom>
           <a:noFill/>
-          <a:ln/>
-        </p:spPr>
-        <p:txBody>
-          <a:bodyPr wrap="square" lIns="0" tIns="0" rIns="0" bIns="0" rtlCol="0" anchor="ctr"/>
-          <a:lstStyle/>
-          <a:p>
-            <a:pPr algn="ctr" indent="0" marL="0">
-              <a:buNone/>
-            </a:pPr>
-            <a:r>
-              <a:rPr lang="en-US" sz="1050" b="1" spc="100" kern="0" dirty="0">
+        </p:spPr>
+        <p:txBody>
+          <a:bodyPr wrap="square" lIns="0" tIns="0" rIns="0" bIns="0" rtlCol="0" anchor="ctr"/>
+          <a:lstStyle/>
+          <a:p>
+            <a:pPr marL="0" indent="0" algn="ctr">
+              <a:buNone/>
+            </a:pPr>
+            <a:r>
+              <a:rPr lang="en-US" sz="1050" b="1" kern="0" spc="100" dirty="0">
                 <a:solidFill>
                   <a:srgbClr val="C9A96E"/>
                 </a:solidFill>
-                <a:latin typeface="Arial" pitchFamily="34" charset="0"/>
-                <a:ea typeface="Arial" pitchFamily="34" charset="-122"/>
-                <a:cs typeface="Arial" pitchFamily="34" charset="-120"/>
+                <a:latin typeface="Arial" panose="020B0604020202090204" pitchFamily="34" charset="0"/>
+                <a:ea typeface="Arial" panose="020B0604020202090204" pitchFamily="34" charset="-122"/>
+                <a:cs typeface="Arial" panose="020B0604020202090204" pitchFamily="34" charset="-120"/>
               </a:rPr>
               <a:t>收束</a:t>
             </a:r>
@@ -4868,13 +4674,12 @@
             <a:avLst/>
           </a:prstGeom>
           <a:noFill/>
-          <a:ln/>
-        </p:spPr>
-        <p:txBody>
-          <a:bodyPr wrap="square" lIns="0" tIns="0" rIns="0" bIns="0" rtlCol="0" anchor="ctr"/>
-          <a:lstStyle/>
-          <a:p>
-            <a:pPr indent="0" marL="0">
+        </p:spPr>
+        <p:txBody>
+          <a:bodyPr wrap="square" lIns="0" tIns="0" rIns="0" bIns="0" rtlCol="0" anchor="ctr"/>
+          <a:lstStyle/>
+          <a:p>
+            <a:pPr marL="0" indent="0">
               <a:buNone/>
             </a:pPr>
             <a:r>
@@ -4882,9 +4687,9 @@
                 <a:solidFill>
                   <a:srgbClr val="F0F0F0"/>
                 </a:solidFill>
-                <a:latin typeface="Arial" pitchFamily="34" charset="0"/>
-                <a:ea typeface="Arial" pitchFamily="34" charset="-122"/>
-                <a:cs typeface="Arial" pitchFamily="34" charset="-120"/>
+                <a:latin typeface="Arial" panose="020B0604020202090204" pitchFamily="34" charset="0"/>
+                <a:ea typeface="Arial" panose="020B0604020202090204" pitchFamily="34" charset="-122"/>
+                <a:cs typeface="Arial" panose="020B0604020202090204" pitchFamily="34" charset="-120"/>
               </a:rPr>
               <a:t>从一份技术方案，到一个能用的组件</a:t>
             </a:r>
@@ -4909,7 +4714,6 @@
           <a:solidFill>
             <a:srgbClr val="C9A96E"/>
           </a:solidFill>
-          <a:ln/>
         </p:spPr>
       </p:sp>
       <p:sp>
@@ -4927,13 +4731,12 @@
             <a:avLst/>
           </a:prstGeom>
           <a:noFill/>
-          <a:ln/>
         </p:spPr>
         <p:txBody>
           <a:bodyPr wrap="square" lIns="0" tIns="0" rIns="0" bIns="0" rtlCol="0" anchor="t"/>
           <a:lstStyle/>
           <a:p>
-            <a:pPr indent="0" marL="0">
+            <a:pPr marL="0" indent="0">
               <a:lnSpc>
                 <a:spcPct val="108000"/>
               </a:lnSpc>
@@ -4944,9 +4747,9 @@
                 <a:solidFill>
                   <a:srgbClr val="D6D6D6"/>
                 </a:solidFill>
-                <a:latin typeface="Arial" pitchFamily="34" charset="0"/>
-                <a:ea typeface="Arial" pitchFamily="34" charset="-122"/>
-                <a:cs typeface="Arial" pitchFamily="34" charset="-120"/>
+                <a:latin typeface="Arial" panose="020B0604020202090204" pitchFamily="34" charset="0"/>
+                <a:ea typeface="Arial" panose="020B0604020202090204" pitchFamily="34" charset="-122"/>
+                <a:cs typeface="Arial" panose="020B0604020202090204" pitchFamily="34" charset="-120"/>
               </a:rPr>
               <a:t>When：一个生产可用的分布式延时投递组件——集群、多副本、自动故障切换、不丢消息。</a:t>
             </a:r>
@@ -4971,7 +4774,6 @@
           <a:solidFill>
             <a:srgbClr val="C9A96E"/>
           </a:solidFill>
-          <a:ln/>
         </p:spPr>
       </p:sp>
       <p:sp>
@@ -4989,13 +4791,12 @@
             <a:avLst/>
           </a:prstGeom>
           <a:noFill/>
-          <a:ln/>
         </p:spPr>
         <p:txBody>
           <a:bodyPr wrap="square" lIns="0" tIns="0" rIns="0" bIns="0" rtlCol="0" anchor="t"/>
           <a:lstStyle/>
           <a:p>
-            <a:pPr indent="0" marL="0">
+            <a:pPr marL="0" indent="0">
               <a:lnSpc>
                 <a:spcPct val="108000"/>
               </a:lnSpc>
@@ -5006,9 +4807,9 @@
                 <a:solidFill>
                   <a:srgbClr val="D6D6D6"/>
                 </a:solidFill>
-                <a:latin typeface="Arial" pitchFamily="34" charset="0"/>
-                <a:ea typeface="Arial" pitchFamily="34" charset="-122"/>
-                <a:cs typeface="Arial" pitchFamily="34" charset="-120"/>
+                <a:latin typeface="Arial" panose="020B0604020202090204" pitchFamily="34" charset="0"/>
+                <a:ea typeface="Arial" panose="020B0604020202090204" pitchFamily="34" charset="-122"/>
+                <a:cs typeface="Arial" panose="020B0604020202090204" pitchFamily="34" charset="-120"/>
               </a:rPr>
               <a:t>怎么做的：底座定契约 → 逐节产出可验证原料 → 两次跑，循环自主实现、人在高风险点把关。</a:t>
             </a:r>
@@ -5033,7 +4834,6 @@
           <a:solidFill>
             <a:srgbClr val="C9A96E"/>
           </a:solidFill>
-          <a:ln/>
         </p:spPr>
       </p:sp>
       <p:sp>
@@ -5051,13 +4851,12 @@
             <a:avLst/>
           </a:prstGeom>
           <a:noFill/>
-          <a:ln/>
         </p:spPr>
         <p:txBody>
           <a:bodyPr wrap="square" lIns="0" tIns="0" rIns="0" bIns="0" rtlCol="0" anchor="t"/>
           <a:lstStyle/>
           <a:p>
-            <a:pPr indent="0" marL="0">
+            <a:pPr marL="0" indent="0">
               <a:lnSpc>
                 <a:spcPct val="108000"/>
               </a:lnSpc>
@@ -5068,9 +4867,9 @@
                 <a:solidFill>
                   <a:srgbClr val="D6D6D6"/>
                 </a:solidFill>
-                <a:latin typeface="Arial" pitchFamily="34" charset="0"/>
-                <a:ea typeface="Arial" pitchFamily="34" charset="-122"/>
-                <a:cs typeface="Arial" pitchFamily="34" charset="-120"/>
+                <a:latin typeface="Arial" panose="020B0604020202090204" pitchFamily="34" charset="0"/>
+                <a:ea typeface="Arial" panose="020B0604020202090204" pitchFamily="34" charset="-122"/>
+                <a:cs typeface="Arial" panose="020B0604020202090204" pitchFamily="34" charset="-120"/>
               </a:rPr>
               <a:t>真正学到的：用 AI 编程做企业级项目的方法——设计循环、设计判官，而 Loop 最重要的永远是 Harness。</a:t>
             </a:r>
@@ -5120,13 +4919,12 @@
             <a:avLst/>
           </a:prstGeom>
           <a:noFill/>
-          <a:ln/>
-        </p:spPr>
-        <p:txBody>
-          <a:bodyPr wrap="square" lIns="0" tIns="0" rIns="0" bIns="0" rtlCol="0" anchor="ctr"/>
-          <a:lstStyle/>
-          <a:p>
-            <a:pPr indent="0" marL="0">
+        </p:spPr>
+        <p:txBody>
+          <a:bodyPr wrap="square" lIns="0" tIns="0" rIns="0" bIns="0" rtlCol="0" anchor="ctr"/>
+          <a:lstStyle/>
+          <a:p>
+            <a:pPr marL="0" indent="0">
               <a:lnSpc>
                 <a:spcPct val="106000"/>
               </a:lnSpc>
@@ -5137,26 +4935,20 @@
                 <a:solidFill>
                   <a:srgbClr val="C9A96E"/>
                 </a:solidFill>
-                <a:latin typeface="Arial" pitchFamily="34" charset="0"/>
-                <a:ea typeface="Arial" pitchFamily="34" charset="-122"/>
-                <a:cs typeface="Arial" pitchFamily="34" charset="-120"/>
+                <a:latin typeface="Arial" panose="020B0604020202090204" pitchFamily="34" charset="0"/>
+                <a:ea typeface="Arial" panose="020B0604020202090204" pitchFamily="34" charset="-122"/>
+                <a:cs typeface="Arial" panose="020B0604020202090204" pitchFamily="34" charset="-120"/>
               </a:rPr>
               <a:t>一句话收口：</a:t>
             </a:r>
-            <a:pPr indent="0" marL="0">
-              <a:lnSpc>
-                <a:spcPct val="106000"/>
-              </a:lnSpc>
-              <a:buNone/>
-            </a:pPr>
             <a:r>
               <a:rPr lang="en-US" sz="1250" dirty="0">
                 <a:solidFill>
                   <a:srgbClr val="F0F0F0"/>
                 </a:solidFill>
-                <a:latin typeface="Arial" pitchFamily="34" charset="0"/>
-                <a:ea typeface="Arial" pitchFamily="34" charset="-122"/>
-                <a:cs typeface="Arial" pitchFamily="34" charset="-120"/>
+                <a:latin typeface="Arial" panose="020B0604020202090204" pitchFamily="34" charset="0"/>
+                <a:ea typeface="Arial" panose="020B0604020202090204" pitchFamily="34" charset="-122"/>
+                <a:cs typeface="Arial" panose="020B0604020202090204" pitchFamily="34" charset="-120"/>
               </a:rPr>
               <a:t>可验证的交给循环，判断留给人；When 是样本，方法才是带得走的东西。</a:t>
             </a:r>
@@ -5174,12 +4966,13 @@
 
 <file path=ppt/slides/slide14.xml><?xml version="1.0" encoding="utf-8"?>
 <p:sld xmlns:a="http://schemas.openxmlformats.org/drawingml/2006/main" xmlns:r="http://schemas.openxmlformats.org/officeDocument/2006/relationships" xmlns:p="http://schemas.openxmlformats.org/presentationml/2006/main">
-  <p:cSld name="Slide 14">
+  <p:cSld>
     <p:bg>
       <p:bgPr>
         <a:solidFill>
           <a:srgbClr val="1E1E1E"/>
         </a:solidFill>
+        <a:effectLst/>
       </p:bgPr>
     </p:bg>
     <p:spTree>
@@ -5211,13 +5004,12 @@
             <a:avLst/>
           </a:prstGeom>
           <a:noFill/>
-          <a:ln/>
-        </p:spPr>
-        <p:txBody>
-          <a:bodyPr wrap="square" lIns="0" tIns="0" rIns="0" bIns="0" rtlCol="0" anchor="ctr"/>
-          <a:lstStyle/>
-          <a:p>
-            <a:pPr algn="ctr" indent="0" marL="0">
+        </p:spPr>
+        <p:txBody>
+          <a:bodyPr wrap="square" lIns="0" tIns="0" rIns="0" bIns="0" rtlCol="0" anchor="ctr"/>
+          <a:lstStyle/>
+          <a:p>
+            <a:pPr marL="0" indent="0" algn="ctr">
               <a:buNone/>
             </a:pPr>
             <a:r>
@@ -5225,9 +5017,9 @@
                 <a:solidFill>
                   <a:srgbClr val="F0F0F0"/>
                 </a:solidFill>
-                <a:latin typeface="Arial" pitchFamily="34" charset="0"/>
-                <a:ea typeface="Arial" pitchFamily="34" charset="-122"/>
-                <a:cs typeface="Arial" pitchFamily="34" charset="-120"/>
+                <a:latin typeface="Arial" panose="020B0604020202090204" pitchFamily="34" charset="0"/>
+                <a:ea typeface="Arial" panose="020B0604020202090204" pitchFamily="34" charset="-122"/>
+                <a:cs typeface="Arial" panose="020B0604020202090204" pitchFamily="34" charset="-120"/>
               </a:rPr>
               <a:t>谢谢</a:t>
             </a:r>
@@ -5250,13 +5042,12 @@
             <a:avLst/>
           </a:prstGeom>
           <a:noFill/>
-          <a:ln/>
-        </p:spPr>
-        <p:txBody>
-          <a:bodyPr wrap="square" lIns="0" tIns="0" rIns="0" bIns="0" rtlCol="0" anchor="ctr"/>
-          <a:lstStyle/>
-          <a:p>
-            <a:pPr algn="ctr" indent="0" marL="0">
+        </p:spPr>
+        <p:txBody>
+          <a:bodyPr wrap="square" lIns="0" tIns="0" rIns="0" bIns="0" rtlCol="0" anchor="ctr"/>
+          <a:lstStyle/>
+          <a:p>
+            <a:pPr marL="0" indent="0" algn="ctr">
               <a:buNone/>
             </a:pPr>
             <a:r>
@@ -5264,9 +5055,9 @@
                 <a:solidFill>
                   <a:srgbClr val="C9A96E"/>
                 </a:solidFill>
-                <a:latin typeface="Arial" pitchFamily="34" charset="0"/>
-                <a:ea typeface="Arial" pitchFamily="34" charset="-122"/>
-                <a:cs typeface="Arial" pitchFamily="34" charset="-120"/>
+                <a:latin typeface="Arial" panose="020B0604020202090204" pitchFamily="34" charset="0"/>
+                <a:ea typeface="Arial" panose="020B0604020202090204" pitchFamily="34" charset="-122"/>
+                <a:cs typeface="Arial" panose="020B0604020202090204" pitchFamily="34" charset="-120"/>
               </a:rPr>
               <a:t>When 交给社区，方法带回你的项目</a:t>
             </a:r>
@@ -5289,13 +5080,12 @@
             <a:avLst/>
           </a:prstGeom>
           <a:noFill/>
-          <a:ln/>
-        </p:spPr>
-        <p:txBody>
-          <a:bodyPr wrap="square" lIns="0" tIns="0" rIns="0" bIns="0" rtlCol="0" anchor="ctr"/>
-          <a:lstStyle/>
-          <a:p>
-            <a:pPr algn="ctr" indent="0" marL="0">
+        </p:spPr>
+        <p:txBody>
+          <a:bodyPr wrap="square" lIns="0" tIns="0" rIns="0" bIns="0" rtlCol="0" anchor="ctr"/>
+          <a:lstStyle/>
+          <a:p>
+            <a:pPr marL="0" indent="0" algn="ctr">
               <a:buNone/>
             </a:pPr>
             <a:r>
@@ -5303,9 +5093,9 @@
                 <a:solidFill>
                   <a:srgbClr val="9A9A9A"/>
                 </a:solidFill>
-                <a:latin typeface="Arial" pitchFamily="34" charset="0"/>
-                <a:ea typeface="Arial" pitchFamily="34" charset="-122"/>
-                <a:cs typeface="Arial" pitchFamily="34" charset="-120"/>
+                <a:latin typeface="Arial" panose="020B0604020202090204" pitchFamily="34" charset="0"/>
+                <a:ea typeface="Arial" panose="020B0604020202090204" pitchFamily="34" charset="-122"/>
+                <a:cs typeface="Arial" panose="020B0604020202090204" pitchFamily="34" charset="-120"/>
               </a:rPr>
               <a:t>GitHub（占位）　·　交流群（占位）　·　欢迎认领 issue、提 PR</a:t>
             </a:r>
@@ -5323,12 +5113,13 @@
 
 <file path=ppt/slides/slide2.xml><?xml version="1.0" encoding="utf-8"?>
 <p:sld xmlns:a="http://schemas.openxmlformats.org/drawingml/2006/main" xmlns:r="http://schemas.openxmlformats.org/officeDocument/2006/relationships" xmlns:p="http://schemas.openxmlformats.org/presentationml/2006/main">
-  <p:cSld name="Slide 2">
+  <p:cSld>
     <p:bg>
       <p:bgPr>
         <a:solidFill>
           <a:srgbClr val="1E1E1E"/>
         </a:solidFill>
+        <a:effectLst/>
       </p:bgPr>
     </p:bg>
     <p:spTree>
@@ -5360,13 +5151,12 @@
             <a:avLst/>
           </a:prstGeom>
           <a:noFill/>
-          <a:ln/>
-        </p:spPr>
-        <p:txBody>
-          <a:bodyPr wrap="square" lIns="0" tIns="0" rIns="0" bIns="0" rtlCol="0" anchor="ctr"/>
-          <a:lstStyle/>
-          <a:p>
-            <a:pPr indent="0" marL="0">
+        </p:spPr>
+        <p:txBody>
+          <a:bodyPr wrap="square" lIns="0" tIns="0" rIns="0" bIns="0" rtlCol="0" anchor="ctr"/>
+          <a:lstStyle/>
+          <a:p>
+            <a:pPr marL="0" indent="0">
               <a:buNone/>
             </a:pPr>
             <a:r>
@@ -5374,9 +5164,9 @@
                 <a:solidFill>
                   <a:srgbClr val="6E6E6E"/>
                 </a:solidFill>
-                <a:latin typeface="Arial" pitchFamily="34" charset="0"/>
-                <a:ea typeface="Arial" pitchFamily="34" charset="-122"/>
-                <a:cs typeface="Arial" pitchFamily="34" charset="-120"/>
+                <a:latin typeface="Arial" panose="020B0604020202090204" pitchFamily="34" charset="0"/>
+                <a:ea typeface="Arial" panose="020B0604020202090204" pitchFamily="34" charset="-122"/>
+                <a:cs typeface="Arial" panose="020B0604020202090204" pitchFamily="34" charset="-120"/>
               </a:rPr>
               <a:t>第 54 节 · When 项目总结与后续规划</a:t>
             </a:r>
@@ -5399,13 +5189,12 @@
             <a:avLst/>
           </a:prstGeom>
           <a:noFill/>
-          <a:ln/>
-        </p:spPr>
-        <p:txBody>
-          <a:bodyPr wrap="square" lIns="0" tIns="0" rIns="0" bIns="0" rtlCol="0" anchor="ctr"/>
-          <a:lstStyle/>
-          <a:p>
-            <a:pPr algn="r" indent="0" marL="0">
+        </p:spPr>
+        <p:txBody>
+          <a:bodyPr wrap="square" lIns="0" tIns="0" rIns="0" bIns="0" rtlCol="0" anchor="ctr"/>
+          <a:lstStyle/>
+          <a:p>
+            <a:pPr marL="0" indent="0" algn="r">
               <a:buNone/>
             </a:pPr>
             <a:r>
@@ -5413,9 +5202,9 @@
                 <a:solidFill>
                   <a:srgbClr val="6E6E6E"/>
                 </a:solidFill>
-                <a:latin typeface="Arial" pitchFamily="34" charset="0"/>
-                <a:ea typeface="Arial" pitchFamily="34" charset="-122"/>
-                <a:cs typeface="Arial" pitchFamily="34" charset="-120"/>
+                <a:latin typeface="Arial" panose="020B0604020202090204" pitchFamily="34" charset="0"/>
+                <a:ea typeface="Arial" panose="020B0604020202090204" pitchFamily="34" charset="-122"/>
+                <a:cs typeface="Arial" panose="020B0604020202090204" pitchFamily="34" charset="-120"/>
               </a:rPr>
               <a:t>2 / 14</a:t>
             </a:r>
@@ -5462,23 +5251,22 @@
             <a:avLst/>
           </a:prstGeom>
           <a:noFill/>
-          <a:ln/>
-        </p:spPr>
-        <p:txBody>
-          <a:bodyPr wrap="square" lIns="0" tIns="0" rIns="0" bIns="0" rtlCol="0" anchor="ctr"/>
-          <a:lstStyle/>
-          <a:p>
-            <a:pPr algn="ctr" indent="0" marL="0">
-              <a:buNone/>
-            </a:pPr>
-            <a:r>
-              <a:rPr lang="en-US" sz="1050" b="1" spc="100" kern="0" dirty="0">
+        </p:spPr>
+        <p:txBody>
+          <a:bodyPr wrap="square" lIns="0" tIns="0" rIns="0" bIns="0" rtlCol="0" anchor="ctr"/>
+          <a:lstStyle/>
+          <a:p>
+            <a:pPr marL="0" indent="0" algn="ctr">
+              <a:buNone/>
+            </a:pPr>
+            <a:r>
+              <a:rPr lang="en-US" sz="1050" b="1" kern="0" spc="100" dirty="0">
                 <a:solidFill>
                   <a:srgbClr val="C9A96E"/>
                 </a:solidFill>
-                <a:latin typeface="Arial" pitchFamily="34" charset="0"/>
-                <a:ea typeface="Arial" pitchFamily="34" charset="-122"/>
-                <a:cs typeface="Arial" pitchFamily="34" charset="-120"/>
+                <a:latin typeface="Arial" panose="020B0604020202090204" pitchFamily="34" charset="0"/>
+                <a:ea typeface="Arial" panose="020B0604020202090204" pitchFamily="34" charset="-122"/>
+                <a:cs typeface="Arial" panose="020B0604020202090204" pitchFamily="34" charset="-120"/>
               </a:rPr>
               <a:t>做成了什么</a:t>
             </a:r>
@@ -5501,13 +5289,12 @@
             <a:avLst/>
           </a:prstGeom>
           <a:noFill/>
-          <a:ln/>
-        </p:spPr>
-        <p:txBody>
-          <a:bodyPr wrap="square" lIns="0" tIns="0" rIns="0" bIns="0" rtlCol="0" anchor="ctr"/>
-          <a:lstStyle/>
-          <a:p>
-            <a:pPr indent="0" marL="0">
+        </p:spPr>
+        <p:txBody>
+          <a:bodyPr wrap="square" lIns="0" tIns="0" rIns="0" bIns="0" rtlCol="0" anchor="ctr"/>
+          <a:lstStyle/>
+          <a:p>
+            <a:pPr marL="0" indent="0">
               <a:buNone/>
             </a:pPr>
             <a:r>
@@ -5515,9 +5302,9 @@
                 <a:solidFill>
                   <a:srgbClr val="F0F0F0"/>
                 </a:solidFill>
-                <a:latin typeface="Arial" pitchFamily="34" charset="0"/>
-                <a:ea typeface="Arial" pitchFamily="34" charset="-122"/>
-                <a:cs typeface="Arial" pitchFamily="34" charset="-120"/>
+                <a:latin typeface="Arial" panose="020B0604020202090204" pitchFamily="34" charset="0"/>
+                <a:ea typeface="Arial" panose="020B0604020202090204" pitchFamily="34" charset="-122"/>
+                <a:cs typeface="Arial" panose="020B0604020202090204" pitchFamily="34" charset="-120"/>
               </a:rPr>
               <a:t>When = 生产可用的分布式延时投递组件</a:t>
             </a:r>
@@ -5551,7 +5338,7 @@
             <a:prstDash val="solid"/>
           </a:ln>
           <a:effectLst>
-            <a:outerShdw sx="100000" sy="100000" kx="0" ky="0" algn="bl" rotWithShape="0" blurRad="88900" dist="25400" dir="5400000">
+            <a:outerShdw blurRad="88900" dist="25400" dir="5400000" algn="bl" rotWithShape="0">
               <a:srgbClr val="000000">
                 <a:alpha val="30000"/>
               </a:srgbClr>
@@ -5574,13 +5361,12 @@
             <a:avLst/>
           </a:prstGeom>
           <a:noFill/>
-          <a:ln/>
-        </p:spPr>
-        <p:txBody>
-          <a:bodyPr wrap="square" lIns="0" tIns="0" rIns="0" bIns="0" rtlCol="0" anchor="ctr"/>
-          <a:lstStyle/>
-          <a:p>
-            <a:pPr algn="ctr" indent="0" marL="0">
+        </p:spPr>
+        <p:txBody>
+          <a:bodyPr wrap="square" lIns="0" tIns="0" rIns="0" bIns="0" rtlCol="0" anchor="ctr"/>
+          <a:lstStyle/>
+          <a:p>
+            <a:pPr marL="0" indent="0" algn="ctr">
               <a:buNone/>
             </a:pPr>
             <a:r>
@@ -5588,9 +5374,9 @@
                 <a:solidFill>
                   <a:srgbClr val="C9A96E"/>
                 </a:solidFill>
-                <a:latin typeface="Arial" pitchFamily="34" charset="0"/>
-                <a:ea typeface="Arial" pitchFamily="34" charset="-122"/>
-                <a:cs typeface="Arial" pitchFamily="34" charset="-120"/>
+                <a:latin typeface="Arial" panose="020B0604020202090204" pitchFamily="34" charset="0"/>
+                <a:ea typeface="Arial" panose="020B0604020202090204" pitchFamily="34" charset="-122"/>
+                <a:cs typeface="Arial" panose="020B0604020202090204" pitchFamily="34" charset="-120"/>
               </a:rPr>
               <a:t>集群协调</a:t>
             </a:r>
@@ -5613,13 +5399,12 @@
             <a:avLst/>
           </a:prstGeom>
           <a:noFill/>
-          <a:ln/>
         </p:spPr>
         <p:txBody>
           <a:bodyPr wrap="square" lIns="0" tIns="0" rIns="0" bIns="0" rtlCol="0" anchor="t"/>
           <a:lstStyle/>
           <a:p>
-            <a:pPr algn="ctr" indent="0" marL="0">
+            <a:pPr marL="0" indent="0" algn="ctr">
               <a:lnSpc>
                 <a:spcPct val="110000"/>
               </a:lnSpc>
@@ -5630,9 +5415,9 @@
                 <a:solidFill>
                   <a:srgbClr val="D6D6D6"/>
                 </a:solidFill>
-                <a:latin typeface="Arial" pitchFamily="34" charset="0"/>
-                <a:ea typeface="Arial" pitchFamily="34" charset="-122"/>
-                <a:cs typeface="Arial" pitchFamily="34" charset="-120"/>
+                <a:latin typeface="Arial" panose="020B0604020202090204" pitchFamily="34" charset="0"/>
+                <a:ea typeface="Arial" panose="020B0604020202090204" pitchFamily="34" charset="-122"/>
+                <a:cs typeface="Arial" panose="020B0604020202090204" pitchFamily="34" charset="-120"/>
               </a:rPr>
               <a:t>ETCD 组集群、选主、感知</a:t>
             </a:r>
@@ -5666,7 +5451,7 @@
             <a:prstDash val="solid"/>
           </a:ln>
           <a:effectLst>
-            <a:outerShdw sx="100000" sy="100000" kx="0" ky="0" algn="bl" rotWithShape="0" blurRad="88900" dist="25400" dir="5400000">
+            <a:outerShdw blurRad="88900" dist="25400" dir="5400000" algn="bl" rotWithShape="0">
               <a:srgbClr val="000000">
                 <a:alpha val="30000"/>
               </a:srgbClr>
@@ -5689,13 +5474,12 @@
             <a:avLst/>
           </a:prstGeom>
           <a:noFill/>
-          <a:ln/>
-        </p:spPr>
-        <p:txBody>
-          <a:bodyPr wrap="square" lIns="0" tIns="0" rIns="0" bIns="0" rtlCol="0" anchor="ctr"/>
-          <a:lstStyle/>
-          <a:p>
-            <a:pPr algn="ctr" indent="0" marL="0">
+        </p:spPr>
+        <p:txBody>
+          <a:bodyPr wrap="square" lIns="0" tIns="0" rIns="0" bIns="0" rtlCol="0" anchor="ctr"/>
+          <a:lstStyle/>
+          <a:p>
+            <a:pPr marL="0" indent="0" algn="ctr">
               <a:buNone/>
             </a:pPr>
             <a:r>
@@ -5703,9 +5487,9 @@
                 <a:solidFill>
                   <a:srgbClr val="C9A96E"/>
                 </a:solidFill>
-                <a:latin typeface="Arial" pitchFamily="34" charset="0"/>
-                <a:ea typeface="Arial" pitchFamily="34" charset="-122"/>
-                <a:cs typeface="Arial" pitchFamily="34" charset="-120"/>
+                <a:latin typeface="Arial" panose="020B0604020202090204" pitchFamily="34" charset="0"/>
+                <a:ea typeface="Arial" panose="020B0604020202090204" pitchFamily="34" charset="-122"/>
+                <a:cs typeface="Arial" panose="020B0604020202090204" pitchFamily="34" charset="-120"/>
               </a:rPr>
               <a:t>多副本高可用</a:t>
             </a:r>
@@ -5728,13 +5512,12 @@
             <a:avLst/>
           </a:prstGeom>
           <a:noFill/>
-          <a:ln/>
         </p:spPr>
         <p:txBody>
           <a:bodyPr wrap="square" lIns="0" tIns="0" rIns="0" bIns="0" rtlCol="0" anchor="t"/>
           <a:lstStyle/>
           <a:p>
-            <a:pPr algn="ctr" indent="0" marL="0">
+            <a:pPr marL="0" indent="0" algn="ctr">
               <a:lnSpc>
                 <a:spcPct val="110000"/>
               </a:lnSpc>
@@ -5745,9 +5528,9 @@
                 <a:solidFill>
                   <a:srgbClr val="D6D6D6"/>
                 </a:solidFill>
-                <a:latin typeface="Arial" pitchFamily="34" charset="0"/>
-                <a:ea typeface="Arial" pitchFamily="34" charset="-122"/>
-                <a:cs typeface="Arial" pitchFamily="34" charset="-120"/>
+                <a:latin typeface="Arial" panose="020B0604020202090204" pitchFamily="34" charset="0"/>
+                <a:ea typeface="Arial" panose="020B0604020202090204" pitchFamily="34" charset="-122"/>
+                <a:cs typeface="Arial" panose="020B0604020202090204" pitchFamily="34" charset="-120"/>
               </a:rPr>
               <a:t>每个时间轮 Master/Slave</a:t>
             </a:r>
@@ -5781,7 +5564,7 @@
             <a:prstDash val="solid"/>
           </a:ln>
           <a:effectLst>
-            <a:outerShdw sx="100000" sy="100000" kx="0" ky="0" algn="bl" rotWithShape="0" blurRad="88900" dist="25400" dir="5400000">
+            <a:outerShdw blurRad="88900" dist="25400" dir="5400000" algn="bl" rotWithShape="0">
               <a:srgbClr val="000000">
                 <a:alpha val="30000"/>
               </a:srgbClr>
@@ -5804,13 +5587,12 @@
             <a:avLst/>
           </a:prstGeom>
           <a:noFill/>
-          <a:ln/>
-        </p:spPr>
-        <p:txBody>
-          <a:bodyPr wrap="square" lIns="0" tIns="0" rIns="0" bIns="0" rtlCol="0" anchor="ctr"/>
-          <a:lstStyle/>
-          <a:p>
-            <a:pPr algn="ctr" indent="0" marL="0">
+        </p:spPr>
+        <p:txBody>
+          <a:bodyPr wrap="square" lIns="0" tIns="0" rIns="0" bIns="0" rtlCol="0" anchor="ctr"/>
+          <a:lstStyle/>
+          <a:p>
+            <a:pPr marL="0" indent="0" algn="ctr">
               <a:buNone/>
             </a:pPr>
             <a:r>
@@ -5818,9 +5600,9 @@
                 <a:solidFill>
                   <a:srgbClr val="C9A96E"/>
                 </a:solidFill>
-                <a:latin typeface="Arial" pitchFamily="34" charset="0"/>
-                <a:ea typeface="Arial" pitchFamily="34" charset="-122"/>
-                <a:cs typeface="Arial" pitchFamily="34" charset="-120"/>
+                <a:latin typeface="Arial" panose="020B0604020202090204" pitchFamily="34" charset="0"/>
+                <a:ea typeface="Arial" panose="020B0604020202090204" pitchFamily="34" charset="-122"/>
+                <a:cs typeface="Arial" panose="020B0604020202090204" pitchFamily="34" charset="-120"/>
               </a:rPr>
               <a:t>自动故障切换</a:t>
             </a:r>
@@ -5843,13 +5625,12 @@
             <a:avLst/>
           </a:prstGeom>
           <a:noFill/>
-          <a:ln/>
         </p:spPr>
         <p:txBody>
           <a:bodyPr wrap="square" lIns="0" tIns="0" rIns="0" bIns="0" rtlCol="0" anchor="t"/>
           <a:lstStyle/>
           <a:p>
-            <a:pPr algn="ctr" indent="0" marL="0">
+            <a:pPr marL="0" indent="0" algn="ctr">
               <a:lnSpc>
                 <a:spcPct val="110000"/>
               </a:lnSpc>
@@ -5860,9 +5641,9 @@
                 <a:solidFill>
                   <a:srgbClr val="D6D6D6"/>
                 </a:solidFill>
-                <a:latin typeface="Arial" pitchFamily="34" charset="0"/>
-                <a:ea typeface="Arial" pitchFamily="34" charset="-122"/>
-                <a:cs typeface="Arial" pitchFamily="34" charset="-120"/>
+                <a:latin typeface="Arial" panose="020B0604020202090204" pitchFamily="34" charset="0"/>
+                <a:ea typeface="Arial" panose="020B0604020202090204" pitchFamily="34" charset="-122"/>
+                <a:cs typeface="Arial" panose="020B0604020202090204" pitchFamily="34" charset="-120"/>
               </a:rPr>
               <a:t>Master 挂 10 秒内接管</a:t>
             </a:r>
@@ -5896,7 +5677,7 @@
             <a:prstDash val="solid"/>
           </a:ln>
           <a:effectLst>
-            <a:outerShdw sx="100000" sy="100000" kx="0" ky="0" algn="bl" rotWithShape="0" blurRad="88900" dist="25400" dir="5400000">
+            <a:outerShdw blurRad="88900" dist="25400" dir="5400000" algn="bl" rotWithShape="0">
               <a:srgbClr val="000000">
                 <a:alpha val="30000"/>
               </a:srgbClr>
@@ -5919,13 +5700,12 @@
             <a:avLst/>
           </a:prstGeom>
           <a:noFill/>
-          <a:ln/>
-        </p:spPr>
-        <p:txBody>
-          <a:bodyPr wrap="square" lIns="0" tIns="0" rIns="0" bIns="0" rtlCol="0" anchor="ctr"/>
-          <a:lstStyle/>
-          <a:p>
-            <a:pPr algn="ctr" indent="0" marL="0">
+        </p:spPr>
+        <p:txBody>
+          <a:bodyPr wrap="square" lIns="0" tIns="0" rIns="0" bIns="0" rtlCol="0" anchor="ctr"/>
+          <a:lstStyle/>
+          <a:p>
+            <a:pPr marL="0" indent="0" algn="ctr">
               <a:buNone/>
             </a:pPr>
             <a:r>
@@ -5933,9 +5713,9 @@
                 <a:solidFill>
                   <a:srgbClr val="C9A96E"/>
                 </a:solidFill>
-                <a:latin typeface="Arial" pitchFamily="34" charset="0"/>
-                <a:ea typeface="Arial" pitchFamily="34" charset="-122"/>
-                <a:cs typeface="Arial" pitchFamily="34" charset="-120"/>
+                <a:latin typeface="Arial" panose="020B0604020202090204" pitchFamily="34" charset="0"/>
+                <a:ea typeface="Arial" panose="020B0604020202090204" pitchFamily="34" charset="-122"/>
+                <a:cs typeface="Arial" panose="020B0604020202090204" pitchFamily="34" charset="-120"/>
               </a:rPr>
               <a:t>不丢消息</a:t>
             </a:r>
@@ -5958,13 +5738,12 @@
             <a:avLst/>
           </a:prstGeom>
           <a:noFill/>
-          <a:ln/>
         </p:spPr>
         <p:txBody>
           <a:bodyPr wrap="square" lIns="0" tIns="0" rIns="0" bIns="0" rtlCol="0" anchor="t"/>
           <a:lstStyle/>
           <a:p>
-            <a:pPr algn="ctr" indent="0" marL="0">
+            <a:pPr marL="0" indent="0" algn="ctr">
               <a:lnSpc>
                 <a:spcPct val="110000"/>
               </a:lnSpc>
@@ -5975,9 +5754,9 @@
                 <a:solidFill>
                   <a:srgbClr val="D6D6D6"/>
                 </a:solidFill>
-                <a:latin typeface="Arial" pitchFamily="34" charset="0"/>
-                <a:ea typeface="Arial" pitchFamily="34" charset="-122"/>
-                <a:cs typeface="Arial" pitchFamily="34" charset="-120"/>
+                <a:latin typeface="Arial" panose="020B0604020202090204" pitchFamily="34" charset="0"/>
+                <a:ea typeface="Arial" panose="020B0604020202090204" pitchFamily="34" charset="-122"/>
+                <a:cs typeface="Arial" panose="020B0604020202090204" pitchFamily="34" charset="-120"/>
               </a:rPr>
               <a:t>先落库、Redis 是真源</a:t>
             </a:r>
@@ -6011,7 +5790,7 @@
             <a:prstDash val="solid"/>
           </a:ln>
           <a:effectLst>
-            <a:outerShdw sx="100000" sy="100000" kx="0" ky="0" algn="bl" rotWithShape="0" blurRad="88900" dist="25400" dir="5400000">
+            <a:outerShdw blurRad="88900" dist="25400" dir="5400000" algn="bl" rotWithShape="0">
               <a:srgbClr val="000000">
                 <a:alpha val="30000"/>
               </a:srgbClr>
@@ -6034,13 +5813,12 @@
             <a:avLst/>
           </a:prstGeom>
           <a:noFill/>
-          <a:ln/>
-        </p:spPr>
-        <p:txBody>
-          <a:bodyPr wrap="square" lIns="0" tIns="0" rIns="0" bIns="0" rtlCol="0" anchor="ctr"/>
-          <a:lstStyle/>
-          <a:p>
-            <a:pPr algn="ctr" indent="0" marL="0">
+        </p:spPr>
+        <p:txBody>
+          <a:bodyPr wrap="square" lIns="0" tIns="0" rIns="0" bIns="0" rtlCol="0" anchor="ctr"/>
+          <a:lstStyle/>
+          <a:p>
+            <a:pPr marL="0" indent="0" algn="ctr">
               <a:buNone/>
             </a:pPr>
             <a:r>
@@ -6048,9 +5826,9 @@
                 <a:solidFill>
                   <a:srgbClr val="C9A96E"/>
                 </a:solidFill>
-                <a:latin typeface="Arial" pitchFamily="34" charset="0"/>
-                <a:ea typeface="Arial" pitchFamily="34" charset="-122"/>
-                <a:cs typeface="Arial" pitchFamily="34" charset="-120"/>
+                <a:latin typeface="Arial" panose="020B0604020202090204" pitchFamily="34" charset="0"/>
+                <a:ea typeface="Arial" panose="020B0604020202090204" pitchFamily="34" charset="-122"/>
+                <a:cs typeface="Arial" panose="020B0604020202090204" pitchFamily="34" charset="-120"/>
               </a:rPr>
               <a:t>多层时间轮</a:t>
             </a:r>
@@ -6073,13 +5851,12 @@
             <a:avLst/>
           </a:prstGeom>
           <a:noFill/>
-          <a:ln/>
         </p:spPr>
         <p:txBody>
           <a:bodyPr wrap="square" lIns="0" tIns="0" rIns="0" bIns="0" rtlCol="0" anchor="t"/>
           <a:lstStyle/>
           <a:p>
-            <a:pPr algn="ctr" indent="0" marL="0">
+            <a:pPr marL="0" indent="0" algn="ctr">
               <a:lnSpc>
                 <a:spcPct val="110000"/>
               </a:lnSpc>
@@ -6090,9 +5867,9 @@
                 <a:solidFill>
                   <a:srgbClr val="D6D6D6"/>
                 </a:solidFill>
-                <a:latin typeface="Arial" pitchFamily="34" charset="0"/>
-                <a:ea typeface="Arial" pitchFamily="34" charset="-122"/>
-                <a:cs typeface="Arial" pitchFamily="34" charset="-120"/>
+                <a:latin typeface="Arial" panose="020B0604020202090204" pitchFamily="34" charset="0"/>
+                <a:ea typeface="Arial" panose="020B0604020202090204" pitchFamily="34" charset="-122"/>
+                <a:cs typeface="Arial" panose="020B0604020202090204" pitchFamily="34" charset="-120"/>
               </a:rPr>
               <a:t>O(1)、秒到 30 天、精度稳</a:t>
             </a:r>
@@ -6126,7 +5903,7 @@
             <a:prstDash val="solid"/>
           </a:ln>
           <a:effectLst>
-            <a:outerShdw sx="100000" sy="100000" kx="0" ky="0" algn="bl" rotWithShape="0" blurRad="88900" dist="25400" dir="5400000">
+            <a:outerShdw blurRad="88900" dist="25400" dir="5400000" algn="bl" rotWithShape="0">
               <a:srgbClr val="000000">
                 <a:alpha val="30000"/>
               </a:srgbClr>
@@ -6149,13 +5926,12 @@
             <a:avLst/>
           </a:prstGeom>
           <a:noFill/>
-          <a:ln/>
-        </p:spPr>
-        <p:txBody>
-          <a:bodyPr wrap="square" lIns="0" tIns="0" rIns="0" bIns="0" rtlCol="0" anchor="ctr"/>
-          <a:lstStyle/>
-          <a:p>
-            <a:pPr algn="ctr" indent="0" marL="0">
+        </p:spPr>
+        <p:txBody>
+          <a:bodyPr wrap="square" lIns="0" tIns="0" rIns="0" bIns="0" rtlCol="0" anchor="ctr"/>
+          <a:lstStyle/>
+          <a:p>
+            <a:pPr marL="0" indent="0" algn="ctr">
               <a:buNone/>
             </a:pPr>
             <a:r>
@@ -6163,9 +5939,9 @@
                 <a:solidFill>
                   <a:srgbClr val="C9A96E"/>
                 </a:solidFill>
-                <a:latin typeface="Arial" pitchFamily="34" charset="0"/>
-                <a:ea typeface="Arial" pitchFamily="34" charset="-122"/>
-                <a:cs typeface="Arial" pitchFamily="34" charset="-120"/>
+                <a:latin typeface="Arial" panose="020B0604020202090204" pitchFamily="34" charset="0"/>
+                <a:ea typeface="Arial" panose="020B0604020202090204" pitchFamily="34" charset="-122"/>
+                <a:cs typeface="Arial" panose="020B0604020202090204" pitchFamily="34" charset="-120"/>
               </a:rPr>
               <a:t>一键部署</a:t>
             </a:r>
@@ -6188,13 +5964,12 @@
             <a:avLst/>
           </a:prstGeom>
           <a:noFill/>
-          <a:ln/>
         </p:spPr>
         <p:txBody>
           <a:bodyPr wrap="square" lIns="0" tIns="0" rIns="0" bIns="0" rtlCol="0" anchor="t"/>
           <a:lstStyle/>
           <a:p>
-            <a:pPr algn="ctr" indent="0" marL="0">
+            <a:pPr marL="0" indent="0" algn="ctr">
               <a:lnSpc>
                 <a:spcPct val="110000"/>
               </a:lnSpc>
@@ -6205,9 +5980,9 @@
                 <a:solidFill>
                   <a:srgbClr val="D6D6D6"/>
                 </a:solidFill>
-                <a:latin typeface="Arial" pitchFamily="34" charset="0"/>
-                <a:ea typeface="Arial" pitchFamily="34" charset="-122"/>
-                <a:cs typeface="Arial" pitchFamily="34" charset="-120"/>
+                <a:latin typeface="Arial" panose="020B0604020202090204" pitchFamily="34" charset="0"/>
+                <a:ea typeface="Arial" panose="020B0604020202090204" pitchFamily="34" charset="-122"/>
+                <a:cs typeface="Arial" panose="020B0604020202090204" pitchFamily="34" charset="-120"/>
               </a:rPr>
               <a:t>compose / 单机 / K8s</a:t>
             </a:r>
@@ -6257,13 +6032,12 @@
             <a:avLst/>
           </a:prstGeom>
           <a:noFill/>
-          <a:ln/>
-        </p:spPr>
-        <p:txBody>
-          <a:bodyPr wrap="square" lIns="0" tIns="0" rIns="0" bIns="0" rtlCol="0" anchor="ctr"/>
-          <a:lstStyle/>
-          <a:p>
-            <a:pPr indent="0" marL="0">
+        </p:spPr>
+        <p:txBody>
+          <a:bodyPr wrap="square" lIns="0" tIns="0" rIns="0" bIns="0" rtlCol="0" anchor="ctr"/>
+          <a:lstStyle/>
+          <a:p>
+            <a:pPr marL="0" indent="0">
               <a:lnSpc>
                 <a:spcPct val="106000"/>
               </a:lnSpc>
@@ -6274,26 +6048,20 @@
                 <a:solidFill>
                   <a:srgbClr val="C9A96E"/>
                 </a:solidFill>
-                <a:latin typeface="Arial" pitchFamily="34" charset="0"/>
-                <a:ea typeface="Arial" pitchFamily="34" charset="-122"/>
-                <a:cs typeface="Arial" pitchFamily="34" charset="-120"/>
+                <a:latin typeface="Arial" panose="020B0604020202090204" pitchFamily="34" charset="0"/>
+                <a:ea typeface="Arial" panose="020B0604020202090204" pitchFamily="34" charset="-122"/>
+                <a:cs typeface="Arial" panose="020B0604020202090204" pitchFamily="34" charset="-120"/>
               </a:rPr>
               <a:t>一句话：</a:t>
             </a:r>
-            <a:pPr indent="0" marL="0">
-              <a:lnSpc>
-                <a:spcPct val="106000"/>
-              </a:lnSpc>
-              <a:buNone/>
-            </a:pPr>
             <a:r>
               <a:rPr lang="en-US" sz="1250" dirty="0">
                 <a:solidFill>
                   <a:srgbClr val="F0F0F0"/>
                 </a:solidFill>
-                <a:latin typeface="Arial" pitchFamily="34" charset="0"/>
-                <a:ea typeface="Arial" pitchFamily="34" charset="-122"/>
-                <a:cs typeface="Arial" pitchFamily="34" charset="-120"/>
+                <a:latin typeface="Arial" panose="020B0604020202090204" pitchFamily="34" charset="0"/>
+                <a:ea typeface="Arial" panose="020B0604020202090204" pitchFamily="34" charset="-122"/>
+                <a:cs typeface="Arial" panose="020B0604020202090204" pitchFamily="34" charset="-120"/>
               </a:rPr>
               <a:t>不是单机 toy，是带 HA 的集群版——这些分布式硬指标做到了，When 才算“生产可用”，作为 AI 编程样本才有说服力。</a:t>
             </a:r>
@@ -6311,12 +6079,13 @@
 
 <file path=ppt/slides/slide3.xml><?xml version="1.0" encoding="utf-8"?>
 <p:sld xmlns:a="http://schemas.openxmlformats.org/drawingml/2006/main" xmlns:r="http://schemas.openxmlformats.org/officeDocument/2006/relationships" xmlns:p="http://schemas.openxmlformats.org/presentationml/2006/main">
-  <p:cSld name="Slide 3">
+  <p:cSld>
     <p:bg>
       <p:bgPr>
         <a:solidFill>
           <a:srgbClr val="1E1E1E"/>
         </a:solidFill>
+        <a:effectLst/>
       </p:bgPr>
     </p:bg>
     <p:spTree>
@@ -6348,13 +6117,12 @@
             <a:avLst/>
           </a:prstGeom>
           <a:noFill/>
-          <a:ln/>
-        </p:spPr>
-        <p:txBody>
-          <a:bodyPr wrap="square" lIns="0" tIns="0" rIns="0" bIns="0" rtlCol="0" anchor="ctr"/>
-          <a:lstStyle/>
-          <a:p>
-            <a:pPr indent="0" marL="0">
+        </p:spPr>
+        <p:txBody>
+          <a:bodyPr wrap="square" lIns="0" tIns="0" rIns="0" bIns="0" rtlCol="0" anchor="ctr"/>
+          <a:lstStyle/>
+          <a:p>
+            <a:pPr marL="0" indent="0">
               <a:buNone/>
             </a:pPr>
             <a:r>
@@ -6362,9 +6130,9 @@
                 <a:solidFill>
                   <a:srgbClr val="6E6E6E"/>
                 </a:solidFill>
-                <a:latin typeface="Arial" pitchFamily="34" charset="0"/>
-                <a:ea typeface="Arial" pitchFamily="34" charset="-122"/>
-                <a:cs typeface="Arial" pitchFamily="34" charset="-120"/>
+                <a:latin typeface="Arial" panose="020B0604020202090204" pitchFamily="34" charset="0"/>
+                <a:ea typeface="Arial" panose="020B0604020202090204" pitchFamily="34" charset="-122"/>
+                <a:cs typeface="Arial" panose="020B0604020202090204" pitchFamily="34" charset="-120"/>
               </a:rPr>
               <a:t>第 54 节 · When 项目总结与后续规划</a:t>
             </a:r>
@@ -6387,13 +6155,12 @@
             <a:avLst/>
           </a:prstGeom>
           <a:noFill/>
-          <a:ln/>
-        </p:spPr>
-        <p:txBody>
-          <a:bodyPr wrap="square" lIns="0" tIns="0" rIns="0" bIns="0" rtlCol="0" anchor="ctr"/>
-          <a:lstStyle/>
-          <a:p>
-            <a:pPr algn="r" indent="0" marL="0">
+        </p:spPr>
+        <p:txBody>
+          <a:bodyPr wrap="square" lIns="0" tIns="0" rIns="0" bIns="0" rtlCol="0" anchor="ctr"/>
+          <a:lstStyle/>
+          <a:p>
+            <a:pPr marL="0" indent="0" algn="r">
               <a:buNone/>
             </a:pPr>
             <a:r>
@@ -6401,9 +6168,9 @@
                 <a:solidFill>
                   <a:srgbClr val="6E6E6E"/>
                 </a:solidFill>
-                <a:latin typeface="Arial" pitchFamily="34" charset="0"/>
-                <a:ea typeface="Arial" pitchFamily="34" charset="-122"/>
-                <a:cs typeface="Arial" pitchFamily="34" charset="-120"/>
+                <a:latin typeface="Arial" panose="020B0604020202090204" pitchFamily="34" charset="0"/>
+                <a:ea typeface="Arial" panose="020B0604020202090204" pitchFamily="34" charset="-122"/>
+                <a:cs typeface="Arial" panose="020B0604020202090204" pitchFamily="34" charset="-120"/>
               </a:rPr>
               <a:t>3 / 14</a:t>
             </a:r>
@@ -6450,23 +6217,22 @@
             <a:avLst/>
           </a:prstGeom>
           <a:noFill/>
-          <a:ln/>
-        </p:spPr>
-        <p:txBody>
-          <a:bodyPr wrap="square" lIns="0" tIns="0" rIns="0" bIns="0" rtlCol="0" anchor="ctr"/>
-          <a:lstStyle/>
-          <a:p>
-            <a:pPr algn="ctr" indent="0" marL="0">
-              <a:buNone/>
-            </a:pPr>
-            <a:r>
-              <a:rPr lang="en-US" sz="1050" b="1" spc="100" kern="0" dirty="0">
+        </p:spPr>
+        <p:txBody>
+          <a:bodyPr wrap="square" lIns="0" tIns="0" rIns="0" bIns="0" rtlCol="0" anchor="ctr"/>
+          <a:lstStyle/>
+          <a:p>
+            <a:pPr marL="0" indent="0" algn="ctr">
+              <a:buNone/>
+            </a:pPr>
+            <a:r>
+              <a:rPr lang="en-US" sz="1050" b="1" kern="0" spc="100" dirty="0">
                 <a:solidFill>
                   <a:srgbClr val="C9A96E"/>
                 </a:solidFill>
-                <a:latin typeface="Arial" pitchFamily="34" charset="0"/>
-                <a:ea typeface="Arial" pitchFamily="34" charset="-122"/>
-                <a:cs typeface="Arial" pitchFamily="34" charset="-120"/>
+                <a:latin typeface="Arial" panose="020B0604020202090204" pitchFamily="34" charset="0"/>
+                <a:ea typeface="Arial" panose="020B0604020202090204" pitchFamily="34" charset="-122"/>
+                <a:cs typeface="Arial" panose="020B0604020202090204" pitchFamily="34" charset="-120"/>
               </a:rPr>
               <a:t>全景回顾</a:t>
             </a:r>
@@ -6489,13 +6255,12 @@
             <a:avLst/>
           </a:prstGeom>
           <a:noFill/>
-          <a:ln/>
-        </p:spPr>
-        <p:txBody>
-          <a:bodyPr wrap="square" lIns="0" tIns="0" rIns="0" bIns="0" rtlCol="0" anchor="ctr"/>
-          <a:lstStyle/>
-          <a:p>
-            <a:pPr indent="0" marL="0">
+        </p:spPr>
+        <p:txBody>
+          <a:bodyPr wrap="square" lIns="0" tIns="0" rIns="0" bIns="0" rtlCol="0" anchor="ctr"/>
+          <a:lstStyle/>
+          <a:p>
+            <a:pPr marL="0" indent="0">
               <a:buNone/>
             </a:pPr>
             <a:r>
@@ -6503,9 +6268,9 @@
                 <a:solidFill>
                   <a:srgbClr val="F0F0F0"/>
                 </a:solidFill>
-                <a:latin typeface="Arial" pitchFamily="34" charset="0"/>
-                <a:ea typeface="Arial" pitchFamily="34" charset="-122"/>
-                <a:cs typeface="Arial" pitchFamily="34" charset="-120"/>
+                <a:latin typeface="Arial" panose="020B0604020202090204" pitchFamily="34" charset="0"/>
+                <a:ea typeface="Arial" panose="020B0604020202090204" pitchFamily="34" charset="-122"/>
+                <a:cs typeface="Arial" panose="020B0604020202090204" pitchFamily="34" charset="-120"/>
               </a:rPr>
               <a:t>一条延时消息，从进来到投出去</a:t>
             </a:r>
@@ -6555,13 +6320,12 @@
             <a:avLst/>
           </a:prstGeom>
           <a:noFill/>
-          <a:ln/>
-        </p:spPr>
-        <p:txBody>
-          <a:bodyPr wrap="square" lIns="0" tIns="0" rIns="0" bIns="0" rtlCol="0" anchor="ctr"/>
-          <a:lstStyle/>
-          <a:p>
-            <a:pPr algn="ctr" indent="0" marL="0">
+        </p:spPr>
+        <p:txBody>
+          <a:bodyPr wrap="square" lIns="0" tIns="0" rIns="0" bIns="0" rtlCol="0" anchor="ctr"/>
+          <a:lstStyle/>
+          <a:p>
+            <a:pPr marL="0" indent="0" algn="ctr">
               <a:lnSpc>
                 <a:spcPct val="100000"/>
               </a:lnSpc>
@@ -6572,9 +6336,9 @@
                 <a:solidFill>
                   <a:srgbClr val="7FA8C9"/>
                 </a:solidFill>
-                <a:latin typeface="Arial" pitchFamily="34" charset="0"/>
-                <a:ea typeface="Arial" pitchFamily="34" charset="-122"/>
-                <a:cs typeface="Arial" pitchFamily="34" charset="-120"/>
+                <a:latin typeface="Arial" panose="020B0604020202090204" pitchFamily="34" charset="0"/>
+                <a:ea typeface="Arial" panose="020B0604020202090204" pitchFamily="34" charset="-122"/>
+                <a:cs typeface="Arial" panose="020B0604020202090204" pitchFamily="34" charset="-120"/>
               </a:rPr>
               <a:t>业务方</a:t>
             </a:r>
@@ -6624,13 +6388,12 @@
             <a:avLst/>
           </a:prstGeom>
           <a:noFill/>
-          <a:ln/>
-        </p:spPr>
-        <p:txBody>
-          <a:bodyPr wrap="square" lIns="0" tIns="0" rIns="0" bIns="0" rtlCol="0" anchor="ctr"/>
-          <a:lstStyle/>
-          <a:p>
-            <a:pPr algn="ctr" indent="0" marL="0">
+        </p:spPr>
+        <p:txBody>
+          <a:bodyPr wrap="square" lIns="0" tIns="0" rIns="0" bIns="0" rtlCol="0" anchor="ctr"/>
+          <a:lstStyle/>
+          <a:p>
+            <a:pPr marL="0" indent="0" algn="ctr">
               <a:lnSpc>
                 <a:spcPct val="102000"/>
               </a:lnSpc>
@@ -6641,9 +6404,9 @@
                 <a:solidFill>
                   <a:srgbClr val="C9A96E"/>
                 </a:solidFill>
-                <a:latin typeface="Arial" pitchFamily="34" charset="0"/>
-                <a:ea typeface="Arial" pitchFamily="34" charset="-122"/>
-                <a:cs typeface="Arial" pitchFamily="34" charset="-120"/>
+                <a:latin typeface="Arial" panose="020B0604020202090204" pitchFamily="34" charset="0"/>
+                <a:ea typeface="Arial" panose="020B0604020202090204" pitchFamily="34" charset="-122"/>
+                <a:cs typeface="Arial" panose="020B0604020202090204" pitchFamily="34" charset="-120"/>
               </a:rPr>
               <a:t>When 集群（同构多节点）</a:t>
             </a:r>
@@ -6693,13 +6456,12 @@
             <a:avLst/>
           </a:prstGeom>
           <a:noFill/>
-          <a:ln/>
-        </p:spPr>
-        <p:txBody>
-          <a:bodyPr wrap="square" lIns="0" tIns="0" rIns="0" bIns="0" rtlCol="0" anchor="ctr"/>
-          <a:lstStyle/>
-          <a:p>
-            <a:pPr algn="ctr" indent="0" marL="0">
+        </p:spPr>
+        <p:txBody>
+          <a:bodyPr wrap="square" lIns="0" tIns="0" rIns="0" bIns="0" rtlCol="0" anchor="ctr"/>
+          <a:lstStyle/>
+          <a:p>
+            <a:pPr marL="0" indent="0" algn="ctr">
               <a:lnSpc>
                 <a:spcPct val="100000"/>
               </a:lnSpc>
@@ -6710,9 +6472,9 @@
                 <a:solidFill>
                   <a:srgbClr val="D6D6D6"/>
                 </a:solidFill>
-                <a:latin typeface="Arial" pitchFamily="34" charset="0"/>
-                <a:ea typeface="Arial" pitchFamily="34" charset="-122"/>
-                <a:cs typeface="Arial" pitchFamily="34" charset="-120"/>
+                <a:latin typeface="Arial" panose="020B0604020202090204" pitchFamily="34" charset="0"/>
+                <a:ea typeface="Arial" panose="020B0604020202090204" pitchFamily="34" charset="-122"/>
+                <a:cs typeface="Arial" panose="020B0604020202090204" pitchFamily="34" charset="-120"/>
               </a:rPr>
               <a:t>接入/路由</a:t>
             </a:r>
@@ -6762,13 +6524,12 @@
             <a:avLst/>
           </a:prstGeom>
           <a:noFill/>
-          <a:ln/>
-        </p:spPr>
-        <p:txBody>
-          <a:bodyPr wrap="square" lIns="0" tIns="0" rIns="0" bIns="0" rtlCol="0" anchor="ctr"/>
-          <a:lstStyle/>
-          <a:p>
-            <a:pPr algn="ctr" indent="0" marL="0">
+        </p:spPr>
+        <p:txBody>
+          <a:bodyPr wrap="square" lIns="0" tIns="0" rIns="0" bIns="0" rtlCol="0" anchor="ctr"/>
+          <a:lstStyle/>
+          <a:p>
+            <a:pPr marL="0" indent="0" algn="ctr">
               <a:lnSpc>
                 <a:spcPct val="100000"/>
               </a:lnSpc>
@@ -6779,9 +6540,9 @@
                 <a:solidFill>
                   <a:srgbClr val="D6D6D6"/>
                 </a:solidFill>
-                <a:latin typeface="Arial" pitchFamily="34" charset="0"/>
-                <a:ea typeface="Arial" pitchFamily="34" charset="-122"/>
-                <a:cs typeface="Arial" pitchFamily="34" charset="-120"/>
+                <a:latin typeface="Arial" panose="020B0604020202090204" pitchFamily="34" charset="0"/>
+                <a:ea typeface="Arial" panose="020B0604020202090204" pitchFamily="34" charset="-122"/>
+                <a:cs typeface="Arial" panose="020B0604020202090204" pitchFamily="34" charset="-120"/>
               </a:rPr>
               <a:t>时间轮</a:t>
             </a:r>
@@ -6831,13 +6592,12 @@
             <a:avLst/>
           </a:prstGeom>
           <a:noFill/>
-          <a:ln/>
-        </p:spPr>
-        <p:txBody>
-          <a:bodyPr wrap="square" lIns="0" tIns="0" rIns="0" bIns="0" rtlCol="0" anchor="ctr"/>
-          <a:lstStyle/>
-          <a:p>
-            <a:pPr algn="ctr" indent="0" marL="0">
+        </p:spPr>
+        <p:txBody>
+          <a:bodyPr wrap="square" lIns="0" tIns="0" rIns="0" bIns="0" rtlCol="0" anchor="ctr"/>
+          <a:lstStyle/>
+          <a:p>
+            <a:pPr marL="0" indent="0" algn="ctr">
               <a:lnSpc>
                 <a:spcPct val="100000"/>
               </a:lnSpc>
@@ -6848,9 +6608,9 @@
                 <a:solidFill>
                   <a:srgbClr val="D6D6D6"/>
                 </a:solidFill>
-                <a:latin typeface="Arial" pitchFamily="34" charset="0"/>
-                <a:ea typeface="Arial" pitchFamily="34" charset="-122"/>
-                <a:cs typeface="Arial" pitchFamily="34" charset="-120"/>
+                <a:latin typeface="Arial" panose="020B0604020202090204" pitchFamily="34" charset="0"/>
+                <a:ea typeface="Arial" panose="020B0604020202090204" pitchFamily="34" charset="-122"/>
+                <a:cs typeface="Arial" panose="020B0604020202090204" pitchFamily="34" charset="-120"/>
               </a:rPr>
               <a:t>Master/Slave</a:t>
             </a:r>
@@ -6900,13 +6660,12 @@
             <a:avLst/>
           </a:prstGeom>
           <a:noFill/>
-          <a:ln/>
-        </p:spPr>
-        <p:txBody>
-          <a:bodyPr wrap="square" lIns="0" tIns="0" rIns="0" bIns="0" rtlCol="0" anchor="ctr"/>
-          <a:lstStyle/>
-          <a:p>
-            <a:pPr algn="ctr" indent="0" marL="0">
+        </p:spPr>
+        <p:txBody>
+          <a:bodyPr wrap="square" lIns="0" tIns="0" rIns="0" bIns="0" rtlCol="0" anchor="ctr"/>
+          <a:lstStyle/>
+          <a:p>
+            <a:pPr marL="0" indent="0" algn="ctr">
               <a:lnSpc>
                 <a:spcPct val="100000"/>
               </a:lnSpc>
@@ -6917,9 +6676,9 @@
                 <a:solidFill>
                   <a:srgbClr val="D6D6D6"/>
                 </a:solidFill>
-                <a:latin typeface="Arial" pitchFamily="34" charset="0"/>
-                <a:ea typeface="Arial" pitchFamily="34" charset="-122"/>
-                <a:cs typeface="Arial" pitchFamily="34" charset="-120"/>
+                <a:latin typeface="Arial" panose="020B0604020202090204" pitchFamily="34" charset="0"/>
+                <a:ea typeface="Arial" panose="020B0604020202090204" pitchFamily="34" charset="-122"/>
+                <a:cs typeface="Arial" panose="020B0604020202090204" pitchFamily="34" charset="-120"/>
               </a:rPr>
               <a:t>Sink 投递</a:t>
             </a:r>
@@ -6969,13 +6728,12 @@
             <a:avLst/>
           </a:prstGeom>
           <a:noFill/>
-          <a:ln/>
-        </p:spPr>
-        <p:txBody>
-          <a:bodyPr wrap="square" lIns="0" tIns="0" rIns="0" bIns="0" rtlCol="0" anchor="ctr"/>
-          <a:lstStyle/>
-          <a:p>
-            <a:pPr algn="ctr" indent="0" marL="0">
+        </p:spPr>
+        <p:txBody>
+          <a:bodyPr wrap="square" lIns="0" tIns="0" rIns="0" bIns="0" rtlCol="0" anchor="ctr"/>
+          <a:lstStyle/>
+          <a:p>
+            <a:pPr marL="0" indent="0" algn="ctr">
               <a:lnSpc>
                 <a:spcPct val="100000"/>
               </a:lnSpc>
@@ -6986,9 +6744,9 @@
                 <a:solidFill>
                   <a:srgbClr val="D6D6D6"/>
                 </a:solidFill>
-                <a:latin typeface="Arial" pitchFamily="34" charset="0"/>
-                <a:ea typeface="Arial" pitchFamily="34" charset="-122"/>
-                <a:cs typeface="Arial" pitchFamily="34" charset="-120"/>
+                <a:latin typeface="Arial" panose="020B0604020202090204" pitchFamily="34" charset="0"/>
+                <a:ea typeface="Arial" panose="020B0604020202090204" pitchFamily="34" charset="-122"/>
+                <a:cs typeface="Arial" panose="020B0604020202090204" pitchFamily="34" charset="-120"/>
               </a:rPr>
               <a:t>Controller · 选主/切换/rebalance</a:t>
             </a:r>
@@ -7038,13 +6796,12 @@
             <a:avLst/>
           </a:prstGeom>
           <a:noFill/>
-          <a:ln/>
-        </p:spPr>
-        <p:txBody>
-          <a:bodyPr wrap="square" lIns="0" tIns="0" rIns="0" bIns="0" rtlCol="0" anchor="ctr"/>
-          <a:lstStyle/>
-          <a:p>
-            <a:pPr algn="ctr" indent="0" marL="0">
+        </p:spPr>
+        <p:txBody>
+          <a:bodyPr wrap="square" lIns="0" tIns="0" rIns="0" bIns="0" rtlCol="0" anchor="ctr"/>
+          <a:lstStyle/>
+          <a:p>
+            <a:pPr marL="0" indent="0" algn="ctr">
               <a:lnSpc>
                 <a:spcPct val="100000"/>
               </a:lnSpc>
@@ -7055,9 +6812,9 @@
                 <a:solidFill>
                   <a:srgbClr val="7FB08A"/>
                 </a:solidFill>
-                <a:latin typeface="Arial" pitchFamily="34" charset="0"/>
-                <a:ea typeface="Arial" pitchFamily="34" charset="-122"/>
-                <a:cs typeface="Arial" pitchFamily="34" charset="-120"/>
+                <a:latin typeface="Arial" panose="020B0604020202090204" pitchFamily="34" charset="0"/>
+                <a:ea typeface="Arial" panose="020B0604020202090204" pitchFamily="34" charset="-122"/>
+                <a:cs typeface="Arial" panose="020B0604020202090204" pitchFamily="34" charset="-120"/>
               </a:rPr>
               <a:t>ETCD（协调）</a:t>
             </a:r>
@@ -7107,13 +6864,12 @@
             <a:avLst/>
           </a:prstGeom>
           <a:noFill/>
-          <a:ln/>
-        </p:spPr>
-        <p:txBody>
-          <a:bodyPr wrap="square" lIns="0" tIns="0" rIns="0" bIns="0" rtlCol="0" anchor="ctr"/>
-          <a:lstStyle/>
-          <a:p>
-            <a:pPr algn="ctr" indent="0" marL="0">
+        </p:spPr>
+        <p:txBody>
+          <a:bodyPr wrap="square" lIns="0" tIns="0" rIns="0" bIns="0" rtlCol="0" anchor="ctr"/>
+          <a:lstStyle/>
+          <a:p>
+            <a:pPr marL="0" indent="0" algn="ctr">
               <a:lnSpc>
                 <a:spcPct val="100000"/>
               </a:lnSpc>
@@ -7124,9 +6880,9 @@
                 <a:solidFill>
                   <a:srgbClr val="7FB08A"/>
                 </a:solidFill>
-                <a:latin typeface="Arial" pitchFamily="34" charset="0"/>
-                <a:ea typeface="Arial" pitchFamily="34" charset="-122"/>
-                <a:cs typeface="Arial" pitchFamily="34" charset="-120"/>
+                <a:latin typeface="Arial" panose="020B0604020202090204" pitchFamily="34" charset="0"/>
+                <a:ea typeface="Arial" panose="020B0604020202090204" pitchFamily="34" charset="-122"/>
+                <a:cs typeface="Arial" panose="020B0604020202090204" pitchFamily="34" charset="-120"/>
               </a:rPr>
               <a:t>Redis（真源）</a:t>
             </a:r>
@@ -7176,13 +6932,12 @@
             <a:avLst/>
           </a:prstGeom>
           <a:noFill/>
-          <a:ln/>
-        </p:spPr>
-        <p:txBody>
-          <a:bodyPr wrap="square" lIns="0" tIns="0" rIns="0" bIns="0" rtlCol="0" anchor="ctr"/>
-          <a:lstStyle/>
-          <a:p>
-            <a:pPr algn="ctr" indent="0" marL="0">
+        </p:spPr>
+        <p:txBody>
+          <a:bodyPr wrap="square" lIns="0" tIns="0" rIns="0" bIns="0" rtlCol="0" anchor="ctr"/>
+          <a:lstStyle/>
+          <a:p>
+            <a:pPr marL="0" indent="0" algn="ctr">
               <a:lnSpc>
                 <a:spcPct val="100000"/>
               </a:lnSpc>
@@ -7193,9 +6948,9 @@
                 <a:solidFill>
                   <a:srgbClr val="9A9A9A"/>
                 </a:solidFill>
-                <a:latin typeface="Arial" pitchFamily="34" charset="0"/>
-                <a:ea typeface="Arial" pitchFamily="34" charset="-122"/>
-                <a:cs typeface="Arial" pitchFamily="34" charset="-120"/>
+                <a:latin typeface="Arial" panose="020B0604020202090204" pitchFamily="34" charset="0"/>
+                <a:ea typeface="Arial" panose="020B0604020202090204" pitchFamily="34" charset="-122"/>
+                <a:cs typeface="Arial" panose="020B0604020202090204" pitchFamily="34" charset="-120"/>
               </a:rPr>
               <a:t>下游 HTTP/Kafka</a:t>
             </a:r>
@@ -7241,13 +6996,12 @@
             <a:avLst/>
           </a:prstGeom>
           <a:noFill/>
-          <a:ln/>
-        </p:spPr>
-        <p:txBody>
-          <a:bodyPr wrap="square" lIns="0" tIns="0" rIns="0" bIns="0" rtlCol="0" anchor="ctr"/>
-          <a:lstStyle/>
-          <a:p>
-            <a:pPr algn="ctr" indent="0" marL="0">
+        </p:spPr>
+        <p:txBody>
+          <a:bodyPr wrap="square" lIns="0" tIns="0" rIns="0" bIns="0" rtlCol="0" anchor="ctr"/>
+          <a:lstStyle/>
+          <a:p>
+            <a:pPr marL="0" indent="0" algn="ctr">
               <a:buNone/>
             </a:pPr>
             <a:r>
@@ -7255,9 +7009,9 @@
                 <a:solidFill>
                   <a:srgbClr val="C9A96E"/>
                 </a:solidFill>
-                <a:latin typeface="Arial" pitchFamily="34" charset="0"/>
-                <a:ea typeface="Arial" pitchFamily="34" charset="-122"/>
-                <a:cs typeface="Arial" pitchFamily="34" charset="-120"/>
+                <a:latin typeface="Arial" panose="020B0604020202090204" pitchFamily="34" charset="0"/>
+                <a:ea typeface="Arial" panose="020B0604020202090204" pitchFamily="34" charset="-122"/>
+                <a:cs typeface="Arial" panose="020B0604020202090204" pitchFamily="34" charset="-120"/>
               </a:rPr>
               <a:t>→</a:t>
             </a:r>
@@ -7349,13 +7103,12 @@
             <a:avLst/>
           </a:prstGeom>
           <a:noFill/>
-          <a:ln/>
-        </p:spPr>
-        <p:txBody>
-          <a:bodyPr wrap="square" lIns="0" tIns="0" rIns="0" bIns="0" rtlCol="0" anchor="ctr"/>
-          <a:lstStyle/>
-          <a:p>
-            <a:pPr algn="ctr" indent="0" marL="0">
+        </p:spPr>
+        <p:txBody>
+          <a:bodyPr wrap="square" lIns="0" tIns="0" rIns="0" bIns="0" rtlCol="0" anchor="ctr"/>
+          <a:lstStyle/>
+          <a:p>
+            <a:pPr marL="0" indent="0" algn="ctr">
               <a:buNone/>
             </a:pPr>
             <a:r>
@@ -7363,9 +7116,9 @@
                 <a:solidFill>
                   <a:srgbClr val="9A9A9A"/>
                 </a:solidFill>
-                <a:latin typeface="Arial" pitchFamily="34" charset="0"/>
-                <a:ea typeface="Arial" pitchFamily="34" charset="-122"/>
-                <a:cs typeface="Arial" pitchFamily="34" charset="-120"/>
+                <a:latin typeface="Arial" panose="020B0604020202090204" pitchFamily="34" charset="0"/>
+                <a:ea typeface="Arial" panose="020B0604020202090204" pitchFamily="34" charset="-122"/>
+                <a:cs typeface="Arial" panose="020B0604020202090204" pitchFamily="34" charset="-120"/>
               </a:rPr>
               <a:t>到点投递 →</a:t>
             </a:r>
@@ -7461,13 +7214,12 @@
             <a:avLst/>
           </a:prstGeom>
           <a:noFill/>
-          <a:ln/>
-        </p:spPr>
-        <p:txBody>
-          <a:bodyPr wrap="square" lIns="0" tIns="0" rIns="0" bIns="0" rtlCol="0" anchor="ctr"/>
-          <a:lstStyle/>
-          <a:p>
-            <a:pPr indent="0" marL="0">
+        </p:spPr>
+        <p:txBody>
+          <a:bodyPr wrap="square" lIns="0" tIns="0" rIns="0" bIns="0" rtlCol="0" anchor="ctr"/>
+          <a:lstStyle/>
+          <a:p>
+            <a:pPr marL="0" indent="0">
               <a:lnSpc>
                 <a:spcPct val="106000"/>
               </a:lnSpc>
@@ -7478,26 +7230,20 @@
                 <a:solidFill>
                   <a:srgbClr val="C9A96E"/>
                 </a:solidFill>
-                <a:latin typeface="Arial" pitchFamily="34" charset="0"/>
-                <a:ea typeface="Arial" pitchFamily="34" charset="-122"/>
-                <a:cs typeface="Arial" pitchFamily="34" charset="-120"/>
+                <a:latin typeface="Arial" panose="020B0604020202090204" pitchFamily="34" charset="0"/>
+                <a:ea typeface="Arial" panose="020B0604020202090204" pitchFamily="34" charset="-122"/>
+                <a:cs typeface="Arial" panose="020B0604020202090204" pitchFamily="34" charset="-120"/>
               </a:rPr>
               <a:t>外 HTTP 内 gRPC　·　</a:t>
             </a:r>
-            <a:pPr indent="0" marL="0">
-              <a:lnSpc>
-                <a:spcPct val="106000"/>
-              </a:lnSpc>
-              <a:buNone/>
-            </a:pPr>
             <a:r>
               <a:rPr lang="en-US" sz="1250" dirty="0">
                 <a:solidFill>
                   <a:srgbClr val="F0F0F0"/>
                 </a:solidFill>
-                <a:latin typeface="Arial" pitchFamily="34" charset="0"/>
-                <a:ea typeface="Arial" pitchFamily="34" charset="-122"/>
-                <a:cs typeface="Arial" pitchFamily="34" charset="-120"/>
+                <a:latin typeface="Arial" panose="020B0604020202090204" pitchFamily="34" charset="0"/>
+                <a:ea typeface="Arial" panose="020B0604020202090204" pitchFamily="34" charset="-122"/>
+                <a:cs typeface="Arial" panose="020B0604020202090204" pitchFamily="34" charset="-120"/>
               </a:rPr>
               <a:t>消息先落 Redis 再入内存时间轮；到点触发交 Sink 投递；ETCD 管集群、Redis 管数据，都不重复造轮子。</a:t>
             </a:r>
@@ -7515,12 +7261,13 @@
 
 <file path=ppt/slides/slide4.xml><?xml version="1.0" encoding="utf-8"?>
 <p:sld xmlns:a="http://schemas.openxmlformats.org/drawingml/2006/main" xmlns:r="http://schemas.openxmlformats.org/officeDocument/2006/relationships" xmlns:p="http://schemas.openxmlformats.org/presentationml/2006/main">
-  <p:cSld name="Slide 4">
+  <p:cSld>
     <p:bg>
       <p:bgPr>
         <a:solidFill>
           <a:srgbClr val="1E1E1E"/>
         </a:solidFill>
+        <a:effectLst/>
       </p:bgPr>
     </p:bg>
     <p:spTree>
@@ -7552,13 +7299,12 @@
             <a:avLst/>
           </a:prstGeom>
           <a:noFill/>
-          <a:ln/>
-        </p:spPr>
-        <p:txBody>
-          <a:bodyPr wrap="square" lIns="0" tIns="0" rIns="0" bIns="0" rtlCol="0" anchor="ctr"/>
-          <a:lstStyle/>
-          <a:p>
-            <a:pPr indent="0" marL="0">
+        </p:spPr>
+        <p:txBody>
+          <a:bodyPr wrap="square" lIns="0" tIns="0" rIns="0" bIns="0" rtlCol="0" anchor="ctr"/>
+          <a:lstStyle/>
+          <a:p>
+            <a:pPr marL="0" indent="0">
               <a:buNone/>
             </a:pPr>
             <a:r>
@@ -7566,9 +7312,9 @@
                 <a:solidFill>
                   <a:srgbClr val="6E6E6E"/>
                 </a:solidFill>
-                <a:latin typeface="Arial" pitchFamily="34" charset="0"/>
-                <a:ea typeface="Arial" pitchFamily="34" charset="-122"/>
-                <a:cs typeface="Arial" pitchFamily="34" charset="-120"/>
+                <a:latin typeface="Arial" panose="020B0604020202090204" pitchFamily="34" charset="0"/>
+                <a:ea typeface="Arial" panose="020B0604020202090204" pitchFamily="34" charset="-122"/>
+                <a:cs typeface="Arial" panose="020B0604020202090204" pitchFamily="34" charset="-120"/>
               </a:rPr>
               <a:t>第 54 节 · When 项目总结与后续规划</a:t>
             </a:r>
@@ -7591,13 +7337,12 @@
             <a:avLst/>
           </a:prstGeom>
           <a:noFill/>
-          <a:ln/>
-        </p:spPr>
-        <p:txBody>
-          <a:bodyPr wrap="square" lIns="0" tIns="0" rIns="0" bIns="0" rtlCol="0" anchor="ctr"/>
-          <a:lstStyle/>
-          <a:p>
-            <a:pPr algn="r" indent="0" marL="0">
+        </p:spPr>
+        <p:txBody>
+          <a:bodyPr wrap="square" lIns="0" tIns="0" rIns="0" bIns="0" rtlCol="0" anchor="ctr"/>
+          <a:lstStyle/>
+          <a:p>
+            <a:pPr marL="0" indent="0" algn="r">
               <a:buNone/>
             </a:pPr>
             <a:r>
@@ -7605,9 +7350,9 @@
                 <a:solidFill>
                   <a:srgbClr val="6E6E6E"/>
                 </a:solidFill>
-                <a:latin typeface="Arial" pitchFamily="34" charset="0"/>
-                <a:ea typeface="Arial" pitchFamily="34" charset="-122"/>
-                <a:cs typeface="Arial" pitchFamily="34" charset="-120"/>
+                <a:latin typeface="Arial" panose="020B0604020202090204" pitchFamily="34" charset="0"/>
+                <a:ea typeface="Arial" panose="020B0604020202090204" pitchFamily="34" charset="-122"/>
+                <a:cs typeface="Arial" panose="020B0604020202090204" pitchFamily="34" charset="-120"/>
               </a:rPr>
               <a:t>4 / 14</a:t>
             </a:r>
@@ -7654,23 +7399,22 @@
             <a:avLst/>
           </a:prstGeom>
           <a:noFill/>
-          <a:ln/>
-        </p:spPr>
-        <p:txBody>
-          <a:bodyPr wrap="square" lIns="0" tIns="0" rIns="0" bIns="0" rtlCol="0" anchor="ctr"/>
-          <a:lstStyle/>
-          <a:p>
-            <a:pPr algn="ctr" indent="0" marL="0">
-              <a:buNone/>
-            </a:pPr>
-            <a:r>
-              <a:rPr lang="en-US" sz="1050" b="1" spc="100" kern="0" dirty="0">
+        </p:spPr>
+        <p:txBody>
+          <a:bodyPr wrap="square" lIns="0" tIns="0" rIns="0" bIns="0" rtlCol="0" anchor="ctr"/>
+          <a:lstStyle/>
+          <a:p>
+            <a:pPr marL="0" indent="0" algn="ctr">
+              <a:buNone/>
+            </a:pPr>
+            <a:r>
+              <a:rPr lang="en-US" sz="1050" b="1" kern="0" spc="100" dirty="0">
                 <a:solidFill>
                   <a:srgbClr val="C9A96E"/>
                 </a:solidFill>
-                <a:latin typeface="Arial" pitchFamily="34" charset="0"/>
-                <a:ea typeface="Arial" pitchFamily="34" charset="-122"/>
-                <a:cs typeface="Arial" pitchFamily="34" charset="-120"/>
+                <a:latin typeface="Arial" panose="020B0604020202090204" pitchFamily="34" charset="0"/>
+                <a:ea typeface="Arial" panose="020B0604020202090204" pitchFamily="34" charset="-122"/>
+                <a:cs typeface="Arial" panose="020B0604020202090204" pitchFamily="34" charset="-120"/>
               </a:rPr>
               <a:t>六大技术决策</a:t>
             </a:r>
@@ -7693,13 +7437,12 @@
             <a:avLst/>
           </a:prstGeom>
           <a:noFill/>
-          <a:ln/>
-        </p:spPr>
-        <p:txBody>
-          <a:bodyPr wrap="square" lIns="0" tIns="0" rIns="0" bIns="0" rtlCol="0" anchor="ctr"/>
-          <a:lstStyle/>
-          <a:p>
-            <a:pPr indent="0" marL="0">
+        </p:spPr>
+        <p:txBody>
+          <a:bodyPr wrap="square" lIns="0" tIns="0" rIns="0" bIns="0" rtlCol="0" anchor="ctr"/>
+          <a:lstStyle/>
+          <a:p>
+            <a:pPr marL="0" indent="0">
               <a:buNone/>
             </a:pPr>
             <a:r>
@@ -7707,9 +7450,9 @@
                 <a:solidFill>
                   <a:srgbClr val="F0F0F0"/>
                 </a:solidFill>
-                <a:latin typeface="Arial" pitchFamily="34" charset="0"/>
-                <a:ea typeface="Arial" pitchFamily="34" charset="-122"/>
-                <a:cs typeface="Arial" pitchFamily="34" charset="-120"/>
+                <a:latin typeface="Arial" panose="020B0604020202090204" pitchFamily="34" charset="0"/>
+                <a:ea typeface="Arial" panose="020B0604020202090204" pitchFamily="34" charset="-122"/>
+                <a:cs typeface="Arial" panose="020B0604020202090204" pitchFamily="34" charset="-120"/>
               </a:rPr>
               <a:t>每个决策都是一次工程取舍</a:t>
             </a:r>
@@ -7743,7 +7486,7 @@
             <a:prstDash val="solid"/>
           </a:ln>
           <a:effectLst>
-            <a:outerShdw sx="100000" sy="100000" kx="0" ky="0" algn="bl" rotWithShape="0" blurRad="88900" dist="25400" dir="5400000">
+            <a:outerShdw blurRad="88900" dist="25400" dir="5400000" algn="bl" rotWithShape="0">
               <a:srgbClr val="000000">
                 <a:alpha val="30000"/>
               </a:srgbClr>
@@ -7766,13 +7509,12 @@
             <a:avLst/>
           </a:prstGeom>
           <a:noFill/>
-          <a:ln/>
-        </p:spPr>
-        <p:txBody>
-          <a:bodyPr wrap="square" lIns="0" tIns="0" rIns="0" bIns="0" rtlCol="0" anchor="ctr"/>
-          <a:lstStyle/>
-          <a:p>
-            <a:pPr indent="0" marL="0">
+        </p:spPr>
+        <p:txBody>
+          <a:bodyPr wrap="square" lIns="0" tIns="0" rIns="0" bIns="0" rtlCol="0" anchor="ctr"/>
+          <a:lstStyle/>
+          <a:p>
+            <a:pPr marL="0" indent="0">
               <a:buNone/>
             </a:pPr>
             <a:r>
@@ -7780,9 +7522,9 @@
                 <a:solidFill>
                   <a:srgbClr val="C9A96E"/>
                 </a:solidFill>
-                <a:latin typeface="Arial" pitchFamily="34" charset="0"/>
-                <a:ea typeface="Arial" pitchFamily="34" charset="-122"/>
-                <a:cs typeface="Arial" pitchFamily="34" charset="-120"/>
+                <a:latin typeface="Arial" panose="020B0604020202090204" pitchFamily="34" charset="0"/>
+                <a:ea typeface="Arial" panose="020B0604020202090204" pitchFamily="34" charset="-122"/>
+                <a:cs typeface="Arial" panose="020B0604020202090204" pitchFamily="34" charset="-120"/>
               </a:rPr>
               <a:t>ETCD 做协调</a:t>
             </a:r>
@@ -7805,13 +7547,12 @@
             <a:avLst/>
           </a:prstGeom>
           <a:noFill/>
-          <a:ln/>
         </p:spPr>
         <p:txBody>
           <a:bodyPr wrap="square" lIns="0" tIns="0" rIns="0" bIns="0" rtlCol="0" anchor="t"/>
           <a:lstStyle/>
           <a:p>
-            <a:pPr indent="0" marL="0">
+            <a:pPr marL="0" indent="0">
               <a:buNone/>
             </a:pPr>
             <a:r>
@@ -7819,9 +7560,9 @@
                 <a:solidFill>
                   <a:srgbClr val="D6D6D6"/>
                 </a:solidFill>
-                <a:latin typeface="Arial" pitchFamily="34" charset="0"/>
-                <a:ea typeface="Arial" pitchFamily="34" charset="-122"/>
-                <a:cs typeface="Arial" pitchFamily="34" charset="-120"/>
+                <a:latin typeface="Arial" panose="020B0604020202090204" pitchFamily="34" charset="0"/>
+                <a:ea typeface="Arial" panose="020B0604020202090204" pitchFamily="34" charset="-122"/>
+                <a:cs typeface="Arial" panose="020B0604020202090204" pitchFamily="34" charset="-120"/>
               </a:rPr>
               <a:t>云原生标准、Lease/Watch 天生适配注册与切换</a:t>
             </a:r>
@@ -7855,7 +7596,7 @@
             <a:prstDash val="solid"/>
           </a:ln>
           <a:effectLst>
-            <a:outerShdw sx="100000" sy="100000" kx="0" ky="0" algn="bl" rotWithShape="0" blurRad="88900" dist="25400" dir="5400000">
+            <a:outerShdw blurRad="88900" dist="25400" dir="5400000" algn="bl" rotWithShape="0">
               <a:srgbClr val="000000">
                 <a:alpha val="30000"/>
               </a:srgbClr>
@@ -7878,13 +7619,12 @@
             <a:avLst/>
           </a:prstGeom>
           <a:noFill/>
-          <a:ln/>
-        </p:spPr>
-        <p:txBody>
-          <a:bodyPr wrap="square" lIns="0" tIns="0" rIns="0" bIns="0" rtlCol="0" anchor="ctr"/>
-          <a:lstStyle/>
-          <a:p>
-            <a:pPr indent="0" marL="0">
+        </p:spPr>
+        <p:txBody>
+          <a:bodyPr wrap="square" lIns="0" tIns="0" rIns="0" bIns="0" rtlCol="0" anchor="ctr"/>
+          <a:lstStyle/>
+          <a:p>
+            <a:pPr marL="0" indent="0">
               <a:buNone/>
             </a:pPr>
             <a:r>
@@ -7892,9 +7632,9 @@
                 <a:solidFill>
                   <a:srgbClr val="C9A96E"/>
                 </a:solidFill>
-                <a:latin typeface="Arial" pitchFamily="34" charset="0"/>
-                <a:ea typeface="Arial" pitchFamily="34" charset="-122"/>
-                <a:cs typeface="Arial" pitchFamily="34" charset="-120"/>
+                <a:latin typeface="Arial" panose="020B0604020202090204" pitchFamily="34" charset="0"/>
+                <a:ea typeface="Arial" panose="020B0604020202090204" pitchFamily="34" charset="-122"/>
+                <a:cs typeface="Arial" panose="020B0604020202090204" pitchFamily="34" charset="-120"/>
               </a:rPr>
               <a:t>Redis 做存储</a:t>
             </a:r>
@@ -7917,13 +7657,12 @@
             <a:avLst/>
           </a:prstGeom>
           <a:noFill/>
-          <a:ln/>
         </p:spPr>
         <p:txBody>
           <a:bodyPr wrap="square" lIns="0" tIns="0" rIns="0" bIns="0" rtlCol="0" anchor="t"/>
           <a:lstStyle/>
           <a:p>
-            <a:pPr indent="0" marL="0">
+            <a:pPr marL="0" indent="0">
               <a:buNone/>
             </a:pPr>
             <a:r>
@@ -7931,9 +7670,9 @@
                 <a:solidFill>
                   <a:srgbClr val="D6D6D6"/>
                 </a:solidFill>
-                <a:latin typeface="Arial" pitchFamily="34" charset="0"/>
-                <a:ea typeface="Arial" pitchFamily="34" charset="-122"/>
-                <a:cs typeface="Arial" pitchFamily="34" charset="-120"/>
+                <a:latin typeface="Arial" panose="020B0604020202090204" pitchFamily="34" charset="0"/>
+                <a:ea typeface="Arial" panose="020B0604020202090204" pitchFamily="34" charset="-122"/>
+                <a:cs typeface="Arial" panose="020B0604020202090204" pitchFamily="34" charset="-120"/>
               </a:rPr>
               <a:t>写快、有 TTL、普及度高；拆小 key 避大 Key</a:t>
             </a:r>
@@ -7967,7 +7706,7 @@
             <a:prstDash val="solid"/>
           </a:ln>
           <a:effectLst>
-            <a:outerShdw sx="100000" sy="100000" kx="0" ky="0" algn="bl" rotWithShape="0" blurRad="88900" dist="25400" dir="5400000">
+            <a:outerShdw blurRad="88900" dist="25400" dir="5400000" algn="bl" rotWithShape="0">
               <a:srgbClr val="000000">
                 <a:alpha val="30000"/>
               </a:srgbClr>
@@ -7990,13 +7729,12 @@
             <a:avLst/>
           </a:prstGeom>
           <a:noFill/>
-          <a:ln/>
-        </p:spPr>
-        <p:txBody>
-          <a:bodyPr wrap="square" lIns="0" tIns="0" rIns="0" bIns="0" rtlCol="0" anchor="ctr"/>
-          <a:lstStyle/>
-          <a:p>
-            <a:pPr indent="0" marL="0">
+        </p:spPr>
+        <p:txBody>
+          <a:bodyPr wrap="square" lIns="0" tIns="0" rIns="0" bIns="0" rtlCol="0" anchor="ctr"/>
+          <a:lstStyle/>
+          <a:p>
+            <a:pPr marL="0" indent="0">
               <a:buNone/>
             </a:pPr>
             <a:r>
@@ -8004,9 +7742,9 @@
                 <a:solidFill>
                   <a:srgbClr val="C9A96E"/>
                 </a:solidFill>
-                <a:latin typeface="Arial" pitchFamily="34" charset="0"/>
-                <a:ea typeface="Arial" pitchFamily="34" charset="-122"/>
-                <a:cs typeface="Arial" pitchFamily="34" charset="-120"/>
+                <a:latin typeface="Arial" panose="020B0604020202090204" pitchFamily="34" charset="0"/>
+                <a:ea typeface="Arial" panose="020B0604020202090204" pitchFamily="34" charset="-122"/>
+                <a:cs typeface="Arial" panose="020B0604020202090204" pitchFamily="34" charset="-120"/>
               </a:rPr>
               <a:t>多层时间轮</a:t>
             </a:r>
@@ -8029,13 +7767,12 @@
             <a:avLst/>
           </a:prstGeom>
           <a:noFill/>
-          <a:ln/>
         </p:spPr>
         <p:txBody>
           <a:bodyPr wrap="square" lIns="0" tIns="0" rIns="0" bIns="0" rtlCol="0" anchor="t"/>
           <a:lstStyle/>
           <a:p>
-            <a:pPr indent="0" marL="0">
+            <a:pPr marL="0" indent="0">
               <a:buNone/>
             </a:pPr>
             <a:r>
@@ -8043,9 +7780,9 @@
                 <a:solidFill>
                   <a:srgbClr val="D6D6D6"/>
                 </a:solidFill>
-                <a:latin typeface="Arial" pitchFamily="34" charset="0"/>
-                <a:ea typeface="Arial" pitchFamily="34" charset="-122"/>
-                <a:cs typeface="Arial" pitchFamily="34" charset="-120"/>
+                <a:latin typeface="Arial" panose="020B0604020202090204" pitchFamily="34" charset="0"/>
+                <a:ea typeface="Arial" panose="020B0604020202090204" pitchFamily="34" charset="-122"/>
+                <a:cs typeface="Arial" panose="020B0604020202090204" pitchFamily="34" charset="-120"/>
               </a:rPr>
               <a:t>O(1) 内存调度，覆盖秒到 30 天</a:t>
             </a:r>
@@ -8079,7 +7816,7 @@
             <a:prstDash val="solid"/>
           </a:ln>
           <a:effectLst>
-            <a:outerShdw sx="100000" sy="100000" kx="0" ky="0" algn="bl" rotWithShape="0" blurRad="88900" dist="25400" dir="5400000">
+            <a:outerShdw blurRad="88900" dist="25400" dir="5400000" algn="bl" rotWithShape="0">
               <a:srgbClr val="000000">
                 <a:alpha val="30000"/>
               </a:srgbClr>
@@ -8102,13 +7839,12 @@
             <a:avLst/>
           </a:prstGeom>
           <a:noFill/>
-          <a:ln/>
-        </p:spPr>
-        <p:txBody>
-          <a:bodyPr wrap="square" lIns="0" tIns="0" rIns="0" bIns="0" rtlCol="0" anchor="ctr"/>
-          <a:lstStyle/>
-          <a:p>
-            <a:pPr indent="0" marL="0">
+        </p:spPr>
+        <p:txBody>
+          <a:bodyPr wrap="square" lIns="0" tIns="0" rIns="0" bIns="0" rtlCol="0" anchor="ctr"/>
+          <a:lstStyle/>
+          <a:p>
+            <a:pPr marL="0" indent="0">
               <a:buNone/>
             </a:pPr>
             <a:r>
@@ -8116,9 +7852,9 @@
                 <a:solidFill>
                   <a:srgbClr val="C9A96E"/>
                 </a:solidFill>
-                <a:latin typeface="Arial" pitchFamily="34" charset="0"/>
-                <a:ea typeface="Arial" pitchFamily="34" charset="-122"/>
-                <a:cs typeface="Arial" pitchFamily="34" charset="-120"/>
+                <a:latin typeface="Arial" panose="020B0604020202090204" pitchFamily="34" charset="0"/>
+                <a:ea typeface="Arial" panose="020B0604020202090204" pitchFamily="34" charset="-122"/>
+                <a:cs typeface="Arial" panose="020B0604020202090204" pitchFamily="34" charset="-120"/>
               </a:rPr>
               <a:t>Master/Slave</a:t>
             </a:r>
@@ -8141,13 +7877,12 @@
             <a:avLst/>
           </a:prstGeom>
           <a:noFill/>
-          <a:ln/>
         </p:spPr>
         <p:txBody>
           <a:bodyPr wrap="square" lIns="0" tIns="0" rIns="0" bIns="0" rtlCol="0" anchor="t"/>
           <a:lstStyle/>
           <a:p>
-            <a:pPr indent="0" marL="0">
+            <a:pPr marL="0" indent="0">
               <a:buNone/>
             </a:pPr>
             <a:r>
@@ -8155,9 +7890,9 @@
                 <a:solidFill>
                   <a:srgbClr val="D6D6D6"/>
                 </a:solidFill>
-                <a:latin typeface="Arial" pitchFamily="34" charset="0"/>
-                <a:ea typeface="Arial" pitchFamily="34" charset="-122"/>
-                <a:cs typeface="Arial" pitchFamily="34" charset="-120"/>
+                <a:latin typeface="Arial" panose="020B0604020202090204" pitchFamily="34" charset="0"/>
+                <a:ea typeface="Arial" panose="020B0604020202090204" pitchFamily="34" charset="-122"/>
+                <a:cs typeface="Arial" panose="020B0604020202090204" pitchFamily="34" charset="-120"/>
               </a:rPr>
               <a:t>要的是快速切换，不是强一致；不上 Raft</a:t>
             </a:r>
@@ -8191,7 +7926,7 @@
             <a:prstDash val="solid"/>
           </a:ln>
           <a:effectLst>
-            <a:outerShdw sx="100000" sy="100000" kx="0" ky="0" algn="bl" rotWithShape="0" blurRad="88900" dist="25400" dir="5400000">
+            <a:outerShdw blurRad="88900" dist="25400" dir="5400000" algn="bl" rotWithShape="0">
               <a:srgbClr val="000000">
                 <a:alpha val="30000"/>
               </a:srgbClr>
@@ -8214,13 +7949,12 @@
             <a:avLst/>
           </a:prstGeom>
           <a:noFill/>
-          <a:ln/>
-        </p:spPr>
-        <p:txBody>
-          <a:bodyPr wrap="square" lIns="0" tIns="0" rIns="0" bIns="0" rtlCol="0" anchor="ctr"/>
-          <a:lstStyle/>
-          <a:p>
-            <a:pPr indent="0" marL="0">
+        </p:spPr>
+        <p:txBody>
+          <a:bodyPr wrap="square" lIns="0" tIns="0" rIns="0" bIns="0" rtlCol="0" anchor="ctr"/>
+          <a:lstStyle/>
+          <a:p>
+            <a:pPr marL="0" indent="0">
               <a:buNone/>
             </a:pPr>
             <a:r>
@@ -8228,9 +7962,9 @@
                 <a:solidFill>
                   <a:srgbClr val="C9A96E"/>
                 </a:solidFill>
-                <a:latin typeface="Arial" pitchFamily="34" charset="0"/>
-                <a:ea typeface="Arial" pitchFamily="34" charset="-122"/>
-                <a:cs typeface="Arial" pitchFamily="34" charset="-120"/>
+                <a:latin typeface="Arial" panose="020B0604020202090204" pitchFamily="34" charset="0"/>
+                <a:ea typeface="Arial" panose="020B0604020202090204" pitchFamily="34" charset="-122"/>
+                <a:cs typeface="Arial" panose="020B0604020202090204" pitchFamily="34" charset="-120"/>
               </a:rPr>
               <a:t>外 HTTP 内 gRPC</a:t>
             </a:r>
@@ -8253,13 +7987,12 @@
             <a:avLst/>
           </a:prstGeom>
           <a:noFill/>
-          <a:ln/>
         </p:spPr>
         <p:txBody>
           <a:bodyPr wrap="square" lIns="0" tIns="0" rIns="0" bIns="0" rtlCol="0" anchor="t"/>
           <a:lstStyle/>
           <a:p>
-            <a:pPr indent="0" marL="0">
+            <a:pPr marL="0" indent="0">
               <a:buNone/>
             </a:pPr>
             <a:r>
@@ -8267,9 +8000,9 @@
                 <a:solidFill>
                   <a:srgbClr val="D6D6D6"/>
                 </a:solidFill>
-                <a:latin typeface="Arial" pitchFamily="34" charset="0"/>
-                <a:ea typeface="Arial" pitchFamily="34" charset="-122"/>
-                <a:cs typeface="Arial" pitchFamily="34" charset="-120"/>
+                <a:latin typeface="Arial" panose="020B0604020202090204" pitchFamily="34" charset="0"/>
+                <a:ea typeface="Arial" panose="020B0604020202090204" pitchFamily="34" charset="-122"/>
+                <a:cs typeface="Arial" panose="020B0604020202090204" pitchFamily="34" charset="-120"/>
               </a:rPr>
               <a:t>外接门槛最低，内传高效强类型</a:t>
             </a:r>
@@ -8303,7 +8036,7 @@
             <a:prstDash val="solid"/>
           </a:ln>
           <a:effectLst>
-            <a:outerShdw sx="100000" sy="100000" kx="0" ky="0" algn="bl" rotWithShape="0" blurRad="88900" dist="25400" dir="5400000">
+            <a:outerShdw blurRad="88900" dist="25400" dir="5400000" algn="bl" rotWithShape="0">
               <a:srgbClr val="000000">
                 <a:alpha val="30000"/>
               </a:srgbClr>
@@ -8326,13 +8059,12 @@
             <a:avLst/>
           </a:prstGeom>
           <a:noFill/>
-          <a:ln/>
-        </p:spPr>
-        <p:txBody>
-          <a:bodyPr wrap="square" lIns="0" tIns="0" rIns="0" bIns="0" rtlCol="0" anchor="ctr"/>
-          <a:lstStyle/>
-          <a:p>
-            <a:pPr indent="0" marL="0">
+        </p:spPr>
+        <p:txBody>
+          <a:bodyPr wrap="square" lIns="0" tIns="0" rIns="0" bIns="0" rtlCol="0" anchor="ctr"/>
+          <a:lstStyle/>
+          <a:p>
+            <a:pPr marL="0" indent="0">
               <a:buNone/>
             </a:pPr>
             <a:r>
@@ -8340,9 +8072,9 @@
                 <a:solidFill>
                   <a:srgbClr val="C9A96E"/>
                 </a:solidFill>
-                <a:latin typeface="Arial" pitchFamily="34" charset="0"/>
-                <a:ea typeface="Arial" pitchFamily="34" charset="-122"/>
-                <a:cs typeface="Arial" pitchFamily="34" charset="-120"/>
+                <a:latin typeface="Arial" panose="020B0604020202090204" pitchFamily="34" charset="0"/>
+                <a:ea typeface="Arial" panose="020B0604020202090204" pitchFamily="34" charset="-122"/>
+                <a:cs typeface="Arial" panose="020B0604020202090204" pitchFamily="34" charset="-120"/>
               </a:rPr>
               <a:t>Java</a:t>
             </a:r>
@@ -8365,13 +8097,12 @@
             <a:avLst/>
           </a:prstGeom>
           <a:noFill/>
-          <a:ln/>
         </p:spPr>
         <p:txBody>
           <a:bodyPr wrap="square" lIns="0" tIns="0" rIns="0" bIns="0" rtlCol="0" anchor="t"/>
           <a:lstStyle/>
           <a:p>
-            <a:pPr indent="0" marL="0">
+            <a:pPr marL="0" indent="0">
               <a:buNone/>
             </a:pPr>
             <a:r>
@@ -8379,9 +8110,9 @@
                 <a:solidFill>
                   <a:srgbClr val="D6D6D6"/>
                 </a:solidFill>
-                <a:latin typeface="Arial" pitchFamily="34" charset="0"/>
-                <a:ea typeface="Arial" pitchFamily="34" charset="-122"/>
-                <a:cs typeface="Arial" pitchFamily="34" charset="-120"/>
+                <a:latin typeface="Arial" panose="020B0604020202090204" pitchFamily="34" charset="0"/>
+                <a:ea typeface="Arial" panose="020B0604020202090204" pitchFamily="34" charset="-122"/>
+                <a:cs typeface="Arial" panose="020B0604020202090204" pitchFamily="34" charset="-120"/>
               </a:rPr>
               <a:t>中间件生态成熟、运维与人才现实最优</a:t>
             </a:r>
@@ -8431,13 +8162,12 @@
             <a:avLst/>
           </a:prstGeom>
           <a:noFill/>
-          <a:ln/>
-        </p:spPr>
-        <p:txBody>
-          <a:bodyPr wrap="square" lIns="0" tIns="0" rIns="0" bIns="0" rtlCol="0" anchor="ctr"/>
-          <a:lstStyle/>
-          <a:p>
-            <a:pPr indent="0" marL="0">
+        </p:spPr>
+        <p:txBody>
+          <a:bodyPr wrap="square" lIns="0" tIns="0" rIns="0" bIns="0" rtlCol="0" anchor="ctr"/>
+          <a:lstStyle/>
+          <a:p>
+            <a:pPr marL="0" indent="0">
               <a:lnSpc>
                 <a:spcPct val="106000"/>
               </a:lnSpc>
@@ -8448,26 +8178,20 @@
                 <a:solidFill>
                   <a:srgbClr val="C9A96E"/>
                 </a:solidFill>
-                <a:latin typeface="Arial" pitchFamily="34" charset="0"/>
-                <a:ea typeface="Arial" pitchFamily="34" charset="-122"/>
-                <a:cs typeface="Arial" pitchFamily="34" charset="-120"/>
+                <a:latin typeface="Arial" panose="020B0604020202090204" pitchFamily="34" charset="0"/>
+                <a:ea typeface="Arial" panose="020B0604020202090204" pitchFamily="34" charset="-122"/>
+                <a:cs typeface="Arial" panose="020B0604020202090204" pitchFamily="34" charset="-120"/>
               </a:rPr>
               <a:t>共同底色：</a:t>
             </a:r>
-            <a:pPr indent="0" marL="0">
-              <a:lnSpc>
-                <a:spcPct val="106000"/>
-              </a:lnSpc>
-              <a:buNone/>
-            </a:pPr>
             <a:r>
               <a:rPr lang="en-US" sz="1250" dirty="0">
                 <a:solidFill>
                   <a:srgbClr val="F0F0F0"/>
                 </a:solidFill>
-                <a:latin typeface="Arial" pitchFamily="34" charset="0"/>
-                <a:ea typeface="Arial" pitchFamily="34" charset="-122"/>
-                <a:cs typeface="Arial" pitchFamily="34" charset="-120"/>
+                <a:latin typeface="Arial" panose="020B0604020202090204" pitchFamily="34" charset="0"/>
+                <a:ea typeface="Arial" panose="020B0604020202090204" pitchFamily="34" charset="-122"/>
+                <a:cs typeface="Arial" panose="020B0604020202090204" pitchFamily="34" charset="-120"/>
               </a:rPr>
               <a:t>能借成熟组件就不自造、状态外置到 Redis、按场景选型不追理论完美——简单够用胜过复杂完美。</a:t>
             </a:r>
@@ -8485,12 +8209,13 @@
 
 <file path=ppt/slides/slide5.xml><?xml version="1.0" encoding="utf-8"?>
 <p:sld xmlns:a="http://schemas.openxmlformats.org/drawingml/2006/main" xmlns:r="http://schemas.openxmlformats.org/officeDocument/2006/relationships" xmlns:p="http://schemas.openxmlformats.org/presentationml/2006/main">
-  <p:cSld name="Slide 5">
+  <p:cSld>
     <p:bg>
       <p:bgPr>
         <a:solidFill>
           <a:srgbClr val="1E1E1E"/>
         </a:solidFill>
+        <a:effectLst/>
       </p:bgPr>
     </p:bg>
     <p:spTree>
@@ -8522,13 +8247,12 @@
             <a:avLst/>
           </a:prstGeom>
           <a:noFill/>
-          <a:ln/>
-        </p:spPr>
-        <p:txBody>
-          <a:bodyPr wrap="square" lIns="0" tIns="0" rIns="0" bIns="0" rtlCol="0" anchor="ctr"/>
-          <a:lstStyle/>
-          <a:p>
-            <a:pPr indent="0" marL="0">
+        </p:spPr>
+        <p:txBody>
+          <a:bodyPr wrap="square" lIns="0" tIns="0" rIns="0" bIns="0" rtlCol="0" anchor="ctr"/>
+          <a:lstStyle/>
+          <a:p>
+            <a:pPr marL="0" indent="0">
               <a:buNone/>
             </a:pPr>
             <a:r>
@@ -8536,9 +8260,9 @@
                 <a:solidFill>
                   <a:srgbClr val="6E6E6E"/>
                 </a:solidFill>
-                <a:latin typeface="Arial" pitchFamily="34" charset="0"/>
-                <a:ea typeface="Arial" pitchFamily="34" charset="-122"/>
-                <a:cs typeface="Arial" pitchFamily="34" charset="-120"/>
+                <a:latin typeface="Arial" panose="020B0604020202090204" pitchFamily="34" charset="0"/>
+                <a:ea typeface="Arial" panose="020B0604020202090204" pitchFamily="34" charset="-122"/>
+                <a:cs typeface="Arial" panose="020B0604020202090204" pitchFamily="34" charset="-120"/>
               </a:rPr>
               <a:t>第 54 节 · When 项目总结与后续规划</a:t>
             </a:r>
@@ -8561,13 +8285,12 @@
             <a:avLst/>
           </a:prstGeom>
           <a:noFill/>
-          <a:ln/>
-        </p:spPr>
-        <p:txBody>
-          <a:bodyPr wrap="square" lIns="0" tIns="0" rIns="0" bIns="0" rtlCol="0" anchor="ctr"/>
-          <a:lstStyle/>
-          <a:p>
-            <a:pPr algn="r" indent="0" marL="0">
+        </p:spPr>
+        <p:txBody>
+          <a:bodyPr wrap="square" lIns="0" tIns="0" rIns="0" bIns="0" rtlCol="0" anchor="ctr"/>
+          <a:lstStyle/>
+          <a:p>
+            <a:pPr marL="0" indent="0" algn="r">
               <a:buNone/>
             </a:pPr>
             <a:r>
@@ -8575,9 +8298,9 @@
                 <a:solidFill>
                   <a:srgbClr val="6E6E6E"/>
                 </a:solidFill>
-                <a:latin typeface="Arial" pitchFamily="34" charset="0"/>
-                <a:ea typeface="Arial" pitchFamily="34" charset="-122"/>
-                <a:cs typeface="Arial" pitchFamily="34" charset="-120"/>
+                <a:latin typeface="Arial" panose="020B0604020202090204" pitchFamily="34" charset="0"/>
+                <a:ea typeface="Arial" panose="020B0604020202090204" pitchFamily="34" charset="-122"/>
+                <a:cs typeface="Arial" panose="020B0604020202090204" pitchFamily="34" charset="-120"/>
               </a:rPr>
               <a:t>5 / 14</a:t>
             </a:r>
@@ -8624,23 +8347,22 @@
             <a:avLst/>
           </a:prstGeom>
           <a:noFill/>
-          <a:ln/>
-        </p:spPr>
-        <p:txBody>
-          <a:bodyPr wrap="square" lIns="0" tIns="0" rIns="0" bIns="0" rtlCol="0" anchor="ctr"/>
-          <a:lstStyle/>
-          <a:p>
-            <a:pPr algn="ctr" indent="0" marL="0">
-              <a:buNone/>
-            </a:pPr>
-            <a:r>
-              <a:rPr lang="en-US" sz="1050" b="1" spc="100" kern="0" dirty="0">
+        </p:spPr>
+        <p:txBody>
+          <a:bodyPr wrap="square" lIns="0" tIns="0" rIns="0" bIns="0" rtlCol="0" anchor="ctr"/>
+          <a:lstStyle/>
+          <a:p>
+            <a:pPr marL="0" indent="0" algn="ctr">
+              <a:buNone/>
+            </a:pPr>
+            <a:r>
+              <a:rPr lang="en-US" sz="1050" b="1" kern="0" spc="100" dirty="0">
                 <a:solidFill>
                   <a:srgbClr val="C9A96E"/>
                 </a:solidFill>
-                <a:latin typeface="Arial" pitchFamily="34" charset="0"/>
-                <a:ea typeface="Arial" pitchFamily="34" charset="-122"/>
-                <a:cs typeface="Arial" pitchFamily="34" charset="-120"/>
+                <a:latin typeface="Arial" panose="020B0604020202090204" pitchFamily="34" charset="0"/>
+                <a:ea typeface="Arial" panose="020B0604020202090204" pitchFamily="34" charset="-122"/>
+                <a:cs typeface="Arial" panose="020B0604020202090204" pitchFamily="34" charset="-120"/>
               </a:rPr>
               <a:t>硬指标兑现</a:t>
             </a:r>
@@ -8663,13 +8385,12 @@
             <a:avLst/>
           </a:prstGeom>
           <a:noFill/>
-          <a:ln/>
-        </p:spPr>
-        <p:txBody>
-          <a:bodyPr wrap="square" lIns="0" tIns="0" rIns="0" bIns="0" rtlCol="0" anchor="ctr"/>
-          <a:lstStyle/>
-          <a:p>
-            <a:pPr indent="0" marL="0">
+        </p:spPr>
+        <p:txBody>
+          <a:bodyPr wrap="square" lIns="0" tIns="0" rIns="0" bIns="0" rtlCol="0" anchor="ctr"/>
+          <a:lstStyle/>
+          <a:p>
+            <a:pPr marL="0" indent="0">
               <a:buNone/>
             </a:pPr>
             <a:r>
@@ -8677,9 +8398,9 @@
                 <a:solidFill>
                   <a:srgbClr val="F0F0F0"/>
                 </a:solidFill>
-                <a:latin typeface="Arial" pitchFamily="34" charset="0"/>
-                <a:ea typeface="Arial" pitchFamily="34" charset="-122"/>
-                <a:cs typeface="Arial" pitchFamily="34" charset="-120"/>
+                <a:latin typeface="Arial" panose="020B0604020202090204" pitchFamily="34" charset="0"/>
+                <a:ea typeface="Arial" panose="020B0604020202090204" pitchFamily="34" charset="-122"/>
+                <a:cs typeface="Arial" panose="020B0604020202090204" pitchFamily="34" charset="-120"/>
               </a:rPr>
               <a:t>“生产可用”不是口号，是可验证的断言</a:t>
             </a:r>
@@ -8713,7 +8434,7 @@
             <a:prstDash val="solid"/>
           </a:ln>
           <a:effectLst>
-            <a:outerShdw sx="100000" sy="100000" kx="0" ky="0" algn="bl" rotWithShape="0" blurRad="88900" dist="25400" dir="5400000">
+            <a:outerShdw blurRad="88900" dist="25400" dir="5400000" algn="bl" rotWithShape="0">
               <a:srgbClr val="000000">
                 <a:alpha val="30000"/>
               </a:srgbClr>
@@ -8736,13 +8457,12 @@
             <a:avLst/>
           </a:prstGeom>
           <a:noFill/>
-          <a:ln/>
-        </p:spPr>
-        <p:txBody>
-          <a:bodyPr wrap="square" lIns="0" tIns="0" rIns="0" bIns="0" rtlCol="0" anchor="ctr"/>
-          <a:lstStyle/>
-          <a:p>
-            <a:pPr algn="ctr" indent="0" marL="0">
+        </p:spPr>
+        <p:txBody>
+          <a:bodyPr wrap="square" lIns="0" tIns="0" rIns="0" bIns="0" rtlCol="0" anchor="ctr"/>
+          <a:lstStyle/>
+          <a:p>
+            <a:pPr marL="0" indent="0" algn="ctr">
               <a:buNone/>
             </a:pPr>
             <a:r>
@@ -8750,9 +8470,9 @@
                 <a:solidFill>
                   <a:srgbClr val="7FB08A"/>
                 </a:solidFill>
-                <a:latin typeface="Arial" pitchFamily="34" charset="0"/>
-                <a:ea typeface="Arial" pitchFamily="34" charset="-122"/>
-                <a:cs typeface="Arial" pitchFamily="34" charset="-120"/>
+                <a:latin typeface="Arial" panose="020B0604020202090204" pitchFamily="34" charset="0"/>
+                <a:ea typeface="Arial" panose="020B0604020202090204" pitchFamily="34" charset="-122"/>
+                <a:cs typeface="Arial" panose="020B0604020202090204" pitchFamily="34" charset="-120"/>
               </a:rPr>
               <a:t>不丢消息</a:t>
             </a:r>
@@ -8775,13 +8495,12 @@
             <a:avLst/>
           </a:prstGeom>
           <a:noFill/>
-          <a:ln/>
         </p:spPr>
         <p:txBody>
           <a:bodyPr wrap="square" lIns="0" tIns="0" rIns="0" bIns="0" rtlCol="0" anchor="t"/>
           <a:lstStyle/>
           <a:p>
-            <a:pPr algn="ctr" indent="0" marL="0">
+            <a:pPr marL="0" indent="0" algn="ctr">
               <a:lnSpc>
                 <a:spcPct val="110000"/>
               </a:lnSpc>
@@ -8792,9 +8511,9 @@
                 <a:solidFill>
                   <a:srgbClr val="D6D6D6"/>
                 </a:solidFill>
-                <a:latin typeface="Arial" pitchFamily="34" charset="0"/>
-                <a:ea typeface="Arial" pitchFamily="34" charset="-122"/>
-                <a:cs typeface="Arial" pitchFamily="34" charset="-120"/>
+                <a:latin typeface="Arial" panose="020B0604020202090204" pitchFamily="34" charset="0"/>
+                <a:ea typeface="Arial" panose="020B0604020202090204" pitchFamily="34" charset="-122"/>
+                <a:cs typeface="Arial" panose="020B0604020202090204" pitchFamily="34" charset="-120"/>
               </a:rPr>
               <a:t>杀 Master，已落库消息一条不丢</a:t>
             </a:r>
@@ -8828,7 +8547,7 @@
             <a:prstDash val="solid"/>
           </a:ln>
           <a:effectLst>
-            <a:outerShdw sx="100000" sy="100000" kx="0" ky="0" algn="bl" rotWithShape="0" blurRad="88900" dist="25400" dir="5400000">
+            <a:outerShdw blurRad="88900" dist="25400" dir="5400000" algn="bl" rotWithShape="0">
               <a:srgbClr val="000000">
                 <a:alpha val="30000"/>
               </a:srgbClr>
@@ -8851,13 +8570,12 @@
             <a:avLst/>
           </a:prstGeom>
           <a:noFill/>
-          <a:ln/>
-        </p:spPr>
-        <p:txBody>
-          <a:bodyPr wrap="square" lIns="0" tIns="0" rIns="0" bIns="0" rtlCol="0" anchor="ctr"/>
-          <a:lstStyle/>
-          <a:p>
-            <a:pPr algn="ctr" indent="0" marL="0">
+        </p:spPr>
+        <p:txBody>
+          <a:bodyPr wrap="square" lIns="0" tIns="0" rIns="0" bIns="0" rtlCol="0" anchor="ctr"/>
+          <a:lstStyle/>
+          <a:p>
+            <a:pPr marL="0" indent="0" algn="ctr">
               <a:buNone/>
             </a:pPr>
             <a:r>
@@ -8865,9 +8583,9 @@
                 <a:solidFill>
                   <a:srgbClr val="C9A96E"/>
                 </a:solidFill>
-                <a:latin typeface="Arial" pitchFamily="34" charset="0"/>
-                <a:ea typeface="Arial" pitchFamily="34" charset="-122"/>
-                <a:cs typeface="Arial" pitchFamily="34" charset="-120"/>
+                <a:latin typeface="Arial" panose="020B0604020202090204" pitchFamily="34" charset="0"/>
+                <a:ea typeface="Arial" panose="020B0604020202090204" pitchFamily="34" charset="-122"/>
+                <a:cs typeface="Arial" panose="020B0604020202090204" pitchFamily="34" charset="-120"/>
               </a:rPr>
               <a:t>10 秒切换</a:t>
             </a:r>
@@ -8890,13 +8608,12 @@
             <a:avLst/>
           </a:prstGeom>
           <a:noFill/>
-          <a:ln/>
         </p:spPr>
         <p:txBody>
           <a:bodyPr wrap="square" lIns="0" tIns="0" rIns="0" bIns="0" rtlCol="0" anchor="t"/>
           <a:lstStyle/>
           <a:p>
-            <a:pPr algn="ctr" indent="0" marL="0">
+            <a:pPr marL="0" indent="0" algn="ctr">
               <a:lnSpc>
                 <a:spcPct val="110000"/>
               </a:lnSpc>
@@ -8907,9 +8624,9 @@
                 <a:solidFill>
                   <a:srgbClr val="D6D6D6"/>
                 </a:solidFill>
-                <a:latin typeface="Arial" pitchFamily="34" charset="0"/>
-                <a:ea typeface="Arial" pitchFamily="34" charset="-122"/>
-                <a:cs typeface="Arial" pitchFamily="34" charset="-120"/>
+                <a:latin typeface="Arial" panose="020B0604020202090204" pitchFamily="34" charset="0"/>
+                <a:ea typeface="Arial" panose="020B0604020202090204" pitchFamily="34" charset="-122"/>
+                <a:cs typeface="Arial" panose="020B0604020202090204" pitchFamily="34" charset="-120"/>
               </a:rPr>
               <a:t>故障到新 Master 接管 &lt; 10s</a:t>
             </a:r>
@@ -8943,7 +8660,7 @@
             <a:prstDash val="solid"/>
           </a:ln>
           <a:effectLst>
-            <a:outerShdw sx="100000" sy="100000" kx="0" ky="0" algn="bl" rotWithShape="0" blurRad="88900" dist="25400" dir="5400000">
+            <a:outerShdw blurRad="88900" dist="25400" dir="5400000" algn="bl" rotWithShape="0">
               <a:srgbClr val="000000">
                 <a:alpha val="30000"/>
               </a:srgbClr>
@@ -8966,13 +8683,12 @@
             <a:avLst/>
           </a:prstGeom>
           <a:noFill/>
-          <a:ln/>
-        </p:spPr>
-        <p:txBody>
-          <a:bodyPr wrap="square" lIns="0" tIns="0" rIns="0" bIns="0" rtlCol="0" anchor="ctr"/>
-          <a:lstStyle/>
-          <a:p>
-            <a:pPr algn="ctr" indent="0" marL="0">
+        </p:spPr>
+        <p:txBody>
+          <a:bodyPr wrap="square" lIns="0" tIns="0" rIns="0" bIns="0" rtlCol="0" anchor="ctr"/>
+          <a:lstStyle/>
+          <a:p>
+            <a:pPr marL="0" indent="0" algn="ctr">
               <a:buNone/>
             </a:pPr>
             <a:r>
@@ -8980,9 +8696,9 @@
                 <a:solidFill>
                   <a:srgbClr val="C9A96E"/>
                 </a:solidFill>
-                <a:latin typeface="Arial" pitchFamily="34" charset="0"/>
-                <a:ea typeface="Arial" pitchFamily="34" charset="-122"/>
-                <a:cs typeface="Arial" pitchFamily="34" charset="-120"/>
+                <a:latin typeface="Arial" panose="020B0604020202090204" pitchFamily="34" charset="0"/>
+                <a:ea typeface="Arial" panose="020B0604020202090204" pitchFamily="34" charset="-122"/>
+                <a:cs typeface="Arial" panose="020B0604020202090204" pitchFamily="34" charset="-120"/>
               </a:rPr>
               <a:t>投递精度</a:t>
             </a:r>
@@ -9005,13 +8721,12 @@
             <a:avLst/>
           </a:prstGeom>
           <a:noFill/>
-          <a:ln/>
         </p:spPr>
         <p:txBody>
           <a:bodyPr wrap="square" lIns="0" tIns="0" rIns="0" bIns="0" rtlCol="0" anchor="t"/>
           <a:lstStyle/>
           <a:p>
-            <a:pPr algn="ctr" indent="0" marL="0">
+            <a:pPr marL="0" indent="0" algn="ctr">
               <a:lnSpc>
                 <a:spcPct val="110000"/>
               </a:lnSpc>
@@ -9022,9 +8737,9 @@
                 <a:solidFill>
                   <a:srgbClr val="D6D6D6"/>
                 </a:solidFill>
-                <a:latin typeface="Arial" pitchFamily="34" charset="0"/>
-                <a:ea typeface="Arial" pitchFamily="34" charset="-122"/>
-                <a:cs typeface="Arial" pitchFamily="34" charset="-120"/>
+                <a:latin typeface="Arial" panose="020B0604020202090204" pitchFamily="34" charset="0"/>
+                <a:ea typeface="Arial" panose="020B0604020202090204" pitchFamily="34" charset="-122"/>
+                <a:cs typeface="Arial" panose="020B0604020202090204" pitchFamily="34" charset="-120"/>
               </a:rPr>
               <a:t>到期延迟 P99 在阈值内</a:t>
             </a:r>
@@ -9058,7 +8773,7 @@
             <a:prstDash val="solid"/>
           </a:ln>
           <a:effectLst>
-            <a:outerShdw sx="100000" sy="100000" kx="0" ky="0" algn="bl" rotWithShape="0" blurRad="88900" dist="25400" dir="5400000">
+            <a:outerShdw blurRad="88900" dist="25400" dir="5400000" algn="bl" rotWithShape="0">
               <a:srgbClr val="000000">
                 <a:alpha val="30000"/>
               </a:srgbClr>
@@ -9081,13 +8796,12 @@
             <a:avLst/>
           </a:prstGeom>
           <a:noFill/>
-          <a:ln/>
-        </p:spPr>
-        <p:txBody>
-          <a:bodyPr wrap="square" lIns="0" tIns="0" rIns="0" bIns="0" rtlCol="0" anchor="ctr"/>
-          <a:lstStyle/>
-          <a:p>
-            <a:pPr algn="ctr" indent="0" marL="0">
+        </p:spPr>
+        <p:txBody>
+          <a:bodyPr wrap="square" lIns="0" tIns="0" rIns="0" bIns="0" rtlCol="0" anchor="ctr"/>
+          <a:lstStyle/>
+          <a:p>
+            <a:pPr marL="0" indent="0" algn="ctr">
               <a:buNone/>
             </a:pPr>
             <a:r>
@@ -9095,9 +8809,9 @@
                 <a:solidFill>
                   <a:srgbClr val="7FB08A"/>
                 </a:solidFill>
-                <a:latin typeface="Arial" pitchFamily="34" charset="0"/>
-                <a:ea typeface="Arial" pitchFamily="34" charset="-122"/>
-                <a:cs typeface="Arial" pitchFamily="34" charset="-120"/>
+                <a:latin typeface="Arial" panose="020B0604020202090204" pitchFamily="34" charset="0"/>
+                <a:ea typeface="Arial" panose="020B0604020202090204" pitchFamily="34" charset="-122"/>
+                <a:cs typeface="Arial" panose="020B0604020202090204" pitchFamily="34" charset="-120"/>
               </a:rPr>
               <a:t>规避大 Key</a:t>
             </a:r>
@@ -9120,13 +8834,12 @@
             <a:avLst/>
           </a:prstGeom>
           <a:noFill/>
-          <a:ln/>
         </p:spPr>
         <p:txBody>
           <a:bodyPr wrap="square" lIns="0" tIns="0" rIns="0" bIns="0" rtlCol="0" anchor="t"/>
           <a:lstStyle/>
           <a:p>
-            <a:pPr algn="ctr" indent="0" marL="0">
+            <a:pPr marL="0" indent="0" algn="ctr">
               <a:lnSpc>
                 <a:spcPct val="110000"/>
               </a:lnSpc>
@@ -9137,9 +8850,9 @@
                 <a:solidFill>
                   <a:srgbClr val="D6D6D6"/>
                 </a:solidFill>
-                <a:latin typeface="Arial" pitchFamily="34" charset="0"/>
-                <a:ea typeface="Arial" pitchFamily="34" charset="-122"/>
-                <a:cs typeface="Arial" pitchFamily="34" charset="-120"/>
+                <a:latin typeface="Arial" panose="020B0604020202090204" pitchFamily="34" charset="0"/>
+                <a:ea typeface="Arial" panose="020B0604020202090204" pitchFamily="34" charset="-122"/>
+                <a:cs typeface="Arial" panose="020B0604020202090204" pitchFamily="34" charset="-120"/>
               </a:rPr>
               <a:t>每条消息独立小 key，不用 ZSet</a:t>
             </a:r>
@@ -9173,7 +8886,7 @@
             <a:prstDash val="solid"/>
           </a:ln>
           <a:effectLst>
-            <a:outerShdw sx="100000" sy="100000" kx="0" ky="0" algn="bl" rotWithShape="0" blurRad="88900" dist="25400" dir="5400000">
+            <a:outerShdw blurRad="88900" dist="25400" dir="5400000" algn="bl" rotWithShape="0">
               <a:srgbClr val="000000">
                 <a:alpha val="30000"/>
               </a:srgbClr>
@@ -9196,13 +8909,12 @@
             <a:avLst/>
           </a:prstGeom>
           <a:noFill/>
-          <a:ln/>
-        </p:spPr>
-        <p:txBody>
-          <a:bodyPr wrap="square" lIns="0" tIns="0" rIns="0" bIns="0" rtlCol="0" anchor="ctr"/>
-          <a:lstStyle/>
-          <a:p>
-            <a:pPr algn="ctr" indent="0" marL="0">
+        </p:spPr>
+        <p:txBody>
+          <a:bodyPr wrap="square" lIns="0" tIns="0" rIns="0" bIns="0" rtlCol="0" anchor="ctr"/>
+          <a:lstStyle/>
+          <a:p>
+            <a:pPr marL="0" indent="0" algn="ctr">
               <a:buNone/>
             </a:pPr>
             <a:r>
@@ -9210,9 +8922,9 @@
                 <a:solidFill>
                   <a:srgbClr val="7FA8C9"/>
                 </a:solidFill>
-                <a:latin typeface="Arial" pitchFamily="34" charset="0"/>
-                <a:ea typeface="Arial" pitchFamily="34" charset="-122"/>
-                <a:cs typeface="Arial" pitchFamily="34" charset="-120"/>
+                <a:latin typeface="Arial" panose="020B0604020202090204" pitchFamily="34" charset="0"/>
+                <a:ea typeface="Arial" panose="020B0604020202090204" pitchFamily="34" charset="-122"/>
+                <a:cs typeface="Arial" panose="020B0604020202090204" pitchFamily="34" charset="-120"/>
               </a:rPr>
               <a:t>至少一次</a:t>
             </a:r>
@@ -9235,13 +8947,12 @@
             <a:avLst/>
           </a:prstGeom>
           <a:noFill/>
-          <a:ln/>
         </p:spPr>
         <p:txBody>
           <a:bodyPr wrap="square" lIns="0" tIns="0" rIns="0" bIns="0" rtlCol="0" anchor="t"/>
           <a:lstStyle/>
           <a:p>
-            <a:pPr algn="ctr" indent="0" marL="0">
+            <a:pPr marL="0" indent="0" algn="ctr">
               <a:lnSpc>
                 <a:spcPct val="110000"/>
               </a:lnSpc>
@@ -9252,9 +8963,9 @@
                 <a:solidFill>
                   <a:srgbClr val="D6D6D6"/>
                 </a:solidFill>
-                <a:latin typeface="Arial" pitchFamily="34" charset="0"/>
-                <a:ea typeface="Arial" pitchFamily="34" charset="-122"/>
-                <a:cs typeface="Arial" pitchFamily="34" charset="-120"/>
+                <a:latin typeface="Arial" panose="020B0604020202090204" pitchFamily="34" charset="0"/>
+                <a:ea typeface="Arial" panose="020B0604020202090204" pitchFamily="34" charset="-122"/>
+                <a:cs typeface="Arial" panose="020B0604020202090204" pitchFamily="34" charset="-120"/>
               </a:rPr>
               <a:t>不丢、可能重复 + 下游幂等</a:t>
             </a:r>
@@ -9288,7 +8999,7 @@
             <a:prstDash val="solid"/>
           </a:ln>
           <a:effectLst>
-            <a:outerShdw sx="100000" sy="100000" kx="0" ky="0" algn="bl" rotWithShape="0" blurRad="88900" dist="25400" dir="5400000">
+            <a:outerShdw blurRad="88900" dist="25400" dir="5400000" algn="bl" rotWithShape="0">
               <a:srgbClr val="000000">
                 <a:alpha val="30000"/>
               </a:srgbClr>
@@ -9311,13 +9022,12 @@
             <a:avLst/>
           </a:prstGeom>
           <a:noFill/>
-          <a:ln/>
-        </p:spPr>
-        <p:txBody>
-          <a:bodyPr wrap="square" lIns="0" tIns="0" rIns="0" bIns="0" rtlCol="0" anchor="ctr"/>
-          <a:lstStyle/>
-          <a:p>
-            <a:pPr algn="ctr" indent="0" marL="0">
+        </p:spPr>
+        <p:txBody>
+          <a:bodyPr wrap="square" lIns="0" tIns="0" rIns="0" bIns="0" rtlCol="0" anchor="ctr"/>
+          <a:lstStyle/>
+          <a:p>
+            <a:pPr marL="0" indent="0" algn="ctr">
               <a:buNone/>
             </a:pPr>
             <a:r>
@@ -9325,9 +9035,9 @@
                 <a:solidFill>
                   <a:srgbClr val="7FA8C9"/>
                 </a:solidFill>
-                <a:latin typeface="Arial" pitchFamily="34" charset="0"/>
-                <a:ea typeface="Arial" pitchFamily="34" charset="-122"/>
-                <a:cs typeface="Arial" pitchFamily="34" charset="-120"/>
+                <a:latin typeface="Arial" panose="020B0604020202090204" pitchFamily="34" charset="0"/>
+                <a:ea typeface="Arial" panose="020B0604020202090204" pitchFamily="34" charset="-122"/>
+                <a:cs typeface="Arial" panose="020B0604020202090204" pitchFamily="34" charset="-120"/>
               </a:rPr>
               <a:t>一键部署</a:t>
             </a:r>
@@ -9350,13 +9060,12 @@
             <a:avLst/>
           </a:prstGeom>
           <a:noFill/>
-          <a:ln/>
         </p:spPr>
         <p:txBody>
           <a:bodyPr wrap="square" lIns="0" tIns="0" rIns="0" bIns="0" rtlCol="0" anchor="t"/>
           <a:lstStyle/>
           <a:p>
-            <a:pPr algn="ctr" indent="0" marL="0">
+            <a:pPr marL="0" indent="0" algn="ctr">
               <a:lnSpc>
                 <a:spcPct val="110000"/>
               </a:lnSpc>
@@ -9367,9 +9076,9 @@
                 <a:solidFill>
                   <a:srgbClr val="D6D6D6"/>
                 </a:solidFill>
-                <a:latin typeface="Arial" pitchFamily="34" charset="0"/>
-                <a:ea typeface="Arial" pitchFamily="34" charset="-122"/>
-                <a:cs typeface="Arial" pitchFamily="34" charset="-120"/>
+                <a:latin typeface="Arial" panose="020B0604020202090204" pitchFamily="34" charset="0"/>
+                <a:ea typeface="Arial" panose="020B0604020202090204" pitchFamily="34" charset="-122"/>
+                <a:cs typeface="Arial" panose="020B0604020202090204" pitchFamily="34" charset="-120"/>
               </a:rPr>
               <a:t>compose/K8s 起 3 节点集群</a:t>
             </a:r>
@@ -9419,13 +9128,12 @@
             <a:avLst/>
           </a:prstGeom>
           <a:noFill/>
-          <a:ln/>
-        </p:spPr>
-        <p:txBody>
-          <a:bodyPr wrap="square" lIns="0" tIns="0" rIns="0" bIns="0" rtlCol="0" anchor="ctr"/>
-          <a:lstStyle/>
-          <a:p>
-            <a:pPr indent="0" marL="0">
+        </p:spPr>
+        <p:txBody>
+          <a:bodyPr wrap="square" lIns="0" tIns="0" rIns="0" bIns="0" rtlCol="0" anchor="ctr"/>
+          <a:lstStyle/>
+          <a:p>
+            <a:pPr marL="0" indent="0">
               <a:lnSpc>
                 <a:spcPct val="106000"/>
               </a:lnSpc>
@@ -9436,26 +9144,20 @@
                 <a:solidFill>
                   <a:srgbClr val="C9A96E"/>
                 </a:solidFill>
-                <a:latin typeface="Arial" pitchFamily="34" charset="0"/>
-                <a:ea typeface="Arial" pitchFamily="34" charset="-122"/>
-                <a:cs typeface="Arial" pitchFamily="34" charset="-120"/>
+                <a:latin typeface="Arial" panose="020B0604020202090204" pitchFamily="34" charset="0"/>
+                <a:ea typeface="Arial" panose="020B0604020202090204" pitchFamily="34" charset="-122"/>
+                <a:cs typeface="Arial" panose="020B0604020202090204" pitchFamily="34" charset="-120"/>
               </a:rPr>
               <a:t>每条都有对应的自动化 / 混沌测试当判官——</a:t>
             </a:r>
-            <a:pPr indent="0" marL="0">
-              <a:lnSpc>
-                <a:spcPct val="106000"/>
-              </a:lnSpc>
-              <a:buNone/>
-            </a:pPr>
             <a:r>
               <a:rPr lang="en-US" sz="1250" dirty="0">
                 <a:solidFill>
                   <a:srgbClr val="F0F0F0"/>
                 </a:solidFill>
-                <a:latin typeface="Arial" pitchFamily="34" charset="0"/>
-                <a:ea typeface="Arial" pitchFamily="34" charset="-122"/>
-                <a:cs typeface="Arial" pitchFamily="34" charset="-120"/>
+                <a:latin typeface="Arial" panose="020B0604020202090204" pitchFamily="34" charset="0"/>
+                <a:ea typeface="Arial" panose="020B0604020202090204" pitchFamily="34" charset="-122"/>
+                <a:cs typeface="Arial" panose="020B0604020202090204" pitchFamily="34" charset="-120"/>
               </a:rPr>
               <a:t>这正是第 38 节讲的：验收不写“覆盖率≥X%”，写“注入故障后 N 条零丢失”这种直指失败模式的断言。</a:t>
             </a:r>
@@ -9473,12 +9175,13 @@
 
 <file path=ppt/slides/slide6.xml><?xml version="1.0" encoding="utf-8"?>
 <p:sld xmlns:a="http://schemas.openxmlformats.org/drawingml/2006/main" xmlns:r="http://schemas.openxmlformats.org/officeDocument/2006/relationships" xmlns:p="http://schemas.openxmlformats.org/presentationml/2006/main">
-  <p:cSld name="Slide 6">
+  <p:cSld>
     <p:bg>
       <p:bgPr>
         <a:solidFill>
           <a:srgbClr val="1E1E1E"/>
         </a:solidFill>
+        <a:effectLst/>
       </p:bgPr>
     </p:bg>
     <p:spTree>
@@ -9510,13 +9213,12 @@
             <a:avLst/>
           </a:prstGeom>
           <a:noFill/>
-          <a:ln/>
-        </p:spPr>
-        <p:txBody>
-          <a:bodyPr wrap="square" lIns="0" tIns="0" rIns="0" bIns="0" rtlCol="0" anchor="ctr"/>
-          <a:lstStyle/>
-          <a:p>
-            <a:pPr indent="0" marL="0">
+        </p:spPr>
+        <p:txBody>
+          <a:bodyPr wrap="square" lIns="0" tIns="0" rIns="0" bIns="0" rtlCol="0" anchor="ctr"/>
+          <a:lstStyle/>
+          <a:p>
+            <a:pPr marL="0" indent="0">
               <a:buNone/>
             </a:pPr>
             <a:r>
@@ -9524,9 +9226,9 @@
                 <a:solidFill>
                   <a:srgbClr val="6E6E6E"/>
                 </a:solidFill>
-                <a:latin typeface="Arial" pitchFamily="34" charset="0"/>
-                <a:ea typeface="Arial" pitchFamily="34" charset="-122"/>
-                <a:cs typeface="Arial" pitchFamily="34" charset="-120"/>
+                <a:latin typeface="Arial" panose="020B0604020202090204" pitchFamily="34" charset="0"/>
+                <a:ea typeface="Arial" panose="020B0604020202090204" pitchFamily="34" charset="-122"/>
+                <a:cs typeface="Arial" panose="020B0604020202090204" pitchFamily="34" charset="-120"/>
               </a:rPr>
               <a:t>第 54 节 · When 项目总结与后续规划</a:t>
             </a:r>
@@ -9549,13 +9251,12 @@
             <a:avLst/>
           </a:prstGeom>
           <a:noFill/>
-          <a:ln/>
-        </p:spPr>
-        <p:txBody>
-          <a:bodyPr wrap="square" lIns="0" tIns="0" rIns="0" bIns="0" rtlCol="0" anchor="ctr"/>
-          <a:lstStyle/>
-          <a:p>
-            <a:pPr algn="r" indent="0" marL="0">
+        </p:spPr>
+        <p:txBody>
+          <a:bodyPr wrap="square" lIns="0" tIns="0" rIns="0" bIns="0" rtlCol="0" anchor="ctr"/>
+          <a:lstStyle/>
+          <a:p>
+            <a:pPr marL="0" indent="0" algn="r">
               <a:buNone/>
             </a:pPr>
             <a:r>
@@ -9563,9 +9264,9 @@
                 <a:solidFill>
                   <a:srgbClr val="6E6E6E"/>
                 </a:solidFill>
-                <a:latin typeface="Arial" pitchFamily="34" charset="0"/>
-                <a:ea typeface="Arial" pitchFamily="34" charset="-122"/>
-                <a:cs typeface="Arial" pitchFamily="34" charset="-120"/>
+                <a:latin typeface="Arial" panose="020B0604020202090204" pitchFamily="34" charset="0"/>
+                <a:ea typeface="Arial" panose="020B0604020202090204" pitchFamily="34" charset="-122"/>
+                <a:cs typeface="Arial" panose="020B0604020202090204" pitchFamily="34" charset="-120"/>
               </a:rPr>
               <a:t>6 / 14</a:t>
             </a:r>
@@ -9612,23 +9313,22 @@
             <a:avLst/>
           </a:prstGeom>
           <a:noFill/>
-          <a:ln/>
-        </p:spPr>
-        <p:txBody>
-          <a:bodyPr wrap="square" lIns="0" tIns="0" rIns="0" bIns="0" rtlCol="0" anchor="ctr"/>
-          <a:lstStyle/>
-          <a:p>
-            <a:pPr algn="ctr" indent="0" marL="0">
-              <a:buNone/>
-            </a:pPr>
-            <a:r>
-              <a:rPr lang="en-US" sz="1050" b="1" spc="100" kern="0" dirty="0">
+        </p:spPr>
+        <p:txBody>
+          <a:bodyPr wrap="square" lIns="0" tIns="0" rIns="0" bIns="0" rtlCol="0" anchor="ctr"/>
+          <a:lstStyle/>
+          <a:p>
+            <a:pPr marL="0" indent="0" algn="ctr">
+              <a:buNone/>
+            </a:pPr>
+            <a:r>
+              <a:rPr lang="en-US" sz="1050" b="1" kern="0" spc="100" dirty="0">
                 <a:solidFill>
                   <a:srgbClr val="C9A96E"/>
                 </a:solidFill>
-                <a:latin typeface="Arial" pitchFamily="34" charset="0"/>
-                <a:ea typeface="Arial" pitchFamily="34" charset="-122"/>
-                <a:cs typeface="Arial" pitchFamily="34" charset="-120"/>
+                <a:latin typeface="Arial" panose="020B0604020202090204" pitchFamily="34" charset="0"/>
+                <a:ea typeface="Arial" panose="020B0604020202090204" pitchFamily="34" charset="-122"/>
+                <a:cs typeface="Arial" panose="020B0604020202090204" pitchFamily="34" charset="-120"/>
               </a:rPr>
               <a:t>但这门课真正的主角</a:t>
             </a:r>
@@ -9651,13 +9351,12 @@
             <a:avLst/>
           </a:prstGeom>
           <a:noFill/>
-          <a:ln/>
-        </p:spPr>
-        <p:txBody>
-          <a:bodyPr wrap="square" lIns="0" tIns="0" rIns="0" bIns="0" rtlCol="0" anchor="ctr"/>
-          <a:lstStyle/>
-          <a:p>
-            <a:pPr indent="0" marL="0">
+        </p:spPr>
+        <p:txBody>
+          <a:bodyPr wrap="square" lIns="0" tIns="0" rIns="0" bIns="0" rtlCol="0" anchor="ctr"/>
+          <a:lstStyle/>
+          <a:p>
+            <a:pPr marL="0" indent="0">
               <a:buNone/>
             </a:pPr>
             <a:r>
@@ -9665,9 +9364,9 @@
                 <a:solidFill>
                   <a:srgbClr val="F0F0F0"/>
                 </a:solidFill>
-                <a:latin typeface="Arial" pitchFamily="34" charset="0"/>
-                <a:ea typeface="Arial" pitchFamily="34" charset="-122"/>
-                <a:cs typeface="Arial" pitchFamily="34" charset="-120"/>
+                <a:latin typeface="Arial" panose="020B0604020202090204" pitchFamily="34" charset="0"/>
+                <a:ea typeface="Arial" panose="020B0604020202090204" pitchFamily="34" charset="-122"/>
+                <a:cs typeface="Arial" panose="020B0604020202090204" pitchFamily="34" charset="-120"/>
               </a:rPr>
               <a:t>不是 When，是把 When 做出来的方式</a:t>
             </a:r>
@@ -9690,13 +9389,12 @@
             <a:avLst/>
           </a:prstGeom>
           <a:noFill/>
-          <a:ln/>
-        </p:spPr>
-        <p:txBody>
-          <a:bodyPr wrap="square" lIns="0" tIns="0" rIns="0" bIns="0" rtlCol="0" anchor="ctr"/>
-          <a:lstStyle/>
-          <a:p>
-            <a:pPr algn="ctr" indent="0" marL="0">
+        </p:spPr>
+        <p:txBody>
+          <a:bodyPr wrap="square" lIns="0" tIns="0" rIns="0" bIns="0" rtlCol="0" anchor="ctr"/>
+          <a:lstStyle/>
+          <a:p>
+            <a:pPr marL="0" indent="0" algn="ctr">
               <a:buNone/>
             </a:pPr>
             <a:r>
@@ -9704,9 +9402,9 @@
                 <a:solidFill>
                   <a:srgbClr val="C9A96E"/>
                 </a:solidFill>
-                <a:latin typeface="Arial" pitchFamily="34" charset="0"/>
-                <a:ea typeface="Arial" pitchFamily="34" charset="-122"/>
-                <a:cs typeface="Arial" pitchFamily="34" charset="-120"/>
+                <a:latin typeface="Arial" panose="020B0604020202090204" pitchFamily="34" charset="0"/>
+                <a:ea typeface="Arial" panose="020B0604020202090204" pitchFamily="34" charset="-122"/>
+                <a:cs typeface="Arial" panose="020B0604020202090204" pitchFamily="34" charset="-120"/>
               </a:rPr>
               <a:t>Loop Engineering</a:t>
             </a:r>
@@ -9731,7 +9429,6 @@
           <a:solidFill>
             <a:srgbClr val="C9A96E"/>
           </a:solidFill>
-          <a:ln/>
         </p:spPr>
       </p:sp>
       <p:sp>
@@ -9749,13 +9446,12 @@
             <a:avLst/>
           </a:prstGeom>
           <a:noFill/>
-          <a:ln/>
         </p:spPr>
         <p:txBody>
           <a:bodyPr wrap="square" lIns="0" tIns="0" rIns="0" bIns="0" rtlCol="0" anchor="t"/>
           <a:lstStyle/>
           <a:p>
-            <a:pPr indent="0" marL="0">
+            <a:pPr marL="0" indent="0">
               <a:lnSpc>
                 <a:spcPct val="108000"/>
               </a:lnSpc>
@@ -9766,9 +9462,9 @@
                 <a:solidFill>
                   <a:srgbClr val="D6D6D6"/>
                 </a:solidFill>
-                <a:latin typeface="Arial" pitchFamily="34" charset="0"/>
-                <a:ea typeface="Arial" pitchFamily="34" charset="-122"/>
-                <a:cs typeface="Arial" pitchFamily="34" charset="-120"/>
+                <a:latin typeface="Arial" panose="020B0604020202090204" pitchFamily="34" charset="0"/>
+                <a:ea typeface="Arial" panose="020B0604020202090204" pitchFamily="34" charset="-122"/>
+                <a:cs typeface="Arial" panose="020B0604020202090204" pitchFamily="34" charset="-120"/>
               </a:rPr>
               <a:t>When 只是样本——要证明的是：企业级中间件，能用 AI 编程做出来，核心代码 90%+ 由 AI 写。</a:t>
             </a:r>
@@ -9793,7 +9489,6 @@
           <a:solidFill>
             <a:srgbClr val="C9A96E"/>
           </a:solidFill>
-          <a:ln/>
         </p:spPr>
       </p:sp>
       <p:sp>
@@ -9811,13 +9506,12 @@
             <a:avLst/>
           </a:prstGeom>
           <a:noFill/>
-          <a:ln/>
         </p:spPr>
         <p:txBody>
           <a:bodyPr wrap="square" lIns="0" tIns="0" rIns="0" bIns="0" rtlCol="0" anchor="t"/>
           <a:lstStyle/>
           <a:p>
-            <a:pPr indent="0" marL="0">
+            <a:pPr marL="0" indent="0">
               <a:lnSpc>
                 <a:spcPct val="108000"/>
               </a:lnSpc>
@@ -9828,9 +9522,9 @@
                 <a:solidFill>
                   <a:srgbClr val="D6D6D6"/>
                 </a:solidFill>
-                <a:latin typeface="Arial" pitchFamily="34" charset="0"/>
-                <a:ea typeface="Arial" pitchFamily="34" charset="-122"/>
-                <a:cs typeface="Arial" pitchFamily="34" charset="-120"/>
+                <a:latin typeface="Arial" panose="020B0604020202090204" pitchFamily="34" charset="0"/>
+                <a:ea typeface="Arial" panose="020B0604020202090204" pitchFamily="34" charset="-122"/>
+                <a:cs typeface="Arial" panose="020B0604020202090204" pitchFamily="34" charset="-120"/>
               </a:rPr>
               <a:t>做法不是坐着一条条下指令，而是设计一个能让 AI 自主循环工作的环境和规则，让它自己转。</a:t>
             </a:r>
@@ -9855,7 +9549,6 @@
           <a:solidFill>
             <a:srgbClr val="C9A96E"/>
           </a:solidFill>
-          <a:ln/>
         </p:spPr>
       </p:sp>
       <p:sp>
@@ -9873,13 +9566,12 @@
             <a:avLst/>
           </a:prstGeom>
           <a:noFill/>
-          <a:ln/>
         </p:spPr>
         <p:txBody>
           <a:bodyPr wrap="square" lIns="0" tIns="0" rIns="0" bIns="0" rtlCol="0" anchor="t"/>
           <a:lstStyle/>
           <a:p>
-            <a:pPr indent="0" marL="0">
+            <a:pPr marL="0" indent="0">
               <a:lnSpc>
                 <a:spcPct val="108000"/>
               </a:lnSpc>
@@ -9890,9 +9582,9 @@
                 <a:solidFill>
                   <a:srgbClr val="D6D6D6"/>
                 </a:solidFill>
-                <a:latin typeface="Arial" pitchFamily="34" charset="0"/>
-                <a:ea typeface="Arial" pitchFamily="34" charset="-122"/>
-                <a:cs typeface="Arial" pitchFamily="34" charset="-120"/>
+                <a:latin typeface="Arial" panose="020B0604020202090204" pitchFamily="34" charset="0"/>
+                <a:ea typeface="Arial" panose="020B0604020202090204" pitchFamily="34" charset="-122"/>
+                <a:cs typeface="Arial" panose="020B0604020202090204" pitchFamily="34" charset="-120"/>
               </a:rPr>
               <a:t>人的精力，从“写提示词”转移到“设计循环、设计判官、在关键点把关”。</a:t>
             </a:r>
@@ -9942,13 +9634,12 @@
             <a:avLst/>
           </a:prstGeom>
           <a:noFill/>
-          <a:ln/>
-        </p:spPr>
-        <p:txBody>
-          <a:bodyPr wrap="square" lIns="0" tIns="0" rIns="0" bIns="0" rtlCol="0" anchor="ctr"/>
-          <a:lstStyle/>
-          <a:p>
-            <a:pPr indent="0" marL="0">
+        </p:spPr>
+        <p:txBody>
+          <a:bodyPr wrap="square" lIns="0" tIns="0" rIns="0" bIns="0" rtlCol="0" anchor="ctr"/>
+          <a:lstStyle/>
+          <a:p>
+            <a:pPr marL="0" indent="0">
               <a:lnSpc>
                 <a:spcPct val="106000"/>
               </a:lnSpc>
@@ -9959,26 +9650,20 @@
                 <a:solidFill>
                   <a:srgbClr val="C9A96E"/>
                 </a:solidFill>
-                <a:latin typeface="Arial" pitchFamily="34" charset="0"/>
-                <a:ea typeface="Arial" pitchFamily="34" charset="-122"/>
-                <a:cs typeface="Arial" pitchFamily="34" charset="-120"/>
+                <a:latin typeface="Arial" panose="020B0604020202090204" pitchFamily="34" charset="0"/>
+                <a:ea typeface="Arial" panose="020B0604020202090204" pitchFamily="34" charset="-122"/>
+                <a:cs typeface="Arial" panose="020B0604020202090204" pitchFamily="34" charset="-120"/>
               </a:rPr>
               <a:t>一句话：</a:t>
             </a:r>
-            <a:pPr indent="0" marL="0">
-              <a:lnSpc>
-                <a:spcPct val="106000"/>
-              </a:lnSpc>
-              <a:buNone/>
-            </a:pPr>
             <a:r>
               <a:rPr lang="en-US" sz="1250" dirty="0">
                 <a:solidFill>
                   <a:srgbClr val="F0F0F0"/>
                 </a:solidFill>
-                <a:latin typeface="Arial" pitchFamily="34" charset="0"/>
-                <a:ea typeface="Arial" pitchFamily="34" charset="-122"/>
-                <a:cs typeface="Arial" pitchFamily="34" charset="-120"/>
+                <a:latin typeface="Arial" panose="020B0604020202090204" pitchFamily="34" charset="0"/>
+                <a:ea typeface="Arial" panose="020B0604020202090204" pitchFamily="34" charset="-122"/>
+                <a:cs typeface="Arial" panose="020B0604020202090204" pitchFamily="34" charset="-120"/>
               </a:rPr>
               <a:t>执行交给循环，判断留给人。</a:t>
             </a:r>
@@ -9996,12 +9681,13 @@
 
 <file path=ppt/slides/slide7.xml><?xml version="1.0" encoding="utf-8"?>
 <p:sld xmlns:a="http://schemas.openxmlformats.org/drawingml/2006/main" xmlns:r="http://schemas.openxmlformats.org/officeDocument/2006/relationships" xmlns:p="http://schemas.openxmlformats.org/presentationml/2006/main">
-  <p:cSld name="Slide 7">
+  <p:cSld>
     <p:bg>
       <p:bgPr>
         <a:solidFill>
           <a:srgbClr val="1E1E1E"/>
         </a:solidFill>
+        <a:effectLst/>
       </p:bgPr>
     </p:bg>
     <p:spTree>
@@ -10033,13 +9719,12 @@
             <a:avLst/>
           </a:prstGeom>
           <a:noFill/>
-          <a:ln/>
-        </p:spPr>
-        <p:txBody>
-          <a:bodyPr wrap="square" lIns="0" tIns="0" rIns="0" bIns="0" rtlCol="0" anchor="ctr"/>
-          <a:lstStyle/>
-          <a:p>
-            <a:pPr indent="0" marL="0">
+        </p:spPr>
+        <p:txBody>
+          <a:bodyPr wrap="square" lIns="0" tIns="0" rIns="0" bIns="0" rtlCol="0" anchor="ctr"/>
+          <a:lstStyle/>
+          <a:p>
+            <a:pPr marL="0" indent="0">
               <a:buNone/>
             </a:pPr>
             <a:r>
@@ -10047,9 +9732,9 @@
                 <a:solidFill>
                   <a:srgbClr val="6E6E6E"/>
                 </a:solidFill>
-                <a:latin typeface="Arial" pitchFamily="34" charset="0"/>
-                <a:ea typeface="Arial" pitchFamily="34" charset="-122"/>
-                <a:cs typeface="Arial" pitchFamily="34" charset="-120"/>
+                <a:latin typeface="Arial" panose="020B0604020202090204" pitchFamily="34" charset="0"/>
+                <a:ea typeface="Arial" panose="020B0604020202090204" pitchFamily="34" charset="-122"/>
+                <a:cs typeface="Arial" panose="020B0604020202090204" pitchFamily="34" charset="-120"/>
               </a:rPr>
               <a:t>第 54 节 · When 项目总结与后续规划</a:t>
             </a:r>
@@ -10072,13 +9757,12 @@
             <a:avLst/>
           </a:prstGeom>
           <a:noFill/>
-          <a:ln/>
-        </p:spPr>
-        <p:txBody>
-          <a:bodyPr wrap="square" lIns="0" tIns="0" rIns="0" bIns="0" rtlCol="0" anchor="ctr"/>
-          <a:lstStyle/>
-          <a:p>
-            <a:pPr algn="r" indent="0" marL="0">
+        </p:spPr>
+        <p:txBody>
+          <a:bodyPr wrap="square" lIns="0" tIns="0" rIns="0" bIns="0" rtlCol="0" anchor="ctr"/>
+          <a:lstStyle/>
+          <a:p>
+            <a:pPr marL="0" indent="0" algn="r">
               <a:buNone/>
             </a:pPr>
             <a:r>
@@ -10086,9 +9770,9 @@
                 <a:solidFill>
                   <a:srgbClr val="6E6E6E"/>
                 </a:solidFill>
-                <a:latin typeface="Arial" pitchFamily="34" charset="0"/>
-                <a:ea typeface="Arial" pitchFamily="34" charset="-122"/>
-                <a:cs typeface="Arial" pitchFamily="34" charset="-120"/>
+                <a:latin typeface="Arial" panose="020B0604020202090204" pitchFamily="34" charset="0"/>
+                <a:ea typeface="Arial" panose="020B0604020202090204" pitchFamily="34" charset="-122"/>
+                <a:cs typeface="Arial" panose="020B0604020202090204" pitchFamily="34" charset="-120"/>
               </a:rPr>
               <a:t>7 / 14</a:t>
             </a:r>
@@ -10135,23 +9819,22 @@
             <a:avLst/>
           </a:prstGeom>
           <a:noFill/>
-          <a:ln/>
-        </p:spPr>
-        <p:txBody>
-          <a:bodyPr wrap="square" lIns="0" tIns="0" rIns="0" bIns="0" rtlCol="0" anchor="ctr"/>
-          <a:lstStyle/>
-          <a:p>
-            <a:pPr algn="ctr" indent="0" marL="0">
-              <a:buNone/>
-            </a:pPr>
-            <a:r>
-              <a:rPr lang="en-US" sz="1050" b="1" spc="100" kern="0" dirty="0">
+        </p:spPr>
+        <p:txBody>
+          <a:bodyPr wrap="square" lIns="0" tIns="0" rIns="0" bIns="0" rtlCol="0" anchor="ctr"/>
+          <a:lstStyle/>
+          <a:p>
+            <a:pPr marL="0" indent="0" algn="ctr">
+              <a:buNone/>
+            </a:pPr>
+            <a:r>
+              <a:rPr lang="en-US" sz="1050" b="1" kern="0" spc="100" dirty="0">
                 <a:solidFill>
                   <a:srgbClr val="C9A96E"/>
                 </a:solidFill>
-                <a:latin typeface="Arial" pitchFamily="34" charset="0"/>
-                <a:ea typeface="Arial" pitchFamily="34" charset="-122"/>
-                <a:cs typeface="Arial" pitchFamily="34" charset="-120"/>
+                <a:latin typeface="Arial" panose="020B0604020202090204" pitchFamily="34" charset="0"/>
+                <a:ea typeface="Arial" panose="020B0604020202090204" pitchFamily="34" charset="-122"/>
+                <a:cs typeface="Arial" panose="020B0604020202090204" pitchFamily="34" charset="-120"/>
               </a:rPr>
               <a:t>方法论</a:t>
             </a:r>
@@ -10174,13 +9857,12 @@
             <a:avLst/>
           </a:prstGeom>
           <a:noFill/>
-          <a:ln/>
-        </p:spPr>
-        <p:txBody>
-          <a:bodyPr wrap="square" lIns="0" tIns="0" rIns="0" bIns="0" rtlCol="0" anchor="ctr"/>
-          <a:lstStyle/>
-          <a:p>
-            <a:pPr indent="0" marL="0">
+        </p:spPr>
+        <p:txBody>
+          <a:bodyPr wrap="square" lIns="0" tIns="0" rIns="0" bIns="0" rtlCol="0" anchor="ctr"/>
+          <a:lstStyle/>
+          <a:p>
+            <a:pPr marL="0" indent="0">
               <a:buNone/>
             </a:pPr>
             <a:r>
@@ -10188,9 +9870,9 @@
                 <a:solidFill>
                   <a:srgbClr val="F0F0F0"/>
                 </a:solidFill>
-                <a:latin typeface="Arial" pitchFamily="34" charset="0"/>
-                <a:ea typeface="Arial" pitchFamily="34" charset="-122"/>
-                <a:cs typeface="Arial" pitchFamily="34" charset="-120"/>
+                <a:latin typeface="Arial" panose="020B0604020202090204" pitchFamily="34" charset="0"/>
+                <a:ea typeface="Arial" panose="020B0604020202090204" pitchFamily="34" charset="-122"/>
+                <a:cs typeface="Arial" panose="020B0604020202090204" pitchFamily="34" charset="-120"/>
               </a:rPr>
               <a:t>底座 → 逐节原料 → 两次跑</a:t>
             </a:r>
@@ -10224,7 +9906,7 @@
             <a:prstDash val="solid"/>
           </a:ln>
           <a:effectLst>
-            <a:outerShdw sx="100000" sy="100000" kx="0" ky="0" algn="bl" rotWithShape="0" blurRad="88900" dist="25400" dir="5400000">
+            <a:outerShdw blurRad="88900" dist="25400" dir="5400000" algn="bl" rotWithShape="0">
               <a:srgbClr val="000000">
                 <a:alpha val="30000"/>
               </a:srgbClr>
@@ -10247,13 +9929,12 @@
             <a:avLst/>
           </a:prstGeom>
           <a:noFill/>
-          <a:ln/>
-        </p:spPr>
-        <p:txBody>
-          <a:bodyPr wrap="square" lIns="0" tIns="0" rIns="0" bIns="0" rtlCol="0" anchor="ctr"/>
-          <a:lstStyle/>
-          <a:p>
-            <a:pPr indent="0" marL="0">
+        </p:spPr>
+        <p:txBody>
+          <a:bodyPr wrap="square" lIns="0" tIns="0" rIns="0" bIns="0" rtlCol="0" anchor="ctr"/>
+          <a:lstStyle/>
+          <a:p>
+            <a:pPr marL="0" indent="0">
               <a:buNone/>
             </a:pPr>
             <a:r>
@@ -10261,9 +9942,9 @@
                 <a:solidFill>
                   <a:srgbClr val="C9A96E"/>
                 </a:solidFill>
-                <a:latin typeface="Arial" pitchFamily="34" charset="0"/>
-                <a:ea typeface="Arial" pitchFamily="34" charset="-122"/>
-                <a:cs typeface="Arial" pitchFamily="34" charset="-120"/>
+                <a:latin typeface="Arial" panose="020B0604020202090204" pitchFamily="34" charset="0"/>
+                <a:ea typeface="Arial" panose="020B0604020202090204" pitchFamily="34" charset="-122"/>
+                <a:cs typeface="Arial" panose="020B0604020202090204" pitchFamily="34" charset="-120"/>
               </a:rPr>
               <a:t>① 底座</a:t>
             </a:r>
@@ -10286,13 +9967,12 @@
             <a:avLst/>
           </a:prstGeom>
           <a:noFill/>
-          <a:ln/>
-        </p:spPr>
-        <p:txBody>
-          <a:bodyPr wrap="square" lIns="0" tIns="0" rIns="0" bIns="0" rtlCol="0" anchor="ctr"/>
-          <a:lstStyle/>
-          <a:p>
-            <a:pPr indent="0" marL="0">
+        </p:spPr>
+        <p:txBody>
+          <a:bodyPr wrap="square" lIns="0" tIns="0" rIns="0" bIns="0" rtlCol="0" anchor="ctr"/>
+          <a:lstStyle/>
+          <a:p>
+            <a:pPr marL="0" indent="0">
               <a:lnSpc>
                 <a:spcPct val="105000"/>
               </a:lnSpc>
@@ -10303,9 +9983,9 @@
                 <a:solidFill>
                   <a:srgbClr val="D6D6D6"/>
                 </a:solidFill>
-                <a:latin typeface="Arial" pitchFamily="34" charset="0"/>
-                <a:ea typeface="Arial" pitchFamily="34" charset="-122"/>
-                <a:cs typeface="Arial" pitchFamily="34" charset="-120"/>
+                <a:latin typeface="Arial" panose="020B0604020202090204" pitchFamily="34" charset="0"/>
+                <a:ea typeface="Arial" panose="020B0604020202090204" pitchFamily="34" charset="-122"/>
+                <a:cs typeface="Arial" panose="020B0604020202090204" pitchFamily="34" charset="-120"/>
               </a:rPr>
               <a:t>领域模型 Message + 模块间契约（SPI）——所有模块的共同词汇表</a:t>
             </a:r>
@@ -10328,13 +10008,12 @@
             <a:avLst/>
           </a:prstGeom>
           <a:noFill/>
-          <a:ln/>
-        </p:spPr>
-        <p:txBody>
-          <a:bodyPr wrap="square" lIns="0" tIns="0" rIns="0" bIns="0" rtlCol="0" anchor="ctr"/>
-          <a:lstStyle/>
-          <a:p>
-            <a:pPr algn="ctr" indent="0" marL="0">
+        </p:spPr>
+        <p:txBody>
+          <a:bodyPr wrap="square" lIns="0" tIns="0" rIns="0" bIns="0" rtlCol="0" anchor="ctr"/>
+          <a:lstStyle/>
+          <a:p>
+            <a:pPr marL="0" indent="0" algn="ctr">
               <a:buNone/>
             </a:pPr>
             <a:r>
@@ -10342,9 +10021,9 @@
                 <a:solidFill>
                   <a:srgbClr val="8C7647"/>
                 </a:solidFill>
-                <a:latin typeface="Arial" pitchFamily="34" charset="0"/>
-                <a:ea typeface="Arial" pitchFamily="34" charset="-122"/>
-                <a:cs typeface="Arial" pitchFamily="34" charset="-120"/>
+                <a:latin typeface="Arial" panose="020B0604020202090204" pitchFamily="34" charset="0"/>
+                <a:ea typeface="Arial" panose="020B0604020202090204" pitchFamily="34" charset="-122"/>
+                <a:cs typeface="Arial" panose="020B0604020202090204" pitchFamily="34" charset="-120"/>
               </a:rPr>
               <a:t>↓</a:t>
             </a:r>
@@ -10378,7 +10057,7 @@
             <a:prstDash val="solid"/>
           </a:ln>
           <a:effectLst>
-            <a:outerShdw sx="100000" sy="100000" kx="0" ky="0" algn="bl" rotWithShape="0" blurRad="88900" dist="25400" dir="5400000">
+            <a:outerShdw blurRad="88900" dist="25400" dir="5400000" algn="bl" rotWithShape="0">
               <a:srgbClr val="000000">
                 <a:alpha val="30000"/>
               </a:srgbClr>
@@ -10401,13 +10080,12 @@
             <a:avLst/>
           </a:prstGeom>
           <a:noFill/>
-          <a:ln/>
-        </p:spPr>
-        <p:txBody>
-          <a:bodyPr wrap="square" lIns="0" tIns="0" rIns="0" bIns="0" rtlCol="0" anchor="ctr"/>
-          <a:lstStyle/>
-          <a:p>
-            <a:pPr indent="0" marL="0">
+        </p:spPr>
+        <p:txBody>
+          <a:bodyPr wrap="square" lIns="0" tIns="0" rIns="0" bIns="0" rtlCol="0" anchor="ctr"/>
+          <a:lstStyle/>
+          <a:p>
+            <a:pPr marL="0" indent="0">
               <a:buNone/>
             </a:pPr>
             <a:r>
@@ -10415,9 +10093,9 @@
                 <a:solidFill>
                   <a:srgbClr val="C9A96E"/>
                 </a:solidFill>
-                <a:latin typeface="Arial" pitchFamily="34" charset="0"/>
-                <a:ea typeface="Arial" pitchFamily="34" charset="-122"/>
-                <a:cs typeface="Arial" pitchFamily="34" charset="-120"/>
+                <a:latin typeface="Arial" panose="020B0604020202090204" pitchFamily="34" charset="0"/>
+                <a:ea typeface="Arial" panose="020B0604020202090204" pitchFamily="34" charset="-122"/>
+                <a:cs typeface="Arial" panose="020B0604020202090204" pitchFamily="34" charset="-120"/>
               </a:rPr>
               <a:t>② 逐节原料</a:t>
             </a:r>
@@ -10440,13 +10118,12 @@
             <a:avLst/>
           </a:prstGeom>
           <a:noFill/>
-          <a:ln/>
-        </p:spPr>
-        <p:txBody>
-          <a:bodyPr wrap="square" lIns="0" tIns="0" rIns="0" bIns="0" rtlCol="0" anchor="ctr"/>
-          <a:lstStyle/>
-          <a:p>
-            <a:pPr indent="0" marL="0">
+        </p:spPr>
+        <p:txBody>
+          <a:bodyPr wrap="square" lIns="0" tIns="0" rIns="0" bIns="0" rtlCol="0" anchor="ctr"/>
+          <a:lstStyle/>
+          <a:p>
+            <a:pPr marL="0" indent="0">
               <a:lnSpc>
                 <a:spcPct val="105000"/>
               </a:lnSpc>
@@ -10457,9 +10134,9 @@
                 <a:solidFill>
                   <a:srgbClr val="D6D6D6"/>
                 </a:solidFill>
-                <a:latin typeface="Arial" pitchFamily="34" charset="0"/>
-                <a:ea typeface="Arial" pitchFamily="34" charset="-122"/>
-                <a:cs typeface="Arial" pitchFamily="34" charset="-120"/>
+                <a:latin typeface="Arial" panose="020B0604020202090204" pitchFamily="34" charset="0"/>
+                <a:ea typeface="Arial" panose="020B0604020202090204" pitchFamily="34" charset="-122"/>
+                <a:cs typeface="Arial" panose="020B0604020202090204" pitchFamily="34" charset="-120"/>
               </a:rPr>
               <a:t>每节一份 part：功能 + task + Harness + 验收，引用底座、彼此咬合</a:t>
             </a:r>
@@ -10482,13 +10159,12 @@
             <a:avLst/>
           </a:prstGeom>
           <a:noFill/>
-          <a:ln/>
-        </p:spPr>
-        <p:txBody>
-          <a:bodyPr wrap="square" lIns="0" tIns="0" rIns="0" bIns="0" rtlCol="0" anchor="ctr"/>
-          <a:lstStyle/>
-          <a:p>
-            <a:pPr algn="ctr" indent="0" marL="0">
+        </p:spPr>
+        <p:txBody>
+          <a:bodyPr wrap="square" lIns="0" tIns="0" rIns="0" bIns="0" rtlCol="0" anchor="ctr"/>
+          <a:lstStyle/>
+          <a:p>
+            <a:pPr marL="0" indent="0" algn="ctr">
               <a:buNone/>
             </a:pPr>
             <a:r>
@@ -10496,9 +10172,9 @@
                 <a:solidFill>
                   <a:srgbClr val="8C7647"/>
                 </a:solidFill>
-                <a:latin typeface="Arial" pitchFamily="34" charset="0"/>
-                <a:ea typeface="Arial" pitchFamily="34" charset="-122"/>
-                <a:cs typeface="Arial" pitchFamily="34" charset="-120"/>
+                <a:latin typeface="Arial" panose="020B0604020202090204" pitchFamily="34" charset="0"/>
+                <a:ea typeface="Arial" panose="020B0604020202090204" pitchFamily="34" charset="-122"/>
+                <a:cs typeface="Arial" panose="020B0604020202090204" pitchFamily="34" charset="-120"/>
               </a:rPr>
               <a:t>↓</a:t>
             </a:r>
@@ -10532,7 +10208,7 @@
             <a:prstDash val="solid"/>
           </a:ln>
           <a:effectLst>
-            <a:outerShdw sx="100000" sy="100000" kx="0" ky="0" algn="bl" rotWithShape="0" blurRad="88900" dist="25400" dir="5400000">
+            <a:outerShdw blurRad="88900" dist="25400" dir="5400000" algn="bl" rotWithShape="0">
               <a:srgbClr val="000000">
                 <a:alpha val="30000"/>
               </a:srgbClr>
@@ -10555,13 +10231,12 @@
             <a:avLst/>
           </a:prstGeom>
           <a:noFill/>
-          <a:ln/>
-        </p:spPr>
-        <p:txBody>
-          <a:bodyPr wrap="square" lIns="0" tIns="0" rIns="0" bIns="0" rtlCol="0" anchor="ctr"/>
-          <a:lstStyle/>
-          <a:p>
-            <a:pPr indent="0" marL="0">
+        </p:spPr>
+        <p:txBody>
+          <a:bodyPr wrap="square" lIns="0" tIns="0" rIns="0" bIns="0" rtlCol="0" anchor="ctr"/>
+          <a:lstStyle/>
+          <a:p>
+            <a:pPr marL="0" indent="0">
               <a:buNone/>
             </a:pPr>
             <a:r>
@@ -10569,9 +10244,9 @@
                 <a:solidFill>
                   <a:srgbClr val="C9A96E"/>
                 </a:solidFill>
-                <a:latin typeface="Arial" pitchFamily="34" charset="0"/>
-                <a:ea typeface="Arial" pitchFamily="34" charset="-122"/>
-                <a:cs typeface="Arial" pitchFamily="34" charset="-120"/>
+                <a:latin typeface="Arial" panose="020B0604020202090204" pitchFamily="34" charset="0"/>
+                <a:ea typeface="Arial" panose="020B0604020202090204" pitchFamily="34" charset="-122"/>
+                <a:cs typeface="Arial" panose="020B0604020202090204" pitchFamily="34" charset="-120"/>
               </a:rPr>
               <a:t>③ 两次跑</a:t>
             </a:r>
@@ -10594,13 +10269,12 @@
             <a:avLst/>
           </a:prstGeom>
           <a:noFill/>
-          <a:ln/>
-        </p:spPr>
-        <p:txBody>
-          <a:bodyPr wrap="square" lIns="0" tIns="0" rIns="0" bIns="0" rtlCol="0" anchor="ctr"/>
-          <a:lstStyle/>
-          <a:p>
-            <a:pPr indent="0" marL="0">
+        </p:spPr>
+        <p:txBody>
+          <a:bodyPr wrap="square" lIns="0" tIns="0" rIns="0" bIns="0" rtlCol="0" anchor="ctr"/>
+          <a:lstStyle/>
+          <a:p>
+            <a:pPr marL="0" indent="0">
               <a:lnSpc>
                 <a:spcPct val="105000"/>
               </a:lnSpc>
@@ -10611,9 +10285,9 @@
                 <a:solidFill>
                   <a:srgbClr val="D6D6D6"/>
                 </a:solidFill>
-                <a:latin typeface="Arial" pitchFamily="34" charset="0"/>
-                <a:ea typeface="Arial" pitchFamily="34" charset="-122"/>
-                <a:cs typeface="Arial" pitchFamily="34" charset="-120"/>
+                <a:latin typeface="Arial" panose="020B0604020202090204" pitchFamily="34" charset="0"/>
+                <a:ea typeface="Arial" panose="020B0604020202090204" pitchFamily="34" charset="-122"/>
+                <a:cs typeface="Arial" panose="020B0604020202090204" pitchFamily="34" charset="-120"/>
               </a:rPr>
               <a:t>把原料喂给循环自主实现；跑 → 冒问题 → 回填原料 → 再跑</a:t>
             </a:r>
@@ -10663,13 +10337,12 @@
             <a:avLst/>
           </a:prstGeom>
           <a:noFill/>
-          <a:ln/>
-        </p:spPr>
-        <p:txBody>
-          <a:bodyPr wrap="square" lIns="0" tIns="0" rIns="0" bIns="0" rtlCol="0" anchor="ctr"/>
-          <a:lstStyle/>
-          <a:p>
-            <a:pPr indent="0" marL="0">
+        </p:spPr>
+        <p:txBody>
+          <a:bodyPr wrap="square" lIns="0" tIns="0" rIns="0" bIns="0" rtlCol="0" anchor="ctr"/>
+          <a:lstStyle/>
+          <a:p>
+            <a:pPr marL="0" indent="0">
               <a:lnSpc>
                 <a:spcPct val="106000"/>
               </a:lnSpc>
@@ -10680,26 +10353,20 @@
                 <a:solidFill>
                   <a:srgbClr val="C9A96E"/>
                 </a:solidFill>
-                <a:latin typeface="Arial" pitchFamily="34" charset="0"/>
-                <a:ea typeface="Arial" pitchFamily="34" charset="-122"/>
-                <a:cs typeface="Arial" pitchFamily="34" charset="-120"/>
+                <a:latin typeface="Arial" panose="020B0604020202090204" pitchFamily="34" charset="0"/>
+                <a:ea typeface="Arial" panose="020B0604020202090204" pitchFamily="34" charset="-122"/>
+                <a:cs typeface="Arial" panose="020B0604020202090204" pitchFamily="34" charset="-120"/>
               </a:rPr>
               <a:t>关键：</a:t>
             </a:r>
-            <a:pPr indent="0" marL="0">
-              <a:lnSpc>
-                <a:spcPct val="106000"/>
-              </a:lnSpc>
-              <a:buNone/>
-            </a:pPr>
             <a:r>
               <a:rPr lang="en-US" sz="1250" dirty="0">
                 <a:solidFill>
                   <a:srgbClr val="F0F0F0"/>
                 </a:solidFill>
-                <a:latin typeface="Arial" pitchFamily="34" charset="0"/>
-                <a:ea typeface="Arial" pitchFamily="34" charset="-122"/>
-                <a:cs typeface="Arial" pitchFamily="34" charset="-120"/>
+                <a:latin typeface="Arial" panose="020B0604020202090204" pitchFamily="34" charset="0"/>
+                <a:ea typeface="Arial" panose="020B0604020202090204" pitchFamily="34" charset="-122"/>
+                <a:cs typeface="Arial" panose="020B0604020202090204" pitchFamily="34" charset="-120"/>
               </a:rPr>
               <a:t>先有共同的模型和接口，循环各节的产出才是“同一台机器的零件”，最后拼得起来、一口气跑出来。</a:t>
             </a:r>
@@ -10717,12 +10384,13 @@
 
 <file path=ppt/slides/slide8.xml><?xml version="1.0" encoding="utf-8"?>
 <p:sld xmlns:a="http://schemas.openxmlformats.org/drawingml/2006/main" xmlns:r="http://schemas.openxmlformats.org/officeDocument/2006/relationships" xmlns:p="http://schemas.openxmlformats.org/presentationml/2006/main">
-  <p:cSld name="Slide 8">
+  <p:cSld>
     <p:bg>
       <p:bgPr>
         <a:solidFill>
           <a:srgbClr val="1E1E1E"/>
         </a:solidFill>
+        <a:effectLst/>
       </p:bgPr>
     </p:bg>
     <p:spTree>
@@ -10754,13 +10422,12 @@
             <a:avLst/>
           </a:prstGeom>
           <a:noFill/>
-          <a:ln/>
-        </p:spPr>
-        <p:txBody>
-          <a:bodyPr wrap="square" lIns="0" tIns="0" rIns="0" bIns="0" rtlCol="0" anchor="ctr"/>
-          <a:lstStyle/>
-          <a:p>
-            <a:pPr indent="0" marL="0">
+        </p:spPr>
+        <p:txBody>
+          <a:bodyPr wrap="square" lIns="0" tIns="0" rIns="0" bIns="0" rtlCol="0" anchor="ctr"/>
+          <a:lstStyle/>
+          <a:p>
+            <a:pPr marL="0" indent="0">
               <a:buNone/>
             </a:pPr>
             <a:r>
@@ -10768,9 +10435,9 @@
                 <a:solidFill>
                   <a:srgbClr val="6E6E6E"/>
                 </a:solidFill>
-                <a:latin typeface="Arial" pitchFamily="34" charset="0"/>
-                <a:ea typeface="Arial" pitchFamily="34" charset="-122"/>
-                <a:cs typeface="Arial" pitchFamily="34" charset="-120"/>
+                <a:latin typeface="Arial" panose="020B0604020202090204" pitchFamily="34" charset="0"/>
+                <a:ea typeface="Arial" panose="020B0604020202090204" pitchFamily="34" charset="-122"/>
+                <a:cs typeface="Arial" panose="020B0604020202090204" pitchFamily="34" charset="-120"/>
               </a:rPr>
               <a:t>第 54 节 · When 项目总结与后续规划</a:t>
             </a:r>
@@ -10793,13 +10460,12 @@
             <a:avLst/>
           </a:prstGeom>
           <a:noFill/>
-          <a:ln/>
-        </p:spPr>
-        <p:txBody>
-          <a:bodyPr wrap="square" lIns="0" tIns="0" rIns="0" bIns="0" rtlCol="0" anchor="ctr"/>
-          <a:lstStyle/>
-          <a:p>
-            <a:pPr algn="r" indent="0" marL="0">
+        </p:spPr>
+        <p:txBody>
+          <a:bodyPr wrap="square" lIns="0" tIns="0" rIns="0" bIns="0" rtlCol="0" anchor="ctr"/>
+          <a:lstStyle/>
+          <a:p>
+            <a:pPr marL="0" indent="0" algn="r">
               <a:buNone/>
             </a:pPr>
             <a:r>
@@ -10807,9 +10473,9 @@
                 <a:solidFill>
                   <a:srgbClr val="6E6E6E"/>
                 </a:solidFill>
-                <a:latin typeface="Arial" pitchFamily="34" charset="0"/>
-                <a:ea typeface="Arial" pitchFamily="34" charset="-122"/>
-                <a:cs typeface="Arial" pitchFamily="34" charset="-120"/>
+                <a:latin typeface="Arial" panose="020B0604020202090204" pitchFamily="34" charset="0"/>
+                <a:ea typeface="Arial" panose="020B0604020202090204" pitchFamily="34" charset="-122"/>
+                <a:cs typeface="Arial" panose="020B0604020202090204" pitchFamily="34" charset="-120"/>
               </a:rPr>
               <a:t>8 / 14</a:t>
             </a:r>
@@ -10856,23 +10522,22 @@
             <a:avLst/>
           </a:prstGeom>
           <a:noFill/>
-          <a:ln/>
-        </p:spPr>
-        <p:txBody>
-          <a:bodyPr wrap="square" lIns="0" tIns="0" rIns="0" bIns="0" rtlCol="0" anchor="ctr"/>
-          <a:lstStyle/>
-          <a:p>
-            <a:pPr algn="ctr" indent="0" marL="0">
-              <a:buNone/>
-            </a:pPr>
-            <a:r>
-              <a:rPr lang="en-US" sz="1050" b="1" spc="100" kern="0" dirty="0">
+        </p:spPr>
+        <p:txBody>
+          <a:bodyPr wrap="square" lIns="0" tIns="0" rIns="0" bIns="0" rtlCol="0" anchor="ctr"/>
+          <a:lstStyle/>
+          <a:p>
+            <a:pPr marL="0" indent="0" algn="ctr">
+              <a:buNone/>
+            </a:pPr>
+            <a:r>
+              <a:rPr lang="en-US" sz="1050" b="1" kern="0" spc="100" dirty="0">
                 <a:solidFill>
                   <a:srgbClr val="C9A96E"/>
                 </a:solidFill>
-                <a:latin typeface="Arial" pitchFamily="34" charset="0"/>
-                <a:ea typeface="Arial" pitchFamily="34" charset="-122"/>
-                <a:cs typeface="Arial" pitchFamily="34" charset="-120"/>
+                <a:latin typeface="Arial" panose="020B0604020202090204" pitchFamily="34" charset="0"/>
+                <a:ea typeface="Arial" panose="020B0604020202090204" pitchFamily="34" charset="-122"/>
+                <a:cs typeface="Arial" panose="020B0604020202090204" pitchFamily="34" charset="-120"/>
               </a:rPr>
               <a:t>Loop 最重要的是 Harness</a:t>
             </a:r>
@@ -10895,13 +10560,12 @@
             <a:avLst/>
           </a:prstGeom>
           <a:noFill/>
-          <a:ln/>
-        </p:spPr>
-        <p:txBody>
-          <a:bodyPr wrap="square" lIns="0" tIns="0" rIns="0" bIns="0" rtlCol="0" anchor="ctr"/>
-          <a:lstStyle/>
-          <a:p>
-            <a:pPr indent="0" marL="0">
+        </p:spPr>
+        <p:txBody>
+          <a:bodyPr wrap="square" lIns="0" tIns="0" rIns="0" bIns="0" rtlCol="0" anchor="ctr"/>
+          <a:lstStyle/>
+          <a:p>
+            <a:pPr marL="0" indent="0">
               <a:buNone/>
             </a:pPr>
             <a:r>
@@ -10909,9 +10573,9 @@
                 <a:solidFill>
                   <a:srgbClr val="F0F0F0"/>
                 </a:solidFill>
-                <a:latin typeface="Arial" pitchFamily="34" charset="0"/>
-                <a:ea typeface="Arial" pitchFamily="34" charset="-122"/>
-                <a:cs typeface="Arial" pitchFamily="34" charset="-120"/>
+                <a:latin typeface="Arial" panose="020B0604020202090204" pitchFamily="34" charset="0"/>
+                <a:ea typeface="Arial" panose="020B0604020202090204" pitchFamily="34" charset="-122"/>
+                <a:cs typeface="Arial" panose="020B0604020202090204" pitchFamily="34" charset="-120"/>
               </a:rPr>
               <a:t>循环放大的，是你事先设计的判官质量</a:t>
             </a:r>
@@ -10945,7 +10609,7 @@
             <a:prstDash val="solid"/>
           </a:ln>
           <a:effectLst>
-            <a:outerShdw sx="100000" sy="100000" kx="0" ky="0" algn="bl" rotWithShape="0" blurRad="88900" dist="25400" dir="5400000">
+            <a:outerShdw blurRad="88900" dist="25400" dir="5400000" algn="bl" rotWithShape="0">
               <a:srgbClr val="000000">
                 <a:alpha val="30000"/>
               </a:srgbClr>
@@ -10968,13 +10632,12 @@
             <a:avLst/>
           </a:prstGeom>
           <a:noFill/>
-          <a:ln/>
-        </p:spPr>
-        <p:txBody>
-          <a:bodyPr wrap="square" lIns="0" tIns="0" rIns="0" bIns="0" rtlCol="0" anchor="ctr"/>
-          <a:lstStyle/>
-          <a:p>
-            <a:pPr algn="ctr" indent="0" marL="0">
+        </p:spPr>
+        <p:txBody>
+          <a:bodyPr wrap="square" lIns="0" tIns="0" rIns="0" bIns="0" rtlCol="0" anchor="ctr"/>
+          <a:lstStyle/>
+          <a:p>
+            <a:pPr marL="0" indent="0" algn="ctr">
               <a:buNone/>
             </a:pPr>
             <a:r>
@@ -10982,9 +10645,9 @@
                 <a:solidFill>
                   <a:srgbClr val="7FA8C9"/>
                 </a:solidFill>
-                <a:latin typeface="Arial" pitchFamily="34" charset="0"/>
-                <a:ea typeface="Arial" pitchFamily="34" charset="-122"/>
-                <a:cs typeface="Arial" pitchFamily="34" charset="-120"/>
+                <a:latin typeface="Arial" panose="020B0604020202090204" pitchFamily="34" charset="0"/>
+                <a:ea typeface="Arial" panose="020B0604020202090204" pitchFamily="34" charset="-122"/>
+                <a:cs typeface="Arial" panose="020B0604020202090204" pitchFamily="34" charset="-120"/>
               </a:rPr>
               <a:t>代码</a:t>
             </a:r>
@@ -11007,13 +10670,12 @@
             <a:avLst/>
           </a:prstGeom>
           <a:noFill/>
-          <a:ln/>
         </p:spPr>
         <p:txBody>
           <a:bodyPr wrap="square" lIns="0" tIns="0" rIns="0" bIns="0" rtlCol="0" anchor="t"/>
           <a:lstStyle/>
           <a:p>
-            <a:pPr algn="ctr" indent="0" marL="0">
+            <a:pPr marL="0" indent="0" algn="ctr">
               <a:lnSpc>
                 <a:spcPct val="115000"/>
               </a:lnSpc>
@@ -11024,9 +10686,9 @@
                 <a:solidFill>
                   <a:srgbClr val="D6D6D6"/>
                 </a:solidFill>
-                <a:latin typeface="Arial" pitchFamily="34" charset="0"/>
-                <a:ea typeface="Arial" pitchFamily="34" charset="-122"/>
-                <a:cs typeface="Arial" pitchFamily="34" charset="-120"/>
+                <a:latin typeface="Arial" panose="020B0604020202090204" pitchFamily="34" charset="0"/>
+                <a:ea typeface="Arial" panose="020B0604020202090204" pitchFamily="34" charset="-122"/>
+                <a:cs typeface="Arial" panose="020B0604020202090204" pitchFamily="34" charset="-120"/>
               </a:rPr>
               <a:t>结构/命名/lint 规范</a:t>
             </a:r>
@@ -11060,7 +10722,7 @@
             <a:prstDash val="solid"/>
           </a:ln>
           <a:effectLst>
-            <a:outerShdw sx="100000" sy="100000" kx="0" ky="0" algn="bl" rotWithShape="0" blurRad="88900" dist="25400" dir="5400000">
+            <a:outerShdw blurRad="88900" dist="25400" dir="5400000" algn="bl" rotWithShape="0">
               <a:srgbClr val="000000">
                 <a:alpha val="30000"/>
               </a:srgbClr>
@@ -11083,13 +10745,12 @@
             <a:avLst/>
           </a:prstGeom>
           <a:noFill/>
-          <a:ln/>
-        </p:spPr>
-        <p:txBody>
-          <a:bodyPr wrap="square" lIns="0" tIns="0" rIns="0" bIns="0" rtlCol="0" anchor="ctr"/>
-          <a:lstStyle/>
-          <a:p>
-            <a:pPr algn="ctr" indent="0" marL="0">
+        </p:spPr>
+        <p:txBody>
+          <a:bodyPr wrap="square" lIns="0" tIns="0" rIns="0" bIns="0" rtlCol="0" anchor="ctr"/>
+          <a:lstStyle/>
+          <a:p>
+            <a:pPr marL="0" indent="0" algn="ctr">
               <a:buNone/>
             </a:pPr>
             <a:r>
@@ -11097,9 +10758,9 @@
                 <a:solidFill>
                   <a:srgbClr val="C98A82"/>
                 </a:solidFill>
-                <a:latin typeface="Arial" pitchFamily="34" charset="0"/>
-                <a:ea typeface="Arial" pitchFamily="34" charset="-122"/>
-                <a:cs typeface="Arial" pitchFamily="34" charset="-120"/>
+                <a:latin typeface="Arial" panose="020B0604020202090204" pitchFamily="34" charset="0"/>
+                <a:ea typeface="Arial" panose="020B0604020202090204" pitchFamily="34" charset="-122"/>
+                <a:cs typeface="Arial" panose="020B0604020202090204" pitchFamily="34" charset="-120"/>
               </a:rPr>
               <a:t>安全</a:t>
             </a:r>
@@ -11122,13 +10783,12 @@
             <a:avLst/>
           </a:prstGeom>
           <a:noFill/>
-          <a:ln/>
         </p:spPr>
         <p:txBody>
           <a:bodyPr wrap="square" lIns="0" tIns="0" rIns="0" bIns="0" rtlCol="0" anchor="t"/>
           <a:lstStyle/>
           <a:p>
-            <a:pPr algn="ctr" indent="0" marL="0">
+            <a:pPr marL="0" indent="0" algn="ctr">
               <a:lnSpc>
                 <a:spcPct val="115000"/>
               </a:lnSpc>
@@ -11139,9 +10799,9 @@
                 <a:solidFill>
                   <a:srgbClr val="D6D6D6"/>
                 </a:solidFill>
-                <a:latin typeface="Arial" pitchFamily="34" charset="0"/>
-                <a:ea typeface="Arial" pitchFamily="34" charset="-122"/>
-                <a:cs typeface="Arial" pitchFamily="34" charset="-120"/>
+                <a:latin typeface="Arial" panose="020B0604020202090204" pitchFamily="34" charset="0"/>
+                <a:ea typeface="Arial" panose="020B0604020202090204" pitchFamily="34" charset="-122"/>
+                <a:cs typeface="Arial" panose="020B0604020202090204" pitchFamily="34" charset="-120"/>
               </a:rPr>
               <a:t>不硬编码密钥、不越权、环境变量注入</a:t>
             </a:r>
@@ -11175,7 +10835,7 @@
             <a:prstDash val="solid"/>
           </a:ln>
           <a:effectLst>
-            <a:outerShdw sx="100000" sy="100000" kx="0" ky="0" algn="bl" rotWithShape="0" blurRad="88900" dist="25400" dir="5400000">
+            <a:outerShdw blurRad="88900" dist="25400" dir="5400000" algn="bl" rotWithShape="0">
               <a:srgbClr val="000000">
                 <a:alpha val="30000"/>
               </a:srgbClr>
@@ -11198,13 +10858,12 @@
             <a:avLst/>
           </a:prstGeom>
           <a:noFill/>
-          <a:ln/>
-        </p:spPr>
-        <p:txBody>
-          <a:bodyPr wrap="square" lIns="0" tIns="0" rIns="0" bIns="0" rtlCol="0" anchor="ctr"/>
-          <a:lstStyle/>
-          <a:p>
-            <a:pPr algn="ctr" indent="0" marL="0">
+        </p:spPr>
+        <p:txBody>
+          <a:bodyPr wrap="square" lIns="0" tIns="0" rIns="0" bIns="0" rtlCol="0" anchor="ctr"/>
+          <a:lstStyle/>
+          <a:p>
+            <a:pPr marL="0" indent="0" algn="ctr">
               <a:buNone/>
             </a:pPr>
             <a:r>
@@ -11212,9 +10871,9 @@
                 <a:solidFill>
                   <a:srgbClr val="C9A96E"/>
                 </a:solidFill>
-                <a:latin typeface="Arial" pitchFamily="34" charset="0"/>
-                <a:ea typeface="Arial" pitchFamily="34" charset="-122"/>
-                <a:cs typeface="Arial" pitchFamily="34" charset="-120"/>
+                <a:latin typeface="Arial" panose="020B0604020202090204" pitchFamily="34" charset="0"/>
+                <a:ea typeface="Arial" panose="020B0604020202090204" pitchFamily="34" charset="-122"/>
+                <a:cs typeface="Arial" panose="020B0604020202090204" pitchFamily="34" charset="-120"/>
               </a:rPr>
               <a:t>验收</a:t>
             </a:r>
@@ -11237,13 +10896,12 @@
             <a:avLst/>
           </a:prstGeom>
           <a:noFill/>
-          <a:ln/>
         </p:spPr>
         <p:txBody>
           <a:bodyPr wrap="square" lIns="0" tIns="0" rIns="0" bIns="0" rtlCol="0" anchor="t"/>
           <a:lstStyle/>
           <a:p>
-            <a:pPr algn="ctr" indent="0" marL="0">
+            <a:pPr marL="0" indent="0" algn="ctr">
               <a:lnSpc>
                 <a:spcPct val="115000"/>
               </a:lnSpc>
@@ -11254,9 +10912,9 @@
                 <a:solidFill>
                   <a:srgbClr val="D6D6D6"/>
                 </a:solidFill>
-                <a:latin typeface="Arial" pitchFamily="34" charset="0"/>
-                <a:ea typeface="Arial" pitchFamily="34" charset="-122"/>
-                <a:cs typeface="Arial" pitchFamily="34" charset="-120"/>
+                <a:latin typeface="Arial" panose="020B0604020202090204" pitchFamily="34" charset="0"/>
+                <a:ea typeface="Arial" panose="020B0604020202090204" pitchFamily="34" charset="-122"/>
+                <a:cs typeface="Arial" panose="020B0604020202090204" pitchFamily="34" charset="-120"/>
               </a:rPr>
               <a:t>单测/集成/CI/混沌——循环的判官</a:t>
             </a:r>
@@ -11306,13 +10964,12 @@
             <a:avLst/>
           </a:prstGeom>
           <a:noFill/>
-          <a:ln/>
-        </p:spPr>
-        <p:txBody>
-          <a:bodyPr wrap="square" lIns="0" tIns="0" rIns="0" bIns="0" rtlCol="0" anchor="ctr"/>
-          <a:lstStyle/>
-          <a:p>
-            <a:pPr indent="0" marL="0">
+        </p:spPr>
+        <p:txBody>
+          <a:bodyPr wrap="square" lIns="0" tIns="0" rIns="0" bIns="0" rtlCol="0" anchor="ctr"/>
+          <a:lstStyle/>
+          <a:p>
+            <a:pPr marL="0" indent="0">
               <a:lnSpc>
                 <a:spcPct val="106000"/>
               </a:lnSpc>
@@ -11323,26 +10980,20 @@
                 <a:solidFill>
                   <a:srgbClr val="C9A96E"/>
                 </a:solidFill>
-                <a:latin typeface="Arial" pitchFamily="34" charset="0"/>
-                <a:ea typeface="Arial" pitchFamily="34" charset="-122"/>
-                <a:cs typeface="Arial" pitchFamily="34" charset="-120"/>
+                <a:latin typeface="Arial" panose="020B0604020202090204" pitchFamily="34" charset="0"/>
+                <a:ea typeface="Arial" panose="020B0604020202090204" pitchFamily="34" charset="-122"/>
+                <a:cs typeface="Arial" panose="020B0604020202090204" pitchFamily="34" charset="-120"/>
               </a:rPr>
               <a:t>判官不能被收买：</a:t>
             </a:r>
-            <a:pPr indent="0" marL="0">
-              <a:lnSpc>
-                <a:spcPct val="106000"/>
-              </a:lnSpc>
-              <a:buNone/>
-            </a:pPr>
             <a:r>
               <a:rPr lang="en-US" sz="1250" dirty="0">
                 <a:solidFill>
                   <a:srgbClr val="F0F0F0"/>
                 </a:solidFill>
-                <a:latin typeface="Arial" pitchFamily="34" charset="0"/>
-                <a:ea typeface="Arial" pitchFamily="34" charset="-122"/>
-                <a:cs typeface="Arial" pitchFamily="34" charset="-120"/>
+                <a:latin typeface="Arial" panose="020B0604020202090204" pitchFamily="34" charset="0"/>
+                <a:ea typeface="Arial" panose="020B0604020202090204" pitchFamily="34" charset="-122"/>
+                <a:cs typeface="Arial" panose="020B0604020202090204" pitchFamily="34" charset="-120"/>
               </a:rPr>
               <a:t>禁止循环改/删测试、实现者与验证者分离、CI 当循环够不着的外部判官。没有靠谱的判官，循环就是在高速地放大错误。</a:t>
             </a:r>
@@ -11392,13 +11043,12 @@
             <a:avLst/>
           </a:prstGeom>
           <a:noFill/>
-          <a:ln/>
-        </p:spPr>
-        <p:txBody>
-          <a:bodyPr wrap="square" lIns="0" tIns="0" rIns="0" bIns="0" rtlCol="0" anchor="ctr"/>
-          <a:lstStyle/>
-          <a:p>
-            <a:pPr indent="0" marL="0">
+        </p:spPr>
+        <p:txBody>
+          <a:bodyPr wrap="square" lIns="0" tIns="0" rIns="0" bIns="0" rtlCol="0" anchor="ctr"/>
+          <a:lstStyle/>
+          <a:p>
+            <a:pPr marL="0" indent="0">
               <a:lnSpc>
                 <a:spcPct val="106000"/>
               </a:lnSpc>
@@ -11409,26 +11059,20 @@
                 <a:solidFill>
                   <a:srgbClr val="9A9A9A"/>
                 </a:solidFill>
-                <a:latin typeface="Arial" pitchFamily="34" charset="0"/>
-                <a:ea typeface="Arial" pitchFamily="34" charset="-122"/>
-                <a:cs typeface="Arial" pitchFamily="34" charset="-120"/>
+                <a:latin typeface="Arial" panose="020B0604020202090204" pitchFamily="34" charset="0"/>
+                <a:ea typeface="Arial" panose="020B0604020202090204" pitchFamily="34" charset="-122"/>
+                <a:cs typeface="Arial" panose="020B0604020202090204" pitchFamily="34" charset="-120"/>
               </a:rPr>
               <a:t>When 的实践：</a:t>
             </a:r>
-            <a:pPr indent="0" marL="0">
-              <a:lnSpc>
-                <a:spcPct val="106000"/>
-              </a:lnSpc>
-              <a:buNone/>
-            </a:pPr>
             <a:r>
               <a:rPr lang="en-US" sz="1250" dirty="0">
                 <a:solidFill>
                   <a:srgbClr val="D6D6D6"/>
                 </a:solidFill>
-                <a:latin typeface="Arial" pitchFamily="34" charset="0"/>
-                <a:ea typeface="Arial" pitchFamily="34" charset="-122"/>
-                <a:cs typeface="Arial" pitchFamily="34" charset="-120"/>
+                <a:latin typeface="Arial" panose="020B0604020202090204" pitchFamily="34" charset="0"/>
+                <a:ea typeface="Arial" panose="020B0604020202090204" pitchFamily="34" charset="-122"/>
+                <a:cs typeface="Arial" panose="020B0604020202090204" pitchFamily="34" charset="-120"/>
               </a:rPr>
               <a:t>混沌测试（杀节点/分区）交 CI；不丢、10 秒切换、脑裂唯一性，都是可判定断言。</a:t>
             </a:r>
@@ -11446,12 +11090,13 @@
 
 <file path=ppt/slides/slide9.xml><?xml version="1.0" encoding="utf-8"?>
 <p:sld xmlns:a="http://schemas.openxmlformats.org/drawingml/2006/main" xmlns:r="http://schemas.openxmlformats.org/officeDocument/2006/relationships" xmlns:p="http://schemas.openxmlformats.org/presentationml/2006/main">
-  <p:cSld name="Slide 9">
+  <p:cSld>
     <p:bg>
       <p:bgPr>
         <a:solidFill>
           <a:srgbClr val="1E1E1E"/>
         </a:solidFill>
+        <a:effectLst/>
       </p:bgPr>
     </p:bg>
     <p:spTree>
@@ -11483,13 +11128,12 @@
             <a:avLst/>
           </a:prstGeom>
           <a:noFill/>
-          <a:ln/>
-        </p:spPr>
-        <p:txBody>
-          <a:bodyPr wrap="square" lIns="0" tIns="0" rIns="0" bIns="0" rtlCol="0" anchor="ctr"/>
-          <a:lstStyle/>
-          <a:p>
-            <a:pPr indent="0" marL="0">
+        </p:spPr>
+        <p:txBody>
+          <a:bodyPr wrap="square" lIns="0" tIns="0" rIns="0" bIns="0" rtlCol="0" anchor="ctr"/>
+          <a:lstStyle/>
+          <a:p>
+            <a:pPr marL="0" indent="0">
               <a:buNone/>
             </a:pPr>
             <a:r>
@@ -11497,9 +11141,9 @@
                 <a:solidFill>
                   <a:srgbClr val="6E6E6E"/>
                 </a:solidFill>
-                <a:latin typeface="Arial" pitchFamily="34" charset="0"/>
-                <a:ea typeface="Arial" pitchFamily="34" charset="-122"/>
-                <a:cs typeface="Arial" pitchFamily="34" charset="-120"/>
+                <a:latin typeface="Arial" panose="020B0604020202090204" pitchFamily="34" charset="0"/>
+                <a:ea typeface="Arial" panose="020B0604020202090204" pitchFamily="34" charset="-122"/>
+                <a:cs typeface="Arial" panose="020B0604020202090204" pitchFamily="34" charset="-120"/>
               </a:rPr>
               <a:t>第 54 节 · When 项目总结与后续规划</a:t>
             </a:r>
@@ -11522,13 +11166,12 @@
             <a:avLst/>
           </a:prstGeom>
           <a:noFill/>
-          <a:ln/>
-        </p:spPr>
-        <p:txBody>
-          <a:bodyPr wrap="square" lIns="0" tIns="0" rIns="0" bIns="0" rtlCol="0" anchor="ctr"/>
-          <a:lstStyle/>
-          <a:p>
-            <a:pPr algn="r" indent="0" marL="0">
+        </p:spPr>
+        <p:txBody>
+          <a:bodyPr wrap="square" lIns="0" tIns="0" rIns="0" bIns="0" rtlCol="0" anchor="ctr"/>
+          <a:lstStyle/>
+          <a:p>
+            <a:pPr marL="0" indent="0" algn="r">
               <a:buNone/>
             </a:pPr>
             <a:r>
@@ -11536,9 +11179,9 @@
                 <a:solidFill>
                   <a:srgbClr val="6E6E6E"/>
                 </a:solidFill>
-                <a:latin typeface="Arial" pitchFamily="34" charset="0"/>
-                <a:ea typeface="Arial" pitchFamily="34" charset="-122"/>
-                <a:cs typeface="Arial" pitchFamily="34" charset="-120"/>
+                <a:latin typeface="Arial" panose="020B0604020202090204" pitchFamily="34" charset="0"/>
+                <a:ea typeface="Arial" panose="020B0604020202090204" pitchFamily="34" charset="-122"/>
+                <a:cs typeface="Arial" panose="020B0604020202090204" pitchFamily="34" charset="-120"/>
               </a:rPr>
               <a:t>9 / 14</a:t>
             </a:r>
@@ -11585,23 +11228,22 @@
             <a:avLst/>
           </a:prstGeom>
           <a:noFill/>
-          <a:ln/>
-        </p:spPr>
-        <p:txBody>
-          <a:bodyPr wrap="square" lIns="0" tIns="0" rIns="0" bIns="0" rtlCol="0" anchor="ctr"/>
-          <a:lstStyle/>
-          <a:p>
-            <a:pPr algn="ctr" indent="0" marL="0">
-              <a:buNone/>
-            </a:pPr>
-            <a:r>
-              <a:rPr lang="en-US" sz="1050" b="1" spc="100" kern="0" dirty="0">
+        </p:spPr>
+        <p:txBody>
+          <a:bodyPr wrap="square" lIns="0" tIns="0" rIns="0" bIns="0" rtlCol="0" anchor="ctr"/>
+          <a:lstStyle/>
+          <a:p>
+            <a:pPr marL="0" indent="0" algn="ctr">
+              <a:buNone/>
+            </a:pPr>
+            <a:r>
+              <a:rPr lang="en-US" sz="1050" b="1" kern="0" spc="100" dirty="0">
                 <a:solidFill>
                   <a:srgbClr val="C9A96E"/>
                 </a:solidFill>
-                <a:latin typeface="Arial" pitchFamily="34" charset="0"/>
-                <a:ea typeface="Arial" pitchFamily="34" charset="-122"/>
-                <a:cs typeface="Arial" pitchFamily="34" charset="-120"/>
+                <a:latin typeface="Arial" panose="020B0604020202090204" pitchFamily="34" charset="0"/>
+                <a:ea typeface="Arial" panose="020B0604020202090204" pitchFamily="34" charset="-122"/>
+                <a:cs typeface="Arial" panose="020B0604020202090204" pitchFamily="34" charset="-120"/>
               </a:rPr>
               <a:t>两次跑</a:t>
             </a:r>
@@ -11624,13 +11266,12 @@
             <a:avLst/>
           </a:prstGeom>
           <a:noFill/>
-          <a:ln/>
-        </p:spPr>
-        <p:txBody>
-          <a:bodyPr wrap="square" lIns="0" tIns="0" rIns="0" bIns="0" rtlCol="0" anchor="ctr"/>
-          <a:lstStyle/>
-          <a:p>
-            <a:pPr indent="0" marL="0">
+        </p:spPr>
+        <p:txBody>
+          <a:bodyPr wrap="square" lIns="0" tIns="0" rIns="0" bIns="0" rtlCol="0" anchor="ctr"/>
+          <a:lstStyle/>
+          <a:p>
+            <a:pPr marL="0" indent="0">
               <a:buNone/>
             </a:pPr>
             <a:r>
@@ -11638,9 +11279,9 @@
                 <a:solidFill>
                   <a:srgbClr val="F0F0F0"/>
                 </a:solidFill>
-                <a:latin typeface="Arial" pitchFamily="34" charset="0"/>
-                <a:ea typeface="Arial" pitchFamily="34" charset="-122"/>
-                <a:cs typeface="Arial" pitchFamily="34" charset="-120"/>
+                <a:latin typeface="Arial" panose="020B0604020202090204" pitchFamily="34" charset="0"/>
+                <a:ea typeface="Arial" panose="020B0604020202090204" pitchFamily="34" charset="-122"/>
+                <a:cs typeface="Arial" panose="020B0604020202090204" pitchFamily="34" charset="-120"/>
               </a:rPr>
               <a:t>第一次单机核心，第二次完整 HA</a:t>
             </a:r>
@@ -11674,7 +11315,7 @@
             <a:prstDash val="solid"/>
           </a:ln>
           <a:effectLst>
-            <a:outerShdw sx="100000" sy="100000" kx="0" ky="0" algn="bl" rotWithShape="0" blurRad="88900" dist="25400" dir="5400000">
+            <a:outerShdw blurRad="88900" dist="25400" dir="5400000" algn="bl" rotWithShape="0">
               <a:srgbClr val="000000">
                 <a:alpha val="30000"/>
               </a:srgbClr>
@@ -11697,13 +11338,12 @@
             <a:avLst/>
           </a:prstGeom>
           <a:noFill/>
-          <a:ln/>
-        </p:spPr>
-        <p:txBody>
-          <a:bodyPr wrap="square" lIns="0" tIns="0" rIns="0" bIns="0" rtlCol="0" anchor="ctr"/>
-          <a:lstStyle/>
-          <a:p>
-            <a:pPr algn="ctr" indent="0" marL="0">
+        </p:spPr>
+        <p:txBody>
+          <a:bodyPr wrap="square" lIns="0" tIns="0" rIns="0" bIns="0" rtlCol="0" anchor="ctr"/>
+          <a:lstStyle/>
+          <a:p>
+            <a:pPr marL="0" indent="0" algn="ctr">
               <a:lnSpc>
                 <a:spcPct val="102000"/>
               </a:lnSpc>
@@ -11714,9 +11354,9 @@
                 <a:solidFill>
                   <a:srgbClr val="7FB08A"/>
                 </a:solidFill>
-                <a:latin typeface="Arial" pitchFamily="34" charset="0"/>
-                <a:ea typeface="Arial" pitchFamily="34" charset="-122"/>
-                <a:cs typeface="Arial" pitchFamily="34" charset="-120"/>
+                <a:latin typeface="Arial" panose="020B0604020202090204" pitchFamily="34" charset="0"/>
+                <a:ea typeface="Arial" panose="020B0604020202090204" pitchFamily="34" charset="-122"/>
+                <a:cs typeface="Arial" panose="020B0604020202090204" pitchFamily="34" charset="-120"/>
               </a:rPr>
               <a:t>第 46 节 · 第一次跑</a:t>
             </a:r>
@@ -11741,7 +11381,6 @@
           <a:solidFill>
             <a:srgbClr val="7FB08A"/>
           </a:solidFill>
-          <a:ln/>
         </p:spPr>
       </p:sp>
       <p:sp>
@@ -11759,13 +11398,12 @@
             <a:avLst/>
           </a:prstGeom>
           <a:noFill/>
-          <a:ln/>
         </p:spPr>
         <p:txBody>
           <a:bodyPr wrap="square" lIns="0" tIns="0" rIns="0" bIns="0" rtlCol="0" anchor="t"/>
           <a:lstStyle/>
           <a:p>
-            <a:pPr indent="0" marL="0">
+            <a:pPr marL="0" indent="0">
               <a:lnSpc>
                 <a:spcPct val="108000"/>
               </a:lnSpc>
@@ -11776,9 +11414,9 @@
                 <a:solidFill>
                   <a:srgbClr val="D6D6D6"/>
                 </a:solidFill>
-                <a:latin typeface="Arial" pitchFamily="34" charset="0"/>
-                <a:ea typeface="Arial" pitchFamily="34" charset="-122"/>
-                <a:cs typeface="Arial" pitchFamily="34" charset="-120"/>
+                <a:latin typeface="Arial" panose="020B0604020202090204" pitchFamily="34" charset="0"/>
+                <a:ea typeface="Arial" panose="020B0604020202090204" pitchFamily="34" charset="-122"/>
+                <a:cs typeface="Arial" panose="020B0604020202090204" pitchFamily="34" charset="-120"/>
               </a:rPr>
               <a:t>单机核心链路：收→存→路由→到点触发</a:t>
             </a:r>
@@ -11803,7 +11441,6 @@
           <a:solidFill>
             <a:srgbClr val="7FB08A"/>
           </a:solidFill>
-          <a:ln/>
         </p:spPr>
       </p:sp>
       <p:sp>
@@ -11821,13 +11458,12 @@
             <a:avLst/>
           </a:prstGeom>
           <a:noFill/>
-          <a:ln/>
         </p:spPr>
         <p:txBody>
           <a:bodyPr wrap="square" lIns="0" tIns="0" rIns="0" bIns="0" rtlCol="0" anchor="t"/>
           <a:lstStyle/>
           <a:p>
-            <a:pPr indent="0" marL="0">
+            <a:pPr marL="0" indent="0">
               <a:lnSpc>
                 <a:spcPct val="108000"/>
               </a:lnSpc>
@@ -11838,9 +11474,9 @@
                 <a:solidFill>
                   <a:srgbClr val="D6D6D6"/>
                 </a:solidFill>
-                <a:latin typeface="Arial" pitchFamily="34" charset="0"/>
-                <a:ea typeface="Arial" pitchFamily="34" charset="-122"/>
-                <a:cs typeface="Arial" pitchFamily="34" charset="-120"/>
+                <a:latin typeface="Arial" panose="020B0604020202090204" pitchFamily="34" charset="0"/>
+                <a:ea typeface="Arial" panose="020B0604020202090204" pitchFamily="34" charset="-122"/>
+                <a:cs typeface="Arial" panose="020B0604020202090204" pitchFamily="34" charset="-120"/>
               </a:rPr>
               <a:t>集群组建、选主、上下线感知</a:t>
             </a:r>
@@ -11865,7 +11501,6 @@
           <a:solidFill>
             <a:srgbClr val="7FB08A"/>
           </a:solidFill>
-          <a:ln/>
         </p:spPr>
       </p:sp>
       <p:sp>
@@ -11883,13 +11518,12 @@
             <a:avLst/>
           </a:prstGeom>
           <a:noFill/>
-          <a:ln/>
         </p:spPr>
         <p:txBody>
           <a:bodyPr wrap="square" lIns="0" tIns="0" rIns="0" bIns="0" rtlCol="0" anchor="t"/>
           <a:lstStyle/>
           <a:p>
-            <a:pPr indent="0" marL="0">
+            <a:pPr marL="0" indent="0">
               <a:lnSpc>
                 <a:spcPct val="108000"/>
               </a:lnSpc>
@@ -11900,9 +11534,9 @@
                 <a:solidFill>
                   <a:srgbClr val="D6D6D6"/>
                 </a:solidFill>
-                <a:latin typeface="Arial" pitchFamily="34" charset="0"/>
-                <a:ea typeface="Arial" pitchFamily="34" charset="-122"/>
-                <a:cs typeface="Arial" pitchFamily="34" charset="-120"/>
+                <a:latin typeface="Arial" panose="020B0604020202090204" pitchFamily="34" charset="0"/>
+                <a:ea typeface="Arial" panose="020B0604020202090204" pitchFamily="34" charset="-122"/>
+                <a:cs typeface="Arial" panose="020B0604020202090204" pitchFamily="34" charset="-120"/>
               </a:rPr>
               <a:t>投递先用桩，闭合链路</a:t>
             </a:r>
@@ -11936,7 +11570,7 @@
             <a:prstDash val="solid"/>
           </a:ln>
           <a:effectLst>
-            <a:outerShdw sx="100000" sy="100000" kx="0" ky="0" algn="bl" rotWithShape="0" blurRad="88900" dist="25400" dir="5400000">
+            <a:outerShdw blurRad="88900" dist="25400" dir="5400000" algn="bl" rotWithShape="0">
               <a:srgbClr val="000000">
                 <a:alpha val="30000"/>
               </a:srgbClr>
@@ -11959,13 +11593,12 @@
             <a:avLst/>
           </a:prstGeom>
           <a:noFill/>
-          <a:ln/>
-        </p:spPr>
-        <p:txBody>
-          <a:bodyPr wrap="square" lIns="0" tIns="0" rIns="0" bIns="0" rtlCol="0" anchor="ctr"/>
-          <a:lstStyle/>
-          <a:p>
-            <a:pPr algn="ctr" indent="0" marL="0">
+        </p:spPr>
+        <p:txBody>
+          <a:bodyPr wrap="square" lIns="0" tIns="0" rIns="0" bIns="0" rtlCol="0" anchor="ctr"/>
+          <a:lstStyle/>
+          <a:p>
+            <a:pPr marL="0" indent="0" algn="ctr">
               <a:lnSpc>
                 <a:spcPct val="102000"/>
               </a:lnSpc>
@@ -11976,9 +11609,9 @@
                 <a:solidFill>
                   <a:srgbClr val="C9A96E"/>
                 </a:solidFill>
-                <a:latin typeface="Arial" pitchFamily="34" charset="0"/>
-                <a:ea typeface="Arial" pitchFamily="34" charset="-122"/>
-                <a:cs typeface="Arial" pitchFamily="34" charset="-120"/>
+                <a:latin typeface="Arial" panose="020B0604020202090204" pitchFamily="34" charset="0"/>
+                <a:ea typeface="Arial" panose="020B0604020202090204" pitchFamily="34" charset="-122"/>
+                <a:cs typeface="Arial" panose="020B0604020202090204" pitchFamily="34" charset="-120"/>
               </a:rPr>
               <a:t>第 53 节 · 第二次跑</a:t>
             </a:r>
@@ -12003,7 +11636,6 @@
           <a:solidFill>
             <a:srgbClr val="C9A96E"/>
           </a:solidFill>
-          <a:ln/>
         </p:spPr>
       </p:sp>
       <p:sp>
@@ -12021,13 +11653,12 @@
             <a:avLst/>
           </a:prstGeom>
           <a:noFill/>
-          <a:ln/>
         </p:spPr>
         <p:txBody>
           <a:bodyPr wrap="square" lIns="0" tIns="0" rIns="0" bIns="0" rtlCol="0" anchor="t"/>
           <a:lstStyle/>
           <a:p>
-            <a:pPr indent="0" marL="0">
+            <a:pPr marL="0" indent="0">
               <a:lnSpc>
                 <a:spcPct val="108000"/>
               </a:lnSpc>
@@ -12038,9 +11669,9 @@
                 <a:solidFill>
                   <a:srgbClr val="D6D6D6"/>
                 </a:solidFill>
-                <a:latin typeface="Arial" pitchFamily="34" charset="0"/>
-                <a:ea typeface="Arial" pitchFamily="34" charset="-122"/>
-                <a:cs typeface="Arial" pitchFamily="34" charset="-120"/>
+                <a:latin typeface="Arial" panose="020B0604020202090204" pitchFamily="34" charset="0"/>
+                <a:ea typeface="Arial" panose="020B0604020202090204" pitchFamily="34" charset="-122"/>
+                <a:cs typeface="Arial" panose="020B0604020202090204" pitchFamily="34" charset="-120"/>
               </a:rPr>
               <a:t>真 HTTP/Kafka 投递、副本 + 10 秒切换</a:t>
             </a:r>
@@ -12065,7 +11696,6 @@
           <a:solidFill>
             <a:srgbClr val="C9A96E"/>
           </a:solidFill>
-          <a:ln/>
         </p:spPr>
       </p:sp>
       <p:sp>
@@ -12083,13 +11713,12 @@
             <a:avLst/>
           </a:prstGeom>
           <a:noFill/>
-          <a:ln/>
         </p:spPr>
         <p:txBody>
           <a:bodyPr wrap="square" lIns="0" tIns="0" rIns="0" bIns="0" rtlCol="0" anchor="t"/>
           <a:lstStyle/>
           <a:p>
-            <a:pPr indent="0" marL="0">
+            <a:pPr marL="0" indent="0">
               <a:lnSpc>
                 <a:spcPct val="108000"/>
               </a:lnSpc>
@@ -12100,9 +11729,9 @@
                 <a:solidFill>
                   <a:srgbClr val="D6D6D6"/>
                 </a:solidFill>
-                <a:latin typeface="Arial" pitchFamily="34" charset="0"/>
-                <a:ea typeface="Arial" pitchFamily="34" charset="-122"/>
-                <a:cs typeface="Arial" pitchFamily="34" charset="-120"/>
+                <a:latin typeface="Arial" panose="020B0604020202090204" pitchFamily="34" charset="0"/>
+                <a:ea typeface="Arial" panose="020B0604020202090204" pitchFamily="34" charset="-122"/>
+                <a:cs typeface="Arial" panose="020B0604020202090204" pitchFamily="34" charset="-120"/>
               </a:rPr>
               <a:t>Controller rebalance、多节点分发</a:t>
             </a:r>
@@ -12127,7 +11756,6 @@
           <a:solidFill>
             <a:srgbClr val="C9A96E"/>
           </a:solidFill>
-          <a:ln/>
         </p:spPr>
       </p:sp>
       <p:sp>
@@ -12145,13 +11773,12 @@
             <a:avLst/>
           </a:prstGeom>
           <a:noFill/>
-          <a:ln/>
         </p:spPr>
         <p:txBody>
           <a:bodyPr wrap="square" lIns="0" tIns="0" rIns="0" bIns="0" rtlCol="0" anchor="t"/>
           <a:lstStyle/>
           <a:p>
-            <a:pPr indent="0" marL="0">
+            <a:pPr marL="0" indent="0">
               <a:lnSpc>
                 <a:spcPct val="108000"/>
               </a:lnSpc>
@@ -12162,9 +11789,9 @@
                 <a:solidFill>
                   <a:srgbClr val="D6D6D6"/>
                 </a:solidFill>
-                <a:latin typeface="Arial" pitchFamily="34" charset="0"/>
-                <a:ea typeface="Arial" pitchFamily="34" charset="-122"/>
-                <a:cs typeface="Arial" pitchFamily="34" charset="-120"/>
+                <a:latin typeface="Arial" panose="020B0604020202090204" pitchFamily="34" charset="0"/>
+                <a:ea typeface="Arial" panose="020B0604020202090204" pitchFamily="34" charset="-122"/>
+                <a:cs typeface="Arial" panose="020B0604020202090204" pitchFamily="34" charset="-120"/>
               </a:rPr>
               <a:t>自动部署 + SDK 测 + 管理台看 + 演示 HA</a:t>
             </a:r>
@@ -12214,13 +11841,12 @@
             <a:avLst/>
           </a:prstGeom>
           <a:noFill/>
-          <a:ln/>
-        </p:spPr>
-        <p:txBody>
-          <a:bodyPr wrap="square" lIns="0" tIns="0" rIns="0" bIns="0" rtlCol="0" anchor="ctr"/>
-          <a:lstStyle/>
-          <a:p>
-            <a:pPr indent="0" marL="0">
+        </p:spPr>
+        <p:txBody>
+          <a:bodyPr wrap="square" lIns="0" tIns="0" rIns="0" bIns="0" rtlCol="0" anchor="ctr"/>
+          <a:lstStyle/>
+          <a:p>
+            <a:pPr marL="0" indent="0">
               <a:lnSpc>
                 <a:spcPct val="106000"/>
               </a:lnSpc>
@@ -12231,26 +11857,20 @@
                 <a:solidFill>
                   <a:srgbClr val="C9A96E"/>
                 </a:solidFill>
-                <a:latin typeface="Arial" pitchFamily="34" charset="0"/>
-                <a:ea typeface="Arial" pitchFamily="34" charset="-122"/>
-                <a:cs typeface="Arial" pitchFamily="34" charset="-120"/>
+                <a:latin typeface="Arial" panose="020B0604020202090204" pitchFamily="34" charset="0"/>
+                <a:ea typeface="Arial" panose="020B0604020202090204" pitchFamily="34" charset="-122"/>
+                <a:cs typeface="Arial" panose="020B0604020202090204" pitchFamily="34" charset="-120"/>
               </a:rPr>
               <a:t>每次都是：</a:t>
             </a:r>
-            <a:pPr indent="0" marL="0">
-              <a:lnSpc>
-                <a:spcPct val="106000"/>
-              </a:lnSpc>
-              <a:buNone/>
-            </a:pPr>
             <a:r>
               <a:rPr lang="en-US" sz="1250" dirty="0">
                 <a:solidFill>
                   <a:srgbClr val="F0F0F0"/>
                 </a:solidFill>
-                <a:latin typeface="Arial" pitchFamily="34" charset="0"/>
-                <a:ea typeface="Arial" pitchFamily="34" charset="-122"/>
-                <a:cs typeface="Arial" pitchFamily="34" charset="-120"/>
+                <a:latin typeface="Arial" panose="020B0604020202090204" pitchFamily="34" charset="0"/>
+                <a:ea typeface="Arial" panose="020B0604020202090204" pitchFamily="34" charset="-122"/>
+                <a:cs typeface="Arial" panose="020B0604020202090204" pitchFamily="34" charset="-120"/>
               </a:rPr>
               <a:t>跑 → 冒问题 → 回填到对应节的原料（不打补丁）→ 从干净状态再跑，直到判官全绿。改输入，比在对话里跟 AI 掰扯十回合更有效。</a:t>
             </a:r>
@@ -12309,7 +11929,7 @@
     </a:clrScheme>
     <a:fontScheme name="Office">
       <a:majorFont>
-        <a:latin typeface="Calibri Light" panose="020F0302020204030204"/>
+        <a:latin typeface="Calibri Light"/>
         <a:ea typeface=""/>
         <a:cs typeface=""/>
         <a:font script="Jpan" typeface="游ゴシック Light"/>
@@ -12342,26 +11962,9 @@
         <a:font script="Viet" typeface="Times New Roman"/>
         <a:font script="Uigh" typeface="Microsoft Uighur"/>
         <a:font script="Geor" typeface="Sylfaen"/>
-        <a:font script="Armn" typeface="Arial"/>
-        <a:font script="Bugi" typeface="Leelawadee UI"/>
-        <a:font script="Bopo" typeface="Microsoft JhengHei"/>
-        <a:font script="Java" typeface="Javanese Text"/>
-        <a:font script="Lisu" typeface="Segoe UI"/>
-        <a:font script="Mymr" typeface="Myanmar Text"/>
-        <a:font script="Nkoo" typeface="Ebrima"/>
-        <a:font script="Olck" typeface="Nirmala UI"/>
-        <a:font script="Osma" typeface="Ebrima"/>
-        <a:font script="Phag" typeface="Phagspa"/>
-        <a:font script="Syrn" typeface="Estrangelo Edessa"/>
-        <a:font script="Syrj" typeface="Estrangelo Edessa"/>
-        <a:font script="Syre" typeface="Estrangelo Edessa"/>
-        <a:font script="Sora" typeface="Nirmala UI"/>
-        <a:font script="Tale" typeface="Microsoft Tai Le"/>
-        <a:font script="Talu" typeface="Microsoft New Tai Lue"/>
-        <a:font script="Tfng" typeface="Ebrima"/>
       </a:majorFont>
       <a:minorFont>
-        <a:latin typeface="Calibri" panose="020F0502020204030204"/>
+        <a:latin typeface="Calibri"/>
         <a:ea typeface=""/>
         <a:cs typeface=""/>
         <a:font script="Jpan" typeface="游ゴシック"/>
@@ -12394,23 +11997,6 @@
         <a:font script="Viet" typeface="Arial"/>
         <a:font script="Uigh" typeface="Microsoft Uighur"/>
         <a:font script="Geor" typeface="Sylfaen"/>
-        <a:font script="Armn" typeface="Arial"/>
-        <a:font script="Bugi" typeface="Leelawadee UI"/>
-        <a:font script="Bopo" typeface="Microsoft JhengHei"/>
-        <a:font script="Java" typeface="Javanese Text"/>
-        <a:font script="Lisu" typeface="Segoe UI"/>
-        <a:font script="Mymr" typeface="Myanmar Text"/>
-        <a:font script="Nkoo" typeface="Ebrima"/>
-        <a:font script="Olck" typeface="Nirmala UI"/>
-        <a:font script="Osma" typeface="Ebrima"/>
-        <a:font script="Phag" typeface="Phagspa"/>
-        <a:font script="Syrn" typeface="Estrangelo Edessa"/>
-        <a:font script="Syrj" typeface="Estrangelo Edessa"/>
-        <a:font script="Syre" typeface="Estrangelo Edessa"/>
-        <a:font script="Sora" typeface="Nirmala UI"/>
-        <a:font script="Tale" typeface="Microsoft Tai Le"/>
-        <a:font script="Talu" typeface="Microsoft New Tai Lue"/>
-        <a:font script="Tfng" typeface="Ebrima"/>
       </a:minorFont>
     </a:fontScheme>
     <a:fmtScheme name="Office">
@@ -12551,8 +12137,265 @@
       </a:bgFillStyleLst>
     </a:fmtScheme>
   </a:themeElements>
-  <a:objectDefaults/>
-  <a:extraClrSchemeLst/>
+  <a:extLst>
+    <a:ext uri="{05A4C25C-085E-4340-85A3-A5531E510DB2}">
+      <thm15:themeFamily xmlns:thm15="http://schemas.microsoft.com/office/thememl/2012/main" name="Office Theme" id="{62F939B6-93AF-4DB8-9C6B-D6C7DFDC589F}" vid="{4A3C46E8-61CC-4603-A589-7422A47A8E4A}"/>
+    </a:ext>
+  </a:extLst>
+</a:theme>
+</file>
+
+<file path=ppt/theme/theme2.xml><?xml version="1.0" encoding="utf-8"?>
+<a:theme xmlns:a="http://schemas.openxmlformats.org/drawingml/2006/main" name="Office Theme">
+  <a:themeElements>
+    <a:clrScheme name="Office">
+      <a:dk1>
+        <a:sysClr val="windowText" lastClr="000000"/>
+      </a:dk1>
+      <a:lt1>
+        <a:sysClr val="window" lastClr="FFFFFF"/>
+      </a:lt1>
+      <a:dk2>
+        <a:srgbClr val="44546A"/>
+      </a:dk2>
+      <a:lt2>
+        <a:srgbClr val="E7E6E6"/>
+      </a:lt2>
+      <a:accent1>
+        <a:srgbClr val="4472C4"/>
+      </a:accent1>
+      <a:accent2>
+        <a:srgbClr val="ED7D31"/>
+      </a:accent2>
+      <a:accent3>
+        <a:srgbClr val="A5A5A5"/>
+      </a:accent3>
+      <a:accent4>
+        <a:srgbClr val="FFC000"/>
+      </a:accent4>
+      <a:accent5>
+        <a:srgbClr val="5B9BD5"/>
+      </a:accent5>
+      <a:accent6>
+        <a:srgbClr val="70AD47"/>
+      </a:accent6>
+      <a:hlink>
+        <a:srgbClr val="0563C1"/>
+      </a:hlink>
+      <a:folHlink>
+        <a:srgbClr val="954F72"/>
+      </a:folHlink>
+    </a:clrScheme>
+    <a:fontScheme name="Office">
+      <a:majorFont>
+        <a:latin typeface="Calibri Light"/>
+        <a:ea typeface=""/>
+        <a:cs typeface=""/>
+        <a:font script="Jpan" typeface="游ゴシック Light"/>
+        <a:font script="Hang" typeface="맑은 고딕"/>
+        <a:font script="Hans" typeface="等线 Light"/>
+        <a:font script="Hant" typeface="新細明體"/>
+        <a:font script="Arab" typeface="Times New Roman"/>
+        <a:font script="Hebr" typeface="Times New Roman"/>
+        <a:font script="Thai" typeface="Angsana New"/>
+        <a:font script="Ethi" typeface="Nyala"/>
+        <a:font script="Beng" typeface="Vrinda"/>
+        <a:font script="Gujr" typeface="Shruti"/>
+        <a:font script="Khmr" typeface="MoolBoran"/>
+        <a:font script="Knda" typeface="Tunga"/>
+        <a:font script="Guru" typeface="Raavi"/>
+        <a:font script="Cans" typeface="Euphemia"/>
+        <a:font script="Cher" typeface="Plantagenet Cherokee"/>
+        <a:font script="Yiii" typeface="Microsoft Yi Baiti"/>
+        <a:font script="Tibt" typeface="Microsoft Himalaya"/>
+        <a:font script="Thaa" typeface="MV Boli"/>
+        <a:font script="Deva" typeface="Mangal"/>
+        <a:font script="Telu" typeface="Gautami"/>
+        <a:font script="Taml" typeface="Latha"/>
+        <a:font script="Syrc" typeface="Estrangelo Edessa"/>
+        <a:font script="Orya" typeface="Kalinga"/>
+        <a:font script="Mlym" typeface="Kartika"/>
+        <a:font script="Laoo" typeface="DokChampa"/>
+        <a:font script="Sinh" typeface="Iskoola Pota"/>
+        <a:font script="Mong" typeface="Mongolian Baiti"/>
+        <a:font script="Viet" typeface="Times New Roman"/>
+        <a:font script="Uigh" typeface="Microsoft Uighur"/>
+        <a:font script="Geor" typeface="Sylfaen"/>
+      </a:majorFont>
+      <a:minorFont>
+        <a:latin typeface="Calibri"/>
+        <a:ea typeface=""/>
+        <a:cs typeface=""/>
+        <a:font script="Jpan" typeface="游ゴシック"/>
+        <a:font script="Hang" typeface="맑은 고딕"/>
+        <a:font script="Hans" typeface="等线"/>
+        <a:font script="Hant" typeface="新細明體"/>
+        <a:font script="Arab" typeface="Arial"/>
+        <a:font script="Hebr" typeface="Arial"/>
+        <a:font script="Thai" typeface="Cordia New"/>
+        <a:font script="Ethi" typeface="Nyala"/>
+        <a:font script="Beng" typeface="Vrinda"/>
+        <a:font script="Gujr" typeface="Shruti"/>
+        <a:font script="Khmr" typeface="DaunPenh"/>
+        <a:font script="Knda" typeface="Tunga"/>
+        <a:font script="Guru" typeface="Raavi"/>
+        <a:font script="Cans" typeface="Euphemia"/>
+        <a:font script="Cher" typeface="Plantagenet Cherokee"/>
+        <a:font script="Yiii" typeface="Microsoft Yi Baiti"/>
+        <a:font script="Tibt" typeface="Microsoft Himalaya"/>
+        <a:font script="Thaa" typeface="MV Boli"/>
+        <a:font script="Deva" typeface="Mangal"/>
+        <a:font script="Telu" typeface="Gautami"/>
+        <a:font script="Taml" typeface="Latha"/>
+        <a:font script="Syrc" typeface="Estrangelo Edessa"/>
+        <a:font script="Orya" typeface="Kalinga"/>
+        <a:font script="Mlym" typeface="Kartika"/>
+        <a:font script="Laoo" typeface="DokChampa"/>
+        <a:font script="Sinh" typeface="Iskoola Pota"/>
+        <a:font script="Mong" typeface="Mongolian Baiti"/>
+        <a:font script="Viet" typeface="Arial"/>
+        <a:font script="Uigh" typeface="Microsoft Uighur"/>
+        <a:font script="Geor" typeface="Sylfaen"/>
+      </a:minorFont>
+    </a:fontScheme>
+    <a:fmtScheme name="Office">
+      <a:fillStyleLst>
+        <a:solidFill>
+          <a:schemeClr val="phClr"/>
+        </a:solidFill>
+        <a:gradFill rotWithShape="1">
+          <a:gsLst>
+            <a:gs pos="0">
+              <a:schemeClr val="phClr">
+                <a:lumMod val="110000"/>
+                <a:satMod val="105000"/>
+                <a:tint val="67000"/>
+              </a:schemeClr>
+            </a:gs>
+            <a:gs pos="50000">
+              <a:schemeClr val="phClr">
+                <a:lumMod val="105000"/>
+                <a:satMod val="103000"/>
+                <a:tint val="73000"/>
+              </a:schemeClr>
+            </a:gs>
+            <a:gs pos="100000">
+              <a:schemeClr val="phClr">
+                <a:lumMod val="105000"/>
+                <a:satMod val="109000"/>
+                <a:tint val="81000"/>
+              </a:schemeClr>
+            </a:gs>
+          </a:gsLst>
+          <a:lin ang="5400000" scaled="0"/>
+        </a:gradFill>
+        <a:gradFill rotWithShape="1">
+          <a:gsLst>
+            <a:gs pos="0">
+              <a:schemeClr val="phClr">
+                <a:satMod val="103000"/>
+                <a:lumMod val="102000"/>
+                <a:tint val="94000"/>
+              </a:schemeClr>
+            </a:gs>
+            <a:gs pos="50000">
+              <a:schemeClr val="phClr">
+                <a:satMod val="110000"/>
+                <a:lumMod val="100000"/>
+                <a:shade val="100000"/>
+              </a:schemeClr>
+            </a:gs>
+            <a:gs pos="100000">
+              <a:schemeClr val="phClr">
+                <a:lumMod val="99000"/>
+                <a:satMod val="120000"/>
+                <a:shade val="78000"/>
+              </a:schemeClr>
+            </a:gs>
+          </a:gsLst>
+          <a:lin ang="5400000" scaled="0"/>
+        </a:gradFill>
+      </a:fillStyleLst>
+      <a:lnStyleLst>
+        <a:ln w="6350" cap="flat" cmpd="sng" algn="ctr">
+          <a:solidFill>
+            <a:schemeClr val="phClr"/>
+          </a:solidFill>
+          <a:prstDash val="solid"/>
+          <a:miter lim="800000"/>
+        </a:ln>
+        <a:ln w="12700" cap="flat" cmpd="sng" algn="ctr">
+          <a:solidFill>
+            <a:schemeClr val="phClr"/>
+          </a:solidFill>
+          <a:prstDash val="solid"/>
+          <a:miter lim="800000"/>
+        </a:ln>
+        <a:ln w="19050" cap="flat" cmpd="sng" algn="ctr">
+          <a:solidFill>
+            <a:schemeClr val="phClr"/>
+          </a:solidFill>
+          <a:prstDash val="solid"/>
+          <a:miter lim="800000"/>
+        </a:ln>
+      </a:lnStyleLst>
+      <a:effectStyleLst>
+        <a:effectStyle>
+          <a:effectLst/>
+        </a:effectStyle>
+        <a:effectStyle>
+          <a:effectLst/>
+        </a:effectStyle>
+        <a:effectStyle>
+          <a:effectLst>
+            <a:outerShdw blurRad="57150" dist="19050" dir="5400000" algn="ctr" rotWithShape="0">
+              <a:srgbClr val="000000">
+                <a:alpha val="63000"/>
+              </a:srgbClr>
+            </a:outerShdw>
+          </a:effectLst>
+        </a:effectStyle>
+      </a:effectStyleLst>
+      <a:bgFillStyleLst>
+        <a:solidFill>
+          <a:schemeClr val="phClr"/>
+        </a:solidFill>
+        <a:solidFill>
+          <a:schemeClr val="phClr">
+            <a:tint val="95000"/>
+            <a:satMod val="170000"/>
+          </a:schemeClr>
+        </a:solidFill>
+        <a:gradFill rotWithShape="1">
+          <a:gsLst>
+            <a:gs pos="0">
+              <a:schemeClr val="phClr">
+                <a:tint val="93000"/>
+                <a:satMod val="150000"/>
+                <a:shade val="98000"/>
+                <a:lumMod val="102000"/>
+              </a:schemeClr>
+            </a:gs>
+            <a:gs pos="50000">
+              <a:schemeClr val="phClr">
+                <a:tint val="98000"/>
+                <a:satMod val="130000"/>
+                <a:shade val="90000"/>
+                <a:lumMod val="103000"/>
+              </a:schemeClr>
+            </a:gs>
+            <a:gs pos="100000">
+              <a:schemeClr val="phClr">
+                <a:shade val="63000"/>
+                <a:satMod val="120000"/>
+              </a:schemeClr>
+            </a:gs>
+          </a:gsLst>
+          <a:lin ang="5400000" scaled="0"/>
+        </a:gradFill>
+      </a:bgFillStyleLst>
+    </a:fmtScheme>
+  </a:themeElements>
   <a:extLst>
     <a:ext uri="{05A4C25C-085E-4340-85A3-A5531E510DB2}">
       <thm15:themeFamily xmlns:thm15="http://schemas.microsoft.com/office/thememl/2012/main" name="Office Theme" id="{62F939B6-93AF-4DB8-9C6B-D6C7DFDC589F}" vid="{4A3C46E8-61CC-4603-A589-7422A47A8E4A}"/>
